--- a/Myntra_Wishlist_Studio_10_Slide_Deck_Updated.pptx
+++ b/Myntra_Wishlist_Studio_10_Slide_Deck_Updated.pptx
@@ -3779,7 +3779,7 @@
               </a:defRPr>
             </a:pPr>
             <a:r>
-              <a:t>Live Deployed MVP: https://myntra-growth-lab.vercel.app | System Architecture &amp; Strategy Plans: 01_ to 08_ specifications</a:t>
+              <a:t>Live Deployed MVP: https://myntra-growth-lab.vercel.app | Live Figma Canvas: https://www.figma.com/design/EtSP7uuOBjzS2b5uA8qaml/Myntra-MVP-NL?node-id=1-2</a:t>
             </a:r>
           </a:p>
         </p:txBody>
@@ -12142,7 +12142,7 @@
               </a:defRPr>
             </a:pPr>
             <a:r>
-              <a:t>★ 🚀 PUBLICLY ACCESSIBLE MVP DEPLOYMENT LINK</a:t>
+              <a:t>★ 🚀 PUBLICLY ACCESSIBLE MVP DEPLOYMENT &amp; FIGMA CANVAS LINKS</a:t>
             </a:r>
           </a:p>
           <a:p>
@@ -12154,7 +12154,7 @@
               </a:defRPr>
             </a:pPr>
             <a:r>
-              <a:t>Interactive Prototype Deployed Live at https://myntra-growth-lab.vercel.app | Built with React 18, Vite, Lucide Icons, and Custom Design System.</a:t>
+              <a:t>Live Prototype: https://myntra-growth-lab.vercel.app | Figma Canvas: https://www.figma.com/design/EtSP7uuOBjzS2b5uA8qaml/Myntra-MVP-NL?node-id=1-2</a:t>
             </a:r>
           </a:p>
         </p:txBody>

--- a/Myntra_Wishlist_Studio_10_Slide_Deck_Updated.pptx
+++ b/Myntra_Wishlist_Studio_10_Slide_Deck_Updated.pptx
@@ -3133,10 +3133,16 @@
           </a:fontRef>
         </p:style>
         <p:txBody>
-          <a:bodyPr rtlCol="0" anchor="ctr" wrap="square"/>
+          <a:bodyPr rtlCol="0" anchor="ctr" wrap="square" tIns="18288" bIns="18288"/>
           <a:lstStyle/>
           <a:p>
             <a:pPr algn="ctr">
+              <a:spcBef>
+                <a:spcPts val="0"/>
+              </a:spcBef>
+              <a:spcAft>
+                <a:spcPts val="0"/>
+              </a:spcAft>
               <a:defRPr sz="1000" b="1">
                 <a:solidFill>
                   <a:srgbClr val="FFFFFF"/>
@@ -3166,13 +3172,16 @@
           <a:noFill/>
         </p:spPr>
         <p:txBody>
-          <a:bodyPr wrap="square">
+          <a:bodyPr wrap="square" lIns="0" rIns="0" tIns="0" bIns="0">
             <a:spAutoFit/>
           </a:bodyPr>
           <a:lstStyle/>
           <a:p>
             <a:pPr>
-              <a:defRPr sz="1450" b="1">
+              <a:spcAft>
+                <a:spcPts val="300"/>
+              </a:spcAft>
+              <a:defRPr sz="1400" b="1">
                 <a:solidFill>
                   <a:srgbClr val="282C3F"/>
                 </a:solidFill>
@@ -3184,7 +3193,13 @@
           </a:p>
           <a:p>
             <a:pPr>
-              <a:defRPr sz="1150" b="1">
+              <a:spcBef>
+                <a:spcPts val="200"/>
+              </a:spcBef>
+              <a:spcAft>
+                <a:spcPts val="400"/>
+              </a:spcAft>
+              <a:defRPr sz="1050" b="1">
                 <a:solidFill>
                   <a:srgbClr val="FF3F6C"/>
                 </a:solidFill>
@@ -3213,7 +3228,7 @@
           <a:noFill/>
         </p:spPr>
         <p:txBody>
-          <a:bodyPr wrap="none">
+          <a:bodyPr wrap="none" lIns="0" rIns="0" tIns="0" bIns="0">
             <a:spAutoFit/>
           </a:bodyPr>
           <a:lstStyle/>
@@ -3284,8 +3299,8 @@
         </p:nvSpPr>
         <p:spPr>
           <a:xfrm>
-            <a:off x="777240" y="1783080"/>
-            <a:ext cx="3840480" cy="3520440"/>
+            <a:off x="749808" y="1755648"/>
+            <a:ext cx="3895344" cy="3575304"/>
           </a:xfrm>
           <a:prstGeom prst="rect">
             <a:avLst/>
@@ -3293,12 +3308,15 @@
           <a:noFill/>
         </p:spPr>
         <p:txBody>
-          <a:bodyPr wrap="square">
+          <a:bodyPr wrap="square" tIns="73152" bIns="73152">
             <a:spAutoFit/>
           </a:bodyPr>
           <a:lstStyle/>
           <a:p>
             <a:pPr>
+              <a:spcAft>
+                <a:spcPts val="800"/>
+              </a:spcAft>
               <a:defRPr sz="1100" b="1">
                 <a:solidFill>
                   <a:srgbClr val="FF3F6C"/>
@@ -3311,7 +3329,16 @@
           </a:p>
           <a:p>
             <a:pPr>
-              <a:defRPr sz="1000"/>
+              <a:lnSpc>
+                <a:spcPct val="118000"/>
+              </a:lnSpc>
+              <a:spcBef>
+                <a:spcPts val="200"/>
+              </a:spcBef>
+              <a:spcAft>
+                <a:spcPts val="500"/>
+              </a:spcAft>
+              <a:defRPr sz="950"/>
             </a:pPr>
             <a:r>
               <a:rPr b="1">
@@ -3340,7 +3367,16 @@
           </a:p>
           <a:p>
             <a:pPr>
-              <a:defRPr sz="1000"/>
+              <a:lnSpc>
+                <a:spcPct val="118000"/>
+              </a:lnSpc>
+              <a:spcBef>
+                <a:spcPts val="200"/>
+              </a:spcBef>
+              <a:spcAft>
+                <a:spcPts val="500"/>
+              </a:spcAft>
+              <a:defRPr sz="950"/>
             </a:pPr>
             <a:r>
               <a:rPr b="1">
@@ -3369,7 +3405,16 @@
           </a:p>
           <a:p>
             <a:pPr>
-              <a:defRPr sz="1000"/>
+              <a:lnSpc>
+                <a:spcPct val="118000"/>
+              </a:lnSpc>
+              <a:spcBef>
+                <a:spcPts val="200"/>
+              </a:spcBef>
+              <a:spcAft>
+                <a:spcPts val="500"/>
+              </a:spcAft>
+              <a:defRPr sz="950"/>
             </a:pPr>
             <a:r>
               <a:rPr b="1">
@@ -3398,7 +3443,16 @@
           </a:p>
           <a:p>
             <a:pPr>
-              <a:defRPr sz="1000"/>
+              <a:lnSpc>
+                <a:spcPct val="118000"/>
+              </a:lnSpc>
+              <a:spcBef>
+                <a:spcPts val="200"/>
+              </a:spcBef>
+              <a:spcAft>
+                <a:spcPts val="500"/>
+              </a:spcAft>
+              <a:defRPr sz="950"/>
             </a:pPr>
             <a:r>
               <a:rPr b="1">
@@ -3480,8 +3534,8 @@
         </p:nvSpPr>
         <p:spPr>
           <a:xfrm>
-            <a:off x="5029200" y="1783080"/>
-            <a:ext cx="3840480" cy="3520440"/>
+            <a:off x="5001768" y="1755648"/>
+            <a:ext cx="3895344" cy="3575304"/>
           </a:xfrm>
           <a:prstGeom prst="rect">
             <a:avLst/>
@@ -3489,12 +3543,15 @@
           <a:noFill/>
         </p:spPr>
         <p:txBody>
-          <a:bodyPr wrap="square">
+          <a:bodyPr wrap="square" tIns="73152" bIns="73152">
             <a:spAutoFit/>
           </a:bodyPr>
           <a:lstStyle/>
           <a:p>
             <a:pPr>
+              <a:spcAft>
+                <a:spcPts val="800"/>
+              </a:spcAft>
               <a:defRPr sz="1100" b="1">
                 <a:solidFill>
                   <a:srgbClr val="FF3F6C"/>
@@ -3507,7 +3564,16 @@
           </a:p>
           <a:p>
             <a:pPr>
-              <a:defRPr sz="1000"/>
+              <a:lnSpc>
+                <a:spcPct val="118000"/>
+              </a:lnSpc>
+              <a:spcBef>
+                <a:spcPts val="200"/>
+              </a:spcBef>
+              <a:spcAft>
+                <a:spcPts val="500"/>
+              </a:spcAft>
+              <a:defRPr sz="950"/>
             </a:pPr>
             <a:r>
               <a:rPr b="1">
@@ -3536,7 +3602,16 @@
           </a:p>
           <a:p>
             <a:pPr>
-              <a:defRPr sz="1000"/>
+              <a:lnSpc>
+                <a:spcPct val="118000"/>
+              </a:lnSpc>
+              <a:spcBef>
+                <a:spcPts val="200"/>
+              </a:spcBef>
+              <a:spcAft>
+                <a:spcPts val="500"/>
+              </a:spcAft>
+              <a:defRPr sz="950"/>
             </a:pPr>
             <a:r>
               <a:rPr b="1">
@@ -3565,7 +3640,16 @@
           </a:p>
           <a:p>
             <a:pPr>
-              <a:defRPr sz="1000"/>
+              <a:lnSpc>
+                <a:spcPct val="118000"/>
+              </a:lnSpc>
+              <a:spcBef>
+                <a:spcPts val="200"/>
+              </a:spcBef>
+              <a:spcAft>
+                <a:spcPts val="500"/>
+              </a:spcAft>
+              <a:defRPr sz="950"/>
             </a:pPr>
             <a:r>
               <a:rPr b="1">
@@ -3594,7 +3678,16 @@
           </a:p>
           <a:p>
             <a:pPr>
-              <a:defRPr sz="1000"/>
+              <a:lnSpc>
+                <a:spcPct val="118000"/>
+              </a:lnSpc>
+              <a:spcBef>
+                <a:spcPts val="200"/>
+              </a:spcBef>
+              <a:spcAft>
+                <a:spcPts val="500"/>
+              </a:spcAft>
+              <a:defRPr sz="950"/>
             </a:pPr>
             <a:r>
               <a:rPr b="1">
@@ -3745,8 +3838,8 @@
         </p:nvSpPr>
         <p:spPr>
           <a:xfrm>
-            <a:off x="777240" y="5605272"/>
-            <a:ext cx="10637215" cy="493776"/>
+            <a:off x="777240" y="5586984"/>
+            <a:ext cx="10637215" cy="530352"/>
           </a:xfrm>
           <a:prstGeom prst="rect">
             <a:avLst/>
@@ -3754,13 +3847,16 @@
           <a:noFill/>
         </p:spPr>
         <p:txBody>
-          <a:bodyPr wrap="square">
+          <a:bodyPr wrap="square" tIns="36576" bIns="36576">
             <a:spAutoFit/>
           </a:bodyPr>
           <a:lstStyle/>
           <a:p>
             <a:pPr>
-              <a:defRPr sz="1000" b="1">
+              <a:spcAft>
+                <a:spcPts val="200"/>
+              </a:spcAft>
+              <a:defRPr sz="950" b="1">
                 <a:solidFill>
                   <a:srgbClr val="4338CA"/>
                 </a:solidFill>
@@ -3772,7 +3868,13 @@
           </a:p>
           <a:p>
             <a:pPr>
-              <a:defRPr sz="1000" b="1">
+              <a:lnSpc>
+                <a:spcPct val="115000"/>
+              </a:lnSpc>
+              <a:spcBef>
+                <a:spcPts val="0"/>
+              </a:spcBef>
+              <a:defRPr sz="950" b="1">
                 <a:solidFill>
                   <a:srgbClr val="282C3F"/>
                 </a:solidFill>
@@ -3822,10 +3924,16 @@
           </a:fontRef>
         </p:style>
         <p:txBody>
-          <a:bodyPr rtlCol="0" anchor="ctr"/>
+          <a:bodyPr rtlCol="0" anchor="ctr" lIns="18288" rIns="18288" tIns="18288" bIns="18288"/>
           <a:lstStyle/>
           <a:p>
             <a:pPr algn="ctr">
+              <a:spcBef>
+                <a:spcPts val="0"/>
+              </a:spcBef>
+              <a:spcAft>
+                <a:spcPts val="0"/>
+              </a:spcAft>
               <a:defRPr sz="900" b="1">
                 <a:solidFill>
                   <a:srgbClr val="FFFFFF"/>
@@ -3876,10 +3984,16 @@
           </a:fontRef>
         </p:style>
         <p:txBody>
-          <a:bodyPr rtlCol="0" anchor="ctr"/>
+          <a:bodyPr rtlCol="0" anchor="ctr" lIns="18288" rIns="18288" tIns="18288" bIns="18288"/>
           <a:lstStyle/>
           <a:p>
             <a:pPr algn="ctr">
+              <a:spcBef>
+                <a:spcPts val="0"/>
+              </a:spcBef>
+              <a:spcAft>
+                <a:spcPts val="0"/>
+              </a:spcAft>
               <a:defRPr sz="900" b="1">
                 <a:solidFill>
                   <a:srgbClr val="535766"/>
@@ -3930,10 +4044,16 @@
           </a:fontRef>
         </p:style>
         <p:txBody>
-          <a:bodyPr rtlCol="0" anchor="ctr"/>
+          <a:bodyPr rtlCol="0" anchor="ctr" lIns="18288" rIns="18288" tIns="18288" bIns="18288"/>
           <a:lstStyle/>
           <a:p>
             <a:pPr algn="ctr">
+              <a:spcBef>
+                <a:spcPts val="0"/>
+              </a:spcBef>
+              <a:spcAft>
+                <a:spcPts val="0"/>
+              </a:spcAft>
               <a:defRPr sz="900" b="1">
                 <a:solidFill>
                   <a:srgbClr val="535766"/>
@@ -3984,10 +4104,16 @@
           </a:fontRef>
         </p:style>
         <p:txBody>
-          <a:bodyPr rtlCol="0" anchor="ctr"/>
+          <a:bodyPr rtlCol="0" anchor="ctr" lIns="18288" rIns="18288" tIns="18288" bIns="18288"/>
           <a:lstStyle/>
           <a:p>
             <a:pPr algn="ctr">
+              <a:spcBef>
+                <a:spcPts val="0"/>
+              </a:spcBef>
+              <a:spcAft>
+                <a:spcPts val="0"/>
+              </a:spcAft>
               <a:defRPr sz="900" b="1">
                 <a:solidFill>
                   <a:srgbClr val="535766"/>
@@ -4038,10 +4164,16 @@
           </a:fontRef>
         </p:style>
         <p:txBody>
-          <a:bodyPr rtlCol="0" anchor="ctr"/>
+          <a:bodyPr rtlCol="0" anchor="ctr" lIns="18288" rIns="18288" tIns="18288" bIns="18288"/>
           <a:lstStyle/>
           <a:p>
             <a:pPr algn="ctr">
+              <a:spcBef>
+                <a:spcPts val="0"/>
+              </a:spcBef>
+              <a:spcAft>
+                <a:spcPts val="0"/>
+              </a:spcAft>
               <a:defRPr sz="900" b="1">
                 <a:solidFill>
                   <a:srgbClr val="535766"/>
@@ -4092,10 +4224,16 @@
           </a:fontRef>
         </p:style>
         <p:txBody>
-          <a:bodyPr rtlCol="0" anchor="ctr"/>
+          <a:bodyPr rtlCol="0" anchor="ctr" lIns="18288" rIns="18288" tIns="18288" bIns="18288"/>
           <a:lstStyle/>
           <a:p>
             <a:pPr algn="ctr">
+              <a:spcBef>
+                <a:spcPts val="0"/>
+              </a:spcBef>
+              <a:spcAft>
+                <a:spcPts val="0"/>
+              </a:spcAft>
               <a:defRPr sz="900" b="1">
                 <a:solidFill>
                   <a:srgbClr val="535766"/>
@@ -4146,10 +4284,16 @@
           </a:fontRef>
         </p:style>
         <p:txBody>
-          <a:bodyPr rtlCol="0" anchor="ctr"/>
+          <a:bodyPr rtlCol="0" anchor="ctr" lIns="18288" rIns="18288" tIns="18288" bIns="18288"/>
           <a:lstStyle/>
           <a:p>
             <a:pPr algn="ctr">
+              <a:spcBef>
+                <a:spcPts val="0"/>
+              </a:spcBef>
+              <a:spcAft>
+                <a:spcPts val="0"/>
+              </a:spcAft>
               <a:defRPr sz="900" b="1">
                 <a:solidFill>
                   <a:srgbClr val="535766"/>
@@ -4200,10 +4344,16 @@
           </a:fontRef>
         </p:style>
         <p:txBody>
-          <a:bodyPr rtlCol="0" anchor="ctr"/>
+          <a:bodyPr rtlCol="0" anchor="ctr" lIns="18288" rIns="18288" tIns="18288" bIns="18288"/>
           <a:lstStyle/>
           <a:p>
             <a:pPr algn="ctr">
+              <a:spcBef>
+                <a:spcPts val="0"/>
+              </a:spcBef>
+              <a:spcAft>
+                <a:spcPts val="0"/>
+              </a:spcAft>
               <a:defRPr sz="900" b="1">
                 <a:solidFill>
                   <a:srgbClr val="535766"/>
@@ -4254,10 +4404,16 @@
           </a:fontRef>
         </p:style>
         <p:txBody>
-          <a:bodyPr rtlCol="0" anchor="ctr"/>
+          <a:bodyPr rtlCol="0" anchor="ctr" lIns="18288" rIns="18288" tIns="18288" bIns="18288"/>
           <a:lstStyle/>
           <a:p>
             <a:pPr algn="ctr">
+              <a:spcBef>
+                <a:spcPts val="0"/>
+              </a:spcBef>
+              <a:spcAft>
+                <a:spcPts val="0"/>
+              </a:spcAft>
               <a:defRPr sz="900" b="1">
                 <a:solidFill>
                   <a:srgbClr val="535766"/>
@@ -4308,10 +4464,16 @@
           </a:fontRef>
         </p:style>
         <p:txBody>
-          <a:bodyPr rtlCol="0" anchor="ctr"/>
+          <a:bodyPr rtlCol="0" anchor="ctr" lIns="18288" rIns="18288" tIns="18288" bIns="18288"/>
           <a:lstStyle/>
           <a:p>
             <a:pPr algn="ctr">
+              <a:spcBef>
+                <a:spcPts val="0"/>
+              </a:spcBef>
+              <a:spcAft>
+                <a:spcPts val="0"/>
+              </a:spcAft>
               <a:defRPr sz="900" b="1">
                 <a:solidFill>
                   <a:srgbClr val="535766"/>
@@ -4378,10 +4540,16 @@
           </a:fontRef>
         </p:style>
         <p:txBody>
-          <a:bodyPr rtlCol="0" anchor="ctr" wrap="square"/>
+          <a:bodyPr rtlCol="0" anchor="ctr" wrap="square" tIns="18288" bIns="18288"/>
           <a:lstStyle/>
           <a:p>
             <a:pPr algn="ctr">
+              <a:spcBef>
+                <a:spcPts val="0"/>
+              </a:spcBef>
+              <a:spcAft>
+                <a:spcPts val="0"/>
+              </a:spcAft>
               <a:defRPr sz="1000" b="1">
                 <a:solidFill>
                   <a:srgbClr val="FFFFFF"/>
@@ -4411,13 +4579,16 @@
           <a:noFill/>
         </p:spPr>
         <p:txBody>
-          <a:bodyPr wrap="square">
+          <a:bodyPr wrap="square" lIns="0" rIns="0" tIns="0" bIns="0">
             <a:spAutoFit/>
           </a:bodyPr>
           <a:lstStyle/>
           <a:p>
             <a:pPr>
-              <a:defRPr sz="1450" b="1">
+              <a:spcAft>
+                <a:spcPts val="300"/>
+              </a:spcAft>
+              <a:defRPr sz="1400" b="1">
                 <a:solidFill>
                   <a:srgbClr val="282C3F"/>
                 </a:solidFill>
@@ -4429,7 +4600,13 @@
           </a:p>
           <a:p>
             <a:pPr>
-              <a:defRPr sz="1150" b="1">
+              <a:spcBef>
+                <a:spcPts val="200"/>
+              </a:spcBef>
+              <a:spcAft>
+                <a:spcPts val="400"/>
+              </a:spcAft>
+              <a:defRPr sz="1050" b="1">
                 <a:solidFill>
                   <a:srgbClr val="FF3F6C"/>
                 </a:solidFill>
@@ -4458,7 +4635,7 @@
           <a:noFill/>
         </p:spPr>
         <p:txBody>
-          <a:bodyPr wrap="none">
+          <a:bodyPr wrap="none" lIns="0" rIns="0" tIns="0" bIns="0">
             <a:spAutoFit/>
           </a:bodyPr>
           <a:lstStyle/>
@@ -4529,8 +4706,8 @@
         </p:nvSpPr>
         <p:spPr>
           <a:xfrm>
-            <a:off x="777240" y="1783080"/>
-            <a:ext cx="3840480" cy="3520440"/>
+            <a:off x="749808" y="1755648"/>
+            <a:ext cx="3895344" cy="3575304"/>
           </a:xfrm>
           <a:prstGeom prst="rect">
             <a:avLst/>
@@ -4538,12 +4715,15 @@
           <a:noFill/>
         </p:spPr>
         <p:txBody>
-          <a:bodyPr wrap="square">
+          <a:bodyPr wrap="square" tIns="73152" bIns="73152">
             <a:spAutoFit/>
           </a:bodyPr>
           <a:lstStyle/>
           <a:p>
             <a:pPr>
+              <a:spcAft>
+                <a:spcPts val="800"/>
+              </a:spcAft>
               <a:defRPr sz="1100" b="1">
                 <a:solidFill>
                   <a:srgbClr val="FF3F6C"/>
@@ -4556,7 +4736,16 @@
           </a:p>
           <a:p>
             <a:pPr>
-              <a:defRPr sz="1000"/>
+              <a:lnSpc>
+                <a:spcPct val="118000"/>
+              </a:lnSpc>
+              <a:spcBef>
+                <a:spcPts val="200"/>
+              </a:spcBef>
+              <a:spcAft>
+                <a:spcPts val="500"/>
+              </a:spcAft>
+              <a:defRPr sz="950"/>
             </a:pPr>
             <a:r>
               <a:rPr b="1">
@@ -4585,7 +4774,16 @@
           </a:p>
           <a:p>
             <a:pPr>
-              <a:defRPr sz="1000"/>
+              <a:lnSpc>
+                <a:spcPct val="118000"/>
+              </a:lnSpc>
+              <a:spcBef>
+                <a:spcPts val="200"/>
+              </a:spcBef>
+              <a:spcAft>
+                <a:spcPts val="500"/>
+              </a:spcAft>
+              <a:defRPr sz="950"/>
             </a:pPr>
             <a:r>
               <a:rPr b="1">
@@ -4614,7 +4812,16 @@
           </a:p>
           <a:p>
             <a:pPr>
-              <a:defRPr sz="1000"/>
+              <a:lnSpc>
+                <a:spcPct val="118000"/>
+              </a:lnSpc>
+              <a:spcBef>
+                <a:spcPts val="200"/>
+              </a:spcBef>
+              <a:spcAft>
+                <a:spcPts val="500"/>
+              </a:spcAft>
+              <a:defRPr sz="950"/>
             </a:pPr>
             <a:r>
               <a:rPr b="1">
@@ -4643,7 +4850,16 @@
           </a:p>
           <a:p>
             <a:pPr>
-              <a:defRPr sz="1000"/>
+              <a:lnSpc>
+                <a:spcPct val="118000"/>
+              </a:lnSpc>
+              <a:spcBef>
+                <a:spcPts val="200"/>
+              </a:spcBef>
+              <a:spcAft>
+                <a:spcPts val="500"/>
+              </a:spcAft>
+              <a:defRPr sz="950"/>
             </a:pPr>
             <a:r>
               <a:rPr b="1">
@@ -4725,8 +4941,8 @@
         </p:nvSpPr>
         <p:spPr>
           <a:xfrm>
-            <a:off x="5029200" y="1783080"/>
-            <a:ext cx="3840480" cy="3520440"/>
+            <a:off x="5001768" y="1755648"/>
+            <a:ext cx="3895344" cy="3575304"/>
           </a:xfrm>
           <a:prstGeom prst="rect">
             <a:avLst/>
@@ -4734,12 +4950,15 @@
           <a:noFill/>
         </p:spPr>
         <p:txBody>
-          <a:bodyPr wrap="square">
+          <a:bodyPr wrap="square" tIns="73152" bIns="73152">
             <a:spAutoFit/>
           </a:bodyPr>
           <a:lstStyle/>
           <a:p>
             <a:pPr>
+              <a:spcAft>
+                <a:spcPts val="800"/>
+              </a:spcAft>
               <a:defRPr sz="1100" b="1">
                 <a:solidFill>
                   <a:srgbClr val="FF3F6C"/>
@@ -4752,7 +4971,16 @@
           </a:p>
           <a:p>
             <a:pPr>
-              <a:defRPr sz="1000"/>
+              <a:lnSpc>
+                <a:spcPct val="118000"/>
+              </a:lnSpc>
+              <a:spcBef>
+                <a:spcPts val="200"/>
+              </a:spcBef>
+              <a:spcAft>
+                <a:spcPts val="500"/>
+              </a:spcAft>
+              <a:defRPr sz="950"/>
             </a:pPr>
             <a:r>
               <a:rPr b="1">
@@ -4781,7 +5009,16 @@
           </a:p>
           <a:p>
             <a:pPr>
-              <a:defRPr sz="1000"/>
+              <a:lnSpc>
+                <a:spcPct val="118000"/>
+              </a:lnSpc>
+              <a:spcBef>
+                <a:spcPts val="200"/>
+              </a:spcBef>
+              <a:spcAft>
+                <a:spcPts val="500"/>
+              </a:spcAft>
+              <a:defRPr sz="950"/>
             </a:pPr>
             <a:r>
               <a:rPr b="1">
@@ -4810,7 +5047,16 @@
           </a:p>
           <a:p>
             <a:pPr>
-              <a:defRPr sz="1000"/>
+              <a:lnSpc>
+                <a:spcPct val="118000"/>
+              </a:lnSpc>
+              <a:spcBef>
+                <a:spcPts val="200"/>
+              </a:spcBef>
+              <a:spcAft>
+                <a:spcPts val="500"/>
+              </a:spcAft>
+              <a:defRPr sz="950"/>
             </a:pPr>
             <a:r>
               <a:rPr b="1">
@@ -4839,7 +5085,16 @@
           </a:p>
           <a:p>
             <a:pPr>
-              <a:defRPr sz="1000"/>
+              <a:lnSpc>
+                <a:spcPct val="118000"/>
+              </a:lnSpc>
+              <a:spcBef>
+                <a:spcPts val="200"/>
+              </a:spcBef>
+              <a:spcAft>
+                <a:spcPts val="500"/>
+              </a:spcAft>
+              <a:defRPr sz="950"/>
             </a:pPr>
             <a:r>
               <a:rPr b="1">
@@ -4990,8 +5245,8 @@
         </p:nvSpPr>
         <p:spPr>
           <a:xfrm>
-            <a:off x="777240" y="5605272"/>
-            <a:ext cx="10637215" cy="493776"/>
+            <a:off x="777240" y="5586984"/>
+            <a:ext cx="10637215" cy="530352"/>
           </a:xfrm>
           <a:prstGeom prst="rect">
             <a:avLst/>
@@ -4999,13 +5254,16 @@
           <a:noFill/>
         </p:spPr>
         <p:txBody>
-          <a:bodyPr wrap="square">
+          <a:bodyPr wrap="square" tIns="36576" bIns="36576">
             <a:spAutoFit/>
           </a:bodyPr>
           <a:lstStyle/>
           <a:p>
             <a:pPr>
-              <a:defRPr sz="1000" b="1">
+              <a:spcAft>
+                <a:spcPts val="200"/>
+              </a:spcAft>
+              <a:defRPr sz="950" b="1">
                 <a:solidFill>
                   <a:srgbClr val="4338CA"/>
                 </a:solidFill>
@@ -5017,7 +5275,13 @@
           </a:p>
           <a:p>
             <a:pPr>
-              <a:defRPr sz="1000" b="1">
+              <a:lnSpc>
+                <a:spcPct val="115000"/>
+              </a:lnSpc>
+              <a:spcBef>
+                <a:spcPts val="0"/>
+              </a:spcBef>
+              <a:defRPr sz="950" b="1">
                 <a:solidFill>
                   <a:srgbClr val="282C3F"/>
                 </a:solidFill>
@@ -5067,10 +5331,16 @@
           </a:fontRef>
         </p:style>
         <p:txBody>
-          <a:bodyPr rtlCol="0" anchor="ctr"/>
+          <a:bodyPr rtlCol="0" anchor="ctr" lIns="18288" rIns="18288" tIns="18288" bIns="18288"/>
           <a:lstStyle/>
           <a:p>
             <a:pPr algn="ctr">
+              <a:spcBef>
+                <a:spcPts val="0"/>
+              </a:spcBef>
+              <a:spcAft>
+                <a:spcPts val="0"/>
+              </a:spcAft>
               <a:defRPr sz="900" b="1">
                 <a:solidFill>
                   <a:srgbClr val="535766"/>
@@ -5121,10 +5391,16 @@
           </a:fontRef>
         </p:style>
         <p:txBody>
-          <a:bodyPr rtlCol="0" anchor="ctr"/>
+          <a:bodyPr rtlCol="0" anchor="ctr" lIns="18288" rIns="18288" tIns="18288" bIns="18288"/>
           <a:lstStyle/>
           <a:p>
             <a:pPr algn="ctr">
+              <a:spcBef>
+                <a:spcPts val="0"/>
+              </a:spcBef>
+              <a:spcAft>
+                <a:spcPts val="0"/>
+              </a:spcAft>
               <a:defRPr sz="900" b="1">
                 <a:solidFill>
                   <a:srgbClr val="535766"/>
@@ -5175,10 +5451,16 @@
           </a:fontRef>
         </p:style>
         <p:txBody>
-          <a:bodyPr rtlCol="0" anchor="ctr"/>
+          <a:bodyPr rtlCol="0" anchor="ctr" lIns="18288" rIns="18288" tIns="18288" bIns="18288"/>
           <a:lstStyle/>
           <a:p>
             <a:pPr algn="ctr">
+              <a:spcBef>
+                <a:spcPts val="0"/>
+              </a:spcBef>
+              <a:spcAft>
+                <a:spcPts val="0"/>
+              </a:spcAft>
               <a:defRPr sz="900" b="1">
                 <a:solidFill>
                   <a:srgbClr val="535766"/>
@@ -5229,10 +5511,16 @@
           </a:fontRef>
         </p:style>
         <p:txBody>
-          <a:bodyPr rtlCol="0" anchor="ctr"/>
+          <a:bodyPr rtlCol="0" anchor="ctr" lIns="18288" rIns="18288" tIns="18288" bIns="18288"/>
           <a:lstStyle/>
           <a:p>
             <a:pPr algn="ctr">
+              <a:spcBef>
+                <a:spcPts val="0"/>
+              </a:spcBef>
+              <a:spcAft>
+                <a:spcPts val="0"/>
+              </a:spcAft>
               <a:defRPr sz="900" b="1">
                 <a:solidFill>
                   <a:srgbClr val="535766"/>
@@ -5283,10 +5571,16 @@
           </a:fontRef>
         </p:style>
         <p:txBody>
-          <a:bodyPr rtlCol="0" anchor="ctr"/>
+          <a:bodyPr rtlCol="0" anchor="ctr" lIns="18288" rIns="18288" tIns="18288" bIns="18288"/>
           <a:lstStyle/>
           <a:p>
             <a:pPr algn="ctr">
+              <a:spcBef>
+                <a:spcPts val="0"/>
+              </a:spcBef>
+              <a:spcAft>
+                <a:spcPts val="0"/>
+              </a:spcAft>
               <a:defRPr sz="900" b="1">
                 <a:solidFill>
                   <a:srgbClr val="535766"/>
@@ -5337,10 +5631,16 @@
           </a:fontRef>
         </p:style>
         <p:txBody>
-          <a:bodyPr rtlCol="0" anchor="ctr"/>
+          <a:bodyPr rtlCol="0" anchor="ctr" lIns="18288" rIns="18288" tIns="18288" bIns="18288"/>
           <a:lstStyle/>
           <a:p>
             <a:pPr algn="ctr">
+              <a:spcBef>
+                <a:spcPts val="0"/>
+              </a:spcBef>
+              <a:spcAft>
+                <a:spcPts val="0"/>
+              </a:spcAft>
               <a:defRPr sz="900" b="1">
                 <a:solidFill>
                   <a:srgbClr val="535766"/>
@@ -5391,10 +5691,16 @@
           </a:fontRef>
         </p:style>
         <p:txBody>
-          <a:bodyPr rtlCol="0" anchor="ctr"/>
+          <a:bodyPr rtlCol="0" anchor="ctr" lIns="18288" rIns="18288" tIns="18288" bIns="18288"/>
           <a:lstStyle/>
           <a:p>
             <a:pPr algn="ctr">
+              <a:spcBef>
+                <a:spcPts val="0"/>
+              </a:spcBef>
+              <a:spcAft>
+                <a:spcPts val="0"/>
+              </a:spcAft>
               <a:defRPr sz="900" b="1">
                 <a:solidFill>
                   <a:srgbClr val="535766"/>
@@ -5445,10 +5751,16 @@
           </a:fontRef>
         </p:style>
         <p:txBody>
-          <a:bodyPr rtlCol="0" anchor="ctr"/>
+          <a:bodyPr rtlCol="0" anchor="ctr" lIns="18288" rIns="18288" tIns="18288" bIns="18288"/>
           <a:lstStyle/>
           <a:p>
             <a:pPr algn="ctr">
+              <a:spcBef>
+                <a:spcPts val="0"/>
+              </a:spcBef>
+              <a:spcAft>
+                <a:spcPts val="0"/>
+              </a:spcAft>
               <a:defRPr sz="900" b="1">
                 <a:solidFill>
                   <a:srgbClr val="535766"/>
@@ -5499,10 +5811,16 @@
           </a:fontRef>
         </p:style>
         <p:txBody>
-          <a:bodyPr rtlCol="0" anchor="ctr"/>
+          <a:bodyPr rtlCol="0" anchor="ctr" lIns="18288" rIns="18288" tIns="18288" bIns="18288"/>
           <a:lstStyle/>
           <a:p>
             <a:pPr algn="ctr">
+              <a:spcBef>
+                <a:spcPts val="0"/>
+              </a:spcBef>
+              <a:spcAft>
+                <a:spcPts val="0"/>
+              </a:spcAft>
               <a:defRPr sz="900" b="1">
                 <a:solidFill>
                   <a:srgbClr val="535766"/>
@@ -5553,10 +5871,16 @@
           </a:fontRef>
         </p:style>
         <p:txBody>
-          <a:bodyPr rtlCol="0" anchor="ctr"/>
+          <a:bodyPr rtlCol="0" anchor="ctr" lIns="18288" rIns="18288" tIns="18288" bIns="18288"/>
           <a:lstStyle/>
           <a:p>
             <a:pPr algn="ctr">
+              <a:spcBef>
+                <a:spcPts val="0"/>
+              </a:spcBef>
+              <a:spcAft>
+                <a:spcPts val="0"/>
+              </a:spcAft>
               <a:defRPr sz="900" b="1">
                 <a:solidFill>
                   <a:srgbClr val="FFFFFF"/>
@@ -5623,10 +5947,16 @@
           </a:fontRef>
         </p:style>
         <p:txBody>
-          <a:bodyPr rtlCol="0" anchor="ctr" wrap="square"/>
+          <a:bodyPr rtlCol="0" anchor="ctr" wrap="square" tIns="18288" bIns="18288"/>
           <a:lstStyle/>
           <a:p>
             <a:pPr algn="ctr">
+              <a:spcBef>
+                <a:spcPts val="0"/>
+              </a:spcBef>
+              <a:spcAft>
+                <a:spcPts val="0"/>
+              </a:spcAft>
               <a:defRPr sz="1000" b="1">
                 <a:solidFill>
                   <a:srgbClr val="FFFFFF"/>
@@ -5656,13 +5986,16 @@
           <a:noFill/>
         </p:spPr>
         <p:txBody>
-          <a:bodyPr wrap="square">
+          <a:bodyPr wrap="square" lIns="0" rIns="0" tIns="0" bIns="0">
             <a:spAutoFit/>
           </a:bodyPr>
           <a:lstStyle/>
           <a:p>
             <a:pPr>
-              <a:defRPr sz="1450" b="1">
+              <a:spcAft>
+                <a:spcPts val="300"/>
+              </a:spcAft>
+              <a:defRPr sz="1400" b="1">
                 <a:solidFill>
                   <a:srgbClr val="282C3F"/>
                 </a:solidFill>
@@ -5674,7 +6007,13 @@
           </a:p>
           <a:p>
             <a:pPr>
-              <a:defRPr sz="1150" b="1">
+              <a:spcBef>
+                <a:spcPts val="200"/>
+              </a:spcBef>
+              <a:spcAft>
+                <a:spcPts val="400"/>
+              </a:spcAft>
+              <a:defRPr sz="1050" b="1">
                 <a:solidFill>
                   <a:srgbClr val="FF3F6C"/>
                 </a:solidFill>
@@ -5703,7 +6042,7 @@
           <a:noFill/>
         </p:spPr>
         <p:txBody>
-          <a:bodyPr wrap="none">
+          <a:bodyPr wrap="none" lIns="0" rIns="0" tIns="0" bIns="0">
             <a:spAutoFit/>
           </a:bodyPr>
           <a:lstStyle/>
@@ -5774,8 +6113,8 @@
         </p:nvSpPr>
         <p:spPr>
           <a:xfrm>
-            <a:off x="777240" y="1783080"/>
-            <a:ext cx="3840480" cy="3520440"/>
+            <a:off x="749808" y="1755648"/>
+            <a:ext cx="3895344" cy="3575304"/>
           </a:xfrm>
           <a:prstGeom prst="rect">
             <a:avLst/>
@@ -5783,12 +6122,15 @@
           <a:noFill/>
         </p:spPr>
         <p:txBody>
-          <a:bodyPr wrap="square">
+          <a:bodyPr wrap="square" tIns="73152" bIns="73152">
             <a:spAutoFit/>
           </a:bodyPr>
           <a:lstStyle/>
           <a:p>
             <a:pPr>
+              <a:spcAft>
+                <a:spcPts val="800"/>
+              </a:spcAft>
               <a:defRPr sz="1100" b="1">
                 <a:solidFill>
                   <a:srgbClr val="FF3F6C"/>
@@ -5801,7 +6143,16 @@
           </a:p>
           <a:p>
             <a:pPr>
-              <a:defRPr sz="1000"/>
+              <a:lnSpc>
+                <a:spcPct val="118000"/>
+              </a:lnSpc>
+              <a:spcBef>
+                <a:spcPts val="200"/>
+              </a:spcBef>
+              <a:spcAft>
+                <a:spcPts val="500"/>
+              </a:spcAft>
+              <a:defRPr sz="950"/>
             </a:pPr>
             <a:r>
               <a:rPr b="1">
@@ -5830,7 +6181,16 @@
           </a:p>
           <a:p>
             <a:pPr>
-              <a:defRPr sz="1000"/>
+              <a:lnSpc>
+                <a:spcPct val="118000"/>
+              </a:lnSpc>
+              <a:spcBef>
+                <a:spcPts val="200"/>
+              </a:spcBef>
+              <a:spcAft>
+                <a:spcPts val="500"/>
+              </a:spcAft>
+              <a:defRPr sz="950"/>
             </a:pPr>
             <a:r>
               <a:rPr b="1">
@@ -5859,7 +6219,16 @@
           </a:p>
           <a:p>
             <a:pPr>
-              <a:defRPr sz="1000"/>
+              <a:lnSpc>
+                <a:spcPct val="118000"/>
+              </a:lnSpc>
+              <a:spcBef>
+                <a:spcPts val="200"/>
+              </a:spcBef>
+              <a:spcAft>
+                <a:spcPts val="500"/>
+              </a:spcAft>
+              <a:defRPr sz="950"/>
             </a:pPr>
             <a:r>
               <a:rPr b="1">
@@ -5941,8 +6310,8 @@
         </p:nvSpPr>
         <p:spPr>
           <a:xfrm>
-            <a:off x="5029200" y="1783080"/>
-            <a:ext cx="3840480" cy="3520440"/>
+            <a:off x="5001768" y="1755648"/>
+            <a:ext cx="3895344" cy="3575304"/>
           </a:xfrm>
           <a:prstGeom prst="rect">
             <a:avLst/>
@@ -5950,12 +6319,15 @@
           <a:noFill/>
         </p:spPr>
         <p:txBody>
-          <a:bodyPr wrap="square">
+          <a:bodyPr wrap="square" tIns="73152" bIns="73152">
             <a:spAutoFit/>
           </a:bodyPr>
           <a:lstStyle/>
           <a:p>
             <a:pPr>
+              <a:spcAft>
+                <a:spcPts val="800"/>
+              </a:spcAft>
               <a:defRPr sz="1100" b="1">
                 <a:solidFill>
                   <a:srgbClr val="FF3F6C"/>
@@ -5968,7 +6340,16 @@
           </a:p>
           <a:p>
             <a:pPr>
-              <a:defRPr sz="1000"/>
+              <a:lnSpc>
+                <a:spcPct val="118000"/>
+              </a:lnSpc>
+              <a:spcBef>
+                <a:spcPts val="200"/>
+              </a:spcBef>
+              <a:spcAft>
+                <a:spcPts val="500"/>
+              </a:spcAft>
+              <a:defRPr sz="950"/>
             </a:pPr>
             <a:r>
               <a:rPr b="1">
@@ -5997,7 +6378,16 @@
           </a:p>
           <a:p>
             <a:pPr>
-              <a:defRPr sz="1000"/>
+              <a:lnSpc>
+                <a:spcPct val="118000"/>
+              </a:lnSpc>
+              <a:spcBef>
+                <a:spcPts val="200"/>
+              </a:spcBef>
+              <a:spcAft>
+                <a:spcPts val="500"/>
+              </a:spcAft>
+              <a:defRPr sz="950"/>
             </a:pPr>
             <a:r>
               <a:rPr b="1">
@@ -6026,7 +6416,16 @@
           </a:p>
           <a:p>
             <a:pPr>
-              <a:defRPr sz="1000"/>
+              <a:lnSpc>
+                <a:spcPct val="118000"/>
+              </a:lnSpc>
+              <a:spcBef>
+                <a:spcPts val="200"/>
+              </a:spcBef>
+              <a:spcAft>
+                <a:spcPts val="500"/>
+              </a:spcAft>
+              <a:defRPr sz="950"/>
             </a:pPr>
             <a:r>
               <a:rPr b="1">
@@ -6055,7 +6454,16 @@
           </a:p>
           <a:p>
             <a:pPr>
-              <a:defRPr sz="1000"/>
+              <a:lnSpc>
+                <a:spcPct val="118000"/>
+              </a:lnSpc>
+              <a:spcBef>
+                <a:spcPts val="200"/>
+              </a:spcBef>
+              <a:spcAft>
+                <a:spcPts val="500"/>
+              </a:spcAft>
+              <a:defRPr sz="950"/>
             </a:pPr>
             <a:r>
               <a:rPr b="1">
@@ -6206,8 +6614,8 @@
         </p:nvSpPr>
         <p:spPr>
           <a:xfrm>
-            <a:off x="777240" y="5605272"/>
-            <a:ext cx="10637215" cy="493776"/>
+            <a:off x="777240" y="5586984"/>
+            <a:ext cx="10637215" cy="530352"/>
           </a:xfrm>
           <a:prstGeom prst="rect">
             <a:avLst/>
@@ -6215,13 +6623,16 @@
           <a:noFill/>
         </p:spPr>
         <p:txBody>
-          <a:bodyPr wrap="square">
+          <a:bodyPr wrap="square" tIns="36576" bIns="36576">
             <a:spAutoFit/>
           </a:bodyPr>
           <a:lstStyle/>
           <a:p>
             <a:pPr>
-              <a:defRPr sz="1000" b="1">
+              <a:spcAft>
+                <a:spcPts val="200"/>
+              </a:spcAft>
+              <a:defRPr sz="950" b="1">
                 <a:solidFill>
                   <a:srgbClr val="4338CA"/>
                 </a:solidFill>
@@ -6233,7 +6644,13 @@
           </a:p>
           <a:p>
             <a:pPr>
-              <a:defRPr sz="1000" b="1">
+              <a:lnSpc>
+                <a:spcPct val="115000"/>
+              </a:lnSpc>
+              <a:spcBef>
+                <a:spcPts val="0"/>
+              </a:spcBef>
+              <a:defRPr sz="950" b="1">
                 <a:solidFill>
                   <a:srgbClr val="282C3F"/>
                 </a:solidFill>
@@ -6283,10 +6700,16 @@
           </a:fontRef>
         </p:style>
         <p:txBody>
-          <a:bodyPr rtlCol="0" anchor="ctr"/>
+          <a:bodyPr rtlCol="0" anchor="ctr" lIns="18288" rIns="18288" tIns="18288" bIns="18288"/>
           <a:lstStyle/>
           <a:p>
             <a:pPr algn="ctr">
+              <a:spcBef>
+                <a:spcPts val="0"/>
+              </a:spcBef>
+              <a:spcAft>
+                <a:spcPts val="0"/>
+              </a:spcAft>
               <a:defRPr sz="900" b="1">
                 <a:solidFill>
                   <a:srgbClr val="535766"/>
@@ -6337,10 +6760,16 @@
           </a:fontRef>
         </p:style>
         <p:txBody>
-          <a:bodyPr rtlCol="0" anchor="ctr"/>
+          <a:bodyPr rtlCol="0" anchor="ctr" lIns="18288" rIns="18288" tIns="18288" bIns="18288"/>
           <a:lstStyle/>
           <a:p>
             <a:pPr algn="ctr">
+              <a:spcBef>
+                <a:spcPts val="0"/>
+              </a:spcBef>
+              <a:spcAft>
+                <a:spcPts val="0"/>
+              </a:spcAft>
               <a:defRPr sz="900" b="1">
                 <a:solidFill>
                   <a:srgbClr val="FFFFFF"/>
@@ -6391,10 +6820,16 @@
           </a:fontRef>
         </p:style>
         <p:txBody>
-          <a:bodyPr rtlCol="0" anchor="ctr"/>
+          <a:bodyPr rtlCol="0" anchor="ctr" lIns="18288" rIns="18288" tIns="18288" bIns="18288"/>
           <a:lstStyle/>
           <a:p>
             <a:pPr algn="ctr">
+              <a:spcBef>
+                <a:spcPts val="0"/>
+              </a:spcBef>
+              <a:spcAft>
+                <a:spcPts val="0"/>
+              </a:spcAft>
               <a:defRPr sz="900" b="1">
                 <a:solidFill>
                   <a:srgbClr val="535766"/>
@@ -6445,10 +6880,16 @@
           </a:fontRef>
         </p:style>
         <p:txBody>
-          <a:bodyPr rtlCol="0" anchor="ctr"/>
+          <a:bodyPr rtlCol="0" anchor="ctr" lIns="18288" rIns="18288" tIns="18288" bIns="18288"/>
           <a:lstStyle/>
           <a:p>
             <a:pPr algn="ctr">
+              <a:spcBef>
+                <a:spcPts val="0"/>
+              </a:spcBef>
+              <a:spcAft>
+                <a:spcPts val="0"/>
+              </a:spcAft>
               <a:defRPr sz="900" b="1">
                 <a:solidFill>
                   <a:srgbClr val="535766"/>
@@ -6499,10 +6940,16 @@
           </a:fontRef>
         </p:style>
         <p:txBody>
-          <a:bodyPr rtlCol="0" anchor="ctr"/>
+          <a:bodyPr rtlCol="0" anchor="ctr" lIns="18288" rIns="18288" tIns="18288" bIns="18288"/>
           <a:lstStyle/>
           <a:p>
             <a:pPr algn="ctr">
+              <a:spcBef>
+                <a:spcPts val="0"/>
+              </a:spcBef>
+              <a:spcAft>
+                <a:spcPts val="0"/>
+              </a:spcAft>
               <a:defRPr sz="900" b="1">
                 <a:solidFill>
                   <a:srgbClr val="535766"/>
@@ -6553,10 +7000,16 @@
           </a:fontRef>
         </p:style>
         <p:txBody>
-          <a:bodyPr rtlCol="0" anchor="ctr"/>
+          <a:bodyPr rtlCol="0" anchor="ctr" lIns="18288" rIns="18288" tIns="18288" bIns="18288"/>
           <a:lstStyle/>
           <a:p>
             <a:pPr algn="ctr">
+              <a:spcBef>
+                <a:spcPts val="0"/>
+              </a:spcBef>
+              <a:spcAft>
+                <a:spcPts val="0"/>
+              </a:spcAft>
               <a:defRPr sz="900" b="1">
                 <a:solidFill>
                   <a:srgbClr val="535766"/>
@@ -6607,10 +7060,16 @@
           </a:fontRef>
         </p:style>
         <p:txBody>
-          <a:bodyPr rtlCol="0" anchor="ctr"/>
+          <a:bodyPr rtlCol="0" anchor="ctr" lIns="18288" rIns="18288" tIns="18288" bIns="18288"/>
           <a:lstStyle/>
           <a:p>
             <a:pPr algn="ctr">
+              <a:spcBef>
+                <a:spcPts val="0"/>
+              </a:spcBef>
+              <a:spcAft>
+                <a:spcPts val="0"/>
+              </a:spcAft>
               <a:defRPr sz="900" b="1">
                 <a:solidFill>
                   <a:srgbClr val="535766"/>
@@ -6661,10 +7120,16 @@
           </a:fontRef>
         </p:style>
         <p:txBody>
-          <a:bodyPr rtlCol="0" anchor="ctr"/>
+          <a:bodyPr rtlCol="0" anchor="ctr" lIns="18288" rIns="18288" tIns="18288" bIns="18288"/>
           <a:lstStyle/>
           <a:p>
             <a:pPr algn="ctr">
+              <a:spcBef>
+                <a:spcPts val="0"/>
+              </a:spcBef>
+              <a:spcAft>
+                <a:spcPts val="0"/>
+              </a:spcAft>
               <a:defRPr sz="900" b="1">
                 <a:solidFill>
                   <a:srgbClr val="535766"/>
@@ -6715,10 +7180,16 @@
           </a:fontRef>
         </p:style>
         <p:txBody>
-          <a:bodyPr rtlCol="0" anchor="ctr"/>
+          <a:bodyPr rtlCol="0" anchor="ctr" lIns="18288" rIns="18288" tIns="18288" bIns="18288"/>
           <a:lstStyle/>
           <a:p>
             <a:pPr algn="ctr">
+              <a:spcBef>
+                <a:spcPts val="0"/>
+              </a:spcBef>
+              <a:spcAft>
+                <a:spcPts val="0"/>
+              </a:spcAft>
               <a:defRPr sz="900" b="1">
                 <a:solidFill>
                   <a:srgbClr val="535766"/>
@@ -6769,10 +7240,16 @@
           </a:fontRef>
         </p:style>
         <p:txBody>
-          <a:bodyPr rtlCol="0" anchor="ctr"/>
+          <a:bodyPr rtlCol="0" anchor="ctr" lIns="18288" rIns="18288" tIns="18288" bIns="18288"/>
           <a:lstStyle/>
           <a:p>
             <a:pPr algn="ctr">
+              <a:spcBef>
+                <a:spcPts val="0"/>
+              </a:spcBef>
+              <a:spcAft>
+                <a:spcPts val="0"/>
+              </a:spcAft>
               <a:defRPr sz="900" b="1">
                 <a:solidFill>
                   <a:srgbClr val="535766"/>
@@ -6839,10 +7316,16 @@
           </a:fontRef>
         </p:style>
         <p:txBody>
-          <a:bodyPr rtlCol="0" anchor="ctr" wrap="square"/>
+          <a:bodyPr rtlCol="0" anchor="ctr" wrap="square" tIns="18288" bIns="18288"/>
           <a:lstStyle/>
           <a:p>
             <a:pPr algn="ctr">
+              <a:spcBef>
+                <a:spcPts val="0"/>
+              </a:spcBef>
+              <a:spcAft>
+                <a:spcPts val="0"/>
+              </a:spcAft>
               <a:defRPr sz="1000" b="1">
                 <a:solidFill>
                   <a:srgbClr val="FFFFFF"/>
@@ -6872,13 +7355,16 @@
           <a:noFill/>
         </p:spPr>
         <p:txBody>
-          <a:bodyPr wrap="square">
+          <a:bodyPr wrap="square" lIns="0" rIns="0" tIns="0" bIns="0">
             <a:spAutoFit/>
           </a:bodyPr>
           <a:lstStyle/>
           <a:p>
             <a:pPr>
-              <a:defRPr sz="1450" b="1">
+              <a:spcAft>
+                <a:spcPts val="300"/>
+              </a:spcAft>
+              <a:defRPr sz="1400" b="1">
                 <a:solidFill>
                   <a:srgbClr val="282C3F"/>
                 </a:solidFill>
@@ -6890,7 +7376,13 @@
           </a:p>
           <a:p>
             <a:pPr>
-              <a:defRPr sz="1150" b="1">
+              <a:spcBef>
+                <a:spcPts val="200"/>
+              </a:spcBef>
+              <a:spcAft>
+                <a:spcPts val="400"/>
+              </a:spcAft>
+              <a:defRPr sz="1050" b="1">
                 <a:solidFill>
                   <a:srgbClr val="FF3F6C"/>
                 </a:solidFill>
@@ -6919,7 +7411,7 @@
           <a:noFill/>
         </p:spPr>
         <p:txBody>
-          <a:bodyPr wrap="none">
+          <a:bodyPr wrap="none" lIns="0" rIns="0" tIns="0" bIns="0">
             <a:spAutoFit/>
           </a:bodyPr>
           <a:lstStyle/>
@@ -6990,8 +7482,8 @@
         </p:nvSpPr>
         <p:spPr>
           <a:xfrm>
-            <a:off x="777240" y="1783080"/>
-            <a:ext cx="5029200" cy="3520440"/>
+            <a:off x="749808" y="1755648"/>
+            <a:ext cx="5084064" cy="3575304"/>
           </a:xfrm>
           <a:prstGeom prst="rect">
             <a:avLst/>
@@ -6999,12 +7491,15 @@
           <a:noFill/>
         </p:spPr>
         <p:txBody>
-          <a:bodyPr wrap="square">
+          <a:bodyPr wrap="square" tIns="73152" bIns="73152">
             <a:spAutoFit/>
           </a:bodyPr>
           <a:lstStyle/>
           <a:p>
             <a:pPr>
+              <a:spcAft>
+                <a:spcPts val="800"/>
+              </a:spcAft>
               <a:defRPr sz="1100" b="1">
                 <a:solidFill>
                   <a:srgbClr val="FF3F6C"/>
@@ -7017,6 +7512,12 @@
           </a:p>
           <a:p>
             <a:pPr>
+              <a:spcBef>
+                <a:spcPts val="400"/>
+              </a:spcBef>
+              <a:spcAft>
+                <a:spcPts val="100"/>
+              </a:spcAft>
               <a:defRPr sz="1000"/>
             </a:pPr>
             <a:r>
@@ -7025,9 +7526,22 @@
                   <a:srgbClr val="FF3F6C"/>
                 </a:solidFill>
               </a:rPr>
-              <a:t>► 1. Initial Hypothesis
-</a:t>
-            </a:r>
+              <a:t>► 1. Initial Hypothesis</a:t>
+            </a:r>
+          </a:p>
+          <a:p>
+            <a:pPr>
+              <a:lnSpc>
+                <a:spcPct val="115000"/>
+              </a:lnSpc>
+              <a:spcBef>
+                <a:spcPts val="0"/>
+              </a:spcBef>
+              <a:spcAft>
+                <a:spcPts val="600"/>
+              </a:spcAft>
+              <a:defRPr sz="950"/>
+            </a:pPr>
             <a:r>
               <a:rPr>
                 <a:solidFill>
@@ -7039,6 +7553,12 @@
           </a:p>
           <a:p>
             <a:pPr>
+              <a:spcBef>
+                <a:spcPts val="400"/>
+              </a:spcBef>
+              <a:spcAft>
+                <a:spcPts val="100"/>
+              </a:spcAft>
               <a:defRPr sz="1000"/>
             </a:pPr>
             <a:r>
@@ -7047,9 +7567,22 @@
                   <a:srgbClr val="FF3F6C"/>
                 </a:solidFill>
               </a:rPr>
-              <a:t>► 2. Sourced 20,250 Review NLP
-</a:t>
-            </a:r>
+              <a:t>► 2. Sourced 20,250 Review NLP</a:t>
+            </a:r>
+          </a:p>
+          <a:p>
+            <a:pPr>
+              <a:lnSpc>
+                <a:spcPct val="115000"/>
+              </a:lnSpc>
+              <a:spcBef>
+                <a:spcPts val="0"/>
+              </a:spcBef>
+              <a:spcAft>
+                <a:spcPts val="600"/>
+              </a:spcAft>
+              <a:defRPr sz="950"/>
+            </a:pPr>
             <a:r>
               <a:rPr>
                 <a:solidFill>
@@ -7061,6 +7594,12 @@
           </a:p>
           <a:p>
             <a:pPr>
+              <a:spcBef>
+                <a:spcPts val="400"/>
+              </a:spcBef>
+              <a:spcAft>
+                <a:spcPts val="100"/>
+              </a:spcAft>
               <a:defRPr sz="1000"/>
             </a:pPr>
             <a:r>
@@ -7069,9 +7608,22 @@
                   <a:srgbClr val="FF3F6C"/>
                 </a:solidFill>
               </a:rPr>
-              <a:t>► 3. Primary Interview Pivot (N=9)
-</a:t>
-            </a:r>
+              <a:t>► 3. Primary Interview Pivot (N=9)</a:t>
+            </a:r>
+          </a:p>
+          <a:p>
+            <a:pPr>
+              <a:lnSpc>
+                <a:spcPct val="115000"/>
+              </a:lnSpc>
+              <a:spcBef>
+                <a:spcPts val="0"/>
+              </a:spcBef>
+              <a:spcAft>
+                <a:spcPts val="600"/>
+              </a:spcAft>
+              <a:defRPr sz="950"/>
+            </a:pPr>
             <a:r>
               <a:rPr>
                 <a:solidFill>
@@ -7083,6 +7635,12 @@
           </a:p>
           <a:p>
             <a:pPr>
+              <a:spcBef>
+                <a:spcPts val="400"/>
+              </a:spcBef>
+              <a:spcAft>
+                <a:spcPts val="100"/>
+              </a:spcAft>
               <a:defRPr sz="1000"/>
             </a:pPr>
             <a:r>
@@ -7091,9 +7649,22 @@
                   <a:srgbClr val="FF3F6C"/>
                 </a:solidFill>
               </a:rPr>
-              <a:t>► 4. Core Problem Definition
-</a:t>
-            </a:r>
+              <a:t>► 4. Core Problem Definition</a:t>
+            </a:r>
+          </a:p>
+          <a:p>
+            <a:pPr>
+              <a:lnSpc>
+                <a:spcPct val="115000"/>
+              </a:lnSpc>
+              <a:spcBef>
+                <a:spcPts val="0"/>
+              </a:spcBef>
+              <a:spcAft>
+                <a:spcPts val="600"/>
+              </a:spcAft>
+              <a:defRPr sz="950"/>
+            </a:pPr>
             <a:r>
               <a:rPr>
                 <a:solidFill>
@@ -7158,8 +7729,8 @@
         </p:nvSpPr>
         <p:spPr>
           <a:xfrm>
-            <a:off x="6355080" y="1783080"/>
-            <a:ext cx="5029200" cy="3520440"/>
+            <a:off x="6327648" y="1755648"/>
+            <a:ext cx="5084064" cy="3575304"/>
           </a:xfrm>
           <a:prstGeom prst="rect">
             <a:avLst/>
@@ -7167,12 +7738,15 @@
           <a:noFill/>
         </p:spPr>
         <p:txBody>
-          <a:bodyPr wrap="square">
+          <a:bodyPr wrap="square" tIns="73152" bIns="73152">
             <a:spAutoFit/>
           </a:bodyPr>
           <a:lstStyle/>
           <a:p>
             <a:pPr>
+              <a:spcAft>
+                <a:spcPts val="800"/>
+              </a:spcAft>
               <a:defRPr sz="1100" b="1">
                 <a:solidFill>
                   <a:srgbClr val="FF3F6C"/>
@@ -7185,7 +7759,16 @@
           </a:p>
           <a:p>
             <a:pPr>
-              <a:defRPr sz="1000"/>
+              <a:lnSpc>
+                <a:spcPct val="118000"/>
+              </a:lnSpc>
+              <a:spcBef>
+                <a:spcPts val="300"/>
+              </a:spcBef>
+              <a:spcAft>
+                <a:spcPts val="600"/>
+              </a:spcAft>
+              <a:defRPr sz="950"/>
             </a:pPr>
             <a:r>
               <a:rPr b="1">
@@ -7206,7 +7789,16 @@
           </a:p>
           <a:p>
             <a:pPr>
-              <a:defRPr sz="1000"/>
+              <a:lnSpc>
+                <a:spcPct val="118000"/>
+              </a:lnSpc>
+              <a:spcBef>
+                <a:spcPts val="300"/>
+              </a:spcBef>
+              <a:spcAft>
+                <a:spcPts val="600"/>
+              </a:spcAft>
+              <a:defRPr sz="950"/>
             </a:pPr>
             <a:r>
               <a:rPr b="1">
@@ -7227,7 +7819,16 @@
           </a:p>
           <a:p>
             <a:pPr>
-              <a:defRPr sz="1000"/>
+              <a:lnSpc>
+                <a:spcPct val="118000"/>
+              </a:lnSpc>
+              <a:spcBef>
+                <a:spcPts val="300"/>
+              </a:spcBef>
+              <a:spcAft>
+                <a:spcPts val="600"/>
+              </a:spcAft>
+              <a:defRPr sz="950"/>
             </a:pPr>
             <a:r>
               <a:rPr b="1">
@@ -7248,7 +7849,16 @@
           </a:p>
           <a:p>
             <a:pPr>
-              <a:defRPr sz="1000"/>
+              <a:lnSpc>
+                <a:spcPct val="118000"/>
+              </a:lnSpc>
+              <a:spcBef>
+                <a:spcPts val="300"/>
+              </a:spcBef>
+              <a:spcAft>
+                <a:spcPts val="600"/>
+              </a:spcAft>
+              <a:defRPr sz="950"/>
             </a:pPr>
             <a:r>
               <a:rPr b="1">
@@ -7322,8 +7932,8 @@
         </p:nvSpPr>
         <p:spPr>
           <a:xfrm>
-            <a:off x="777240" y="5605272"/>
-            <a:ext cx="10637215" cy="493776"/>
+            <a:off x="777240" y="5586984"/>
+            <a:ext cx="10637215" cy="530352"/>
           </a:xfrm>
           <a:prstGeom prst="rect">
             <a:avLst/>
@@ -7331,13 +7941,16 @@
           <a:noFill/>
         </p:spPr>
         <p:txBody>
-          <a:bodyPr wrap="square">
+          <a:bodyPr wrap="square" tIns="36576" bIns="36576">
             <a:spAutoFit/>
           </a:bodyPr>
           <a:lstStyle/>
           <a:p>
             <a:pPr>
-              <a:defRPr sz="1000" b="1">
+              <a:spcAft>
+                <a:spcPts val="200"/>
+              </a:spcAft>
+              <a:defRPr sz="950" b="1">
                 <a:solidFill>
                   <a:srgbClr val="4338CA"/>
                 </a:solidFill>
@@ -7349,7 +7962,13 @@
           </a:p>
           <a:p>
             <a:pPr>
-              <a:defRPr sz="1000" b="1">
+              <a:lnSpc>
+                <a:spcPct val="115000"/>
+              </a:lnSpc>
+              <a:spcBef>
+                <a:spcPts val="0"/>
+              </a:spcBef>
+              <a:defRPr sz="950" b="1">
                 <a:solidFill>
                   <a:srgbClr val="282C3F"/>
                 </a:solidFill>
@@ -7399,10 +8018,16 @@
           </a:fontRef>
         </p:style>
         <p:txBody>
-          <a:bodyPr rtlCol="0" anchor="ctr"/>
+          <a:bodyPr rtlCol="0" anchor="ctr" lIns="18288" rIns="18288" tIns="18288" bIns="18288"/>
           <a:lstStyle/>
           <a:p>
             <a:pPr algn="ctr">
+              <a:spcBef>
+                <a:spcPts val="0"/>
+              </a:spcBef>
+              <a:spcAft>
+                <a:spcPts val="0"/>
+              </a:spcAft>
               <a:defRPr sz="900" b="1">
                 <a:solidFill>
                   <a:srgbClr val="535766"/>
@@ -7453,10 +8078,16 @@
           </a:fontRef>
         </p:style>
         <p:txBody>
-          <a:bodyPr rtlCol="0" anchor="ctr"/>
+          <a:bodyPr rtlCol="0" anchor="ctr" lIns="18288" rIns="18288" tIns="18288" bIns="18288"/>
           <a:lstStyle/>
           <a:p>
             <a:pPr algn="ctr">
+              <a:spcBef>
+                <a:spcPts val="0"/>
+              </a:spcBef>
+              <a:spcAft>
+                <a:spcPts val="0"/>
+              </a:spcAft>
               <a:defRPr sz="900" b="1">
                 <a:solidFill>
                   <a:srgbClr val="535766"/>
@@ -7507,10 +8138,16 @@
           </a:fontRef>
         </p:style>
         <p:txBody>
-          <a:bodyPr rtlCol="0" anchor="ctr"/>
+          <a:bodyPr rtlCol="0" anchor="ctr" lIns="18288" rIns="18288" tIns="18288" bIns="18288"/>
           <a:lstStyle/>
           <a:p>
             <a:pPr algn="ctr">
+              <a:spcBef>
+                <a:spcPts val="0"/>
+              </a:spcBef>
+              <a:spcAft>
+                <a:spcPts val="0"/>
+              </a:spcAft>
               <a:defRPr sz="900" b="1">
                 <a:solidFill>
                   <a:srgbClr val="FFFFFF"/>
@@ -7561,10 +8198,16 @@
           </a:fontRef>
         </p:style>
         <p:txBody>
-          <a:bodyPr rtlCol="0" anchor="ctr"/>
+          <a:bodyPr rtlCol="0" anchor="ctr" lIns="18288" rIns="18288" tIns="18288" bIns="18288"/>
           <a:lstStyle/>
           <a:p>
             <a:pPr algn="ctr">
+              <a:spcBef>
+                <a:spcPts val="0"/>
+              </a:spcBef>
+              <a:spcAft>
+                <a:spcPts val="0"/>
+              </a:spcAft>
               <a:defRPr sz="900" b="1">
                 <a:solidFill>
                   <a:srgbClr val="535766"/>
@@ -7615,10 +8258,16 @@
           </a:fontRef>
         </p:style>
         <p:txBody>
-          <a:bodyPr rtlCol="0" anchor="ctr"/>
+          <a:bodyPr rtlCol="0" anchor="ctr" lIns="18288" rIns="18288" tIns="18288" bIns="18288"/>
           <a:lstStyle/>
           <a:p>
             <a:pPr algn="ctr">
+              <a:spcBef>
+                <a:spcPts val="0"/>
+              </a:spcBef>
+              <a:spcAft>
+                <a:spcPts val="0"/>
+              </a:spcAft>
               <a:defRPr sz="900" b="1">
                 <a:solidFill>
                   <a:srgbClr val="535766"/>
@@ -7669,10 +8318,16 @@
           </a:fontRef>
         </p:style>
         <p:txBody>
-          <a:bodyPr rtlCol="0" anchor="ctr"/>
+          <a:bodyPr rtlCol="0" anchor="ctr" lIns="18288" rIns="18288" tIns="18288" bIns="18288"/>
           <a:lstStyle/>
           <a:p>
             <a:pPr algn="ctr">
+              <a:spcBef>
+                <a:spcPts val="0"/>
+              </a:spcBef>
+              <a:spcAft>
+                <a:spcPts val="0"/>
+              </a:spcAft>
               <a:defRPr sz="900" b="1">
                 <a:solidFill>
                   <a:srgbClr val="535766"/>
@@ -7723,10 +8378,16 @@
           </a:fontRef>
         </p:style>
         <p:txBody>
-          <a:bodyPr rtlCol="0" anchor="ctr"/>
+          <a:bodyPr rtlCol="0" anchor="ctr" lIns="18288" rIns="18288" tIns="18288" bIns="18288"/>
           <a:lstStyle/>
           <a:p>
             <a:pPr algn="ctr">
+              <a:spcBef>
+                <a:spcPts val="0"/>
+              </a:spcBef>
+              <a:spcAft>
+                <a:spcPts val="0"/>
+              </a:spcAft>
               <a:defRPr sz="900" b="1">
                 <a:solidFill>
                   <a:srgbClr val="535766"/>
@@ -7777,10 +8438,16 @@
           </a:fontRef>
         </p:style>
         <p:txBody>
-          <a:bodyPr rtlCol="0" anchor="ctr"/>
+          <a:bodyPr rtlCol="0" anchor="ctr" lIns="18288" rIns="18288" tIns="18288" bIns="18288"/>
           <a:lstStyle/>
           <a:p>
             <a:pPr algn="ctr">
+              <a:spcBef>
+                <a:spcPts val="0"/>
+              </a:spcBef>
+              <a:spcAft>
+                <a:spcPts val="0"/>
+              </a:spcAft>
               <a:defRPr sz="900" b="1">
                 <a:solidFill>
                   <a:srgbClr val="535766"/>
@@ -7831,10 +8498,16 @@
           </a:fontRef>
         </p:style>
         <p:txBody>
-          <a:bodyPr rtlCol="0" anchor="ctr"/>
+          <a:bodyPr rtlCol="0" anchor="ctr" lIns="18288" rIns="18288" tIns="18288" bIns="18288"/>
           <a:lstStyle/>
           <a:p>
             <a:pPr algn="ctr">
+              <a:spcBef>
+                <a:spcPts val="0"/>
+              </a:spcBef>
+              <a:spcAft>
+                <a:spcPts val="0"/>
+              </a:spcAft>
               <a:defRPr sz="900" b="1">
                 <a:solidFill>
                   <a:srgbClr val="535766"/>
@@ -7885,10 +8558,16 @@
           </a:fontRef>
         </p:style>
         <p:txBody>
-          <a:bodyPr rtlCol="0" anchor="ctr"/>
+          <a:bodyPr rtlCol="0" anchor="ctr" lIns="18288" rIns="18288" tIns="18288" bIns="18288"/>
           <a:lstStyle/>
           <a:p>
             <a:pPr algn="ctr">
+              <a:spcBef>
+                <a:spcPts val="0"/>
+              </a:spcBef>
+              <a:spcAft>
+                <a:spcPts val="0"/>
+              </a:spcAft>
               <a:defRPr sz="900" b="1">
                 <a:solidFill>
                   <a:srgbClr val="535766"/>
@@ -7955,10 +8634,16 @@
           </a:fontRef>
         </p:style>
         <p:txBody>
-          <a:bodyPr rtlCol="0" anchor="ctr" wrap="square"/>
+          <a:bodyPr rtlCol="0" anchor="ctr" wrap="square" tIns="18288" bIns="18288"/>
           <a:lstStyle/>
           <a:p>
             <a:pPr algn="ctr">
+              <a:spcBef>
+                <a:spcPts val="0"/>
+              </a:spcBef>
+              <a:spcAft>
+                <a:spcPts val="0"/>
+              </a:spcAft>
               <a:defRPr sz="1000" b="1">
                 <a:solidFill>
                   <a:srgbClr val="FFFFFF"/>
@@ -7988,13 +8673,16 @@
           <a:noFill/>
         </p:spPr>
         <p:txBody>
-          <a:bodyPr wrap="square">
+          <a:bodyPr wrap="square" lIns="0" rIns="0" tIns="0" bIns="0">
             <a:spAutoFit/>
           </a:bodyPr>
           <a:lstStyle/>
           <a:p>
             <a:pPr>
-              <a:defRPr sz="1450" b="1">
+              <a:spcAft>
+                <a:spcPts val="300"/>
+              </a:spcAft>
+              <a:defRPr sz="1400" b="1">
                 <a:solidFill>
                   <a:srgbClr val="282C3F"/>
                 </a:solidFill>
@@ -8006,7 +8694,13 @@
           </a:p>
           <a:p>
             <a:pPr>
-              <a:defRPr sz="1150" b="1">
+              <a:spcBef>
+                <a:spcPts val="200"/>
+              </a:spcBef>
+              <a:spcAft>
+                <a:spcPts val="400"/>
+              </a:spcAft>
+              <a:defRPr sz="1050" b="1">
                 <a:solidFill>
                   <a:srgbClr val="FF3F6C"/>
                 </a:solidFill>
@@ -8035,7 +8729,7 @@
           <a:noFill/>
         </p:spPr>
         <p:txBody>
-          <a:bodyPr wrap="none">
+          <a:bodyPr wrap="none" lIns="0" rIns="0" tIns="0" bIns="0">
             <a:spAutoFit/>
           </a:bodyPr>
           <a:lstStyle/>
@@ -8106,8 +8800,8 @@
         </p:nvSpPr>
         <p:spPr>
           <a:xfrm>
-            <a:off x="777240" y="1783080"/>
-            <a:ext cx="3840480" cy="3520440"/>
+            <a:off x="749808" y="1755648"/>
+            <a:ext cx="3895344" cy="3575304"/>
           </a:xfrm>
           <a:prstGeom prst="rect">
             <a:avLst/>
@@ -8115,12 +8809,15 @@
           <a:noFill/>
         </p:spPr>
         <p:txBody>
-          <a:bodyPr wrap="square">
+          <a:bodyPr wrap="square" tIns="73152" bIns="73152">
             <a:spAutoFit/>
           </a:bodyPr>
           <a:lstStyle/>
           <a:p>
             <a:pPr>
+              <a:spcAft>
+                <a:spcPts val="800"/>
+              </a:spcAft>
               <a:defRPr sz="1100" b="1">
                 <a:solidFill>
                   <a:srgbClr val="FF3F6C"/>
@@ -8133,7 +8830,16 @@
           </a:p>
           <a:p>
             <a:pPr>
-              <a:defRPr sz="1000"/>
+              <a:lnSpc>
+                <a:spcPct val="118000"/>
+              </a:lnSpc>
+              <a:spcBef>
+                <a:spcPts val="200"/>
+              </a:spcBef>
+              <a:spcAft>
+                <a:spcPts val="500"/>
+              </a:spcAft>
+              <a:defRPr sz="950"/>
             </a:pPr>
             <a:r>
               <a:rPr b="1">
@@ -8162,7 +8868,16 @@
           </a:p>
           <a:p>
             <a:pPr>
-              <a:defRPr sz="1000"/>
+              <a:lnSpc>
+                <a:spcPct val="118000"/>
+              </a:lnSpc>
+              <a:spcBef>
+                <a:spcPts val="200"/>
+              </a:spcBef>
+              <a:spcAft>
+                <a:spcPts val="500"/>
+              </a:spcAft>
+              <a:defRPr sz="950"/>
             </a:pPr>
             <a:r>
               <a:rPr b="1">
@@ -8191,7 +8906,16 @@
           </a:p>
           <a:p>
             <a:pPr>
-              <a:defRPr sz="1000"/>
+              <a:lnSpc>
+                <a:spcPct val="118000"/>
+              </a:lnSpc>
+              <a:spcBef>
+                <a:spcPts val="200"/>
+              </a:spcBef>
+              <a:spcAft>
+                <a:spcPts val="500"/>
+              </a:spcAft>
+              <a:defRPr sz="950"/>
             </a:pPr>
             <a:r>
               <a:rPr b="1">
@@ -8220,7 +8944,16 @@
           </a:p>
           <a:p>
             <a:pPr>
-              <a:defRPr sz="1000"/>
+              <a:lnSpc>
+                <a:spcPct val="118000"/>
+              </a:lnSpc>
+              <a:spcBef>
+                <a:spcPts val="200"/>
+              </a:spcBef>
+              <a:spcAft>
+                <a:spcPts val="500"/>
+              </a:spcAft>
+              <a:defRPr sz="950"/>
             </a:pPr>
             <a:r>
               <a:rPr b="1">
@@ -8302,8 +9035,8 @@
         </p:nvSpPr>
         <p:spPr>
           <a:xfrm>
-            <a:off x="5029200" y="1783080"/>
-            <a:ext cx="3840480" cy="3520440"/>
+            <a:off x="5001768" y="1755648"/>
+            <a:ext cx="3895344" cy="3575304"/>
           </a:xfrm>
           <a:prstGeom prst="rect">
             <a:avLst/>
@@ -8311,12 +9044,15 @@
           <a:noFill/>
         </p:spPr>
         <p:txBody>
-          <a:bodyPr wrap="square">
+          <a:bodyPr wrap="square" tIns="73152" bIns="73152">
             <a:spAutoFit/>
           </a:bodyPr>
           <a:lstStyle/>
           <a:p>
             <a:pPr>
+              <a:spcAft>
+                <a:spcPts val="800"/>
+              </a:spcAft>
               <a:defRPr sz="1100" b="1">
                 <a:solidFill>
                   <a:srgbClr val="FF3F6C"/>
@@ -8329,7 +9065,16 @@
           </a:p>
           <a:p>
             <a:pPr>
-              <a:defRPr sz="1000"/>
+              <a:lnSpc>
+                <a:spcPct val="118000"/>
+              </a:lnSpc>
+              <a:spcBef>
+                <a:spcPts val="200"/>
+              </a:spcBef>
+              <a:spcAft>
+                <a:spcPts val="500"/>
+              </a:spcAft>
+              <a:defRPr sz="950"/>
             </a:pPr>
             <a:r>
               <a:rPr b="1">
@@ -8358,7 +9103,16 @@
           </a:p>
           <a:p>
             <a:pPr>
-              <a:defRPr sz="1000"/>
+              <a:lnSpc>
+                <a:spcPct val="118000"/>
+              </a:lnSpc>
+              <a:spcBef>
+                <a:spcPts val="200"/>
+              </a:spcBef>
+              <a:spcAft>
+                <a:spcPts val="500"/>
+              </a:spcAft>
+              <a:defRPr sz="950"/>
             </a:pPr>
             <a:r>
               <a:rPr b="1">
@@ -8387,7 +9141,16 @@
           </a:p>
           <a:p>
             <a:pPr>
-              <a:defRPr sz="1000"/>
+              <a:lnSpc>
+                <a:spcPct val="118000"/>
+              </a:lnSpc>
+              <a:spcBef>
+                <a:spcPts val="200"/>
+              </a:spcBef>
+              <a:spcAft>
+                <a:spcPts val="500"/>
+              </a:spcAft>
+              <a:defRPr sz="950"/>
             </a:pPr>
             <a:r>
               <a:rPr b="1">
@@ -8416,7 +9179,16 @@
           </a:p>
           <a:p>
             <a:pPr>
-              <a:defRPr sz="1000"/>
+              <a:lnSpc>
+                <a:spcPct val="118000"/>
+              </a:lnSpc>
+              <a:spcBef>
+                <a:spcPts val="200"/>
+              </a:spcBef>
+              <a:spcAft>
+                <a:spcPts val="500"/>
+              </a:spcAft>
+              <a:defRPr sz="950"/>
             </a:pPr>
             <a:r>
               <a:rPr b="1">
@@ -8567,8 +9339,8 @@
         </p:nvSpPr>
         <p:spPr>
           <a:xfrm>
-            <a:off x="777240" y="5605272"/>
-            <a:ext cx="10637215" cy="493776"/>
+            <a:off x="777240" y="5586984"/>
+            <a:ext cx="10637215" cy="530352"/>
           </a:xfrm>
           <a:prstGeom prst="rect">
             <a:avLst/>
@@ -8576,13 +9348,16 @@
           <a:noFill/>
         </p:spPr>
         <p:txBody>
-          <a:bodyPr wrap="square">
+          <a:bodyPr wrap="square" tIns="36576" bIns="36576">
             <a:spAutoFit/>
           </a:bodyPr>
           <a:lstStyle/>
           <a:p>
             <a:pPr>
-              <a:defRPr sz="1000" b="1">
+              <a:spcAft>
+                <a:spcPts val="200"/>
+              </a:spcAft>
+              <a:defRPr sz="950" b="1">
                 <a:solidFill>
                   <a:srgbClr val="4338CA"/>
                 </a:solidFill>
@@ -8594,7 +9369,13 @@
           </a:p>
           <a:p>
             <a:pPr>
-              <a:defRPr sz="1000" b="1">
+              <a:lnSpc>
+                <a:spcPct val="115000"/>
+              </a:lnSpc>
+              <a:spcBef>
+                <a:spcPts val="0"/>
+              </a:spcBef>
+              <a:defRPr sz="950" b="1">
                 <a:solidFill>
                   <a:srgbClr val="282C3F"/>
                 </a:solidFill>
@@ -8644,10 +9425,16 @@
           </a:fontRef>
         </p:style>
         <p:txBody>
-          <a:bodyPr rtlCol="0" anchor="ctr"/>
+          <a:bodyPr rtlCol="0" anchor="ctr" lIns="18288" rIns="18288" tIns="18288" bIns="18288"/>
           <a:lstStyle/>
           <a:p>
             <a:pPr algn="ctr">
+              <a:spcBef>
+                <a:spcPts val="0"/>
+              </a:spcBef>
+              <a:spcAft>
+                <a:spcPts val="0"/>
+              </a:spcAft>
               <a:defRPr sz="900" b="1">
                 <a:solidFill>
                   <a:srgbClr val="535766"/>
@@ -8698,10 +9485,16 @@
           </a:fontRef>
         </p:style>
         <p:txBody>
-          <a:bodyPr rtlCol="0" anchor="ctr"/>
+          <a:bodyPr rtlCol="0" anchor="ctr" lIns="18288" rIns="18288" tIns="18288" bIns="18288"/>
           <a:lstStyle/>
           <a:p>
             <a:pPr algn="ctr">
+              <a:spcBef>
+                <a:spcPts val="0"/>
+              </a:spcBef>
+              <a:spcAft>
+                <a:spcPts val="0"/>
+              </a:spcAft>
               <a:defRPr sz="900" b="1">
                 <a:solidFill>
                   <a:srgbClr val="535766"/>
@@ -8752,10 +9545,16 @@
           </a:fontRef>
         </p:style>
         <p:txBody>
-          <a:bodyPr rtlCol="0" anchor="ctr"/>
+          <a:bodyPr rtlCol="0" anchor="ctr" lIns="18288" rIns="18288" tIns="18288" bIns="18288"/>
           <a:lstStyle/>
           <a:p>
             <a:pPr algn="ctr">
+              <a:spcBef>
+                <a:spcPts val="0"/>
+              </a:spcBef>
+              <a:spcAft>
+                <a:spcPts val="0"/>
+              </a:spcAft>
               <a:defRPr sz="900" b="1">
                 <a:solidFill>
                   <a:srgbClr val="535766"/>
@@ -8806,10 +9605,16 @@
           </a:fontRef>
         </p:style>
         <p:txBody>
-          <a:bodyPr rtlCol="0" anchor="ctr"/>
+          <a:bodyPr rtlCol="0" anchor="ctr" lIns="18288" rIns="18288" tIns="18288" bIns="18288"/>
           <a:lstStyle/>
           <a:p>
             <a:pPr algn="ctr">
+              <a:spcBef>
+                <a:spcPts val="0"/>
+              </a:spcBef>
+              <a:spcAft>
+                <a:spcPts val="0"/>
+              </a:spcAft>
               <a:defRPr sz="900" b="1">
                 <a:solidFill>
                   <a:srgbClr val="FFFFFF"/>
@@ -8860,10 +9665,16 @@
           </a:fontRef>
         </p:style>
         <p:txBody>
-          <a:bodyPr rtlCol="0" anchor="ctr"/>
+          <a:bodyPr rtlCol="0" anchor="ctr" lIns="18288" rIns="18288" tIns="18288" bIns="18288"/>
           <a:lstStyle/>
           <a:p>
             <a:pPr algn="ctr">
+              <a:spcBef>
+                <a:spcPts val="0"/>
+              </a:spcBef>
+              <a:spcAft>
+                <a:spcPts val="0"/>
+              </a:spcAft>
               <a:defRPr sz="900" b="1">
                 <a:solidFill>
                   <a:srgbClr val="535766"/>
@@ -8914,10 +9725,16 @@
           </a:fontRef>
         </p:style>
         <p:txBody>
-          <a:bodyPr rtlCol="0" anchor="ctr"/>
+          <a:bodyPr rtlCol="0" anchor="ctr" lIns="18288" rIns="18288" tIns="18288" bIns="18288"/>
           <a:lstStyle/>
           <a:p>
             <a:pPr algn="ctr">
+              <a:spcBef>
+                <a:spcPts val="0"/>
+              </a:spcBef>
+              <a:spcAft>
+                <a:spcPts val="0"/>
+              </a:spcAft>
               <a:defRPr sz="900" b="1">
                 <a:solidFill>
                   <a:srgbClr val="535766"/>
@@ -8968,10 +9785,16 @@
           </a:fontRef>
         </p:style>
         <p:txBody>
-          <a:bodyPr rtlCol="0" anchor="ctr"/>
+          <a:bodyPr rtlCol="0" anchor="ctr" lIns="18288" rIns="18288" tIns="18288" bIns="18288"/>
           <a:lstStyle/>
           <a:p>
             <a:pPr algn="ctr">
+              <a:spcBef>
+                <a:spcPts val="0"/>
+              </a:spcBef>
+              <a:spcAft>
+                <a:spcPts val="0"/>
+              </a:spcAft>
               <a:defRPr sz="900" b="1">
                 <a:solidFill>
                   <a:srgbClr val="535766"/>
@@ -9022,10 +9845,16 @@
           </a:fontRef>
         </p:style>
         <p:txBody>
-          <a:bodyPr rtlCol="0" anchor="ctr"/>
+          <a:bodyPr rtlCol="0" anchor="ctr" lIns="18288" rIns="18288" tIns="18288" bIns="18288"/>
           <a:lstStyle/>
           <a:p>
             <a:pPr algn="ctr">
+              <a:spcBef>
+                <a:spcPts val="0"/>
+              </a:spcBef>
+              <a:spcAft>
+                <a:spcPts val="0"/>
+              </a:spcAft>
               <a:defRPr sz="900" b="1">
                 <a:solidFill>
                   <a:srgbClr val="535766"/>
@@ -9076,10 +9905,16 @@
           </a:fontRef>
         </p:style>
         <p:txBody>
-          <a:bodyPr rtlCol="0" anchor="ctr"/>
+          <a:bodyPr rtlCol="0" anchor="ctr" lIns="18288" rIns="18288" tIns="18288" bIns="18288"/>
           <a:lstStyle/>
           <a:p>
             <a:pPr algn="ctr">
+              <a:spcBef>
+                <a:spcPts val="0"/>
+              </a:spcBef>
+              <a:spcAft>
+                <a:spcPts val="0"/>
+              </a:spcAft>
               <a:defRPr sz="900" b="1">
                 <a:solidFill>
                   <a:srgbClr val="535766"/>
@@ -9130,10 +9965,16 @@
           </a:fontRef>
         </p:style>
         <p:txBody>
-          <a:bodyPr rtlCol="0" anchor="ctr"/>
+          <a:bodyPr rtlCol="0" anchor="ctr" lIns="18288" rIns="18288" tIns="18288" bIns="18288"/>
           <a:lstStyle/>
           <a:p>
             <a:pPr algn="ctr">
+              <a:spcBef>
+                <a:spcPts val="0"/>
+              </a:spcBef>
+              <a:spcAft>
+                <a:spcPts val="0"/>
+              </a:spcAft>
               <a:defRPr sz="900" b="1">
                 <a:solidFill>
                   <a:srgbClr val="535766"/>
@@ -9200,10 +10041,16 @@
           </a:fontRef>
         </p:style>
         <p:txBody>
-          <a:bodyPr rtlCol="0" anchor="ctr" wrap="square"/>
+          <a:bodyPr rtlCol="0" anchor="ctr" wrap="square" tIns="18288" bIns="18288"/>
           <a:lstStyle/>
           <a:p>
             <a:pPr algn="ctr">
+              <a:spcBef>
+                <a:spcPts val="0"/>
+              </a:spcBef>
+              <a:spcAft>
+                <a:spcPts val="0"/>
+              </a:spcAft>
               <a:defRPr sz="1000" b="1">
                 <a:solidFill>
                   <a:srgbClr val="FFFFFF"/>
@@ -9233,13 +10080,16 @@
           <a:noFill/>
         </p:spPr>
         <p:txBody>
-          <a:bodyPr wrap="square">
+          <a:bodyPr wrap="square" lIns="0" rIns="0" tIns="0" bIns="0">
             <a:spAutoFit/>
           </a:bodyPr>
           <a:lstStyle/>
           <a:p>
             <a:pPr>
-              <a:defRPr sz="1450" b="1">
+              <a:spcAft>
+                <a:spcPts val="300"/>
+              </a:spcAft>
+              <a:defRPr sz="1400" b="1">
                 <a:solidFill>
                   <a:srgbClr val="282C3F"/>
                 </a:solidFill>
@@ -9251,7 +10101,13 @@
           </a:p>
           <a:p>
             <a:pPr>
-              <a:defRPr sz="1150" b="1">
+              <a:spcBef>
+                <a:spcPts val="200"/>
+              </a:spcBef>
+              <a:spcAft>
+                <a:spcPts val="400"/>
+              </a:spcAft>
+              <a:defRPr sz="1050" b="1">
                 <a:solidFill>
                   <a:srgbClr val="FF3F6C"/>
                 </a:solidFill>
@@ -9280,7 +10136,7 @@
           <a:noFill/>
         </p:spPr>
         <p:txBody>
-          <a:bodyPr wrap="none">
+          <a:bodyPr wrap="none" lIns="0" rIns="0" tIns="0" bIns="0">
             <a:spAutoFit/>
           </a:bodyPr>
           <a:lstStyle/>
@@ -9351,8 +10207,8 @@
         </p:nvSpPr>
         <p:spPr>
           <a:xfrm>
-            <a:off x="777240" y="1783080"/>
-            <a:ext cx="5029200" cy="3520440"/>
+            <a:off x="749808" y="1755648"/>
+            <a:ext cx="5084064" cy="3575304"/>
           </a:xfrm>
           <a:prstGeom prst="rect">
             <a:avLst/>
@@ -9360,12 +10216,15 @@
           <a:noFill/>
         </p:spPr>
         <p:txBody>
-          <a:bodyPr wrap="square">
+          <a:bodyPr wrap="square" tIns="73152" bIns="73152">
             <a:spAutoFit/>
           </a:bodyPr>
           <a:lstStyle/>
           <a:p>
             <a:pPr>
+              <a:spcAft>
+                <a:spcPts val="800"/>
+              </a:spcAft>
               <a:defRPr sz="1100" b="1">
                 <a:solidFill>
                   <a:srgbClr val="FF3F6C"/>
@@ -9378,6 +10237,15 @@
           </a:p>
           <a:p>
             <a:pPr>
+              <a:lnSpc>
+                <a:spcPct val="118000"/>
+              </a:lnSpc>
+              <a:spcBef>
+                <a:spcPts val="300"/>
+              </a:spcBef>
+              <a:spcAft>
+                <a:spcPts val="600"/>
+              </a:spcAft>
               <a:defRPr sz="950"/>
             </a:pPr>
             <a:r>
@@ -9399,6 +10267,15 @@
           </a:p>
           <a:p>
             <a:pPr>
+              <a:lnSpc>
+                <a:spcPct val="118000"/>
+              </a:lnSpc>
+              <a:spcBef>
+                <a:spcPts val="300"/>
+              </a:spcBef>
+              <a:spcAft>
+                <a:spcPts val="600"/>
+              </a:spcAft>
               <a:defRPr sz="950"/>
             </a:pPr>
             <a:r>
@@ -9420,6 +10297,15 @@
           </a:p>
           <a:p>
             <a:pPr>
+              <a:lnSpc>
+                <a:spcPct val="118000"/>
+              </a:lnSpc>
+              <a:spcBef>
+                <a:spcPts val="300"/>
+              </a:spcBef>
+              <a:spcAft>
+                <a:spcPts val="600"/>
+              </a:spcAft>
               <a:defRPr sz="950"/>
             </a:pPr>
             <a:r>
@@ -9441,6 +10327,15 @@
           </a:p>
           <a:p>
             <a:pPr>
+              <a:lnSpc>
+                <a:spcPct val="118000"/>
+              </a:lnSpc>
+              <a:spcBef>
+                <a:spcPts val="300"/>
+              </a:spcBef>
+              <a:spcAft>
+                <a:spcPts val="600"/>
+              </a:spcAft>
               <a:defRPr sz="950"/>
             </a:pPr>
             <a:r>
@@ -9462,6 +10357,15 @@
           </a:p>
           <a:p>
             <a:pPr>
+              <a:lnSpc>
+                <a:spcPct val="118000"/>
+              </a:lnSpc>
+              <a:spcBef>
+                <a:spcPts val="300"/>
+              </a:spcBef>
+              <a:spcAft>
+                <a:spcPts val="600"/>
+              </a:spcAft>
               <a:defRPr sz="950"/>
             </a:pPr>
             <a:r>
@@ -9483,6 +10387,15 @@
           </a:p>
           <a:p>
             <a:pPr>
+              <a:lnSpc>
+                <a:spcPct val="118000"/>
+              </a:lnSpc>
+              <a:spcBef>
+                <a:spcPts val="300"/>
+              </a:spcBef>
+              <a:spcAft>
+                <a:spcPts val="600"/>
+              </a:spcAft>
               <a:defRPr sz="950"/>
             </a:pPr>
             <a:r>
@@ -9557,8 +10470,8 @@
         </p:nvSpPr>
         <p:spPr>
           <a:xfrm>
-            <a:off x="6355080" y="1783080"/>
-            <a:ext cx="5029200" cy="3520440"/>
+            <a:off x="6327648" y="1755648"/>
+            <a:ext cx="5084064" cy="3575304"/>
           </a:xfrm>
           <a:prstGeom prst="rect">
             <a:avLst/>
@@ -9566,12 +10479,15 @@
           <a:noFill/>
         </p:spPr>
         <p:txBody>
-          <a:bodyPr wrap="square">
+          <a:bodyPr wrap="square" tIns="73152" bIns="73152">
             <a:spAutoFit/>
           </a:bodyPr>
           <a:lstStyle/>
           <a:p>
             <a:pPr>
+              <a:spcAft>
+                <a:spcPts val="800"/>
+              </a:spcAft>
               <a:defRPr sz="1100" b="1">
                 <a:solidFill>
                   <a:srgbClr val="FF3F6C"/>
@@ -9584,6 +10500,12 @@
           </a:p>
           <a:p>
             <a:pPr>
+              <a:spcBef>
+                <a:spcPts val="400"/>
+              </a:spcBef>
+              <a:spcAft>
+                <a:spcPts val="100"/>
+              </a:spcAft>
               <a:defRPr sz="1000"/>
             </a:pPr>
             <a:r>
@@ -9592,9 +10514,22 @@
                   <a:srgbClr val="FF3F6C"/>
                 </a:solidFill>
               </a:rPr>
-              <a:t>► Base Case (100% Target Lift)
-</a:t>
-            </a:r>
+              <a:t>► Base Case (100% Target Lift)</a:t>
+            </a:r>
+          </a:p>
+          <a:p>
+            <a:pPr>
+              <a:lnSpc>
+                <a:spcPct val="115000"/>
+              </a:lnSpc>
+              <a:spcBef>
+                <a:spcPts val="0"/>
+              </a:spcBef>
+              <a:spcAft>
+                <a:spcPts val="600"/>
+              </a:spcAft>
+              <a:defRPr sz="950"/>
+            </a:pPr>
             <a:r>
               <a:rPr>
                 <a:solidFill>
@@ -9606,6 +10541,12 @@
           </a:p>
           <a:p>
             <a:pPr>
+              <a:spcBef>
+                <a:spcPts val="400"/>
+              </a:spcBef>
+              <a:spcAft>
+                <a:spcPts val="100"/>
+              </a:spcAft>
               <a:defRPr sz="1000"/>
             </a:pPr>
             <a:r>
@@ -9614,9 +10555,22 @@
                   <a:srgbClr val="FF3F6C"/>
                 </a:solidFill>
               </a:rPr>
-              <a:t>► Conservative Case (75% Lift)
-</a:t>
-            </a:r>
+              <a:t>► Conservative Case (75% Lift)</a:t>
+            </a:r>
+          </a:p>
+          <a:p>
+            <a:pPr>
+              <a:lnSpc>
+                <a:spcPct val="115000"/>
+              </a:lnSpc>
+              <a:spcBef>
+                <a:spcPts val="0"/>
+              </a:spcBef>
+              <a:spcAft>
+                <a:spcPts val="600"/>
+              </a:spcAft>
+              <a:defRPr sz="950"/>
+            </a:pPr>
             <a:r>
               <a:rPr>
                 <a:solidFill>
@@ -9628,6 +10582,12 @@
           </a:p>
           <a:p>
             <a:pPr>
+              <a:spcBef>
+                <a:spcPts val="400"/>
+              </a:spcBef>
+              <a:spcAft>
+                <a:spcPts val="100"/>
+              </a:spcAft>
               <a:defRPr sz="1000"/>
             </a:pPr>
             <a:r>
@@ -9636,9 +10596,22 @@
                   <a:srgbClr val="FF3F6C"/>
                 </a:solidFill>
               </a:rPr>
-              <a:t>► Stress-Test Case (50% Lift)
-</a:t>
-            </a:r>
+              <a:t>► Stress-Test Case (50% Lift)</a:t>
+            </a:r>
+          </a:p>
+          <a:p>
+            <a:pPr>
+              <a:lnSpc>
+                <a:spcPct val="115000"/>
+              </a:lnSpc>
+              <a:spcBef>
+                <a:spcPts val="0"/>
+              </a:spcBef>
+              <a:spcAft>
+                <a:spcPts val="600"/>
+              </a:spcAft>
+              <a:defRPr sz="950"/>
+            </a:pPr>
             <a:r>
               <a:rPr>
                 <a:solidFill>
@@ -9703,8 +10676,8 @@
         </p:nvSpPr>
         <p:spPr>
           <a:xfrm>
-            <a:off x="777240" y="5605272"/>
-            <a:ext cx="10637215" cy="493776"/>
+            <a:off x="777240" y="5586984"/>
+            <a:ext cx="10637215" cy="530352"/>
           </a:xfrm>
           <a:prstGeom prst="rect">
             <a:avLst/>
@@ -9712,13 +10685,16 @@
           <a:noFill/>
         </p:spPr>
         <p:txBody>
-          <a:bodyPr wrap="square">
+          <a:bodyPr wrap="square" tIns="36576" bIns="36576">
             <a:spAutoFit/>
           </a:bodyPr>
           <a:lstStyle/>
           <a:p>
             <a:pPr>
-              <a:defRPr sz="1000" b="1">
+              <a:spcAft>
+                <a:spcPts val="200"/>
+              </a:spcAft>
+              <a:defRPr sz="950" b="1">
                 <a:solidFill>
                   <a:srgbClr val="4338CA"/>
                 </a:solidFill>
@@ -9730,7 +10706,13 @@
           </a:p>
           <a:p>
             <a:pPr>
-              <a:defRPr sz="1000" b="1">
+              <a:lnSpc>
+                <a:spcPct val="115000"/>
+              </a:lnSpc>
+              <a:spcBef>
+                <a:spcPts val="0"/>
+              </a:spcBef>
+              <a:defRPr sz="950" b="1">
                 <a:solidFill>
                   <a:srgbClr val="282C3F"/>
                 </a:solidFill>
@@ -9780,10 +10762,16 @@
           </a:fontRef>
         </p:style>
         <p:txBody>
-          <a:bodyPr rtlCol="0" anchor="ctr"/>
+          <a:bodyPr rtlCol="0" anchor="ctr" lIns="18288" rIns="18288" tIns="18288" bIns="18288"/>
           <a:lstStyle/>
           <a:p>
             <a:pPr algn="ctr">
+              <a:spcBef>
+                <a:spcPts val="0"/>
+              </a:spcBef>
+              <a:spcAft>
+                <a:spcPts val="0"/>
+              </a:spcAft>
               <a:defRPr sz="900" b="1">
                 <a:solidFill>
                   <a:srgbClr val="535766"/>
@@ -9834,10 +10822,16 @@
           </a:fontRef>
         </p:style>
         <p:txBody>
-          <a:bodyPr rtlCol="0" anchor="ctr"/>
+          <a:bodyPr rtlCol="0" anchor="ctr" lIns="18288" rIns="18288" tIns="18288" bIns="18288"/>
           <a:lstStyle/>
           <a:p>
             <a:pPr algn="ctr">
+              <a:spcBef>
+                <a:spcPts val="0"/>
+              </a:spcBef>
+              <a:spcAft>
+                <a:spcPts val="0"/>
+              </a:spcAft>
               <a:defRPr sz="900" b="1">
                 <a:solidFill>
                   <a:srgbClr val="535766"/>
@@ -9888,10 +10882,16 @@
           </a:fontRef>
         </p:style>
         <p:txBody>
-          <a:bodyPr rtlCol="0" anchor="ctr"/>
+          <a:bodyPr rtlCol="0" anchor="ctr" lIns="18288" rIns="18288" tIns="18288" bIns="18288"/>
           <a:lstStyle/>
           <a:p>
             <a:pPr algn="ctr">
+              <a:spcBef>
+                <a:spcPts val="0"/>
+              </a:spcBef>
+              <a:spcAft>
+                <a:spcPts val="0"/>
+              </a:spcAft>
               <a:defRPr sz="900" b="1">
                 <a:solidFill>
                   <a:srgbClr val="535766"/>
@@ -9942,10 +10942,16 @@
           </a:fontRef>
         </p:style>
         <p:txBody>
-          <a:bodyPr rtlCol="0" anchor="ctr"/>
+          <a:bodyPr rtlCol="0" anchor="ctr" lIns="18288" rIns="18288" tIns="18288" bIns="18288"/>
           <a:lstStyle/>
           <a:p>
             <a:pPr algn="ctr">
+              <a:spcBef>
+                <a:spcPts val="0"/>
+              </a:spcBef>
+              <a:spcAft>
+                <a:spcPts val="0"/>
+              </a:spcAft>
               <a:defRPr sz="900" b="1">
                 <a:solidFill>
                   <a:srgbClr val="535766"/>
@@ -9996,10 +11002,16 @@
           </a:fontRef>
         </p:style>
         <p:txBody>
-          <a:bodyPr rtlCol="0" anchor="ctr"/>
+          <a:bodyPr rtlCol="0" anchor="ctr" lIns="18288" rIns="18288" tIns="18288" bIns="18288"/>
           <a:lstStyle/>
           <a:p>
             <a:pPr algn="ctr">
+              <a:spcBef>
+                <a:spcPts val="0"/>
+              </a:spcBef>
+              <a:spcAft>
+                <a:spcPts val="0"/>
+              </a:spcAft>
               <a:defRPr sz="900" b="1">
                 <a:solidFill>
                   <a:srgbClr val="FFFFFF"/>
@@ -10050,10 +11062,16 @@
           </a:fontRef>
         </p:style>
         <p:txBody>
-          <a:bodyPr rtlCol="0" anchor="ctr"/>
+          <a:bodyPr rtlCol="0" anchor="ctr" lIns="18288" rIns="18288" tIns="18288" bIns="18288"/>
           <a:lstStyle/>
           <a:p>
             <a:pPr algn="ctr">
+              <a:spcBef>
+                <a:spcPts val="0"/>
+              </a:spcBef>
+              <a:spcAft>
+                <a:spcPts val="0"/>
+              </a:spcAft>
               <a:defRPr sz="900" b="1">
                 <a:solidFill>
                   <a:srgbClr val="535766"/>
@@ -10104,10 +11122,16 @@
           </a:fontRef>
         </p:style>
         <p:txBody>
-          <a:bodyPr rtlCol="0" anchor="ctr"/>
+          <a:bodyPr rtlCol="0" anchor="ctr" lIns="18288" rIns="18288" tIns="18288" bIns="18288"/>
           <a:lstStyle/>
           <a:p>
             <a:pPr algn="ctr">
+              <a:spcBef>
+                <a:spcPts val="0"/>
+              </a:spcBef>
+              <a:spcAft>
+                <a:spcPts val="0"/>
+              </a:spcAft>
               <a:defRPr sz="900" b="1">
                 <a:solidFill>
                   <a:srgbClr val="535766"/>
@@ -10158,10 +11182,16 @@
           </a:fontRef>
         </p:style>
         <p:txBody>
-          <a:bodyPr rtlCol="0" anchor="ctr"/>
+          <a:bodyPr rtlCol="0" anchor="ctr" lIns="18288" rIns="18288" tIns="18288" bIns="18288"/>
           <a:lstStyle/>
           <a:p>
             <a:pPr algn="ctr">
+              <a:spcBef>
+                <a:spcPts val="0"/>
+              </a:spcBef>
+              <a:spcAft>
+                <a:spcPts val="0"/>
+              </a:spcAft>
               <a:defRPr sz="900" b="1">
                 <a:solidFill>
                   <a:srgbClr val="535766"/>
@@ -10212,10 +11242,16 @@
           </a:fontRef>
         </p:style>
         <p:txBody>
-          <a:bodyPr rtlCol="0" anchor="ctr"/>
+          <a:bodyPr rtlCol="0" anchor="ctr" lIns="18288" rIns="18288" tIns="18288" bIns="18288"/>
           <a:lstStyle/>
           <a:p>
             <a:pPr algn="ctr">
+              <a:spcBef>
+                <a:spcPts val="0"/>
+              </a:spcBef>
+              <a:spcAft>
+                <a:spcPts val="0"/>
+              </a:spcAft>
               <a:defRPr sz="900" b="1">
                 <a:solidFill>
                   <a:srgbClr val="535766"/>
@@ -10266,10 +11302,16 @@
           </a:fontRef>
         </p:style>
         <p:txBody>
-          <a:bodyPr rtlCol="0" anchor="ctr"/>
+          <a:bodyPr rtlCol="0" anchor="ctr" lIns="18288" rIns="18288" tIns="18288" bIns="18288"/>
           <a:lstStyle/>
           <a:p>
             <a:pPr algn="ctr">
+              <a:spcBef>
+                <a:spcPts val="0"/>
+              </a:spcBef>
+              <a:spcAft>
+                <a:spcPts val="0"/>
+              </a:spcAft>
               <a:defRPr sz="900" b="1">
                 <a:solidFill>
                   <a:srgbClr val="535766"/>
@@ -10336,10 +11378,16 @@
           </a:fontRef>
         </p:style>
         <p:txBody>
-          <a:bodyPr rtlCol="0" anchor="ctr" wrap="square"/>
+          <a:bodyPr rtlCol="0" anchor="ctr" wrap="square" tIns="18288" bIns="18288"/>
           <a:lstStyle/>
           <a:p>
             <a:pPr algn="ctr">
+              <a:spcBef>
+                <a:spcPts val="0"/>
+              </a:spcBef>
+              <a:spcAft>
+                <a:spcPts val="0"/>
+              </a:spcAft>
               <a:defRPr sz="1000" b="1">
                 <a:solidFill>
                   <a:srgbClr val="FFFFFF"/>
@@ -10369,13 +11417,16 @@
           <a:noFill/>
         </p:spPr>
         <p:txBody>
-          <a:bodyPr wrap="square">
+          <a:bodyPr wrap="square" lIns="0" rIns="0" tIns="0" bIns="0">
             <a:spAutoFit/>
           </a:bodyPr>
           <a:lstStyle/>
           <a:p>
             <a:pPr>
-              <a:defRPr sz="1450" b="1">
+              <a:spcAft>
+                <a:spcPts val="300"/>
+              </a:spcAft>
+              <a:defRPr sz="1400" b="1">
                 <a:solidFill>
                   <a:srgbClr val="282C3F"/>
                 </a:solidFill>
@@ -10387,7 +11438,13 @@
           </a:p>
           <a:p>
             <a:pPr>
-              <a:defRPr sz="1150" b="1">
+              <a:spcBef>
+                <a:spcPts val="200"/>
+              </a:spcBef>
+              <a:spcAft>
+                <a:spcPts val="400"/>
+              </a:spcAft>
+              <a:defRPr sz="1050" b="1">
                 <a:solidFill>
                   <a:srgbClr val="FF3F6C"/>
                 </a:solidFill>
@@ -10416,7 +11473,7 @@
           <a:noFill/>
         </p:spPr>
         <p:txBody>
-          <a:bodyPr wrap="none">
+          <a:bodyPr wrap="none" lIns="0" rIns="0" tIns="0" bIns="0">
             <a:spAutoFit/>
           </a:bodyPr>
           <a:lstStyle/>
@@ -10487,8 +11544,8 @@
         </p:nvSpPr>
         <p:spPr>
           <a:xfrm>
-            <a:off x="777240" y="1783080"/>
-            <a:ext cx="3840480" cy="3520440"/>
+            <a:off x="749808" y="1755648"/>
+            <a:ext cx="3895344" cy="3575304"/>
           </a:xfrm>
           <a:prstGeom prst="rect">
             <a:avLst/>
@@ -10496,12 +11553,15 @@
           <a:noFill/>
         </p:spPr>
         <p:txBody>
-          <a:bodyPr wrap="square">
+          <a:bodyPr wrap="square" tIns="73152" bIns="73152">
             <a:spAutoFit/>
           </a:bodyPr>
           <a:lstStyle/>
           <a:p>
             <a:pPr>
+              <a:spcAft>
+                <a:spcPts val="800"/>
+              </a:spcAft>
               <a:defRPr sz="1100" b="1">
                 <a:solidFill>
                   <a:srgbClr val="FF3F6C"/>
@@ -10514,7 +11574,16 @@
           </a:p>
           <a:p>
             <a:pPr>
-              <a:defRPr sz="1000"/>
+              <a:lnSpc>
+                <a:spcPct val="118000"/>
+              </a:lnSpc>
+              <a:spcBef>
+                <a:spcPts val="200"/>
+              </a:spcBef>
+              <a:spcAft>
+                <a:spcPts val="500"/>
+              </a:spcAft>
+              <a:defRPr sz="950"/>
             </a:pPr>
             <a:r>
               <a:rPr b="1">
@@ -10543,7 +11612,16 @@
           </a:p>
           <a:p>
             <a:pPr>
-              <a:defRPr sz="1000"/>
+              <a:lnSpc>
+                <a:spcPct val="118000"/>
+              </a:lnSpc>
+              <a:spcBef>
+                <a:spcPts val="200"/>
+              </a:spcBef>
+              <a:spcAft>
+                <a:spcPts val="500"/>
+              </a:spcAft>
+              <a:defRPr sz="950"/>
             </a:pPr>
             <a:r>
               <a:rPr b="1">
@@ -10572,7 +11650,16 @@
           </a:p>
           <a:p>
             <a:pPr>
-              <a:defRPr sz="1000"/>
+              <a:lnSpc>
+                <a:spcPct val="118000"/>
+              </a:lnSpc>
+              <a:spcBef>
+                <a:spcPts val="200"/>
+              </a:spcBef>
+              <a:spcAft>
+                <a:spcPts val="500"/>
+              </a:spcAft>
+              <a:defRPr sz="950"/>
             </a:pPr>
             <a:r>
               <a:rPr b="1">
@@ -10601,7 +11688,16 @@
           </a:p>
           <a:p>
             <a:pPr>
-              <a:defRPr sz="1000"/>
+              <a:lnSpc>
+                <a:spcPct val="118000"/>
+              </a:lnSpc>
+              <a:spcBef>
+                <a:spcPts val="200"/>
+              </a:spcBef>
+              <a:spcAft>
+                <a:spcPts val="500"/>
+              </a:spcAft>
+              <a:defRPr sz="950"/>
             </a:pPr>
             <a:r>
               <a:rPr b="1">
@@ -10683,8 +11779,8 @@
         </p:nvSpPr>
         <p:spPr>
           <a:xfrm>
-            <a:off x="5029200" y="1783080"/>
-            <a:ext cx="3840480" cy="3520440"/>
+            <a:off x="5001768" y="1755648"/>
+            <a:ext cx="3895344" cy="3575304"/>
           </a:xfrm>
           <a:prstGeom prst="rect">
             <a:avLst/>
@@ -10692,12 +11788,15 @@
           <a:noFill/>
         </p:spPr>
         <p:txBody>
-          <a:bodyPr wrap="square">
+          <a:bodyPr wrap="square" tIns="73152" bIns="73152">
             <a:spAutoFit/>
           </a:bodyPr>
           <a:lstStyle/>
           <a:p>
             <a:pPr>
+              <a:spcAft>
+                <a:spcPts val="800"/>
+              </a:spcAft>
               <a:defRPr sz="1100" b="1">
                 <a:solidFill>
                   <a:srgbClr val="FF3F6C"/>
@@ -10710,7 +11809,16 @@
           </a:p>
           <a:p>
             <a:pPr>
-              <a:defRPr sz="1000"/>
+              <a:lnSpc>
+                <a:spcPct val="118000"/>
+              </a:lnSpc>
+              <a:spcBef>
+                <a:spcPts val="200"/>
+              </a:spcBef>
+              <a:spcAft>
+                <a:spcPts val="500"/>
+              </a:spcAft>
+              <a:defRPr sz="950"/>
             </a:pPr>
             <a:r>
               <a:rPr b="1">
@@ -10739,7 +11847,16 @@
           </a:p>
           <a:p>
             <a:pPr>
-              <a:defRPr sz="1000"/>
+              <a:lnSpc>
+                <a:spcPct val="118000"/>
+              </a:lnSpc>
+              <a:spcBef>
+                <a:spcPts val="200"/>
+              </a:spcBef>
+              <a:spcAft>
+                <a:spcPts val="500"/>
+              </a:spcAft>
+              <a:defRPr sz="950"/>
             </a:pPr>
             <a:r>
               <a:rPr b="1">
@@ -10768,7 +11885,16 @@
           </a:p>
           <a:p>
             <a:pPr>
-              <a:defRPr sz="1000"/>
+              <a:lnSpc>
+                <a:spcPct val="118000"/>
+              </a:lnSpc>
+              <a:spcBef>
+                <a:spcPts val="200"/>
+              </a:spcBef>
+              <a:spcAft>
+                <a:spcPts val="500"/>
+              </a:spcAft>
+              <a:defRPr sz="950"/>
             </a:pPr>
             <a:r>
               <a:rPr b="1">
@@ -10919,8 +12045,8 @@
         </p:nvSpPr>
         <p:spPr>
           <a:xfrm>
-            <a:off x="777240" y="5605272"/>
-            <a:ext cx="10637215" cy="493776"/>
+            <a:off x="777240" y="5586984"/>
+            <a:ext cx="10637215" cy="530352"/>
           </a:xfrm>
           <a:prstGeom prst="rect">
             <a:avLst/>
@@ -10928,13 +12054,16 @@
           <a:noFill/>
         </p:spPr>
         <p:txBody>
-          <a:bodyPr wrap="square">
+          <a:bodyPr wrap="square" tIns="36576" bIns="36576">
             <a:spAutoFit/>
           </a:bodyPr>
           <a:lstStyle/>
           <a:p>
             <a:pPr>
-              <a:defRPr sz="1000" b="1">
+              <a:spcAft>
+                <a:spcPts val="200"/>
+              </a:spcAft>
+              <a:defRPr sz="950" b="1">
                 <a:solidFill>
                   <a:srgbClr val="4338CA"/>
                 </a:solidFill>
@@ -10946,7 +12075,13 @@
           </a:p>
           <a:p>
             <a:pPr>
-              <a:defRPr sz="1000" b="1">
+              <a:lnSpc>
+                <a:spcPct val="115000"/>
+              </a:lnSpc>
+              <a:spcBef>
+                <a:spcPts val="0"/>
+              </a:spcBef>
+              <a:defRPr sz="950" b="1">
                 <a:solidFill>
                   <a:srgbClr val="282C3F"/>
                 </a:solidFill>
@@ -10996,10 +12131,16 @@
           </a:fontRef>
         </p:style>
         <p:txBody>
-          <a:bodyPr rtlCol="0" anchor="ctr"/>
+          <a:bodyPr rtlCol="0" anchor="ctr" lIns="18288" rIns="18288" tIns="18288" bIns="18288"/>
           <a:lstStyle/>
           <a:p>
             <a:pPr algn="ctr">
+              <a:spcBef>
+                <a:spcPts val="0"/>
+              </a:spcBef>
+              <a:spcAft>
+                <a:spcPts val="0"/>
+              </a:spcAft>
               <a:defRPr sz="900" b="1">
                 <a:solidFill>
                   <a:srgbClr val="535766"/>
@@ -11050,10 +12191,16 @@
           </a:fontRef>
         </p:style>
         <p:txBody>
-          <a:bodyPr rtlCol="0" anchor="ctr"/>
+          <a:bodyPr rtlCol="0" anchor="ctr" lIns="18288" rIns="18288" tIns="18288" bIns="18288"/>
           <a:lstStyle/>
           <a:p>
             <a:pPr algn="ctr">
+              <a:spcBef>
+                <a:spcPts val="0"/>
+              </a:spcBef>
+              <a:spcAft>
+                <a:spcPts val="0"/>
+              </a:spcAft>
               <a:defRPr sz="900" b="1">
                 <a:solidFill>
                   <a:srgbClr val="535766"/>
@@ -11104,10 +12251,16 @@
           </a:fontRef>
         </p:style>
         <p:txBody>
-          <a:bodyPr rtlCol="0" anchor="ctr"/>
+          <a:bodyPr rtlCol="0" anchor="ctr" lIns="18288" rIns="18288" tIns="18288" bIns="18288"/>
           <a:lstStyle/>
           <a:p>
             <a:pPr algn="ctr">
+              <a:spcBef>
+                <a:spcPts val="0"/>
+              </a:spcBef>
+              <a:spcAft>
+                <a:spcPts val="0"/>
+              </a:spcAft>
               <a:defRPr sz="900" b="1">
                 <a:solidFill>
                   <a:srgbClr val="535766"/>
@@ -11158,10 +12311,16 @@
           </a:fontRef>
         </p:style>
         <p:txBody>
-          <a:bodyPr rtlCol="0" anchor="ctr"/>
+          <a:bodyPr rtlCol="0" anchor="ctr" lIns="18288" rIns="18288" tIns="18288" bIns="18288"/>
           <a:lstStyle/>
           <a:p>
             <a:pPr algn="ctr">
+              <a:spcBef>
+                <a:spcPts val="0"/>
+              </a:spcBef>
+              <a:spcAft>
+                <a:spcPts val="0"/>
+              </a:spcAft>
               <a:defRPr sz="900" b="1">
                 <a:solidFill>
                   <a:srgbClr val="535766"/>
@@ -11212,10 +12371,16 @@
           </a:fontRef>
         </p:style>
         <p:txBody>
-          <a:bodyPr rtlCol="0" anchor="ctr"/>
+          <a:bodyPr rtlCol="0" anchor="ctr" lIns="18288" rIns="18288" tIns="18288" bIns="18288"/>
           <a:lstStyle/>
           <a:p>
             <a:pPr algn="ctr">
+              <a:spcBef>
+                <a:spcPts val="0"/>
+              </a:spcBef>
+              <a:spcAft>
+                <a:spcPts val="0"/>
+              </a:spcAft>
               <a:defRPr sz="900" b="1">
                 <a:solidFill>
                   <a:srgbClr val="535766"/>
@@ -11266,10 +12431,16 @@
           </a:fontRef>
         </p:style>
         <p:txBody>
-          <a:bodyPr rtlCol="0" anchor="ctr"/>
+          <a:bodyPr rtlCol="0" anchor="ctr" lIns="18288" rIns="18288" tIns="18288" bIns="18288"/>
           <a:lstStyle/>
           <a:p>
             <a:pPr algn="ctr">
+              <a:spcBef>
+                <a:spcPts val="0"/>
+              </a:spcBef>
+              <a:spcAft>
+                <a:spcPts val="0"/>
+              </a:spcAft>
               <a:defRPr sz="900" b="1">
                 <a:solidFill>
                   <a:srgbClr val="FFFFFF"/>
@@ -11320,10 +12491,16 @@
           </a:fontRef>
         </p:style>
         <p:txBody>
-          <a:bodyPr rtlCol="0" anchor="ctr"/>
+          <a:bodyPr rtlCol="0" anchor="ctr" lIns="18288" rIns="18288" tIns="18288" bIns="18288"/>
           <a:lstStyle/>
           <a:p>
             <a:pPr algn="ctr">
+              <a:spcBef>
+                <a:spcPts val="0"/>
+              </a:spcBef>
+              <a:spcAft>
+                <a:spcPts val="0"/>
+              </a:spcAft>
               <a:defRPr sz="900" b="1">
                 <a:solidFill>
                   <a:srgbClr val="535766"/>
@@ -11374,10 +12551,16 @@
           </a:fontRef>
         </p:style>
         <p:txBody>
-          <a:bodyPr rtlCol="0" anchor="ctr"/>
+          <a:bodyPr rtlCol="0" anchor="ctr" lIns="18288" rIns="18288" tIns="18288" bIns="18288"/>
           <a:lstStyle/>
           <a:p>
             <a:pPr algn="ctr">
+              <a:spcBef>
+                <a:spcPts val="0"/>
+              </a:spcBef>
+              <a:spcAft>
+                <a:spcPts val="0"/>
+              </a:spcAft>
               <a:defRPr sz="900" b="1">
                 <a:solidFill>
                   <a:srgbClr val="535766"/>
@@ -11428,10 +12611,16 @@
           </a:fontRef>
         </p:style>
         <p:txBody>
-          <a:bodyPr rtlCol="0" anchor="ctr"/>
+          <a:bodyPr rtlCol="0" anchor="ctr" lIns="18288" rIns="18288" tIns="18288" bIns="18288"/>
           <a:lstStyle/>
           <a:p>
             <a:pPr algn="ctr">
+              <a:spcBef>
+                <a:spcPts val="0"/>
+              </a:spcBef>
+              <a:spcAft>
+                <a:spcPts val="0"/>
+              </a:spcAft>
               <a:defRPr sz="900" b="1">
                 <a:solidFill>
                   <a:srgbClr val="535766"/>
@@ -11482,10 +12671,16 @@
           </a:fontRef>
         </p:style>
         <p:txBody>
-          <a:bodyPr rtlCol="0" anchor="ctr"/>
+          <a:bodyPr rtlCol="0" anchor="ctr" lIns="18288" rIns="18288" tIns="18288" bIns="18288"/>
           <a:lstStyle/>
           <a:p>
             <a:pPr algn="ctr">
+              <a:spcBef>
+                <a:spcPts val="0"/>
+              </a:spcBef>
+              <a:spcAft>
+                <a:spcPts val="0"/>
+              </a:spcAft>
               <a:defRPr sz="900" b="1">
                 <a:solidFill>
                   <a:srgbClr val="535766"/>
@@ -11552,10 +12747,16 @@
           </a:fontRef>
         </p:style>
         <p:txBody>
-          <a:bodyPr rtlCol="0" anchor="ctr" wrap="square"/>
+          <a:bodyPr rtlCol="0" anchor="ctr" wrap="square" tIns="18288" bIns="18288"/>
           <a:lstStyle/>
           <a:p>
             <a:pPr algn="ctr">
+              <a:spcBef>
+                <a:spcPts val="0"/>
+              </a:spcBef>
+              <a:spcAft>
+                <a:spcPts val="0"/>
+              </a:spcAft>
               <a:defRPr sz="1000" b="1">
                 <a:solidFill>
                   <a:srgbClr val="FFFFFF"/>
@@ -11585,13 +12786,16 @@
           <a:noFill/>
         </p:spPr>
         <p:txBody>
-          <a:bodyPr wrap="square">
+          <a:bodyPr wrap="square" lIns="0" rIns="0" tIns="0" bIns="0">
             <a:spAutoFit/>
           </a:bodyPr>
           <a:lstStyle/>
           <a:p>
             <a:pPr>
-              <a:defRPr sz="1450" b="1">
+              <a:spcAft>
+                <a:spcPts val="300"/>
+              </a:spcAft>
+              <a:defRPr sz="1400" b="1">
                 <a:solidFill>
                   <a:srgbClr val="282C3F"/>
                 </a:solidFill>
@@ -11603,7 +12807,13 @@
           </a:p>
           <a:p>
             <a:pPr>
-              <a:defRPr sz="1150" b="1">
+              <a:spcBef>
+                <a:spcPts val="200"/>
+              </a:spcBef>
+              <a:spcAft>
+                <a:spcPts val="400"/>
+              </a:spcAft>
+              <a:defRPr sz="1050" b="1">
                 <a:solidFill>
                   <a:srgbClr val="FF3F6C"/>
                 </a:solidFill>
@@ -11632,7 +12842,7 @@
           <a:noFill/>
         </p:spPr>
         <p:txBody>
-          <a:bodyPr wrap="none">
+          <a:bodyPr wrap="none" lIns="0" rIns="0" tIns="0" bIns="0">
             <a:spAutoFit/>
           </a:bodyPr>
           <a:lstStyle/>
@@ -11712,12 +12922,15 @@
           <a:noFill/>
         </p:spPr>
         <p:txBody>
-          <a:bodyPr wrap="square">
+          <a:bodyPr wrap="square" lIns="45720" rIns="45720" tIns="36576" bIns="36576">
             <a:spAutoFit/>
           </a:bodyPr>
           <a:lstStyle/>
           <a:p>
             <a:pPr>
+              <a:spcAft>
+                <a:spcPts val="400"/>
+              </a:spcAft>
               <a:defRPr sz="950" b="1">
                 <a:solidFill>
                   <a:srgbClr val="FF3F6C"/>
@@ -11771,12 +12984,15 @@
           <a:noFill/>
         </p:spPr>
         <p:txBody>
-          <a:bodyPr wrap="square">
+          <a:bodyPr wrap="square" lIns="45720" rIns="45720" tIns="18288" bIns="18288">
             <a:spAutoFit/>
           </a:bodyPr>
           <a:lstStyle/>
           <a:p>
             <a:pPr>
+              <a:spcBef>
+                <a:spcPts val="200"/>
+              </a:spcBef>
               <a:defRPr sz="850" b="1">
                 <a:solidFill>
                   <a:srgbClr val="FF3F6C"/>
@@ -11851,12 +13067,15 @@
           <a:noFill/>
         </p:spPr>
         <p:txBody>
-          <a:bodyPr wrap="square">
+          <a:bodyPr wrap="square" lIns="45720" rIns="45720" tIns="36576" bIns="36576">
             <a:spAutoFit/>
           </a:bodyPr>
           <a:lstStyle/>
           <a:p>
             <a:pPr>
+              <a:spcAft>
+                <a:spcPts val="400"/>
+              </a:spcAft>
               <a:defRPr sz="950" b="1">
                 <a:solidFill>
                   <a:srgbClr val="FF3F6C"/>
@@ -11910,12 +13129,15 @@
           <a:noFill/>
         </p:spPr>
         <p:txBody>
-          <a:bodyPr wrap="square">
+          <a:bodyPr wrap="square" lIns="45720" rIns="45720" tIns="18288" bIns="18288">
             <a:spAutoFit/>
           </a:bodyPr>
           <a:lstStyle/>
           <a:p>
             <a:pPr>
+              <a:spcBef>
+                <a:spcPts val="200"/>
+              </a:spcBef>
               <a:defRPr sz="850" b="1">
                 <a:solidFill>
                   <a:srgbClr val="FF3F6C"/>
@@ -11990,12 +13212,15 @@
           <a:noFill/>
         </p:spPr>
         <p:txBody>
-          <a:bodyPr wrap="square">
+          <a:bodyPr wrap="square" lIns="45720" rIns="45720" tIns="36576" bIns="36576">
             <a:spAutoFit/>
           </a:bodyPr>
           <a:lstStyle/>
           <a:p>
             <a:pPr>
+              <a:spcAft>
+                <a:spcPts val="400"/>
+              </a:spcAft>
               <a:defRPr sz="950" b="1">
                 <a:solidFill>
                   <a:srgbClr val="FF3F6C"/>
@@ -12049,12 +13274,15 @@
           <a:noFill/>
         </p:spPr>
         <p:txBody>
-          <a:bodyPr wrap="square">
+          <a:bodyPr wrap="square" lIns="45720" rIns="45720" tIns="18288" bIns="18288">
             <a:spAutoFit/>
           </a:bodyPr>
           <a:lstStyle/>
           <a:p>
             <a:pPr>
+              <a:spcBef>
+                <a:spcPts val="200"/>
+              </a:spcBef>
               <a:defRPr sz="850" b="1">
                 <a:solidFill>
                   <a:srgbClr val="FF3F6C"/>
@@ -12120,8 +13348,8 @@
         </p:nvSpPr>
         <p:spPr>
           <a:xfrm>
-            <a:off x="777240" y="5605272"/>
-            <a:ext cx="10637215" cy="493776"/>
+            <a:off x="777240" y="5586984"/>
+            <a:ext cx="10637215" cy="530352"/>
           </a:xfrm>
           <a:prstGeom prst="rect">
             <a:avLst/>
@@ -12129,13 +13357,16 @@
           <a:noFill/>
         </p:spPr>
         <p:txBody>
-          <a:bodyPr wrap="square">
+          <a:bodyPr wrap="square" tIns="36576" bIns="36576">
             <a:spAutoFit/>
           </a:bodyPr>
           <a:lstStyle/>
           <a:p>
             <a:pPr>
-              <a:defRPr sz="1000" b="1">
+              <a:spcAft>
+                <a:spcPts val="200"/>
+              </a:spcAft>
+              <a:defRPr sz="950" b="1">
                 <a:solidFill>
                   <a:srgbClr val="4338CA"/>
                 </a:solidFill>
@@ -12147,7 +13378,13 @@
           </a:p>
           <a:p>
             <a:pPr>
-              <a:defRPr sz="1000" b="1">
+              <a:lnSpc>
+                <a:spcPct val="115000"/>
+              </a:lnSpc>
+              <a:spcBef>
+                <a:spcPts val="0"/>
+              </a:spcBef>
+              <a:defRPr sz="950" b="1">
                 <a:solidFill>
                   <a:srgbClr val="282C3F"/>
                 </a:solidFill>
@@ -12197,10 +13434,16 @@
           </a:fontRef>
         </p:style>
         <p:txBody>
-          <a:bodyPr rtlCol="0" anchor="ctr"/>
+          <a:bodyPr rtlCol="0" anchor="ctr" lIns="18288" rIns="18288" tIns="18288" bIns="18288"/>
           <a:lstStyle/>
           <a:p>
             <a:pPr algn="ctr">
+              <a:spcBef>
+                <a:spcPts val="0"/>
+              </a:spcBef>
+              <a:spcAft>
+                <a:spcPts val="0"/>
+              </a:spcAft>
               <a:defRPr sz="900" b="1">
                 <a:solidFill>
                   <a:srgbClr val="535766"/>
@@ -12251,10 +13494,16 @@
           </a:fontRef>
         </p:style>
         <p:txBody>
-          <a:bodyPr rtlCol="0" anchor="ctr"/>
+          <a:bodyPr rtlCol="0" anchor="ctr" lIns="18288" rIns="18288" tIns="18288" bIns="18288"/>
           <a:lstStyle/>
           <a:p>
             <a:pPr algn="ctr">
+              <a:spcBef>
+                <a:spcPts val="0"/>
+              </a:spcBef>
+              <a:spcAft>
+                <a:spcPts val="0"/>
+              </a:spcAft>
               <a:defRPr sz="900" b="1">
                 <a:solidFill>
                   <a:srgbClr val="535766"/>
@@ -12305,10 +13554,16 @@
           </a:fontRef>
         </p:style>
         <p:txBody>
-          <a:bodyPr rtlCol="0" anchor="ctr"/>
+          <a:bodyPr rtlCol="0" anchor="ctr" lIns="18288" rIns="18288" tIns="18288" bIns="18288"/>
           <a:lstStyle/>
           <a:p>
             <a:pPr algn="ctr">
+              <a:spcBef>
+                <a:spcPts val="0"/>
+              </a:spcBef>
+              <a:spcAft>
+                <a:spcPts val="0"/>
+              </a:spcAft>
               <a:defRPr sz="900" b="1">
                 <a:solidFill>
                   <a:srgbClr val="535766"/>
@@ -12359,10 +13614,16 @@
           </a:fontRef>
         </p:style>
         <p:txBody>
-          <a:bodyPr rtlCol="0" anchor="ctr"/>
+          <a:bodyPr rtlCol="0" anchor="ctr" lIns="18288" rIns="18288" tIns="18288" bIns="18288"/>
           <a:lstStyle/>
           <a:p>
             <a:pPr algn="ctr">
+              <a:spcBef>
+                <a:spcPts val="0"/>
+              </a:spcBef>
+              <a:spcAft>
+                <a:spcPts val="0"/>
+              </a:spcAft>
               <a:defRPr sz="900" b="1">
                 <a:solidFill>
                   <a:srgbClr val="535766"/>
@@ -12413,10 +13674,16 @@
           </a:fontRef>
         </p:style>
         <p:txBody>
-          <a:bodyPr rtlCol="0" anchor="ctr"/>
+          <a:bodyPr rtlCol="0" anchor="ctr" lIns="18288" rIns="18288" tIns="18288" bIns="18288"/>
           <a:lstStyle/>
           <a:p>
             <a:pPr algn="ctr">
+              <a:spcBef>
+                <a:spcPts val="0"/>
+              </a:spcBef>
+              <a:spcAft>
+                <a:spcPts val="0"/>
+              </a:spcAft>
               <a:defRPr sz="900" b="1">
                 <a:solidFill>
                   <a:srgbClr val="535766"/>
@@ -12467,10 +13734,16 @@
           </a:fontRef>
         </p:style>
         <p:txBody>
-          <a:bodyPr rtlCol="0" anchor="ctr"/>
+          <a:bodyPr rtlCol="0" anchor="ctr" lIns="18288" rIns="18288" tIns="18288" bIns="18288"/>
           <a:lstStyle/>
           <a:p>
             <a:pPr algn="ctr">
+              <a:spcBef>
+                <a:spcPts val="0"/>
+              </a:spcBef>
+              <a:spcAft>
+                <a:spcPts val="0"/>
+              </a:spcAft>
               <a:defRPr sz="900" b="1">
                 <a:solidFill>
                   <a:srgbClr val="535766"/>
@@ -12521,10 +13794,16 @@
           </a:fontRef>
         </p:style>
         <p:txBody>
-          <a:bodyPr rtlCol="0" anchor="ctr"/>
+          <a:bodyPr rtlCol="0" anchor="ctr" lIns="18288" rIns="18288" tIns="18288" bIns="18288"/>
           <a:lstStyle/>
           <a:p>
             <a:pPr algn="ctr">
+              <a:spcBef>
+                <a:spcPts val="0"/>
+              </a:spcBef>
+              <a:spcAft>
+                <a:spcPts val="0"/>
+              </a:spcAft>
               <a:defRPr sz="900" b="1">
                 <a:solidFill>
                   <a:srgbClr val="FFFFFF"/>
@@ -12575,10 +13854,16 @@
           </a:fontRef>
         </p:style>
         <p:txBody>
-          <a:bodyPr rtlCol="0" anchor="ctr"/>
+          <a:bodyPr rtlCol="0" anchor="ctr" lIns="18288" rIns="18288" tIns="18288" bIns="18288"/>
           <a:lstStyle/>
           <a:p>
             <a:pPr algn="ctr">
+              <a:spcBef>
+                <a:spcPts val="0"/>
+              </a:spcBef>
+              <a:spcAft>
+                <a:spcPts val="0"/>
+              </a:spcAft>
               <a:defRPr sz="900" b="1">
                 <a:solidFill>
                   <a:srgbClr val="535766"/>
@@ -12629,10 +13914,16 @@
           </a:fontRef>
         </p:style>
         <p:txBody>
-          <a:bodyPr rtlCol="0" anchor="ctr"/>
+          <a:bodyPr rtlCol="0" anchor="ctr" lIns="18288" rIns="18288" tIns="18288" bIns="18288"/>
           <a:lstStyle/>
           <a:p>
             <a:pPr algn="ctr">
+              <a:spcBef>
+                <a:spcPts val="0"/>
+              </a:spcBef>
+              <a:spcAft>
+                <a:spcPts val="0"/>
+              </a:spcAft>
               <a:defRPr sz="900" b="1">
                 <a:solidFill>
                   <a:srgbClr val="535766"/>
@@ -12683,10 +13974,16 @@
           </a:fontRef>
         </p:style>
         <p:txBody>
-          <a:bodyPr rtlCol="0" anchor="ctr"/>
+          <a:bodyPr rtlCol="0" anchor="ctr" lIns="18288" rIns="18288" tIns="18288" bIns="18288"/>
           <a:lstStyle/>
           <a:p>
             <a:pPr algn="ctr">
+              <a:spcBef>
+                <a:spcPts val="0"/>
+              </a:spcBef>
+              <a:spcAft>
+                <a:spcPts val="0"/>
+              </a:spcAft>
               <a:defRPr sz="900" b="1">
                 <a:solidFill>
                   <a:srgbClr val="535766"/>
@@ -12753,10 +14050,16 @@
           </a:fontRef>
         </p:style>
         <p:txBody>
-          <a:bodyPr rtlCol="0" anchor="ctr" wrap="square"/>
+          <a:bodyPr rtlCol="0" anchor="ctr" wrap="square" tIns="18288" bIns="18288"/>
           <a:lstStyle/>
           <a:p>
             <a:pPr algn="ctr">
+              <a:spcBef>
+                <a:spcPts val="0"/>
+              </a:spcBef>
+              <a:spcAft>
+                <a:spcPts val="0"/>
+              </a:spcAft>
               <a:defRPr sz="1000" b="1">
                 <a:solidFill>
                   <a:srgbClr val="FFFFFF"/>
@@ -12786,13 +14089,16 @@
           <a:noFill/>
         </p:spPr>
         <p:txBody>
-          <a:bodyPr wrap="square">
+          <a:bodyPr wrap="square" lIns="0" rIns="0" tIns="0" bIns="0">
             <a:spAutoFit/>
           </a:bodyPr>
           <a:lstStyle/>
           <a:p>
             <a:pPr>
-              <a:defRPr sz="1450" b="1">
+              <a:spcAft>
+                <a:spcPts val="300"/>
+              </a:spcAft>
+              <a:defRPr sz="1400" b="1">
                 <a:solidFill>
                   <a:srgbClr val="282C3F"/>
                 </a:solidFill>
@@ -12804,7 +14110,13 @@
           </a:p>
           <a:p>
             <a:pPr>
-              <a:defRPr sz="1150" b="1">
+              <a:spcBef>
+                <a:spcPts val="200"/>
+              </a:spcBef>
+              <a:spcAft>
+                <a:spcPts val="400"/>
+              </a:spcAft>
+              <a:defRPr sz="1050" b="1">
                 <a:solidFill>
                   <a:srgbClr val="FF3F6C"/>
                 </a:solidFill>
@@ -12833,7 +14145,7 @@
           <a:noFill/>
         </p:spPr>
         <p:txBody>
-          <a:bodyPr wrap="none">
+          <a:bodyPr wrap="none" lIns="0" rIns="0" tIns="0" bIns="0">
             <a:spAutoFit/>
           </a:bodyPr>
           <a:lstStyle/>
@@ -12904,8 +14216,8 @@
         </p:nvSpPr>
         <p:spPr>
           <a:xfrm>
-            <a:off x="777240" y="1783080"/>
-            <a:ext cx="3840480" cy="3520440"/>
+            <a:off x="749808" y="1755648"/>
+            <a:ext cx="3895344" cy="3575304"/>
           </a:xfrm>
           <a:prstGeom prst="rect">
             <a:avLst/>
@@ -12913,12 +14225,15 @@
           <a:noFill/>
         </p:spPr>
         <p:txBody>
-          <a:bodyPr wrap="square">
+          <a:bodyPr wrap="square" tIns="73152" bIns="73152">
             <a:spAutoFit/>
           </a:bodyPr>
           <a:lstStyle/>
           <a:p>
             <a:pPr>
+              <a:spcAft>
+                <a:spcPts val="800"/>
+              </a:spcAft>
               <a:defRPr sz="1100" b="1">
                 <a:solidFill>
                   <a:srgbClr val="FF3F6C"/>
@@ -12931,7 +14246,16 @@
           </a:p>
           <a:p>
             <a:pPr>
-              <a:defRPr sz="1000"/>
+              <a:lnSpc>
+                <a:spcPct val="118000"/>
+              </a:lnSpc>
+              <a:spcBef>
+                <a:spcPts val="200"/>
+              </a:spcBef>
+              <a:spcAft>
+                <a:spcPts val="500"/>
+              </a:spcAft>
+              <a:defRPr sz="950"/>
             </a:pPr>
             <a:r>
               <a:rPr b="1">
@@ -12960,7 +14284,16 @@
           </a:p>
           <a:p>
             <a:pPr>
-              <a:defRPr sz="1000"/>
+              <a:lnSpc>
+                <a:spcPct val="118000"/>
+              </a:lnSpc>
+              <a:spcBef>
+                <a:spcPts val="200"/>
+              </a:spcBef>
+              <a:spcAft>
+                <a:spcPts val="500"/>
+              </a:spcAft>
+              <a:defRPr sz="950"/>
             </a:pPr>
             <a:r>
               <a:rPr b="1">
@@ -12989,7 +14322,16 @@
           </a:p>
           <a:p>
             <a:pPr>
-              <a:defRPr sz="1000"/>
+              <a:lnSpc>
+                <a:spcPct val="118000"/>
+              </a:lnSpc>
+              <a:spcBef>
+                <a:spcPts val="200"/>
+              </a:spcBef>
+              <a:spcAft>
+                <a:spcPts val="500"/>
+              </a:spcAft>
+              <a:defRPr sz="950"/>
             </a:pPr>
             <a:r>
               <a:rPr b="1">
@@ -13018,7 +14360,16 @@
           </a:p>
           <a:p>
             <a:pPr>
-              <a:defRPr sz="1000"/>
+              <a:lnSpc>
+                <a:spcPct val="118000"/>
+              </a:lnSpc>
+              <a:spcBef>
+                <a:spcPts val="200"/>
+              </a:spcBef>
+              <a:spcAft>
+                <a:spcPts val="500"/>
+              </a:spcAft>
+              <a:defRPr sz="950"/>
             </a:pPr>
             <a:r>
               <a:rPr b="1">
@@ -13100,8 +14451,8 @@
         </p:nvSpPr>
         <p:spPr>
           <a:xfrm>
-            <a:off x="5029200" y="1783080"/>
-            <a:ext cx="3840480" cy="3520440"/>
+            <a:off x="5001768" y="1755648"/>
+            <a:ext cx="3895344" cy="3575304"/>
           </a:xfrm>
           <a:prstGeom prst="rect">
             <a:avLst/>
@@ -13109,12 +14460,15 @@
           <a:noFill/>
         </p:spPr>
         <p:txBody>
-          <a:bodyPr wrap="square">
+          <a:bodyPr wrap="square" tIns="73152" bIns="73152">
             <a:spAutoFit/>
           </a:bodyPr>
           <a:lstStyle/>
           <a:p>
             <a:pPr>
+              <a:spcAft>
+                <a:spcPts val="800"/>
+              </a:spcAft>
               <a:defRPr sz="1100" b="1">
                 <a:solidFill>
                   <a:srgbClr val="FF3F6C"/>
@@ -13127,7 +14481,16 @@
           </a:p>
           <a:p>
             <a:pPr>
-              <a:defRPr sz="1000"/>
+              <a:lnSpc>
+                <a:spcPct val="118000"/>
+              </a:lnSpc>
+              <a:spcBef>
+                <a:spcPts val="200"/>
+              </a:spcBef>
+              <a:spcAft>
+                <a:spcPts val="500"/>
+              </a:spcAft>
+              <a:defRPr sz="950"/>
             </a:pPr>
             <a:r>
               <a:rPr b="1">
@@ -13156,7 +14519,16 @@
           </a:p>
           <a:p>
             <a:pPr>
-              <a:defRPr sz="1000"/>
+              <a:lnSpc>
+                <a:spcPct val="118000"/>
+              </a:lnSpc>
+              <a:spcBef>
+                <a:spcPts val="200"/>
+              </a:spcBef>
+              <a:spcAft>
+                <a:spcPts val="500"/>
+              </a:spcAft>
+              <a:defRPr sz="950"/>
             </a:pPr>
             <a:r>
               <a:rPr b="1">
@@ -13185,7 +14557,16 @@
           </a:p>
           <a:p>
             <a:pPr>
-              <a:defRPr sz="1000"/>
+              <a:lnSpc>
+                <a:spcPct val="118000"/>
+              </a:lnSpc>
+              <a:spcBef>
+                <a:spcPts val="200"/>
+              </a:spcBef>
+              <a:spcAft>
+                <a:spcPts val="500"/>
+              </a:spcAft>
+              <a:defRPr sz="950"/>
             </a:pPr>
             <a:r>
               <a:rPr b="1">
@@ -13214,7 +14595,16 @@
           </a:p>
           <a:p>
             <a:pPr>
-              <a:defRPr sz="1000"/>
+              <a:lnSpc>
+                <a:spcPct val="118000"/>
+              </a:lnSpc>
+              <a:spcBef>
+                <a:spcPts val="200"/>
+              </a:spcBef>
+              <a:spcAft>
+                <a:spcPts val="500"/>
+              </a:spcAft>
+              <a:defRPr sz="950"/>
             </a:pPr>
             <a:r>
               <a:rPr b="1">
@@ -13365,8 +14755,8 @@
         </p:nvSpPr>
         <p:spPr>
           <a:xfrm>
-            <a:off x="777240" y="5605272"/>
-            <a:ext cx="10637215" cy="493776"/>
+            <a:off x="777240" y="5586984"/>
+            <a:ext cx="10637215" cy="530352"/>
           </a:xfrm>
           <a:prstGeom prst="rect">
             <a:avLst/>
@@ -13374,13 +14764,16 @@
           <a:noFill/>
         </p:spPr>
         <p:txBody>
-          <a:bodyPr wrap="square">
+          <a:bodyPr wrap="square" tIns="36576" bIns="36576">
             <a:spAutoFit/>
           </a:bodyPr>
           <a:lstStyle/>
           <a:p>
             <a:pPr>
-              <a:defRPr sz="1000" b="1">
+              <a:spcAft>
+                <a:spcPts val="200"/>
+              </a:spcAft>
+              <a:defRPr sz="950" b="1">
                 <a:solidFill>
                   <a:srgbClr val="4338CA"/>
                 </a:solidFill>
@@ -13392,7 +14785,13 @@
           </a:p>
           <a:p>
             <a:pPr>
-              <a:defRPr sz="1000" b="1">
+              <a:lnSpc>
+                <a:spcPct val="115000"/>
+              </a:lnSpc>
+              <a:spcBef>
+                <a:spcPts val="0"/>
+              </a:spcBef>
+              <a:defRPr sz="950" b="1">
                 <a:solidFill>
                   <a:srgbClr val="282C3F"/>
                 </a:solidFill>
@@ -13442,10 +14841,16 @@
           </a:fontRef>
         </p:style>
         <p:txBody>
-          <a:bodyPr rtlCol="0" anchor="ctr"/>
+          <a:bodyPr rtlCol="0" anchor="ctr" lIns="18288" rIns="18288" tIns="18288" bIns="18288"/>
           <a:lstStyle/>
           <a:p>
             <a:pPr algn="ctr">
+              <a:spcBef>
+                <a:spcPts val="0"/>
+              </a:spcBef>
+              <a:spcAft>
+                <a:spcPts val="0"/>
+              </a:spcAft>
               <a:defRPr sz="900" b="1">
                 <a:solidFill>
                   <a:srgbClr val="535766"/>
@@ -13496,10 +14901,16 @@
           </a:fontRef>
         </p:style>
         <p:txBody>
-          <a:bodyPr rtlCol="0" anchor="ctr"/>
+          <a:bodyPr rtlCol="0" anchor="ctr" lIns="18288" rIns="18288" tIns="18288" bIns="18288"/>
           <a:lstStyle/>
           <a:p>
             <a:pPr algn="ctr">
+              <a:spcBef>
+                <a:spcPts val="0"/>
+              </a:spcBef>
+              <a:spcAft>
+                <a:spcPts val="0"/>
+              </a:spcAft>
               <a:defRPr sz="900" b="1">
                 <a:solidFill>
                   <a:srgbClr val="535766"/>
@@ -13550,10 +14961,16 @@
           </a:fontRef>
         </p:style>
         <p:txBody>
-          <a:bodyPr rtlCol="0" anchor="ctr"/>
+          <a:bodyPr rtlCol="0" anchor="ctr" lIns="18288" rIns="18288" tIns="18288" bIns="18288"/>
           <a:lstStyle/>
           <a:p>
             <a:pPr algn="ctr">
+              <a:spcBef>
+                <a:spcPts val="0"/>
+              </a:spcBef>
+              <a:spcAft>
+                <a:spcPts val="0"/>
+              </a:spcAft>
               <a:defRPr sz="900" b="1">
                 <a:solidFill>
                   <a:srgbClr val="535766"/>
@@ -13604,10 +15021,16 @@
           </a:fontRef>
         </p:style>
         <p:txBody>
-          <a:bodyPr rtlCol="0" anchor="ctr"/>
+          <a:bodyPr rtlCol="0" anchor="ctr" lIns="18288" rIns="18288" tIns="18288" bIns="18288"/>
           <a:lstStyle/>
           <a:p>
             <a:pPr algn="ctr">
+              <a:spcBef>
+                <a:spcPts val="0"/>
+              </a:spcBef>
+              <a:spcAft>
+                <a:spcPts val="0"/>
+              </a:spcAft>
               <a:defRPr sz="900" b="1">
                 <a:solidFill>
                   <a:srgbClr val="535766"/>
@@ -13658,10 +15081,16 @@
           </a:fontRef>
         </p:style>
         <p:txBody>
-          <a:bodyPr rtlCol="0" anchor="ctr"/>
+          <a:bodyPr rtlCol="0" anchor="ctr" lIns="18288" rIns="18288" tIns="18288" bIns="18288"/>
           <a:lstStyle/>
           <a:p>
             <a:pPr algn="ctr">
+              <a:spcBef>
+                <a:spcPts val="0"/>
+              </a:spcBef>
+              <a:spcAft>
+                <a:spcPts val="0"/>
+              </a:spcAft>
               <a:defRPr sz="900" b="1">
                 <a:solidFill>
                   <a:srgbClr val="535766"/>
@@ -13712,10 +15141,16 @@
           </a:fontRef>
         </p:style>
         <p:txBody>
-          <a:bodyPr rtlCol="0" anchor="ctr"/>
+          <a:bodyPr rtlCol="0" anchor="ctr" lIns="18288" rIns="18288" tIns="18288" bIns="18288"/>
           <a:lstStyle/>
           <a:p>
             <a:pPr algn="ctr">
+              <a:spcBef>
+                <a:spcPts val="0"/>
+              </a:spcBef>
+              <a:spcAft>
+                <a:spcPts val="0"/>
+              </a:spcAft>
               <a:defRPr sz="900" b="1">
                 <a:solidFill>
                   <a:srgbClr val="535766"/>
@@ -13766,10 +15201,16 @@
           </a:fontRef>
         </p:style>
         <p:txBody>
-          <a:bodyPr rtlCol="0" anchor="ctr"/>
+          <a:bodyPr rtlCol="0" anchor="ctr" lIns="18288" rIns="18288" tIns="18288" bIns="18288"/>
           <a:lstStyle/>
           <a:p>
             <a:pPr algn="ctr">
+              <a:spcBef>
+                <a:spcPts val="0"/>
+              </a:spcBef>
+              <a:spcAft>
+                <a:spcPts val="0"/>
+              </a:spcAft>
               <a:defRPr sz="900" b="1">
                 <a:solidFill>
                   <a:srgbClr val="535766"/>
@@ -13820,10 +15261,16 @@
           </a:fontRef>
         </p:style>
         <p:txBody>
-          <a:bodyPr rtlCol="0" anchor="ctr"/>
+          <a:bodyPr rtlCol="0" anchor="ctr" lIns="18288" rIns="18288" tIns="18288" bIns="18288"/>
           <a:lstStyle/>
           <a:p>
             <a:pPr algn="ctr">
+              <a:spcBef>
+                <a:spcPts val="0"/>
+              </a:spcBef>
+              <a:spcAft>
+                <a:spcPts val="0"/>
+              </a:spcAft>
               <a:defRPr sz="900" b="1">
                 <a:solidFill>
                   <a:srgbClr val="FFFFFF"/>
@@ -13874,10 +15321,16 @@
           </a:fontRef>
         </p:style>
         <p:txBody>
-          <a:bodyPr rtlCol="0" anchor="ctr"/>
+          <a:bodyPr rtlCol="0" anchor="ctr" lIns="18288" rIns="18288" tIns="18288" bIns="18288"/>
           <a:lstStyle/>
           <a:p>
             <a:pPr algn="ctr">
+              <a:spcBef>
+                <a:spcPts val="0"/>
+              </a:spcBef>
+              <a:spcAft>
+                <a:spcPts val="0"/>
+              </a:spcAft>
               <a:defRPr sz="900" b="1">
                 <a:solidFill>
                   <a:srgbClr val="535766"/>
@@ -13928,10 +15381,16 @@
           </a:fontRef>
         </p:style>
         <p:txBody>
-          <a:bodyPr rtlCol="0" anchor="ctr"/>
+          <a:bodyPr rtlCol="0" anchor="ctr" lIns="18288" rIns="18288" tIns="18288" bIns="18288"/>
           <a:lstStyle/>
           <a:p>
             <a:pPr algn="ctr">
+              <a:spcBef>
+                <a:spcPts val="0"/>
+              </a:spcBef>
+              <a:spcAft>
+                <a:spcPts val="0"/>
+              </a:spcAft>
               <a:defRPr sz="900" b="1">
                 <a:solidFill>
                   <a:srgbClr val="535766"/>
@@ -13998,10 +15457,16 @@
           </a:fontRef>
         </p:style>
         <p:txBody>
-          <a:bodyPr rtlCol="0" anchor="ctr" wrap="square"/>
+          <a:bodyPr rtlCol="0" anchor="ctr" wrap="square" tIns="18288" bIns="18288"/>
           <a:lstStyle/>
           <a:p>
             <a:pPr algn="ctr">
+              <a:spcBef>
+                <a:spcPts val="0"/>
+              </a:spcBef>
+              <a:spcAft>
+                <a:spcPts val="0"/>
+              </a:spcAft>
               <a:defRPr sz="1000" b="1">
                 <a:solidFill>
                   <a:srgbClr val="FFFFFF"/>
@@ -14031,13 +15496,16 @@
           <a:noFill/>
         </p:spPr>
         <p:txBody>
-          <a:bodyPr wrap="square">
+          <a:bodyPr wrap="square" lIns="0" rIns="0" tIns="0" bIns="0">
             <a:spAutoFit/>
           </a:bodyPr>
           <a:lstStyle/>
           <a:p>
             <a:pPr>
-              <a:defRPr sz="1450" b="1">
+              <a:spcAft>
+                <a:spcPts val="300"/>
+              </a:spcAft>
+              <a:defRPr sz="1400" b="1">
                 <a:solidFill>
                   <a:srgbClr val="282C3F"/>
                 </a:solidFill>
@@ -14049,7 +15517,13 @@
           </a:p>
           <a:p>
             <a:pPr>
-              <a:defRPr sz="1150" b="1">
+              <a:spcBef>
+                <a:spcPts val="200"/>
+              </a:spcBef>
+              <a:spcAft>
+                <a:spcPts val="400"/>
+              </a:spcAft>
+              <a:defRPr sz="1050" b="1">
                 <a:solidFill>
                   <a:srgbClr val="FF3F6C"/>
                 </a:solidFill>
@@ -14078,7 +15552,7 @@
           <a:noFill/>
         </p:spPr>
         <p:txBody>
-          <a:bodyPr wrap="none">
+          <a:bodyPr wrap="none" lIns="0" rIns="0" tIns="0" bIns="0">
             <a:spAutoFit/>
           </a:bodyPr>
           <a:lstStyle/>
@@ -14149,8 +15623,8 @@
         </p:nvSpPr>
         <p:spPr>
           <a:xfrm>
-            <a:off x="777240" y="1783080"/>
-            <a:ext cx="3840480" cy="3520440"/>
+            <a:off x="749808" y="1755648"/>
+            <a:ext cx="3895344" cy="3575304"/>
           </a:xfrm>
           <a:prstGeom prst="rect">
             <a:avLst/>
@@ -14158,12 +15632,15 @@
           <a:noFill/>
         </p:spPr>
         <p:txBody>
-          <a:bodyPr wrap="square">
+          <a:bodyPr wrap="square" tIns="73152" bIns="73152">
             <a:spAutoFit/>
           </a:bodyPr>
           <a:lstStyle/>
           <a:p>
             <a:pPr>
+              <a:spcAft>
+                <a:spcPts val="800"/>
+              </a:spcAft>
               <a:defRPr sz="1100" b="1">
                 <a:solidFill>
                   <a:srgbClr val="FF3F6C"/>
@@ -14176,7 +15653,16 @@
           </a:p>
           <a:p>
             <a:pPr>
-              <a:defRPr sz="1000"/>
+              <a:lnSpc>
+                <a:spcPct val="118000"/>
+              </a:lnSpc>
+              <a:spcBef>
+                <a:spcPts val="200"/>
+              </a:spcBef>
+              <a:spcAft>
+                <a:spcPts val="500"/>
+              </a:spcAft>
+              <a:defRPr sz="950"/>
             </a:pPr>
             <a:r>
               <a:rPr b="1">
@@ -14205,7 +15691,16 @@
           </a:p>
           <a:p>
             <a:pPr>
-              <a:defRPr sz="1000"/>
+              <a:lnSpc>
+                <a:spcPct val="118000"/>
+              </a:lnSpc>
+              <a:spcBef>
+                <a:spcPts val="200"/>
+              </a:spcBef>
+              <a:spcAft>
+                <a:spcPts val="500"/>
+              </a:spcAft>
+              <a:defRPr sz="950"/>
             </a:pPr>
             <a:r>
               <a:rPr b="1">
@@ -14234,7 +15729,16 @@
           </a:p>
           <a:p>
             <a:pPr>
-              <a:defRPr sz="1000"/>
+              <a:lnSpc>
+                <a:spcPct val="118000"/>
+              </a:lnSpc>
+              <a:spcBef>
+                <a:spcPts val="200"/>
+              </a:spcBef>
+              <a:spcAft>
+                <a:spcPts val="500"/>
+              </a:spcAft>
+              <a:defRPr sz="950"/>
             </a:pPr>
             <a:r>
               <a:rPr b="1">
@@ -14263,7 +15767,16 @@
           </a:p>
           <a:p>
             <a:pPr>
-              <a:defRPr sz="1000"/>
+              <a:lnSpc>
+                <a:spcPct val="118000"/>
+              </a:lnSpc>
+              <a:spcBef>
+                <a:spcPts val="200"/>
+              </a:spcBef>
+              <a:spcAft>
+                <a:spcPts val="500"/>
+              </a:spcAft>
+              <a:defRPr sz="950"/>
             </a:pPr>
             <a:r>
               <a:rPr b="1">
@@ -14345,8 +15858,8 @@
         </p:nvSpPr>
         <p:spPr>
           <a:xfrm>
-            <a:off x="5029200" y="1783080"/>
-            <a:ext cx="3840480" cy="3520440"/>
+            <a:off x="5001768" y="1755648"/>
+            <a:ext cx="3895344" cy="3575304"/>
           </a:xfrm>
           <a:prstGeom prst="rect">
             <a:avLst/>
@@ -14354,12 +15867,15 @@
           <a:noFill/>
         </p:spPr>
         <p:txBody>
-          <a:bodyPr wrap="square">
+          <a:bodyPr wrap="square" tIns="73152" bIns="73152">
             <a:spAutoFit/>
           </a:bodyPr>
           <a:lstStyle/>
           <a:p>
             <a:pPr>
+              <a:spcAft>
+                <a:spcPts val="800"/>
+              </a:spcAft>
               <a:defRPr sz="1100" b="1">
                 <a:solidFill>
                   <a:srgbClr val="FF3F6C"/>
@@ -14372,7 +15888,16 @@
           </a:p>
           <a:p>
             <a:pPr>
-              <a:defRPr sz="1000"/>
+              <a:lnSpc>
+                <a:spcPct val="118000"/>
+              </a:lnSpc>
+              <a:spcBef>
+                <a:spcPts val="200"/>
+              </a:spcBef>
+              <a:spcAft>
+                <a:spcPts val="500"/>
+              </a:spcAft>
+              <a:defRPr sz="950"/>
             </a:pPr>
             <a:r>
               <a:rPr b="1">
@@ -14401,7 +15926,16 @@
           </a:p>
           <a:p>
             <a:pPr>
-              <a:defRPr sz="1000"/>
+              <a:lnSpc>
+                <a:spcPct val="118000"/>
+              </a:lnSpc>
+              <a:spcBef>
+                <a:spcPts val="200"/>
+              </a:spcBef>
+              <a:spcAft>
+                <a:spcPts val="500"/>
+              </a:spcAft>
+              <a:defRPr sz="950"/>
             </a:pPr>
             <a:r>
               <a:rPr b="1">
@@ -14430,7 +15964,16 @@
           </a:p>
           <a:p>
             <a:pPr>
-              <a:defRPr sz="1000"/>
+              <a:lnSpc>
+                <a:spcPct val="118000"/>
+              </a:lnSpc>
+              <a:spcBef>
+                <a:spcPts val="200"/>
+              </a:spcBef>
+              <a:spcAft>
+                <a:spcPts val="500"/>
+              </a:spcAft>
+              <a:defRPr sz="950"/>
             </a:pPr>
             <a:r>
               <a:rPr b="1">
@@ -14459,7 +16002,16 @@
           </a:p>
           <a:p>
             <a:pPr>
-              <a:defRPr sz="1000"/>
+              <a:lnSpc>
+                <a:spcPct val="118000"/>
+              </a:lnSpc>
+              <a:spcBef>
+                <a:spcPts val="200"/>
+              </a:spcBef>
+              <a:spcAft>
+                <a:spcPts val="500"/>
+              </a:spcAft>
+              <a:defRPr sz="950"/>
             </a:pPr>
             <a:r>
               <a:rPr b="1">
@@ -14610,8 +16162,8 @@
         </p:nvSpPr>
         <p:spPr>
           <a:xfrm>
-            <a:off x="777240" y="5605272"/>
-            <a:ext cx="10637215" cy="493776"/>
+            <a:off x="777240" y="5586984"/>
+            <a:ext cx="10637215" cy="530352"/>
           </a:xfrm>
           <a:prstGeom prst="rect">
             <a:avLst/>
@@ -14619,13 +16171,16 @@
           <a:noFill/>
         </p:spPr>
         <p:txBody>
-          <a:bodyPr wrap="square">
+          <a:bodyPr wrap="square" tIns="36576" bIns="36576">
             <a:spAutoFit/>
           </a:bodyPr>
           <a:lstStyle/>
           <a:p>
             <a:pPr>
-              <a:defRPr sz="1000" b="1">
+              <a:spcAft>
+                <a:spcPts val="200"/>
+              </a:spcAft>
+              <a:defRPr sz="950" b="1">
                 <a:solidFill>
                   <a:srgbClr val="4338CA"/>
                 </a:solidFill>
@@ -14637,7 +16192,13 @@
           </a:p>
           <a:p>
             <a:pPr>
-              <a:defRPr sz="1000" b="1">
+              <a:lnSpc>
+                <a:spcPct val="115000"/>
+              </a:lnSpc>
+              <a:spcBef>
+                <a:spcPts val="0"/>
+              </a:spcBef>
+              <a:defRPr sz="950" b="1">
                 <a:solidFill>
                   <a:srgbClr val="282C3F"/>
                 </a:solidFill>
@@ -14687,10 +16248,16 @@
           </a:fontRef>
         </p:style>
         <p:txBody>
-          <a:bodyPr rtlCol="0" anchor="ctr"/>
+          <a:bodyPr rtlCol="0" anchor="ctr" lIns="18288" rIns="18288" tIns="18288" bIns="18288"/>
           <a:lstStyle/>
           <a:p>
             <a:pPr algn="ctr">
+              <a:spcBef>
+                <a:spcPts val="0"/>
+              </a:spcBef>
+              <a:spcAft>
+                <a:spcPts val="0"/>
+              </a:spcAft>
               <a:defRPr sz="900" b="1">
                 <a:solidFill>
                   <a:srgbClr val="535766"/>
@@ -14741,10 +16308,16 @@
           </a:fontRef>
         </p:style>
         <p:txBody>
-          <a:bodyPr rtlCol="0" anchor="ctr"/>
+          <a:bodyPr rtlCol="0" anchor="ctr" lIns="18288" rIns="18288" tIns="18288" bIns="18288"/>
           <a:lstStyle/>
           <a:p>
             <a:pPr algn="ctr">
+              <a:spcBef>
+                <a:spcPts val="0"/>
+              </a:spcBef>
+              <a:spcAft>
+                <a:spcPts val="0"/>
+              </a:spcAft>
               <a:defRPr sz="900" b="1">
                 <a:solidFill>
                   <a:srgbClr val="535766"/>
@@ -14795,10 +16368,16 @@
           </a:fontRef>
         </p:style>
         <p:txBody>
-          <a:bodyPr rtlCol="0" anchor="ctr"/>
+          <a:bodyPr rtlCol="0" anchor="ctr" lIns="18288" rIns="18288" tIns="18288" bIns="18288"/>
           <a:lstStyle/>
           <a:p>
             <a:pPr algn="ctr">
+              <a:spcBef>
+                <a:spcPts val="0"/>
+              </a:spcBef>
+              <a:spcAft>
+                <a:spcPts val="0"/>
+              </a:spcAft>
               <a:defRPr sz="900" b="1">
                 <a:solidFill>
                   <a:srgbClr val="535766"/>
@@ -14849,10 +16428,16 @@
           </a:fontRef>
         </p:style>
         <p:txBody>
-          <a:bodyPr rtlCol="0" anchor="ctr"/>
+          <a:bodyPr rtlCol="0" anchor="ctr" lIns="18288" rIns="18288" tIns="18288" bIns="18288"/>
           <a:lstStyle/>
           <a:p>
             <a:pPr algn="ctr">
+              <a:spcBef>
+                <a:spcPts val="0"/>
+              </a:spcBef>
+              <a:spcAft>
+                <a:spcPts val="0"/>
+              </a:spcAft>
               <a:defRPr sz="900" b="1">
                 <a:solidFill>
                   <a:srgbClr val="535766"/>
@@ -14903,10 +16488,16 @@
           </a:fontRef>
         </p:style>
         <p:txBody>
-          <a:bodyPr rtlCol="0" anchor="ctr"/>
+          <a:bodyPr rtlCol="0" anchor="ctr" lIns="18288" rIns="18288" tIns="18288" bIns="18288"/>
           <a:lstStyle/>
           <a:p>
             <a:pPr algn="ctr">
+              <a:spcBef>
+                <a:spcPts val="0"/>
+              </a:spcBef>
+              <a:spcAft>
+                <a:spcPts val="0"/>
+              </a:spcAft>
               <a:defRPr sz="900" b="1">
                 <a:solidFill>
                   <a:srgbClr val="535766"/>
@@ -14957,10 +16548,16 @@
           </a:fontRef>
         </p:style>
         <p:txBody>
-          <a:bodyPr rtlCol="0" anchor="ctr"/>
+          <a:bodyPr rtlCol="0" anchor="ctr" lIns="18288" rIns="18288" tIns="18288" bIns="18288"/>
           <a:lstStyle/>
           <a:p>
             <a:pPr algn="ctr">
+              <a:spcBef>
+                <a:spcPts val="0"/>
+              </a:spcBef>
+              <a:spcAft>
+                <a:spcPts val="0"/>
+              </a:spcAft>
               <a:defRPr sz="900" b="1">
                 <a:solidFill>
                   <a:srgbClr val="535766"/>
@@ -15011,10 +16608,16 @@
           </a:fontRef>
         </p:style>
         <p:txBody>
-          <a:bodyPr rtlCol="0" anchor="ctr"/>
+          <a:bodyPr rtlCol="0" anchor="ctr" lIns="18288" rIns="18288" tIns="18288" bIns="18288"/>
           <a:lstStyle/>
           <a:p>
             <a:pPr algn="ctr">
+              <a:spcBef>
+                <a:spcPts val="0"/>
+              </a:spcBef>
+              <a:spcAft>
+                <a:spcPts val="0"/>
+              </a:spcAft>
               <a:defRPr sz="900" b="1">
                 <a:solidFill>
                   <a:srgbClr val="535766"/>
@@ -15065,10 +16668,16 @@
           </a:fontRef>
         </p:style>
         <p:txBody>
-          <a:bodyPr rtlCol="0" anchor="ctr"/>
+          <a:bodyPr rtlCol="0" anchor="ctr" lIns="18288" rIns="18288" tIns="18288" bIns="18288"/>
           <a:lstStyle/>
           <a:p>
             <a:pPr algn="ctr">
+              <a:spcBef>
+                <a:spcPts val="0"/>
+              </a:spcBef>
+              <a:spcAft>
+                <a:spcPts val="0"/>
+              </a:spcAft>
               <a:defRPr sz="900" b="1">
                 <a:solidFill>
                   <a:srgbClr val="535766"/>
@@ -15119,10 +16728,16 @@
           </a:fontRef>
         </p:style>
         <p:txBody>
-          <a:bodyPr rtlCol="0" anchor="ctr"/>
+          <a:bodyPr rtlCol="0" anchor="ctr" lIns="18288" rIns="18288" tIns="18288" bIns="18288"/>
           <a:lstStyle/>
           <a:p>
             <a:pPr algn="ctr">
+              <a:spcBef>
+                <a:spcPts val="0"/>
+              </a:spcBef>
+              <a:spcAft>
+                <a:spcPts val="0"/>
+              </a:spcAft>
               <a:defRPr sz="900" b="1">
                 <a:solidFill>
                   <a:srgbClr val="FFFFFF"/>
@@ -15173,10 +16788,16 @@
           </a:fontRef>
         </p:style>
         <p:txBody>
-          <a:bodyPr rtlCol="0" anchor="ctr"/>
+          <a:bodyPr rtlCol="0" anchor="ctr" lIns="18288" rIns="18288" tIns="18288" bIns="18288"/>
           <a:lstStyle/>
           <a:p>
             <a:pPr algn="ctr">
+              <a:spcBef>
+                <a:spcPts val="0"/>
+              </a:spcBef>
+              <a:spcAft>
+                <a:spcPts val="0"/>
+              </a:spcAft>
               <a:defRPr sz="900" b="1">
                 <a:solidFill>
                   <a:srgbClr val="535766"/>

--- a/Myntra_Wishlist_Studio_10_Slide_Deck_Updated.pptx
+++ b/Myntra_Wishlist_Studio_10_Slide_Deck_Updated.pptx
@@ -3308,7 +3308,7 @@
           <a:noFill/>
         </p:spPr>
         <p:txBody>
-          <a:bodyPr wrap="square">
+          <a:bodyPr wrap="square" lIns="73152" rIns="73152" tIns="54864" bIns="54864">
             <a:spAutoFit/>
           </a:bodyPr>
           <a:lstStyle/>
@@ -3328,7 +3328,7 @@
             </a:r>
           </a:p>
           <a:p>
-            <a:pPr>
+            <a:pPr marL="203200" indent="-152400">
               <a:lnSpc>
                 <a:spcPct val="115000"/>
               </a:lnSpc>
@@ -3366,7 +3366,7 @@
             </a:r>
           </a:p>
           <a:p>
-            <a:pPr>
+            <a:pPr marL="203200" indent="-152400">
               <a:lnSpc>
                 <a:spcPct val="115000"/>
               </a:lnSpc>
@@ -3404,7 +3404,7 @@
             </a:r>
           </a:p>
           <a:p>
-            <a:pPr>
+            <a:pPr marL="203200" indent="-152400">
               <a:lnSpc>
                 <a:spcPct val="115000"/>
               </a:lnSpc>
@@ -3442,7 +3442,7 @@
             </a:r>
           </a:p>
           <a:p>
-            <a:pPr>
+            <a:pPr marL="203200" indent="-152400">
               <a:lnSpc>
                 <a:spcPct val="115000"/>
               </a:lnSpc>
@@ -3543,7 +3543,7 @@
           <a:noFill/>
         </p:spPr>
         <p:txBody>
-          <a:bodyPr wrap="square">
+          <a:bodyPr wrap="square" lIns="73152" rIns="73152" tIns="54864" bIns="54864">
             <a:spAutoFit/>
           </a:bodyPr>
           <a:lstStyle/>
@@ -3563,7 +3563,7 @@
             </a:r>
           </a:p>
           <a:p>
-            <a:pPr>
+            <a:pPr marL="203200" indent="-152400">
               <a:lnSpc>
                 <a:spcPct val="115000"/>
               </a:lnSpc>
@@ -3601,7 +3601,7 @@
             </a:r>
           </a:p>
           <a:p>
-            <a:pPr>
+            <a:pPr marL="203200" indent="-152400">
               <a:lnSpc>
                 <a:spcPct val="115000"/>
               </a:lnSpc>
@@ -3639,7 +3639,7 @@
             </a:r>
           </a:p>
           <a:p>
-            <a:pPr>
+            <a:pPr marL="203200" indent="-152400">
               <a:lnSpc>
                 <a:spcPct val="115000"/>
               </a:lnSpc>
@@ -3677,7 +3677,7 @@
             </a:r>
           </a:p>
           <a:p>
-            <a:pPr>
+            <a:pPr marL="203200" indent="-152400">
               <a:lnSpc>
                 <a:spcPct val="115000"/>
               </a:lnSpc>
@@ -5083,7 +5083,7 @@
           <a:noFill/>
         </p:spPr>
         <p:txBody>
-          <a:bodyPr wrap="square">
+          <a:bodyPr wrap="square" lIns="54864" rIns="54864">
             <a:spAutoFit/>
           </a:bodyPr>
           <a:lstStyle/>
@@ -5103,7 +5103,7 @@
             </a:r>
           </a:p>
           <a:p>
-            <a:pPr>
+            <a:pPr marL="127000" indent="0">
               <a:lnSpc>
                 <a:spcPct val="112000"/>
               </a:lnSpc>
@@ -5130,7 +5130,7 @@
             </a:r>
           </a:p>
           <a:p>
-            <a:pPr>
+            <a:pPr marL="127000" indent="0">
               <a:lnSpc>
                 <a:spcPct val="112000"/>
               </a:lnSpc>
@@ -5220,7 +5220,7 @@
           <a:noFill/>
         </p:spPr>
         <p:txBody>
-          <a:bodyPr wrap="square">
+          <a:bodyPr wrap="square" lIns="54864" rIns="54864">
             <a:spAutoFit/>
           </a:bodyPr>
           <a:lstStyle/>
@@ -5240,7 +5240,7 @@
             </a:r>
           </a:p>
           <a:p>
-            <a:pPr>
+            <a:pPr marL="127000" indent="0">
               <a:lnSpc>
                 <a:spcPct val="112000"/>
               </a:lnSpc>
@@ -5267,7 +5267,7 @@
             </a:r>
           </a:p>
           <a:p>
-            <a:pPr>
+            <a:pPr marL="127000" indent="0">
               <a:lnSpc>
                 <a:spcPct val="112000"/>
               </a:lnSpc>
@@ -5357,7 +5357,7 @@
           <a:noFill/>
         </p:spPr>
         <p:txBody>
-          <a:bodyPr wrap="square">
+          <a:bodyPr wrap="square" lIns="54864" rIns="54864">
             <a:spAutoFit/>
           </a:bodyPr>
           <a:lstStyle/>
@@ -5377,7 +5377,7 @@
             </a:r>
           </a:p>
           <a:p>
-            <a:pPr>
+            <a:pPr marL="127000" indent="0">
               <a:lnSpc>
                 <a:spcPct val="112000"/>
               </a:lnSpc>
@@ -5404,7 +5404,7 @@
             </a:r>
           </a:p>
           <a:p>
-            <a:pPr>
+            <a:pPr marL="127000" indent="0">
               <a:lnSpc>
                 <a:spcPct val="112000"/>
               </a:lnSpc>
@@ -5494,7 +5494,7 @@
           <a:noFill/>
         </p:spPr>
         <p:txBody>
-          <a:bodyPr wrap="square">
+          <a:bodyPr wrap="square" lIns="54864" rIns="54864">
             <a:spAutoFit/>
           </a:bodyPr>
           <a:lstStyle/>
@@ -5514,7 +5514,7 @@
             </a:r>
           </a:p>
           <a:p>
-            <a:pPr>
+            <a:pPr marL="127000" indent="0">
               <a:lnSpc>
                 <a:spcPct val="112000"/>
               </a:lnSpc>
@@ -5541,7 +5541,7 @@
             </a:r>
           </a:p>
           <a:p>
-            <a:pPr>
+            <a:pPr marL="127000" indent="0">
               <a:lnSpc>
                 <a:spcPct val="112000"/>
               </a:lnSpc>
@@ -5568,7 +5568,7 @@
             </a:r>
           </a:p>
           <a:p>
-            <a:pPr>
+            <a:pPr marL="127000" indent="0">
               <a:lnSpc>
                 <a:spcPct val="112000"/>
               </a:lnSpc>
@@ -5658,7 +5658,7 @@
           <a:noFill/>
         </p:spPr>
         <p:txBody>
-          <a:bodyPr wrap="square">
+          <a:bodyPr wrap="square" lIns="54864" rIns="54864">
             <a:spAutoFit/>
           </a:bodyPr>
           <a:lstStyle/>
@@ -5678,7 +5678,7 @@
             </a:r>
           </a:p>
           <a:p>
-            <a:pPr>
+            <a:pPr marL="127000" indent="0">
               <a:lnSpc>
                 <a:spcPct val="112000"/>
               </a:lnSpc>
@@ -5705,7 +5705,7 @@
             </a:r>
           </a:p>
           <a:p>
-            <a:pPr>
+            <a:pPr marL="127000" indent="0">
               <a:lnSpc>
                 <a:spcPct val="112000"/>
               </a:lnSpc>
@@ -5732,7 +5732,7 @@
             </a:r>
           </a:p>
           <a:p>
-            <a:pPr>
+            <a:pPr marL="127000" indent="0">
               <a:lnSpc>
                 <a:spcPct val="112000"/>
               </a:lnSpc>
@@ -5822,7 +5822,7 @@
           <a:noFill/>
         </p:spPr>
         <p:txBody>
-          <a:bodyPr wrap="square">
+          <a:bodyPr wrap="square" lIns="54864" rIns="54864">
             <a:spAutoFit/>
           </a:bodyPr>
           <a:lstStyle/>
@@ -5842,7 +5842,7 @@
             </a:r>
           </a:p>
           <a:p>
-            <a:pPr>
+            <a:pPr marL="127000" indent="0">
               <a:lnSpc>
                 <a:spcPct val="112000"/>
               </a:lnSpc>
@@ -5869,7 +5869,7 @@
             </a:r>
           </a:p>
           <a:p>
-            <a:pPr>
+            <a:pPr marL="127000" indent="0">
               <a:lnSpc>
                 <a:spcPct val="112000"/>
               </a:lnSpc>
@@ -5896,7 +5896,7 @@
             </a:r>
           </a:p>
           <a:p>
-            <a:pPr>
+            <a:pPr marL="127000" indent="0">
               <a:lnSpc>
                 <a:spcPct val="112000"/>
               </a:lnSpc>
@@ -6854,7 +6854,7 @@
           <a:noFill/>
         </p:spPr>
         <p:txBody>
-          <a:bodyPr wrap="square">
+          <a:bodyPr wrap="square" lIns="73152" rIns="73152">
             <a:spAutoFit/>
           </a:bodyPr>
           <a:lstStyle/>
@@ -6952,7 +6952,7 @@
           <a:noFill/>
         </p:spPr>
         <p:txBody>
-          <a:bodyPr wrap="square">
+          <a:bodyPr wrap="square" lIns="73152" rIns="73152">
             <a:spAutoFit/>
           </a:bodyPr>
           <a:lstStyle/>
@@ -6972,7 +6972,7 @@
             </a:r>
           </a:p>
           <a:p>
-            <a:pPr>
+            <a:pPr marL="203200" indent="-152400">
               <a:lnSpc>
                 <a:spcPct val="115000"/>
               </a:lnSpc>
@@ -7010,7 +7010,7 @@
             </a:r>
           </a:p>
           <a:p>
-            <a:pPr>
+            <a:pPr marL="203200" indent="-152400">
               <a:lnSpc>
                 <a:spcPct val="115000"/>
               </a:lnSpc>
@@ -7048,7 +7048,7 @@
             </a:r>
           </a:p>
           <a:p>
-            <a:pPr>
+            <a:pPr marL="203200" indent="-152400">
               <a:lnSpc>
                 <a:spcPct val="115000"/>
               </a:lnSpc>
@@ -7086,7 +7086,7 @@
             </a:r>
           </a:p>
           <a:p>
-            <a:pPr>
+            <a:pPr marL="203200" indent="-152400">
               <a:lnSpc>
                 <a:spcPct val="115000"/>
               </a:lnSpc>
@@ -7187,7 +7187,7 @@
           <a:noFill/>
         </p:spPr>
         <p:txBody>
-          <a:bodyPr wrap="square">
+          <a:bodyPr wrap="square" lIns="73152" rIns="73152">
             <a:spAutoFit/>
           </a:bodyPr>
           <a:lstStyle/>
@@ -7285,7 +7285,7 @@
           <a:noFill/>
         </p:spPr>
         <p:txBody>
-          <a:bodyPr wrap="square">
+          <a:bodyPr wrap="square" lIns="73152" rIns="73152">
             <a:spAutoFit/>
           </a:bodyPr>
           <a:lstStyle/>
@@ -7383,7 +7383,7 @@
           <a:noFill/>
         </p:spPr>
         <p:txBody>
-          <a:bodyPr wrap="square">
+          <a:bodyPr wrap="square" lIns="73152" rIns="73152">
             <a:spAutoFit/>
           </a:bodyPr>
           <a:lstStyle/>
@@ -8349,7 +8349,7 @@
           <a:noFill/>
         </p:spPr>
         <p:txBody>
-          <a:bodyPr wrap="square">
+          <a:bodyPr wrap="square" lIns="73152" rIns="73152">
             <a:spAutoFit/>
           </a:bodyPr>
           <a:lstStyle/>
@@ -8388,7 +8388,7 @@
             </a:r>
           </a:p>
           <a:p>
-            <a:pPr>
+            <a:pPr marL="177800" indent="0">
               <a:lnSpc>
                 <a:spcPct val="115000"/>
               </a:lnSpc>
@@ -8429,7 +8429,7 @@
             </a:r>
           </a:p>
           <a:p>
-            <a:pPr>
+            <a:pPr marL="177800" indent="0">
               <a:lnSpc>
                 <a:spcPct val="115000"/>
               </a:lnSpc>
@@ -8470,7 +8470,7 @@
             </a:r>
           </a:p>
           <a:p>
-            <a:pPr>
+            <a:pPr marL="177800" indent="0">
               <a:lnSpc>
                 <a:spcPct val="115000"/>
               </a:lnSpc>
@@ -8555,7 +8555,7 @@
           <a:noFill/>
         </p:spPr>
         <p:txBody>
-          <a:bodyPr wrap="square">
+          <a:bodyPr wrap="square" lIns="73152" rIns="73152">
             <a:spAutoFit/>
           </a:bodyPr>
           <a:lstStyle/>
@@ -8575,7 +8575,7 @@
             </a:r>
           </a:p>
           <a:p>
-            <a:pPr>
+            <a:pPr marL="177800" indent="-127000">
               <a:lnSpc>
                 <a:spcPct val="115000"/>
               </a:lnSpc>
@@ -8605,7 +8605,7 @@
             </a:r>
           </a:p>
           <a:p>
-            <a:pPr>
+            <a:pPr marL="177800" indent="-127000">
               <a:lnSpc>
                 <a:spcPct val="115000"/>
               </a:lnSpc>
@@ -8635,7 +8635,7 @@
             </a:r>
           </a:p>
           <a:p>
-            <a:pPr>
+            <a:pPr marL="177800" indent="-127000">
               <a:lnSpc>
                 <a:spcPct val="115000"/>
               </a:lnSpc>
@@ -8728,7 +8728,7 @@
           <a:noFill/>
         </p:spPr>
         <p:txBody>
-          <a:bodyPr wrap="square">
+          <a:bodyPr wrap="square" lIns="73152" rIns="73152">
             <a:spAutoFit/>
           </a:bodyPr>
           <a:lstStyle/>
@@ -8748,7 +8748,7 @@
             </a:r>
           </a:p>
           <a:p>
-            <a:pPr>
+            <a:pPr marL="203200" indent="-152400">
               <a:lnSpc>
                 <a:spcPct val="115000"/>
               </a:lnSpc>
@@ -8778,7 +8778,7 @@
             </a:r>
           </a:p>
           <a:p>
-            <a:pPr>
+            <a:pPr marL="203200" indent="-152400">
               <a:lnSpc>
                 <a:spcPct val="115000"/>
               </a:lnSpc>
@@ -8808,7 +8808,7 @@
             </a:r>
           </a:p>
           <a:p>
-            <a:pPr>
+            <a:pPr marL="203200" indent="-152400">
               <a:lnSpc>
                 <a:spcPct val="115000"/>
               </a:lnSpc>
@@ -9769,7 +9769,7 @@
           <a:noFill/>
         </p:spPr>
         <p:txBody>
-          <a:bodyPr wrap="square">
+          <a:bodyPr wrap="square" lIns="73152" rIns="73152">
             <a:spAutoFit/>
           </a:bodyPr>
           <a:lstStyle/>
@@ -9789,7 +9789,7 @@
             </a:r>
           </a:p>
           <a:p>
-            <a:pPr>
+            <a:pPr marL="177800" indent="-127000">
               <a:lnSpc>
                 <a:spcPct val="115000"/>
               </a:lnSpc>
@@ -9819,7 +9819,7 @@
             </a:r>
           </a:p>
           <a:p>
-            <a:pPr>
+            <a:pPr marL="177800" indent="-127000">
               <a:lnSpc>
                 <a:spcPct val="115000"/>
               </a:lnSpc>
@@ -9849,7 +9849,7 @@
             </a:r>
           </a:p>
           <a:p>
-            <a:pPr>
+            <a:pPr marL="177800" indent="-127000">
               <a:lnSpc>
                 <a:spcPct val="115000"/>
               </a:lnSpc>
@@ -9942,7 +9942,7 @@
           <a:noFill/>
         </p:spPr>
         <p:txBody>
-          <a:bodyPr wrap="square">
+          <a:bodyPr wrap="square" lIns="73152" rIns="73152">
             <a:spAutoFit/>
           </a:bodyPr>
           <a:lstStyle/>
@@ -9962,7 +9962,7 @@
             </a:r>
           </a:p>
           <a:p>
-            <a:pPr>
+            <a:pPr marL="177800" indent="-127000">
               <a:lnSpc>
                 <a:spcPct val="115000"/>
               </a:lnSpc>
@@ -9992,7 +9992,7 @@
             </a:r>
           </a:p>
           <a:p>
-            <a:pPr>
+            <a:pPr marL="177800" indent="-127000">
               <a:lnSpc>
                 <a:spcPct val="115000"/>
               </a:lnSpc>
@@ -10022,7 +10022,7 @@
             </a:r>
           </a:p>
           <a:p>
-            <a:pPr>
+            <a:pPr marL="177800" indent="-127000">
               <a:lnSpc>
                 <a:spcPct val="115000"/>
               </a:lnSpc>
@@ -10115,7 +10115,7 @@
           <a:noFill/>
         </p:spPr>
         <p:txBody>
-          <a:bodyPr wrap="square">
+          <a:bodyPr wrap="square" lIns="73152" rIns="73152">
             <a:spAutoFit/>
           </a:bodyPr>
           <a:lstStyle/>
@@ -10135,7 +10135,7 @@
             </a:r>
           </a:p>
           <a:p>
-            <a:pPr>
+            <a:pPr marL="177800" indent="-127000">
               <a:lnSpc>
                 <a:spcPct val="115000"/>
               </a:lnSpc>
@@ -10165,7 +10165,7 @@
             </a:r>
           </a:p>
           <a:p>
-            <a:pPr>
+            <a:pPr marL="177800" indent="-127000">
               <a:lnSpc>
                 <a:spcPct val="115000"/>
               </a:lnSpc>
@@ -10195,7 +10195,7 @@
             </a:r>
           </a:p>
           <a:p>
-            <a:pPr>
+            <a:pPr marL="177800" indent="-127000">
               <a:lnSpc>
                 <a:spcPct val="115000"/>
               </a:lnSpc>
@@ -10288,7 +10288,7 @@
           <a:noFill/>
         </p:spPr>
         <p:txBody>
-          <a:bodyPr wrap="square">
+          <a:bodyPr wrap="square" lIns="73152" rIns="73152">
             <a:spAutoFit/>
           </a:bodyPr>
           <a:lstStyle/>
@@ -10308,7 +10308,7 @@
             </a:r>
           </a:p>
           <a:p>
-            <a:pPr>
+            <a:pPr marL="177800" indent="-127000">
               <a:lnSpc>
                 <a:spcPct val="115000"/>
               </a:lnSpc>
@@ -10338,7 +10338,7 @@
             </a:r>
           </a:p>
           <a:p>
-            <a:pPr>
+            <a:pPr marL="177800" indent="-127000">
               <a:lnSpc>
                 <a:spcPct val="115000"/>
               </a:lnSpc>
@@ -10368,7 +10368,7 @@
             </a:r>
           </a:p>
           <a:p>
-            <a:pPr>
+            <a:pPr marL="177800" indent="-127000">
               <a:lnSpc>
                 <a:spcPct val="115000"/>
               </a:lnSpc>
@@ -11329,7 +11329,7 @@
           <a:noFill/>
         </p:spPr>
         <p:txBody>
-          <a:bodyPr wrap="square">
+          <a:bodyPr wrap="square" lIns="54864" rIns="54864">
             <a:spAutoFit/>
           </a:bodyPr>
           <a:lstStyle/>
@@ -11427,7 +11427,7 @@
           <a:noFill/>
         </p:spPr>
         <p:txBody>
-          <a:bodyPr wrap="square">
+          <a:bodyPr wrap="square" lIns="54864" rIns="54864">
             <a:spAutoFit/>
           </a:bodyPr>
           <a:lstStyle/>
@@ -11525,7 +11525,7 @@
           <a:noFill/>
         </p:spPr>
         <p:txBody>
-          <a:bodyPr wrap="square">
+          <a:bodyPr wrap="square" lIns="54864" rIns="54864">
             <a:spAutoFit/>
           </a:bodyPr>
           <a:lstStyle/>
@@ -11623,7 +11623,7 @@
           <a:noFill/>
         </p:spPr>
         <p:txBody>
-          <a:bodyPr wrap="square">
+          <a:bodyPr wrap="square" lIns="73152" rIns="73152">
             <a:spAutoFit/>
           </a:bodyPr>
           <a:lstStyle/>
@@ -11643,7 +11643,7 @@
             </a:r>
           </a:p>
           <a:p>
-            <a:pPr>
+            <a:pPr marL="177800" indent="-127000">
               <a:lnSpc>
                 <a:spcPct val="115000"/>
               </a:lnSpc>
@@ -11681,7 +11681,7 @@
             </a:r>
           </a:p>
           <a:p>
-            <a:pPr>
+            <a:pPr marL="177800" indent="-127000">
               <a:lnSpc>
                 <a:spcPct val="115000"/>
               </a:lnSpc>
@@ -11719,7 +11719,7 @@
             </a:r>
           </a:p>
           <a:p>
-            <a:pPr>
+            <a:pPr marL="177800" indent="-127000">
               <a:lnSpc>
                 <a:spcPct val="115000"/>
               </a:lnSpc>
@@ -11757,7 +11757,7 @@
             </a:r>
           </a:p>
           <a:p>
-            <a:pPr>
+            <a:pPr marL="177800" indent="-127000">
               <a:lnSpc>
                 <a:spcPct val="115000"/>
               </a:lnSpc>
@@ -11795,7 +11795,7 @@
             </a:r>
           </a:p>
           <a:p>
-            <a:pPr>
+            <a:pPr marL="177800" indent="-127000">
               <a:lnSpc>
                 <a:spcPct val="115000"/>
               </a:lnSpc>
@@ -11833,7 +11833,7 @@
             </a:r>
           </a:p>
           <a:p>
-            <a:pPr>
+            <a:pPr marL="177800" indent="-127000">
               <a:lnSpc>
                 <a:spcPct val="115000"/>
               </a:lnSpc>
@@ -12802,7 +12802,7 @@
           <a:noFill/>
         </p:spPr>
         <p:txBody>
-          <a:bodyPr wrap="square">
+          <a:bodyPr wrap="square" lIns="54864" rIns="54864">
             <a:spAutoFit/>
           </a:bodyPr>
           <a:lstStyle/>
@@ -12900,7 +12900,7 @@
           <a:noFill/>
         </p:spPr>
         <p:txBody>
-          <a:bodyPr wrap="square">
+          <a:bodyPr wrap="square" lIns="54864" rIns="54864">
             <a:spAutoFit/>
           </a:bodyPr>
           <a:lstStyle/>
@@ -12998,7 +12998,7 @@
           <a:noFill/>
         </p:spPr>
         <p:txBody>
-          <a:bodyPr wrap="square">
+          <a:bodyPr wrap="square" lIns="54864" rIns="54864">
             <a:spAutoFit/>
           </a:bodyPr>
           <a:lstStyle/>
@@ -13096,7 +13096,7 @@
           <a:noFill/>
         </p:spPr>
         <p:txBody>
-          <a:bodyPr wrap="square">
+          <a:bodyPr wrap="square" lIns="54864" rIns="54864">
             <a:spAutoFit/>
           </a:bodyPr>
           <a:lstStyle/>
@@ -13116,7 +13116,7 @@
             </a:r>
           </a:p>
           <a:p>
-            <a:pPr>
+            <a:pPr marL="152400" indent="-101600">
               <a:lnSpc>
                 <a:spcPct val="112000"/>
               </a:lnSpc>
@@ -13131,7 +13131,7 @@
             </a:r>
           </a:p>
           <a:p>
-            <a:pPr>
+            <a:pPr marL="152400" indent="-101600">
               <a:lnSpc>
                 <a:spcPct val="112000"/>
               </a:lnSpc>
@@ -13209,7 +13209,7 @@
           <a:noFill/>
         </p:spPr>
         <p:txBody>
-          <a:bodyPr wrap="square">
+          <a:bodyPr wrap="square" lIns="54864" rIns="54864">
             <a:spAutoFit/>
           </a:bodyPr>
           <a:lstStyle/>
@@ -14175,7 +14175,7 @@
           <a:noFill/>
         </p:spPr>
         <p:txBody>
-          <a:bodyPr wrap="square">
+          <a:bodyPr wrap="square" lIns="73152" rIns="73152">
             <a:spAutoFit/>
           </a:bodyPr>
           <a:lstStyle/>
@@ -14195,7 +14195,7 @@
             </a:r>
           </a:p>
           <a:p>
-            <a:pPr>
+            <a:pPr marL="177800" indent="-127000">
               <a:lnSpc>
                 <a:spcPct val="115000"/>
               </a:lnSpc>
@@ -14225,7 +14225,7 @@
             </a:r>
           </a:p>
           <a:p>
-            <a:pPr>
+            <a:pPr marL="177800" indent="-127000">
               <a:lnSpc>
                 <a:spcPct val="115000"/>
               </a:lnSpc>
@@ -14255,7 +14255,7 @@
             </a:r>
           </a:p>
           <a:p>
-            <a:pPr>
+            <a:pPr marL="177800" indent="-127000">
               <a:lnSpc>
                 <a:spcPct val="115000"/>
               </a:lnSpc>
@@ -14348,7 +14348,7 @@
           <a:noFill/>
         </p:spPr>
         <p:txBody>
-          <a:bodyPr wrap="square">
+          <a:bodyPr wrap="square" lIns="73152" rIns="73152">
             <a:spAutoFit/>
           </a:bodyPr>
           <a:lstStyle/>
@@ -14368,7 +14368,7 @@
             </a:r>
           </a:p>
           <a:p>
-            <a:pPr>
+            <a:pPr marL="177800" indent="-127000">
               <a:lnSpc>
                 <a:spcPct val="115000"/>
               </a:lnSpc>
@@ -14414,7 +14414,7 @@
             </a:r>
           </a:p>
           <a:p>
-            <a:pPr>
+            <a:pPr marL="177800" indent="-127000">
               <a:lnSpc>
                 <a:spcPct val="115000"/>
               </a:lnSpc>
@@ -14460,7 +14460,7 @@
             </a:r>
           </a:p>
           <a:p>
-            <a:pPr>
+            <a:pPr marL="177800" indent="-127000">
               <a:lnSpc>
                 <a:spcPct val="115000"/>
               </a:lnSpc>
@@ -15437,7 +15437,7 @@
           <a:noFill/>
         </p:spPr>
         <p:txBody>
-          <a:bodyPr wrap="square">
+          <a:bodyPr wrap="square" lIns="73152" rIns="73152">
             <a:spAutoFit/>
           </a:bodyPr>
           <a:lstStyle/>
@@ -15457,7 +15457,7 @@
             </a:r>
           </a:p>
           <a:p>
-            <a:pPr>
+            <a:pPr marL="177800" indent="-127000">
               <a:lnSpc>
                 <a:spcPct val="112000"/>
               </a:lnSpc>
@@ -15487,7 +15487,7 @@
             </a:r>
           </a:p>
           <a:p>
-            <a:pPr>
+            <a:pPr marL="177800" indent="-127000">
               <a:lnSpc>
                 <a:spcPct val="112000"/>
               </a:lnSpc>
@@ -15517,7 +15517,7 @@
             </a:r>
           </a:p>
           <a:p>
-            <a:pPr>
+            <a:pPr marL="177800" indent="-127000">
               <a:lnSpc>
                 <a:spcPct val="112000"/>
               </a:lnSpc>
@@ -15547,7 +15547,7 @@
             </a:r>
           </a:p>
           <a:p>
-            <a:pPr>
+            <a:pPr marL="177800" indent="-127000">
               <a:lnSpc>
                 <a:spcPct val="112000"/>
               </a:lnSpc>
@@ -16820,7 +16820,7 @@
           <a:noFill/>
         </p:spPr>
         <p:txBody>
-          <a:bodyPr wrap="square">
+          <a:bodyPr wrap="square" lIns="73152" rIns="73152">
             <a:spAutoFit/>
           </a:bodyPr>
           <a:lstStyle/>
@@ -16840,7 +16840,7 @@
             </a:r>
           </a:p>
           <a:p>
-            <a:pPr>
+            <a:pPr marL="177800" indent="-127000">
               <a:lnSpc>
                 <a:spcPct val="115000"/>
               </a:lnSpc>
@@ -16878,7 +16878,7 @@
             </a:r>
           </a:p>
           <a:p>
-            <a:pPr>
+            <a:pPr marL="177800" indent="-127000">
               <a:lnSpc>
                 <a:spcPct val="115000"/>
               </a:lnSpc>
@@ -16916,7 +16916,7 @@
             </a:r>
           </a:p>
           <a:p>
-            <a:pPr>
+            <a:pPr marL="177800" indent="-127000">
               <a:lnSpc>
                 <a:spcPct val="115000"/>
               </a:lnSpc>
@@ -16954,7 +16954,7 @@
             </a:r>
           </a:p>
           <a:p>
-            <a:pPr>
+            <a:pPr marL="177800" indent="-127000">
               <a:lnSpc>
                 <a:spcPct val="115000"/>
               </a:lnSpc>
@@ -17055,7 +17055,7 @@
           <a:noFill/>
         </p:spPr>
         <p:txBody>
-          <a:bodyPr wrap="square">
+          <a:bodyPr wrap="square" lIns="73152" rIns="73152">
             <a:spAutoFit/>
           </a:bodyPr>
           <a:lstStyle/>
@@ -17075,7 +17075,7 @@
             </a:r>
           </a:p>
           <a:p>
-            <a:pPr>
+            <a:pPr marL="177800" indent="-127000">
               <a:lnSpc>
                 <a:spcPct val="115000"/>
               </a:lnSpc>
@@ -17105,7 +17105,7 @@
             </a:r>
           </a:p>
           <a:p>
-            <a:pPr>
+            <a:pPr marL="177800" indent="-127000">
               <a:lnSpc>
                 <a:spcPct val="115000"/>
               </a:lnSpc>
@@ -17135,7 +17135,7 @@
             </a:r>
           </a:p>
           <a:p>
-            <a:pPr>
+            <a:pPr marL="177800" indent="-127000">
               <a:lnSpc>
                 <a:spcPct val="115000"/>
               </a:lnSpc>
@@ -17165,7 +17165,7 @@
             </a:r>
           </a:p>
           <a:p>
-            <a:pPr>
+            <a:pPr marL="177800" indent="-127000">
               <a:lnSpc>
                 <a:spcPct val="115000"/>
               </a:lnSpc>

--- a/Myntra_Wishlist_Studio_10_Slide_Deck_Updated.pptx
+++ b/Myntra_Wishlist_Studio_10_Slide_Deck_Updated.pptx
@@ -6943,8 +6943,8 @@
         </p:nvSpPr>
         <p:spPr>
           <a:xfrm>
-            <a:off x="749808" y="2907792"/>
-            <a:ext cx="5724144" cy="2468880"/>
+            <a:off x="749808" y="2889504"/>
+            <a:ext cx="5724144" cy="320040"/>
           </a:xfrm>
           <a:prstGeom prst="rect">
             <a:avLst/>
@@ -6952,15 +6952,12 @@
           <a:noFill/>
         </p:spPr>
         <p:txBody>
-          <a:bodyPr wrap="square" lIns="73152" rIns="73152">
+          <a:bodyPr wrap="square">
             <a:spAutoFit/>
           </a:bodyPr>
           <a:lstStyle/>
           <a:p>
             <a:pPr>
-              <a:spcAft>
-                <a:spcPts val="600"/>
-              </a:spcAft>
               <a:defRPr sz="1050" b="1">
                 <a:solidFill>
                   <a:srgbClr val="FF3F6C"/>
@@ -6969,158 +6966,6 @@
             </a:pPr>
             <a:r>
               <a:t>🔄 CURRENT DISCOVERY FLOW (THE GRAVEYARD LOOP)</a:t>
-            </a:r>
-          </a:p>
-          <a:p>
-            <a:pPr marL="203200" indent="-152400">
-              <a:lnSpc>
-                <a:spcPct val="115000"/>
-              </a:lnSpc>
-              <a:spcBef>
-                <a:spcPts val="200"/>
-              </a:spcBef>
-              <a:spcAft>
-                <a:spcPts val="400"/>
-              </a:spcAft>
-              <a:defRPr sz="950"/>
-            </a:pPr>
-            <a:r>
-              <a:rPr b="1">
-                <a:solidFill>
-                  <a:srgbClr val="FF3F6C"/>
-                </a:solidFill>
-              </a:rPr>
-              <a:t>► </a:t>
-            </a:r>
-            <a:r>
-              <a:rPr b="1">
-                <a:solidFill>
-                  <a:srgbClr val="282C3F"/>
-                </a:solidFill>
-              </a:rPr>
-              <a:t>1. Intent Trigger: </a:t>
-            </a:r>
-            <a:r>
-              <a:rPr>
-                <a:solidFill>
-                  <a:srgbClr val="282C3F"/>
-                </a:solidFill>
-              </a:rPr>
-              <a:t>Browses app &amp; saves 3-4 style alternatives</a:t>
-            </a:r>
-          </a:p>
-          <a:p>
-            <a:pPr marL="203200" indent="-152400">
-              <a:lnSpc>
-                <a:spcPct val="115000"/>
-              </a:lnSpc>
-              <a:spcBef>
-                <a:spcPts val="200"/>
-              </a:spcBef>
-              <a:spcAft>
-                <a:spcPts val="400"/>
-              </a:spcAft>
-              <a:defRPr sz="950"/>
-            </a:pPr>
-            <a:r>
-              <a:rPr b="1">
-                <a:solidFill>
-                  <a:srgbClr val="FF3F6C"/>
-                </a:solidFill>
-              </a:rPr>
-              <a:t>► </a:t>
-            </a:r>
-            <a:r>
-              <a:rPr b="1">
-                <a:solidFill>
-                  <a:srgbClr val="282C3F"/>
-                </a:solidFill>
-              </a:rPr>
-              <a:t>2. Category Browse: </a:t>
-            </a:r>
-            <a:r>
-              <a:rPr>
-                <a:solidFill>
-                  <a:srgbClr val="282C3F"/>
-                </a:solidFill>
-              </a:rPr>
-              <a:t>Leaves items in wishlist without buying</a:t>
-            </a:r>
-          </a:p>
-          <a:p>
-            <a:pPr marL="203200" indent="-152400">
-              <a:lnSpc>
-                <a:spcPct val="115000"/>
-              </a:lnSpc>
-              <a:spcBef>
-                <a:spcPts val="200"/>
-              </a:spcBef>
-              <a:spcAft>
-                <a:spcPts val="400"/>
-              </a:spcAft>
-              <a:defRPr sz="950"/>
-            </a:pPr>
-            <a:r>
-              <a:rPr b="1">
-                <a:solidFill>
-                  <a:srgbClr val="FF3F6C"/>
-                </a:solidFill>
-              </a:rPr>
-              <a:t>► </a:t>
-            </a:r>
-            <a:r>
-              <a:rPr b="1">
-                <a:solidFill>
-                  <a:srgbClr val="282C3F"/>
-                </a:solidFill>
-              </a:rPr>
-              <a:t>3. Wishlist Graveyard: </a:t>
-            </a:r>
-            <a:r>
-              <a:rPr>
-                <a:solidFill>
-                  <a:srgbClr val="282C3F"/>
-                </a:solidFill>
-              </a:rPr>
-              <a:t>Stalls due to fabric GSM &amp; fit ambiguity</a:t>
-            </a:r>
-          </a:p>
-          <a:p>
-            <a:pPr marL="203200" indent="-152400">
-              <a:lnSpc>
-                <a:spcPct val="115000"/>
-              </a:lnSpc>
-              <a:spcBef>
-                <a:spcPts val="200"/>
-              </a:spcBef>
-              <a:spcAft>
-                <a:spcPts val="400"/>
-              </a:spcAft>
-              <a:defRPr sz="950"/>
-            </a:pPr>
-            <a:r>
-              <a:rPr b="1">
-                <a:solidFill>
-                  <a:srgbClr val="FF3F6C"/>
-                </a:solidFill>
-              </a:rPr>
-              <a:t>► </a:t>
-            </a:r>
-            <a:r>
-              <a:rPr b="1">
-                <a:solidFill>
-                  <a:srgbClr val="282C3F"/>
-                </a:solidFill>
-              </a:rPr>
-              <a:t>4. Abandonment: </a:t>
-            </a:r>
-            <a:r>
-              <a:rPr>
-                <a:solidFill>
-                  <a:srgbClr val="282C3F"/>
-                </a:solidFill>
-              </a:rPr>
-              <a:t>Screenshots to WhatsApp; 68% drop-off</a:t>
             </a:r>
           </a:p>
         </p:txBody>
@@ -7133,8 +6978,8 @@
         </p:nvSpPr>
         <p:spPr>
           <a:xfrm>
-            <a:off x="6796735" y="1536192"/>
-            <a:ext cx="4754880" cy="1225296"/>
+            <a:off x="749808" y="3218688"/>
+            <a:ext cx="1353312" cy="2130552"/>
           </a:xfrm>
           <a:prstGeom prst="roundRect">
             <a:avLst/>
@@ -7178,6 +7023,398 @@
         </p:nvSpPr>
         <p:spPr>
           <a:xfrm>
+            <a:off x="786384" y="3255264"/>
+            <a:ext cx="1280160" cy="2039113"/>
+          </a:xfrm>
+          <a:prstGeom prst="rect">
+            <a:avLst/>
+          </a:prstGeom>
+          <a:noFill/>
+        </p:spPr>
+        <p:txBody>
+          <a:bodyPr wrap="square" lIns="18288" rIns="18288">
+            <a:spAutoFit/>
+          </a:bodyPr>
+          <a:lstStyle/>
+          <a:p>
+            <a:pPr>
+              <a:spcAft>
+                <a:spcPts val="200"/>
+              </a:spcAft>
+              <a:defRPr sz="850" b="1">
+                <a:solidFill>
+                  <a:srgbClr val="FF3F6C"/>
+                </a:solidFill>
+              </a:defRPr>
+            </a:pPr>
+            <a:r>
+              <a:t>1. Intent Trigger</a:t>
+            </a:r>
+          </a:p>
+          <a:p>
+            <a:pPr>
+              <a:lnSpc>
+                <a:spcPct val="110000"/>
+              </a:lnSpc>
+              <a:defRPr sz="750">
+                <a:solidFill>
+                  <a:srgbClr val="282C3F"/>
+                </a:solidFill>
+              </a:defRPr>
+            </a:pPr>
+            <a:r>
+              <a:t>Browses app &amp; saves 3-4 style alternatives</a:t>
+            </a:r>
+          </a:p>
+        </p:txBody>
+      </p:sp>
+      <p:sp>
+        <p:nvSpPr>
+          <p:cNvPr id="11" name="Rounded Rectangle 10"/>
+          <p:cNvSpPr/>
+          <p:nvPr/>
+        </p:nvSpPr>
+        <p:spPr>
+          <a:xfrm>
+            <a:off x="2212848" y="3218688"/>
+            <a:ext cx="1353312" cy="2130552"/>
+          </a:xfrm>
+          <a:prstGeom prst="roundRect">
+            <a:avLst/>
+          </a:prstGeom>
+          <a:solidFill>
+            <a:srgbClr val="FFF0F4"/>
+          </a:solidFill>
+          <a:ln w="12700">
+            <a:solidFill>
+              <a:srgbClr val="FFC2D1"/>
+            </a:solidFill>
+          </a:ln>
+        </p:spPr>
+        <p:style>
+          <a:lnRef idx="1">
+            <a:schemeClr val="accent1"/>
+          </a:lnRef>
+          <a:fillRef idx="3">
+            <a:schemeClr val="accent1"/>
+          </a:fillRef>
+          <a:effectRef idx="2">
+            <a:schemeClr val="accent1"/>
+          </a:effectRef>
+          <a:fontRef idx="minor">
+            <a:schemeClr val="lt1"/>
+          </a:fontRef>
+        </p:style>
+        <p:txBody>
+          <a:bodyPr rtlCol="0" anchor="ctr"/>
+          <a:lstStyle/>
+          <a:p>
+            <a:pPr algn="ctr"/>
+          </a:p>
+        </p:txBody>
+      </p:sp>
+      <p:sp>
+        <p:nvSpPr>
+          <p:cNvPr id="12" name="TextBox 11"/>
+          <p:cNvSpPr txBox="1"/>
+          <p:nvPr/>
+        </p:nvSpPr>
+        <p:spPr>
+          <a:xfrm>
+            <a:off x="2249424" y="3255264"/>
+            <a:ext cx="1280160" cy="2039113"/>
+          </a:xfrm>
+          <a:prstGeom prst="rect">
+            <a:avLst/>
+          </a:prstGeom>
+          <a:noFill/>
+        </p:spPr>
+        <p:txBody>
+          <a:bodyPr wrap="square" lIns="18288" rIns="18288">
+            <a:spAutoFit/>
+          </a:bodyPr>
+          <a:lstStyle/>
+          <a:p>
+            <a:pPr>
+              <a:spcAft>
+                <a:spcPts val="200"/>
+              </a:spcAft>
+              <a:defRPr sz="850" b="1">
+                <a:solidFill>
+                  <a:srgbClr val="FF3F6C"/>
+                </a:solidFill>
+              </a:defRPr>
+            </a:pPr>
+            <a:r>
+              <a:t>2. Category Browse</a:t>
+            </a:r>
+          </a:p>
+          <a:p>
+            <a:pPr>
+              <a:lnSpc>
+                <a:spcPct val="110000"/>
+              </a:lnSpc>
+              <a:defRPr sz="750">
+                <a:solidFill>
+                  <a:srgbClr val="282C3F"/>
+                </a:solidFill>
+              </a:defRPr>
+            </a:pPr>
+            <a:r>
+              <a:t>Leaves items in wishlist without buying</a:t>
+            </a:r>
+          </a:p>
+        </p:txBody>
+      </p:sp>
+      <p:sp>
+        <p:nvSpPr>
+          <p:cNvPr id="13" name="Rounded Rectangle 12"/>
+          <p:cNvSpPr/>
+          <p:nvPr/>
+        </p:nvSpPr>
+        <p:spPr>
+          <a:xfrm>
+            <a:off x="3675888" y="3218688"/>
+            <a:ext cx="1353312" cy="2130552"/>
+          </a:xfrm>
+          <a:prstGeom prst="roundRect">
+            <a:avLst/>
+          </a:prstGeom>
+          <a:solidFill>
+            <a:srgbClr val="FFF0F4"/>
+          </a:solidFill>
+          <a:ln w="12700">
+            <a:solidFill>
+              <a:srgbClr val="FFC2D1"/>
+            </a:solidFill>
+          </a:ln>
+        </p:spPr>
+        <p:style>
+          <a:lnRef idx="1">
+            <a:schemeClr val="accent1"/>
+          </a:lnRef>
+          <a:fillRef idx="3">
+            <a:schemeClr val="accent1"/>
+          </a:fillRef>
+          <a:effectRef idx="2">
+            <a:schemeClr val="accent1"/>
+          </a:effectRef>
+          <a:fontRef idx="minor">
+            <a:schemeClr val="lt1"/>
+          </a:fontRef>
+        </p:style>
+        <p:txBody>
+          <a:bodyPr rtlCol="0" anchor="ctr"/>
+          <a:lstStyle/>
+          <a:p>
+            <a:pPr algn="ctr"/>
+          </a:p>
+        </p:txBody>
+      </p:sp>
+      <p:sp>
+        <p:nvSpPr>
+          <p:cNvPr id="14" name="TextBox 13"/>
+          <p:cNvSpPr txBox="1"/>
+          <p:nvPr/>
+        </p:nvSpPr>
+        <p:spPr>
+          <a:xfrm>
+            <a:off x="3712464" y="3255264"/>
+            <a:ext cx="1280160" cy="2039113"/>
+          </a:xfrm>
+          <a:prstGeom prst="rect">
+            <a:avLst/>
+          </a:prstGeom>
+          <a:noFill/>
+        </p:spPr>
+        <p:txBody>
+          <a:bodyPr wrap="square" lIns="18288" rIns="18288">
+            <a:spAutoFit/>
+          </a:bodyPr>
+          <a:lstStyle/>
+          <a:p>
+            <a:pPr>
+              <a:spcAft>
+                <a:spcPts val="200"/>
+              </a:spcAft>
+              <a:defRPr sz="850" b="1">
+                <a:solidFill>
+                  <a:srgbClr val="FF3F6C"/>
+                </a:solidFill>
+              </a:defRPr>
+            </a:pPr>
+            <a:r>
+              <a:t>3. Wishlist Graveyard</a:t>
+            </a:r>
+          </a:p>
+          <a:p>
+            <a:pPr>
+              <a:lnSpc>
+                <a:spcPct val="110000"/>
+              </a:lnSpc>
+              <a:defRPr sz="750">
+                <a:solidFill>
+                  <a:srgbClr val="282C3F"/>
+                </a:solidFill>
+              </a:defRPr>
+            </a:pPr>
+            <a:r>
+              <a:t>Stalls due to fabric GSM &amp; fit ambiguity</a:t>
+            </a:r>
+          </a:p>
+        </p:txBody>
+      </p:sp>
+      <p:sp>
+        <p:nvSpPr>
+          <p:cNvPr id="15" name="Rounded Rectangle 14"/>
+          <p:cNvSpPr/>
+          <p:nvPr/>
+        </p:nvSpPr>
+        <p:spPr>
+          <a:xfrm>
+            <a:off x="5138928" y="3218688"/>
+            <a:ext cx="1353312" cy="2130552"/>
+          </a:xfrm>
+          <a:prstGeom prst="roundRect">
+            <a:avLst/>
+          </a:prstGeom>
+          <a:solidFill>
+            <a:srgbClr val="FFF0F4"/>
+          </a:solidFill>
+          <a:ln w="12700">
+            <a:solidFill>
+              <a:srgbClr val="FFC2D1"/>
+            </a:solidFill>
+          </a:ln>
+        </p:spPr>
+        <p:style>
+          <a:lnRef idx="1">
+            <a:schemeClr val="accent1"/>
+          </a:lnRef>
+          <a:fillRef idx="3">
+            <a:schemeClr val="accent1"/>
+          </a:fillRef>
+          <a:effectRef idx="2">
+            <a:schemeClr val="accent1"/>
+          </a:effectRef>
+          <a:fontRef idx="minor">
+            <a:schemeClr val="lt1"/>
+          </a:fontRef>
+        </p:style>
+        <p:txBody>
+          <a:bodyPr rtlCol="0" anchor="ctr"/>
+          <a:lstStyle/>
+          <a:p>
+            <a:pPr algn="ctr"/>
+          </a:p>
+        </p:txBody>
+      </p:sp>
+      <p:sp>
+        <p:nvSpPr>
+          <p:cNvPr id="16" name="TextBox 15"/>
+          <p:cNvSpPr txBox="1"/>
+          <p:nvPr/>
+        </p:nvSpPr>
+        <p:spPr>
+          <a:xfrm>
+            <a:off x="5175504" y="3255264"/>
+            <a:ext cx="1280160" cy="2039113"/>
+          </a:xfrm>
+          <a:prstGeom prst="rect">
+            <a:avLst/>
+          </a:prstGeom>
+          <a:noFill/>
+        </p:spPr>
+        <p:txBody>
+          <a:bodyPr wrap="square" lIns="18288" rIns="18288">
+            <a:spAutoFit/>
+          </a:bodyPr>
+          <a:lstStyle/>
+          <a:p>
+            <a:pPr>
+              <a:spcAft>
+                <a:spcPts val="200"/>
+              </a:spcAft>
+              <a:defRPr sz="850" b="1">
+                <a:solidFill>
+                  <a:srgbClr val="FF3F6C"/>
+                </a:solidFill>
+              </a:defRPr>
+            </a:pPr>
+            <a:r>
+              <a:t>4. Abandonment</a:t>
+            </a:r>
+          </a:p>
+          <a:p>
+            <a:pPr>
+              <a:lnSpc>
+                <a:spcPct val="110000"/>
+              </a:lnSpc>
+              <a:defRPr sz="750">
+                <a:solidFill>
+                  <a:srgbClr val="282C3F"/>
+                </a:solidFill>
+              </a:defRPr>
+            </a:pPr>
+            <a:r>
+              <a:t>Screenshots to WhatsApp; 68% drop-off</a:t>
+            </a:r>
+          </a:p>
+        </p:txBody>
+      </p:sp>
+      <p:sp>
+        <p:nvSpPr>
+          <p:cNvPr id="17" name="Rounded Rectangle 16"/>
+          <p:cNvSpPr/>
+          <p:nvPr/>
+        </p:nvSpPr>
+        <p:spPr>
+          <a:xfrm>
+            <a:off x="6796735" y="1536192"/>
+            <a:ext cx="4754880" cy="1225296"/>
+          </a:xfrm>
+          <a:prstGeom prst="roundRect">
+            <a:avLst/>
+          </a:prstGeom>
+          <a:solidFill>
+            <a:srgbClr val="FFF0F4"/>
+          </a:solidFill>
+          <a:ln w="12700">
+            <a:solidFill>
+              <a:srgbClr val="FFC2D1"/>
+            </a:solidFill>
+          </a:ln>
+        </p:spPr>
+        <p:style>
+          <a:lnRef idx="1">
+            <a:schemeClr val="accent1"/>
+          </a:lnRef>
+          <a:fillRef idx="3">
+            <a:schemeClr val="accent1"/>
+          </a:fillRef>
+          <a:effectRef idx="2">
+            <a:schemeClr val="accent1"/>
+          </a:effectRef>
+          <a:fontRef idx="minor">
+            <a:schemeClr val="lt1"/>
+          </a:fontRef>
+        </p:style>
+        <p:txBody>
+          <a:bodyPr rtlCol="0" anchor="ctr"/>
+          <a:lstStyle/>
+          <a:p>
+            <a:pPr algn="ctr"/>
+          </a:p>
+        </p:txBody>
+      </p:sp>
+      <p:sp>
+        <p:nvSpPr>
+          <p:cNvPr id="18" name="TextBox 17"/>
+          <p:cNvSpPr txBox="1"/>
+          <p:nvPr/>
+        </p:nvSpPr>
+        <p:spPr>
+          <a:xfrm>
             <a:off x="6903720" y="1609344"/>
             <a:ext cx="4535424" cy="1078992"/>
           </a:xfrm>
@@ -7225,7 +7462,7 @@
       </p:sp>
       <p:sp>
         <p:nvSpPr>
-          <p:cNvPr id="11" name="Rounded Rectangle 10"/>
+          <p:cNvPr id="19" name="Rounded Rectangle 18"/>
           <p:cNvSpPr/>
           <p:nvPr/>
         </p:nvSpPr>
@@ -7270,7 +7507,7 @@
       </p:sp>
       <p:sp>
         <p:nvSpPr>
-          <p:cNvPr id="12" name="TextBox 11"/>
+          <p:cNvPr id="20" name="TextBox 19"/>
           <p:cNvSpPr txBox="1"/>
           <p:nvPr/>
         </p:nvSpPr>
@@ -7323,7 +7560,7 @@
       </p:sp>
       <p:sp>
         <p:nvSpPr>
-          <p:cNvPr id="13" name="Rounded Rectangle 12"/>
+          <p:cNvPr id="21" name="Rounded Rectangle 20"/>
           <p:cNvSpPr/>
           <p:nvPr/>
         </p:nvSpPr>
@@ -7368,7 +7605,7 @@
       </p:sp>
       <p:sp>
         <p:nvSpPr>
-          <p:cNvPr id="14" name="TextBox 13"/>
+          <p:cNvPr id="22" name="TextBox 21"/>
           <p:cNvSpPr txBox="1"/>
           <p:nvPr/>
         </p:nvSpPr>
@@ -7421,7 +7658,7 @@
       </p:sp>
       <p:sp>
         <p:nvSpPr>
-          <p:cNvPr id="15" name="Rounded Rectangle 14"/>
+          <p:cNvPr id="23" name="Rounded Rectangle 22"/>
           <p:cNvSpPr/>
           <p:nvPr/>
         </p:nvSpPr>
@@ -7466,7 +7703,7 @@
       </p:sp>
       <p:sp>
         <p:nvSpPr>
-          <p:cNvPr id="16" name="TextBox 15"/>
+          <p:cNvPr id="24" name="TextBox 23"/>
           <p:cNvSpPr txBox="1"/>
           <p:nvPr/>
         </p:nvSpPr>
@@ -7522,7 +7759,7 @@
       </p:sp>
       <p:sp>
         <p:nvSpPr>
-          <p:cNvPr id="17" name="Rounded Rectangle 16"/>
+          <p:cNvPr id="25" name="Rounded Rectangle 24"/>
           <p:cNvSpPr/>
           <p:nvPr/>
         </p:nvSpPr>
@@ -7582,7 +7819,7 @@
       </p:sp>
       <p:sp>
         <p:nvSpPr>
-          <p:cNvPr id="18" name="Rounded Rectangle 17"/>
+          <p:cNvPr id="26" name="Rounded Rectangle 25"/>
           <p:cNvSpPr/>
           <p:nvPr/>
         </p:nvSpPr>
@@ -7642,7 +7879,7 @@
       </p:sp>
       <p:sp>
         <p:nvSpPr>
-          <p:cNvPr id="19" name="Rounded Rectangle 18"/>
+          <p:cNvPr id="27" name="Rounded Rectangle 26"/>
           <p:cNvSpPr/>
           <p:nvPr/>
         </p:nvSpPr>
@@ -7702,7 +7939,7 @@
       </p:sp>
       <p:sp>
         <p:nvSpPr>
-          <p:cNvPr id="20" name="Rounded Rectangle 19"/>
+          <p:cNvPr id="28" name="Rounded Rectangle 27"/>
           <p:cNvSpPr/>
           <p:nvPr/>
         </p:nvSpPr>
@@ -7762,7 +7999,7 @@
       </p:sp>
       <p:sp>
         <p:nvSpPr>
-          <p:cNvPr id="21" name="Rounded Rectangle 20"/>
+          <p:cNvPr id="29" name="Rounded Rectangle 28"/>
           <p:cNvSpPr/>
           <p:nvPr/>
         </p:nvSpPr>
@@ -7822,7 +8059,7 @@
       </p:sp>
       <p:sp>
         <p:nvSpPr>
-          <p:cNvPr id="22" name="Rounded Rectangle 21"/>
+          <p:cNvPr id="30" name="Rounded Rectangle 29"/>
           <p:cNvSpPr/>
           <p:nvPr/>
         </p:nvSpPr>
@@ -7882,7 +8119,7 @@
       </p:sp>
       <p:sp>
         <p:nvSpPr>
-          <p:cNvPr id="23" name="Rounded Rectangle 22"/>
+          <p:cNvPr id="31" name="Rounded Rectangle 30"/>
           <p:cNvSpPr/>
           <p:nvPr/>
         </p:nvSpPr>
@@ -7942,7 +8179,7 @@
       </p:sp>
       <p:sp>
         <p:nvSpPr>
-          <p:cNvPr id="24" name="Rounded Rectangle 23"/>
+          <p:cNvPr id="32" name="Rounded Rectangle 31"/>
           <p:cNvSpPr/>
           <p:nvPr/>
         </p:nvSpPr>
@@ -8002,7 +8239,7 @@
       </p:sp>
       <p:sp>
         <p:nvSpPr>
-          <p:cNvPr id="25" name="Rounded Rectangle 24"/>
+          <p:cNvPr id="33" name="Rounded Rectangle 32"/>
           <p:cNvSpPr/>
           <p:nvPr/>
         </p:nvSpPr>
@@ -8062,7 +8299,7 @@
       </p:sp>
       <p:sp>
         <p:nvSpPr>
-          <p:cNvPr id="26" name="Rounded Rectangle 25"/>
+          <p:cNvPr id="34" name="Rounded Rectangle 33"/>
           <p:cNvSpPr/>
           <p:nvPr/>
         </p:nvSpPr>
@@ -8502,7 +8739,7 @@
         <p:spPr>
           <a:xfrm>
             <a:off x="7040880" y="1536192"/>
-            <a:ext cx="4510735" cy="1737360"/>
+            <a:ext cx="4510735" cy="1828800"/>
           </a:xfrm>
           <a:prstGeom prst="roundRect">
             <a:avLst/>
@@ -8546,8 +8783,8 @@
         </p:nvSpPr>
         <p:spPr>
           <a:xfrm>
-            <a:off x="7150608" y="1609344"/>
-            <a:ext cx="4288536" cy="1591056"/>
+            <a:off x="7150608" y="1591056"/>
+            <a:ext cx="4288536" cy="320040"/>
           </a:xfrm>
           <a:prstGeom prst="rect">
             <a:avLst/>
@@ -8555,15 +8792,12 @@
           <a:noFill/>
         </p:spPr>
         <p:txBody>
-          <a:bodyPr wrap="square" lIns="73152" rIns="73152">
+          <a:bodyPr wrap="square">
             <a:spAutoFit/>
           </a:bodyPr>
           <a:lstStyle/>
           <a:p>
             <a:pPr>
-              <a:spcAft>
-                <a:spcPts val="400"/>
-              </a:spcAft>
               <a:defRPr sz="1050" b="1">
                 <a:solidFill>
                   <a:srgbClr val="FF3F6C"/>
@@ -8572,96 +8806,6 @@
             </a:pPr>
             <a:r>
               <a:t>🔬 CORPUS FUNNEL &amp; NLP PIPELINE</a:t>
-            </a:r>
-          </a:p>
-          <a:p>
-            <a:pPr marL="177800" indent="-127000">
-              <a:lnSpc>
-                <a:spcPct val="115000"/>
-              </a:lnSpc>
-              <a:spcBef>
-                <a:spcPts val="200"/>
-              </a:spcBef>
-              <a:spcAft>
-                <a:spcPts val="300"/>
-              </a:spcAft>
-              <a:defRPr sz="950"/>
-            </a:pPr>
-            <a:r>
-              <a:rPr b="1">
-                <a:solidFill>
-                  <a:srgbClr val="282C3F"/>
-                </a:solidFill>
-              </a:rPr>
-              <a:t>• 1. Scrape &amp; Clean: </a:t>
-            </a:r>
-            <a:r>
-              <a:rPr>
-                <a:solidFill>
-                  <a:srgbClr val="282C3F"/>
-                </a:solidFill>
-              </a:rPr>
-              <a:t>20,250 Raw Reviews</a:t>
-            </a:r>
-          </a:p>
-          <a:p>
-            <a:pPr marL="177800" indent="-127000">
-              <a:lnSpc>
-                <a:spcPct val="115000"/>
-              </a:lnSpc>
-              <a:spcBef>
-                <a:spcPts val="200"/>
-              </a:spcBef>
-              <a:spcAft>
-                <a:spcPts val="300"/>
-              </a:spcAft>
-              <a:defRPr sz="950"/>
-            </a:pPr>
-            <a:r>
-              <a:rPr b="1">
-                <a:solidFill>
-                  <a:srgbClr val="282C3F"/>
-                </a:solidFill>
-              </a:rPr>
-              <a:t>• 2. Vectorize: </a:t>
-            </a:r>
-            <a:r>
-              <a:rPr>
-                <a:solidFill>
-                  <a:srgbClr val="282C3F"/>
-                </a:solidFill>
-              </a:rPr>
-              <a:t>Sentence-BERT Embeddings</a:t>
-            </a:r>
-          </a:p>
-          <a:p>
-            <a:pPr marL="177800" indent="-127000">
-              <a:lnSpc>
-                <a:spcPct val="115000"/>
-              </a:lnSpc>
-              <a:spcBef>
-                <a:spcPts val="200"/>
-              </a:spcBef>
-              <a:spcAft>
-                <a:spcPts val="300"/>
-              </a:spcAft>
-              <a:defRPr sz="950"/>
-            </a:pPr>
-            <a:r>
-              <a:rPr b="1">
-                <a:solidFill>
-                  <a:srgbClr val="282C3F"/>
-                </a:solidFill>
-              </a:rPr>
-              <a:t>• 3. Synthesis: </a:t>
-            </a:r>
-            <a:r>
-              <a:rPr>
-                <a:solidFill>
-                  <a:srgbClr val="282C3F"/>
-                </a:solidFill>
-              </a:rPr>
-              <a:t>LLM Intent Extraction</a:t>
             </a:r>
           </a:p>
         </p:txBody>
@@ -8674,8 +8818,8 @@
         </p:nvSpPr>
         <p:spPr>
           <a:xfrm>
-            <a:off x="7040880" y="3410711"/>
-            <a:ext cx="4510735" cy="2039113"/>
+            <a:off x="7150608" y="1920240"/>
+            <a:ext cx="1335024" cy="1325880"/>
           </a:xfrm>
           <a:prstGeom prst="roundRect">
             <a:avLst/>
@@ -8719,8 +8863,302 @@
         </p:nvSpPr>
         <p:spPr>
           <a:xfrm>
-            <a:off x="7150608" y="3483863"/>
-            <a:ext cx="4288536" cy="1892808"/>
+            <a:off x="7187184" y="1956816"/>
+            <a:ext cx="1261872" cy="1234440"/>
+          </a:xfrm>
+          <a:prstGeom prst="rect">
+            <a:avLst/>
+          </a:prstGeom>
+          <a:noFill/>
+        </p:spPr>
+        <p:txBody>
+          <a:bodyPr wrap="square" lIns="18288" rIns="18288">
+            <a:spAutoFit/>
+          </a:bodyPr>
+          <a:lstStyle/>
+          <a:p>
+            <a:pPr>
+              <a:spcAft>
+                <a:spcPts val="200"/>
+              </a:spcAft>
+              <a:defRPr sz="850" b="1">
+                <a:solidFill>
+                  <a:srgbClr val="FF3F6C"/>
+                </a:solidFill>
+              </a:defRPr>
+            </a:pPr>
+            <a:r>
+              <a:t>1. Scrape &amp; Clean</a:t>
+            </a:r>
+          </a:p>
+          <a:p>
+            <a:pPr>
+              <a:lnSpc>
+                <a:spcPct val="110000"/>
+              </a:lnSpc>
+              <a:defRPr sz="750">
+                <a:solidFill>
+                  <a:srgbClr val="282C3F"/>
+                </a:solidFill>
+              </a:defRPr>
+            </a:pPr>
+            <a:r>
+              <a:t>20,250 Raw Reviews</a:t>
+            </a:r>
+          </a:p>
+        </p:txBody>
+      </p:sp>
+      <p:sp>
+        <p:nvSpPr>
+          <p:cNvPr id="11" name="Rounded Rectangle 10"/>
+          <p:cNvSpPr/>
+          <p:nvPr/>
+        </p:nvSpPr>
+        <p:spPr>
+          <a:xfrm>
+            <a:off x="8595360" y="1920240"/>
+            <a:ext cx="1335024" cy="1325880"/>
+          </a:xfrm>
+          <a:prstGeom prst="roundRect">
+            <a:avLst/>
+          </a:prstGeom>
+          <a:solidFill>
+            <a:srgbClr val="FFFFFF"/>
+          </a:solidFill>
+          <a:ln w="12700">
+            <a:solidFill>
+              <a:srgbClr val="EAEAEC"/>
+            </a:solidFill>
+          </a:ln>
+        </p:spPr>
+        <p:style>
+          <a:lnRef idx="1">
+            <a:schemeClr val="accent1"/>
+          </a:lnRef>
+          <a:fillRef idx="3">
+            <a:schemeClr val="accent1"/>
+          </a:fillRef>
+          <a:effectRef idx="2">
+            <a:schemeClr val="accent1"/>
+          </a:effectRef>
+          <a:fontRef idx="minor">
+            <a:schemeClr val="lt1"/>
+          </a:fontRef>
+        </p:style>
+        <p:txBody>
+          <a:bodyPr rtlCol="0" anchor="ctr"/>
+          <a:lstStyle/>
+          <a:p>
+            <a:pPr algn="ctr"/>
+          </a:p>
+        </p:txBody>
+      </p:sp>
+      <p:sp>
+        <p:nvSpPr>
+          <p:cNvPr id="12" name="TextBox 11"/>
+          <p:cNvSpPr txBox="1"/>
+          <p:nvPr/>
+        </p:nvSpPr>
+        <p:spPr>
+          <a:xfrm>
+            <a:off x="8631936" y="1956816"/>
+            <a:ext cx="1261872" cy="1234440"/>
+          </a:xfrm>
+          <a:prstGeom prst="rect">
+            <a:avLst/>
+          </a:prstGeom>
+          <a:noFill/>
+        </p:spPr>
+        <p:txBody>
+          <a:bodyPr wrap="square" lIns="18288" rIns="18288">
+            <a:spAutoFit/>
+          </a:bodyPr>
+          <a:lstStyle/>
+          <a:p>
+            <a:pPr>
+              <a:spcAft>
+                <a:spcPts val="200"/>
+              </a:spcAft>
+              <a:defRPr sz="850" b="1">
+                <a:solidFill>
+                  <a:srgbClr val="FF3F6C"/>
+                </a:solidFill>
+              </a:defRPr>
+            </a:pPr>
+            <a:r>
+              <a:t>2. Vectorize</a:t>
+            </a:r>
+          </a:p>
+          <a:p>
+            <a:pPr>
+              <a:lnSpc>
+                <a:spcPct val="110000"/>
+              </a:lnSpc>
+              <a:defRPr sz="750">
+                <a:solidFill>
+                  <a:srgbClr val="282C3F"/>
+                </a:solidFill>
+              </a:defRPr>
+            </a:pPr>
+            <a:r>
+              <a:t>Sentence-BERT Embeddings</a:t>
+            </a:r>
+          </a:p>
+        </p:txBody>
+      </p:sp>
+      <p:sp>
+        <p:nvSpPr>
+          <p:cNvPr id="13" name="Rounded Rectangle 12"/>
+          <p:cNvSpPr/>
+          <p:nvPr/>
+        </p:nvSpPr>
+        <p:spPr>
+          <a:xfrm>
+            <a:off x="10040112" y="1920240"/>
+            <a:ext cx="1335024" cy="1325880"/>
+          </a:xfrm>
+          <a:prstGeom prst="roundRect">
+            <a:avLst/>
+          </a:prstGeom>
+          <a:solidFill>
+            <a:srgbClr val="FFFFFF"/>
+          </a:solidFill>
+          <a:ln w="12700">
+            <a:solidFill>
+              <a:srgbClr val="EAEAEC"/>
+            </a:solidFill>
+          </a:ln>
+        </p:spPr>
+        <p:style>
+          <a:lnRef idx="1">
+            <a:schemeClr val="accent1"/>
+          </a:lnRef>
+          <a:fillRef idx="3">
+            <a:schemeClr val="accent1"/>
+          </a:fillRef>
+          <a:effectRef idx="2">
+            <a:schemeClr val="accent1"/>
+          </a:effectRef>
+          <a:fontRef idx="minor">
+            <a:schemeClr val="lt1"/>
+          </a:fontRef>
+        </p:style>
+        <p:txBody>
+          <a:bodyPr rtlCol="0" anchor="ctr"/>
+          <a:lstStyle/>
+          <a:p>
+            <a:pPr algn="ctr"/>
+          </a:p>
+        </p:txBody>
+      </p:sp>
+      <p:sp>
+        <p:nvSpPr>
+          <p:cNvPr id="14" name="TextBox 13"/>
+          <p:cNvSpPr txBox="1"/>
+          <p:nvPr/>
+        </p:nvSpPr>
+        <p:spPr>
+          <a:xfrm>
+            <a:off x="10076688" y="1956816"/>
+            <a:ext cx="1261872" cy="1234440"/>
+          </a:xfrm>
+          <a:prstGeom prst="rect">
+            <a:avLst/>
+          </a:prstGeom>
+          <a:noFill/>
+        </p:spPr>
+        <p:txBody>
+          <a:bodyPr wrap="square" lIns="18288" rIns="18288">
+            <a:spAutoFit/>
+          </a:bodyPr>
+          <a:lstStyle/>
+          <a:p>
+            <a:pPr>
+              <a:spcAft>
+                <a:spcPts val="200"/>
+              </a:spcAft>
+              <a:defRPr sz="850" b="1">
+                <a:solidFill>
+                  <a:srgbClr val="FF3F6C"/>
+                </a:solidFill>
+              </a:defRPr>
+            </a:pPr>
+            <a:r>
+              <a:t>3. Synthesis</a:t>
+            </a:r>
+          </a:p>
+          <a:p>
+            <a:pPr>
+              <a:lnSpc>
+                <a:spcPct val="110000"/>
+              </a:lnSpc>
+              <a:defRPr sz="750">
+                <a:solidFill>
+                  <a:srgbClr val="282C3F"/>
+                </a:solidFill>
+              </a:defRPr>
+            </a:pPr>
+            <a:r>
+              <a:t>LLM Intent Extraction</a:t>
+            </a:r>
+          </a:p>
+        </p:txBody>
+      </p:sp>
+      <p:sp>
+        <p:nvSpPr>
+          <p:cNvPr id="15" name="Rounded Rectangle 14"/>
+          <p:cNvSpPr/>
+          <p:nvPr/>
+        </p:nvSpPr>
+        <p:spPr>
+          <a:xfrm>
+            <a:off x="7040880" y="3502152"/>
+            <a:ext cx="4510735" cy="1947672"/>
+          </a:xfrm>
+          <a:prstGeom prst="roundRect">
+            <a:avLst/>
+          </a:prstGeom>
+          <a:solidFill>
+            <a:srgbClr val="FFFFFF"/>
+          </a:solidFill>
+          <a:ln w="12700">
+            <a:solidFill>
+              <a:srgbClr val="EAEAEC"/>
+            </a:solidFill>
+          </a:ln>
+        </p:spPr>
+        <p:style>
+          <a:lnRef idx="1">
+            <a:schemeClr val="accent1"/>
+          </a:lnRef>
+          <a:fillRef idx="3">
+            <a:schemeClr val="accent1"/>
+          </a:fillRef>
+          <a:effectRef idx="2">
+            <a:schemeClr val="accent1"/>
+          </a:effectRef>
+          <a:fontRef idx="minor">
+            <a:schemeClr val="lt1"/>
+          </a:fontRef>
+        </p:style>
+        <p:txBody>
+          <a:bodyPr rtlCol="0" anchor="ctr"/>
+          <a:lstStyle/>
+          <a:p>
+            <a:pPr algn="ctr"/>
+          </a:p>
+        </p:txBody>
+      </p:sp>
+      <p:sp>
+        <p:nvSpPr>
+          <p:cNvPr id="16" name="TextBox 15"/>
+          <p:cNvSpPr txBox="1"/>
+          <p:nvPr/>
+        </p:nvSpPr>
+        <p:spPr>
+          <a:xfrm>
+            <a:off x="7150608" y="3575304"/>
+            <a:ext cx="4288536" cy="1801368"/>
           </a:xfrm>
           <a:prstGeom prst="rect">
             <a:avLst/>
@@ -8841,7 +9279,7 @@
       </p:sp>
       <p:sp>
         <p:nvSpPr>
-          <p:cNvPr id="11" name="Rounded Rectangle 10"/>
+          <p:cNvPr id="17" name="Rounded Rectangle 16"/>
           <p:cNvSpPr/>
           <p:nvPr/>
         </p:nvSpPr>
@@ -8886,7 +9324,7 @@
       </p:sp>
       <p:sp>
         <p:nvSpPr>
-          <p:cNvPr id="12" name="TextBox 11"/>
+          <p:cNvPr id="18" name="TextBox 17"/>
           <p:cNvSpPr txBox="1"/>
           <p:nvPr/>
         </p:nvSpPr>
@@ -8942,7 +9380,7 @@
       </p:sp>
       <p:sp>
         <p:nvSpPr>
-          <p:cNvPr id="13" name="Rounded Rectangle 12"/>
+          <p:cNvPr id="19" name="Rounded Rectangle 18"/>
           <p:cNvSpPr/>
           <p:nvPr/>
         </p:nvSpPr>
@@ -9002,7 +9440,7 @@
       </p:sp>
       <p:sp>
         <p:nvSpPr>
-          <p:cNvPr id="14" name="Rounded Rectangle 13"/>
+          <p:cNvPr id="20" name="Rounded Rectangle 19"/>
           <p:cNvSpPr/>
           <p:nvPr/>
         </p:nvSpPr>
@@ -9062,7 +9500,7 @@
       </p:sp>
       <p:sp>
         <p:nvSpPr>
-          <p:cNvPr id="15" name="Rounded Rectangle 14"/>
+          <p:cNvPr id="21" name="Rounded Rectangle 20"/>
           <p:cNvSpPr/>
           <p:nvPr/>
         </p:nvSpPr>
@@ -9122,7 +9560,7 @@
       </p:sp>
       <p:sp>
         <p:nvSpPr>
-          <p:cNvPr id="16" name="Rounded Rectangle 15"/>
+          <p:cNvPr id="22" name="Rounded Rectangle 21"/>
           <p:cNvSpPr/>
           <p:nvPr/>
         </p:nvSpPr>
@@ -9182,7 +9620,7 @@
       </p:sp>
       <p:sp>
         <p:nvSpPr>
-          <p:cNvPr id="17" name="Rounded Rectangle 16"/>
+          <p:cNvPr id="23" name="Rounded Rectangle 22"/>
           <p:cNvSpPr/>
           <p:nvPr/>
         </p:nvSpPr>
@@ -9242,7 +9680,7 @@
       </p:sp>
       <p:sp>
         <p:nvSpPr>
-          <p:cNvPr id="18" name="Rounded Rectangle 17"/>
+          <p:cNvPr id="24" name="Rounded Rectangle 23"/>
           <p:cNvSpPr/>
           <p:nvPr/>
         </p:nvSpPr>
@@ -9302,7 +9740,7 @@
       </p:sp>
       <p:sp>
         <p:nvSpPr>
-          <p:cNvPr id="19" name="Rounded Rectangle 18"/>
+          <p:cNvPr id="25" name="Rounded Rectangle 24"/>
           <p:cNvSpPr/>
           <p:nvPr/>
         </p:nvSpPr>
@@ -9362,7 +9800,7 @@
       </p:sp>
       <p:sp>
         <p:nvSpPr>
-          <p:cNvPr id="20" name="Rounded Rectangle 19"/>
+          <p:cNvPr id="26" name="Rounded Rectangle 25"/>
           <p:cNvSpPr/>
           <p:nvPr/>
         </p:nvSpPr>
@@ -9422,7 +9860,7 @@
       </p:sp>
       <p:sp>
         <p:nvSpPr>
-          <p:cNvPr id="21" name="Rounded Rectangle 20"/>
+          <p:cNvPr id="27" name="Rounded Rectangle 26"/>
           <p:cNvSpPr/>
           <p:nvPr/>
         </p:nvSpPr>
@@ -9482,7 +9920,7 @@
       </p:sp>
       <p:sp>
         <p:nvSpPr>
-          <p:cNvPr id="22" name="Rounded Rectangle 21"/>
+          <p:cNvPr id="28" name="Rounded Rectangle 27"/>
           <p:cNvSpPr/>
           <p:nvPr/>
         </p:nvSpPr>
@@ -15377,14 +15815,49 @@
       </p:sp>
       <p:sp>
         <p:nvSpPr>
-          <p:cNvPr id="5" name="Rounded Rectangle 4"/>
+          <p:cNvPr id="5" name="TextBox 4"/>
+          <p:cNvSpPr txBox="1"/>
+          <p:nvPr/>
+        </p:nvSpPr>
+        <p:spPr>
+          <a:xfrm>
+            <a:off x="640080" y="1499616"/>
+            <a:ext cx="10911535" cy="292608"/>
+          </a:xfrm>
+          <a:prstGeom prst="rect">
+            <a:avLst/>
+          </a:prstGeom>
+          <a:noFill/>
+        </p:spPr>
+        <p:txBody>
+          <a:bodyPr wrap="square">
+            <a:spAutoFit/>
+          </a:bodyPr>
+          <a:lstStyle/>
+          <a:p>
+            <a:pPr>
+              <a:defRPr sz="1050" b="1">
+                <a:solidFill>
+                  <a:srgbClr val="FF3F6C"/>
+                </a:solidFill>
+              </a:defRPr>
+            </a:pPr>
+            <a:r>
+              <a:t>⚙️ DECISION STUDIO ARCHITECTURE PIPELINE (4-STEP ML FLOW)</a:t>
+            </a:r>
+          </a:p>
+        </p:txBody>
+      </p:sp>
+      <p:sp>
+        <p:nvSpPr>
+          <p:cNvPr id="6" name="Rounded Rectangle 5"/>
           <p:cNvSpPr/>
           <p:nvPr/>
         </p:nvSpPr>
         <p:spPr>
           <a:xfrm>
-            <a:off x="640080" y="1536192"/>
-            <a:ext cx="10911535" cy="1097280"/>
+            <a:off x="640080" y="1828800"/>
+            <a:ext cx="2578608" cy="1078992"/>
           </a:xfrm>
           <a:prstGeom prst="roundRect">
             <a:avLst/>
@@ -15422,14 +15895,14 @@
       </p:sp>
       <p:sp>
         <p:nvSpPr>
-          <p:cNvPr id="6" name="TextBox 5"/>
+          <p:cNvPr id="7" name="TextBox 6"/>
           <p:cNvSpPr txBox="1"/>
           <p:nvPr/>
         </p:nvSpPr>
         <p:spPr>
           <a:xfrm>
-            <a:off x="749808" y="1591056"/>
-            <a:ext cx="10689336" cy="987552"/>
+            <a:off x="694944" y="1865376"/>
+            <a:ext cx="2468880" cy="1005840"/>
           </a:xfrm>
           <a:prstGeom prst="rect">
             <a:avLst/>
@@ -15437,7 +15910,7 @@
           <a:noFill/>
         </p:spPr>
         <p:txBody>
-          <a:bodyPr wrap="square" lIns="73152" rIns="73152">
+          <a:bodyPr wrap="square" lIns="18288" rIns="18288">
             <a:spAutoFit/>
           </a:bodyPr>
           <a:lstStyle/>
@@ -15446,148 +15919,43 @@
               <a:spcAft>
                 <a:spcPts val="200"/>
               </a:spcAft>
-              <a:defRPr sz="1050" b="1">
+              <a:defRPr sz="900" b="1">
                 <a:solidFill>
                   <a:srgbClr val="FF3F6C"/>
                 </a:solidFill>
               </a:defRPr>
             </a:pPr>
             <a:r>
-              <a:t>⚙️ DECISION STUDIO ARCHITECTURE PIPELINE</a:t>
-            </a:r>
-          </a:p>
-          <a:p>
-            <a:pPr marL="177800" indent="-127000">
+              <a:t>1. Event Trigger</a:t>
+            </a:r>
+          </a:p>
+          <a:p>
+            <a:pPr>
               <a:lnSpc>
-                <a:spcPct val="112000"/>
+                <a:spcPct val="110000"/>
               </a:lnSpc>
-              <a:spcBef>
-                <a:spcPts val="100"/>
-              </a:spcBef>
-              <a:spcAft>
-                <a:spcPts val="100"/>
-              </a:spcAft>
-              <a:defRPr sz="850"/>
-            </a:pPr>
-            <a:r>
-              <a:rPr b="1">
+              <a:defRPr sz="750">
                 <a:solidFill>
                   <a:srgbClr val="282C3F"/>
                 </a:solidFill>
-              </a:rPr>
-              <a:t>• 1. Event Trigger: </a:t>
-            </a:r>
-            <a:r>
-              <a:rPr>
-                <a:solidFill>
-                  <a:srgbClr val="282C3F"/>
-                </a:solidFill>
-              </a:rPr>
+              </a:defRPr>
+            </a:pPr>
+            <a:r>
               <a:t>Frontend fires payload on wishlist view containing saved product IDs, timestamp, and category.</a:t>
             </a:r>
           </a:p>
-          <a:p>
-            <a:pPr marL="177800" indent="-127000">
-              <a:lnSpc>
-                <a:spcPct val="112000"/>
-              </a:lnSpc>
-              <a:spcBef>
-                <a:spcPts val="100"/>
-              </a:spcBef>
-              <a:spcAft>
-                <a:spcPts val="100"/>
-              </a:spcAft>
-              <a:defRPr sz="850"/>
-            </a:pPr>
-            <a:r>
-              <a:rPr b="1">
-                <a:solidFill>
-                  <a:srgbClr val="282C3F"/>
-                </a:solidFill>
-              </a:rPr>
-              <a:t>• 2. Inference Engine: </a:t>
-            </a:r>
-            <a:r>
-              <a:rPr>
-                <a:solidFill>
-                  <a:srgbClr val="282C3F"/>
-                </a:solidFill>
-              </a:rPr>
-              <a:t>Review NLP normalizes fabric GSM weight, fit consensus %, and return friction score from 20k reviews.</a:t>
-            </a:r>
-          </a:p>
-          <a:p>
-            <a:pPr marL="177800" indent="-127000">
-              <a:lnSpc>
-                <a:spcPct val="112000"/>
-              </a:lnSpc>
-              <a:spcBef>
-                <a:spcPts val="100"/>
-              </a:spcBef>
-              <a:spcAft>
-                <a:spcPts val="100"/>
-              </a:spcAft>
-              <a:defRPr sz="850"/>
-            </a:pPr>
-            <a:r>
-              <a:rPr b="1">
-                <a:solidFill>
-                  <a:srgbClr val="282C3F"/>
-                </a:solidFill>
-              </a:rPr>
-              <a:t>• 3. Constrained Catalog: </a:t>
-            </a:r>
-            <a:r>
-              <a:rPr>
-                <a:solidFill>
-                  <a:srgbClr val="282C3F"/>
-                </a:solidFill>
-              </a:rPr>
-              <a:t>Maps item to pre-approved, high-margin styling catalog for complete 3-piece look builder.</a:t>
-            </a:r>
-          </a:p>
-          <a:p>
-            <a:pPr marL="177800" indent="-127000">
-              <a:lnSpc>
-                <a:spcPct val="112000"/>
-              </a:lnSpc>
-              <a:spcBef>
-                <a:spcPts val="100"/>
-              </a:spcBef>
-              <a:spcAft>
-                <a:spcPts val="100"/>
-              </a:spcAft>
-              <a:defRPr sz="850"/>
-            </a:pPr>
-            <a:r>
-              <a:rPr b="1">
-                <a:solidFill>
-                  <a:srgbClr val="282C3F"/>
-                </a:solidFill>
-              </a:rPr>
-              <a:t>• 4. Real-time UI Render: </a:t>
-            </a:r>
-            <a:r>
-              <a:rPr>
-                <a:solidFill>
-                  <a:srgbClr val="282C3F"/>
-                </a:solidFill>
-              </a:rPr>
-              <a:t>Returns clean JSON payload and renders interactive Spec Matrix and WhatsApp Poll card in &lt;180ms.</a:t>
-            </a:r>
-          </a:p>
-        </p:txBody>
-      </p:sp>
-      <p:sp>
-        <p:nvSpPr>
-          <p:cNvPr id="7" name="Rounded Rectangle 6"/>
+        </p:txBody>
+      </p:sp>
+      <p:sp>
+        <p:nvSpPr>
+          <p:cNvPr id="8" name="Rounded Rectangle 7"/>
           <p:cNvSpPr/>
           <p:nvPr/>
         </p:nvSpPr>
         <p:spPr>
           <a:xfrm>
-            <a:off x="640080" y="2743200"/>
-            <a:ext cx="3474720" cy="2706624"/>
+            <a:off x="3410712" y="1828800"/>
+            <a:ext cx="2578608" cy="1078992"/>
           </a:xfrm>
           <a:prstGeom prst="roundRect">
             <a:avLst/>
@@ -15625,14 +15993,308 @@
       </p:sp>
       <p:sp>
         <p:nvSpPr>
-          <p:cNvPr id="8" name="TextBox 7"/>
+          <p:cNvPr id="9" name="TextBox 8"/>
           <p:cNvSpPr txBox="1"/>
           <p:nvPr/>
         </p:nvSpPr>
         <p:spPr>
           <a:xfrm>
-            <a:off x="713232" y="2779776"/>
-            <a:ext cx="3328416" cy="365760"/>
+            <a:off x="3465576" y="1865376"/>
+            <a:ext cx="2468880" cy="1005840"/>
+          </a:xfrm>
+          <a:prstGeom prst="rect">
+            <a:avLst/>
+          </a:prstGeom>
+          <a:noFill/>
+        </p:spPr>
+        <p:txBody>
+          <a:bodyPr wrap="square" lIns="18288" rIns="18288">
+            <a:spAutoFit/>
+          </a:bodyPr>
+          <a:lstStyle/>
+          <a:p>
+            <a:pPr>
+              <a:spcAft>
+                <a:spcPts val="200"/>
+              </a:spcAft>
+              <a:defRPr sz="900" b="1">
+                <a:solidFill>
+                  <a:srgbClr val="FF3F6C"/>
+                </a:solidFill>
+              </a:defRPr>
+            </a:pPr>
+            <a:r>
+              <a:t>2. Inference Engine</a:t>
+            </a:r>
+          </a:p>
+          <a:p>
+            <a:pPr>
+              <a:lnSpc>
+                <a:spcPct val="110000"/>
+              </a:lnSpc>
+              <a:defRPr sz="750">
+                <a:solidFill>
+                  <a:srgbClr val="282C3F"/>
+                </a:solidFill>
+              </a:defRPr>
+            </a:pPr>
+            <a:r>
+              <a:t>Review NLP normalizes fabric GSM weight, fit consensus %, and return friction score from 20k reviews.</a:t>
+            </a:r>
+          </a:p>
+        </p:txBody>
+      </p:sp>
+      <p:sp>
+        <p:nvSpPr>
+          <p:cNvPr id="10" name="Rounded Rectangle 9"/>
+          <p:cNvSpPr/>
+          <p:nvPr/>
+        </p:nvSpPr>
+        <p:spPr>
+          <a:xfrm>
+            <a:off x="6181344" y="1828800"/>
+            <a:ext cx="2578608" cy="1078992"/>
+          </a:xfrm>
+          <a:prstGeom prst="roundRect">
+            <a:avLst/>
+          </a:prstGeom>
+          <a:solidFill>
+            <a:srgbClr val="FFFFFF"/>
+          </a:solidFill>
+          <a:ln w="12700">
+            <a:solidFill>
+              <a:srgbClr val="EAEAEC"/>
+            </a:solidFill>
+          </a:ln>
+        </p:spPr>
+        <p:style>
+          <a:lnRef idx="1">
+            <a:schemeClr val="accent1"/>
+          </a:lnRef>
+          <a:fillRef idx="3">
+            <a:schemeClr val="accent1"/>
+          </a:fillRef>
+          <a:effectRef idx="2">
+            <a:schemeClr val="accent1"/>
+          </a:effectRef>
+          <a:fontRef idx="minor">
+            <a:schemeClr val="lt1"/>
+          </a:fontRef>
+        </p:style>
+        <p:txBody>
+          <a:bodyPr rtlCol="0" anchor="ctr"/>
+          <a:lstStyle/>
+          <a:p>
+            <a:pPr algn="ctr"/>
+          </a:p>
+        </p:txBody>
+      </p:sp>
+      <p:sp>
+        <p:nvSpPr>
+          <p:cNvPr id="11" name="TextBox 10"/>
+          <p:cNvSpPr txBox="1"/>
+          <p:nvPr/>
+        </p:nvSpPr>
+        <p:spPr>
+          <a:xfrm>
+            <a:off x="6236208" y="1865376"/>
+            <a:ext cx="2468880" cy="1005840"/>
+          </a:xfrm>
+          <a:prstGeom prst="rect">
+            <a:avLst/>
+          </a:prstGeom>
+          <a:noFill/>
+        </p:spPr>
+        <p:txBody>
+          <a:bodyPr wrap="square" lIns="18288" rIns="18288">
+            <a:spAutoFit/>
+          </a:bodyPr>
+          <a:lstStyle/>
+          <a:p>
+            <a:pPr>
+              <a:spcAft>
+                <a:spcPts val="200"/>
+              </a:spcAft>
+              <a:defRPr sz="900" b="1">
+                <a:solidFill>
+                  <a:srgbClr val="FF3F6C"/>
+                </a:solidFill>
+              </a:defRPr>
+            </a:pPr>
+            <a:r>
+              <a:t>3. Constrained Catalog</a:t>
+            </a:r>
+          </a:p>
+          <a:p>
+            <a:pPr>
+              <a:lnSpc>
+                <a:spcPct val="110000"/>
+              </a:lnSpc>
+              <a:defRPr sz="750">
+                <a:solidFill>
+                  <a:srgbClr val="282C3F"/>
+                </a:solidFill>
+              </a:defRPr>
+            </a:pPr>
+            <a:r>
+              <a:t>Maps item to pre-approved, high-margin styling catalog for complete 3-piece look builder.</a:t>
+            </a:r>
+          </a:p>
+        </p:txBody>
+      </p:sp>
+      <p:sp>
+        <p:nvSpPr>
+          <p:cNvPr id="12" name="Rounded Rectangle 11"/>
+          <p:cNvSpPr/>
+          <p:nvPr/>
+        </p:nvSpPr>
+        <p:spPr>
+          <a:xfrm>
+            <a:off x="8951976" y="1828800"/>
+            <a:ext cx="2578608" cy="1078992"/>
+          </a:xfrm>
+          <a:prstGeom prst="roundRect">
+            <a:avLst/>
+          </a:prstGeom>
+          <a:solidFill>
+            <a:srgbClr val="FFFFFF"/>
+          </a:solidFill>
+          <a:ln w="12700">
+            <a:solidFill>
+              <a:srgbClr val="EAEAEC"/>
+            </a:solidFill>
+          </a:ln>
+        </p:spPr>
+        <p:style>
+          <a:lnRef idx="1">
+            <a:schemeClr val="accent1"/>
+          </a:lnRef>
+          <a:fillRef idx="3">
+            <a:schemeClr val="accent1"/>
+          </a:fillRef>
+          <a:effectRef idx="2">
+            <a:schemeClr val="accent1"/>
+          </a:effectRef>
+          <a:fontRef idx="minor">
+            <a:schemeClr val="lt1"/>
+          </a:fontRef>
+        </p:style>
+        <p:txBody>
+          <a:bodyPr rtlCol="0" anchor="ctr"/>
+          <a:lstStyle/>
+          <a:p>
+            <a:pPr algn="ctr"/>
+          </a:p>
+        </p:txBody>
+      </p:sp>
+      <p:sp>
+        <p:nvSpPr>
+          <p:cNvPr id="13" name="TextBox 12"/>
+          <p:cNvSpPr txBox="1"/>
+          <p:nvPr/>
+        </p:nvSpPr>
+        <p:spPr>
+          <a:xfrm>
+            <a:off x="9006840" y="1865376"/>
+            <a:ext cx="2468880" cy="1005840"/>
+          </a:xfrm>
+          <a:prstGeom prst="rect">
+            <a:avLst/>
+          </a:prstGeom>
+          <a:noFill/>
+        </p:spPr>
+        <p:txBody>
+          <a:bodyPr wrap="square" lIns="18288" rIns="18288">
+            <a:spAutoFit/>
+          </a:bodyPr>
+          <a:lstStyle/>
+          <a:p>
+            <a:pPr>
+              <a:spcAft>
+                <a:spcPts val="200"/>
+              </a:spcAft>
+              <a:defRPr sz="900" b="1">
+                <a:solidFill>
+                  <a:srgbClr val="FF3F6C"/>
+                </a:solidFill>
+              </a:defRPr>
+            </a:pPr>
+            <a:r>
+              <a:t>4. Real-time UI Render</a:t>
+            </a:r>
+          </a:p>
+          <a:p>
+            <a:pPr>
+              <a:lnSpc>
+                <a:spcPct val="110000"/>
+              </a:lnSpc>
+              <a:defRPr sz="750">
+                <a:solidFill>
+                  <a:srgbClr val="282C3F"/>
+                </a:solidFill>
+              </a:defRPr>
+            </a:pPr>
+            <a:r>
+              <a:t>Returns clean JSON payload and renders interactive Spec Matrix and WhatsApp Poll card in &lt;180ms.</a:t>
+            </a:r>
+          </a:p>
+        </p:txBody>
+      </p:sp>
+      <p:sp>
+        <p:nvSpPr>
+          <p:cNvPr id="14" name="Rounded Rectangle 13"/>
+          <p:cNvSpPr/>
+          <p:nvPr/>
+        </p:nvSpPr>
+        <p:spPr>
+          <a:xfrm>
+            <a:off x="640080" y="2999232"/>
+            <a:ext cx="3474720" cy="2450592"/>
+          </a:xfrm>
+          <a:prstGeom prst="roundRect">
+            <a:avLst/>
+          </a:prstGeom>
+          <a:solidFill>
+            <a:srgbClr val="FFFFFF"/>
+          </a:solidFill>
+          <a:ln w="12700">
+            <a:solidFill>
+              <a:srgbClr val="EAEAEC"/>
+            </a:solidFill>
+          </a:ln>
+        </p:spPr>
+        <p:style>
+          <a:lnRef idx="1">
+            <a:schemeClr val="accent1"/>
+          </a:lnRef>
+          <a:fillRef idx="3">
+            <a:schemeClr val="accent1"/>
+          </a:fillRef>
+          <a:effectRef idx="2">
+            <a:schemeClr val="accent1"/>
+          </a:effectRef>
+          <a:fontRef idx="minor">
+            <a:schemeClr val="lt1"/>
+          </a:fontRef>
+        </p:style>
+        <p:txBody>
+          <a:bodyPr rtlCol="0" anchor="ctr"/>
+          <a:lstStyle/>
+          <a:p>
+            <a:pPr algn="ctr"/>
+          </a:p>
+        </p:txBody>
+      </p:sp>
+      <p:sp>
+        <p:nvSpPr>
+          <p:cNvPr id="15" name="TextBox 14"/>
+          <p:cNvSpPr txBox="1"/>
+          <p:nvPr/>
+        </p:nvSpPr>
+        <p:spPr>
+          <a:xfrm>
+            <a:off x="713232" y="3035808"/>
+            <a:ext cx="3328416" cy="347472"/>
           </a:xfrm>
           <a:prstGeom prst="rect">
             <a:avLst/>
@@ -15660,7 +16322,7 @@
       </p:sp>
       <p:pic>
         <p:nvPicPr>
-          <p:cNvPr id="9" name="Picture 8" descr="01_Figma_Mobile_Spec_Comparison_Matrix.png"/>
+          <p:cNvPr id="16" name="Picture 15" descr="01_Figma_Mobile_Spec_Comparison_Matrix.png"/>
           <p:cNvPicPr>
             <a:picLocks noChangeAspect="1"/>
           </p:cNvPicPr>
@@ -15674,8 +16336,8 @@
         </p:blipFill>
         <p:spPr>
           <a:xfrm>
-            <a:off x="749808" y="3127248"/>
-            <a:ext cx="3255264" cy="2240280"/>
+            <a:off x="749808" y="3364992"/>
+            <a:ext cx="3255264" cy="2011680"/>
           </a:xfrm>
           <a:prstGeom prst="rect">
             <a:avLst/>
@@ -15684,14 +16346,14 @@
       </p:pic>
       <p:sp>
         <p:nvSpPr>
-          <p:cNvPr id="10" name="Rounded Rectangle 9"/>
+          <p:cNvPr id="17" name="Rounded Rectangle 16"/>
           <p:cNvSpPr/>
           <p:nvPr/>
         </p:nvSpPr>
         <p:spPr>
           <a:xfrm>
-            <a:off x="4352544" y="2743200"/>
-            <a:ext cx="3474720" cy="2706624"/>
+            <a:off x="4352544" y="2999232"/>
+            <a:ext cx="3474720" cy="2450592"/>
           </a:xfrm>
           <a:prstGeom prst="roundRect">
             <a:avLst/>
@@ -15729,14 +16391,14 @@
       </p:sp>
       <p:sp>
         <p:nvSpPr>
-          <p:cNvPr id="11" name="TextBox 10"/>
+          <p:cNvPr id="18" name="TextBox 17"/>
           <p:cNvSpPr txBox="1"/>
           <p:nvPr/>
         </p:nvSpPr>
         <p:spPr>
           <a:xfrm>
-            <a:off x="4425696" y="2779776"/>
-            <a:ext cx="3328416" cy="365760"/>
+            <a:off x="4425696" y="3035808"/>
+            <a:ext cx="3328416" cy="347472"/>
           </a:xfrm>
           <a:prstGeom prst="rect">
             <a:avLst/>
@@ -15764,7 +16426,7 @@
       </p:sp>
       <p:pic>
         <p:nvPicPr>
-          <p:cNvPr id="12" name="Picture 11" descr="02_Figma_Mobile_AI_Outfit_Coordinator.png"/>
+          <p:cNvPr id="19" name="Picture 18" descr="02_Figma_Mobile_AI_Outfit_Coordinator.png"/>
           <p:cNvPicPr>
             <a:picLocks noChangeAspect="1"/>
           </p:cNvPicPr>
@@ -15778,8 +16440,8 @@
         </p:blipFill>
         <p:spPr>
           <a:xfrm>
-            <a:off x="4462272" y="3127248"/>
-            <a:ext cx="3255264" cy="2240280"/>
+            <a:off x="4462272" y="3364992"/>
+            <a:ext cx="3255264" cy="2011680"/>
           </a:xfrm>
           <a:prstGeom prst="rect">
             <a:avLst/>
@@ -15788,14 +16450,14 @@
       </p:pic>
       <p:sp>
         <p:nvSpPr>
-          <p:cNvPr id="13" name="Rounded Rectangle 12"/>
+          <p:cNvPr id="20" name="Rounded Rectangle 19"/>
           <p:cNvSpPr/>
           <p:nvPr/>
         </p:nvSpPr>
         <p:spPr>
           <a:xfrm>
-            <a:off x="8065008" y="2743200"/>
-            <a:ext cx="3474720" cy="2706624"/>
+            <a:off x="8065008" y="2999232"/>
+            <a:ext cx="3474720" cy="2450592"/>
           </a:xfrm>
           <a:prstGeom prst="roundRect">
             <a:avLst/>
@@ -15833,14 +16495,14 @@
       </p:sp>
       <p:sp>
         <p:nvSpPr>
-          <p:cNvPr id="14" name="TextBox 13"/>
+          <p:cNvPr id="21" name="TextBox 20"/>
           <p:cNvSpPr txBox="1"/>
           <p:nvPr/>
         </p:nvSpPr>
         <p:spPr>
           <a:xfrm>
-            <a:off x="8138160" y="2779776"/>
-            <a:ext cx="3328416" cy="365760"/>
+            <a:off x="8138160" y="3035808"/>
+            <a:ext cx="3328416" cy="347472"/>
           </a:xfrm>
           <a:prstGeom prst="rect">
             <a:avLst/>
@@ -15868,7 +16530,7 @@
       </p:sp>
       <p:pic>
         <p:nvPicPr>
-          <p:cNvPr id="15" name="Picture 14" descr="03_Figma_Mobile_WhatsApp_Voting_Card.png"/>
+          <p:cNvPr id="22" name="Picture 21" descr="03_Figma_Mobile_WhatsApp_Voting_Card.png"/>
           <p:cNvPicPr>
             <a:picLocks noChangeAspect="1"/>
           </p:cNvPicPr>
@@ -15882,8 +16544,8 @@
         </p:blipFill>
         <p:spPr>
           <a:xfrm>
-            <a:off x="8174736" y="3127248"/>
-            <a:ext cx="3255264" cy="2240280"/>
+            <a:off x="8174736" y="3364992"/>
+            <a:ext cx="3255264" cy="2011680"/>
           </a:xfrm>
           <a:prstGeom prst="rect">
             <a:avLst/>
@@ -15892,7 +16554,7 @@
       </p:pic>
       <p:sp>
         <p:nvSpPr>
-          <p:cNvPr id="16" name="Rounded Rectangle 15"/>
+          <p:cNvPr id="23" name="Rounded Rectangle 22"/>
           <p:cNvSpPr/>
           <p:nvPr/>
         </p:nvSpPr>
@@ -15937,7 +16599,7 @@
       </p:sp>
       <p:sp>
         <p:nvSpPr>
-          <p:cNvPr id="17" name="TextBox 16"/>
+          <p:cNvPr id="24" name="TextBox 23"/>
           <p:cNvSpPr txBox="1"/>
           <p:nvPr/>
         </p:nvSpPr>
@@ -15993,7 +16655,7 @@
       </p:sp>
       <p:sp>
         <p:nvSpPr>
-          <p:cNvPr id="18" name="Rounded Rectangle 17"/>
+          <p:cNvPr id="25" name="Rounded Rectangle 24"/>
           <p:cNvSpPr/>
           <p:nvPr/>
         </p:nvSpPr>
@@ -16053,7 +16715,7 @@
       </p:sp>
       <p:sp>
         <p:nvSpPr>
-          <p:cNvPr id="19" name="Rounded Rectangle 18"/>
+          <p:cNvPr id="26" name="Rounded Rectangle 25"/>
           <p:cNvSpPr/>
           <p:nvPr/>
         </p:nvSpPr>
@@ -16113,7 +16775,7 @@
       </p:sp>
       <p:sp>
         <p:nvSpPr>
-          <p:cNvPr id="20" name="Rounded Rectangle 19"/>
+          <p:cNvPr id="27" name="Rounded Rectangle 26"/>
           <p:cNvSpPr/>
           <p:nvPr/>
         </p:nvSpPr>
@@ -16173,7 +16835,7 @@
       </p:sp>
       <p:sp>
         <p:nvSpPr>
-          <p:cNvPr id="21" name="Rounded Rectangle 20"/>
+          <p:cNvPr id="28" name="Rounded Rectangle 27"/>
           <p:cNvSpPr/>
           <p:nvPr/>
         </p:nvSpPr>
@@ -16233,7 +16895,7 @@
       </p:sp>
       <p:sp>
         <p:nvSpPr>
-          <p:cNvPr id="22" name="Rounded Rectangle 21"/>
+          <p:cNvPr id="29" name="Rounded Rectangle 28"/>
           <p:cNvSpPr/>
           <p:nvPr/>
         </p:nvSpPr>
@@ -16293,7 +16955,7 @@
       </p:sp>
       <p:sp>
         <p:nvSpPr>
-          <p:cNvPr id="23" name="Rounded Rectangle 22"/>
+          <p:cNvPr id="30" name="Rounded Rectangle 29"/>
           <p:cNvSpPr/>
           <p:nvPr/>
         </p:nvSpPr>
@@ -16353,7 +17015,7 @@
       </p:sp>
       <p:sp>
         <p:nvSpPr>
-          <p:cNvPr id="24" name="Rounded Rectangle 23"/>
+          <p:cNvPr id="31" name="Rounded Rectangle 30"/>
           <p:cNvSpPr/>
           <p:nvPr/>
         </p:nvSpPr>
@@ -16413,7 +17075,7 @@
       </p:sp>
       <p:sp>
         <p:nvSpPr>
-          <p:cNvPr id="25" name="Rounded Rectangle 24"/>
+          <p:cNvPr id="32" name="Rounded Rectangle 31"/>
           <p:cNvSpPr/>
           <p:nvPr/>
         </p:nvSpPr>
@@ -16473,7 +17135,7 @@
       </p:sp>
       <p:sp>
         <p:nvSpPr>
-          <p:cNvPr id="26" name="Rounded Rectangle 25"/>
+          <p:cNvPr id="33" name="Rounded Rectangle 32"/>
           <p:cNvSpPr/>
           <p:nvPr/>
         </p:nvSpPr>
@@ -16533,7 +17195,7 @@
       </p:sp>
       <p:sp>
         <p:nvSpPr>
-          <p:cNvPr id="27" name="Rounded Rectangle 26"/>
+          <p:cNvPr id="34" name="Rounded Rectangle 33"/>
           <p:cNvSpPr/>
           <p:nvPr/>
         </p:nvSpPr>

--- a/Myntra_Wishlist_Studio_10_Slide_Deck_Updated.pptx
+++ b/Myntra_Wishlist_Studio_10_Slide_Deck_Updated.pptx
@@ -3105,8 +3105,8 @@
         </p:nvSpPr>
         <p:spPr>
           <a:xfrm>
-            <a:off x="3124047" y="182880"/>
-            <a:ext cx="5943600" cy="329184"/>
+            <a:off x="2666847" y="164592"/>
+            <a:ext cx="6858000" cy="384048"/>
           </a:xfrm>
           <a:prstGeom prst="roundRect">
             <a:avLst/>
@@ -3143,7 +3143,7 @@
               <a:spcAft>
                 <a:spcPts val="0"/>
               </a:spcAft>
-              <a:defRPr sz="950" b="1">
+              <a:defRPr sz="1400" b="1">
                 <a:solidFill>
                   <a:srgbClr val="FFFFFF"/>
                 </a:solidFill>
@@ -3163,8 +3163,8 @@
         </p:nvSpPr>
         <p:spPr>
           <a:xfrm>
-            <a:off x="640080" y="585216"/>
-            <a:ext cx="9601200" cy="777240"/>
+            <a:off x="594360" y="594360"/>
+            <a:ext cx="9875520" cy="777240"/>
           </a:xfrm>
           <a:prstGeom prst="rect">
             <a:avLst/>
@@ -3181,7 +3181,7 @@
               <a:spcAft>
                 <a:spcPts val="200"/>
               </a:spcAft>
-              <a:defRPr sz="1350" b="1">
+              <a:defRPr sz="1800" b="1">
                 <a:solidFill>
                   <a:srgbClr val="282C3F"/>
                 </a:solidFill>
@@ -3199,7 +3199,7 @@
               <a:spcAft>
                 <a:spcPts val="400"/>
               </a:spcAft>
-              <a:defRPr sz="1000" b="1">
+              <a:defRPr sz="1400" b="1">
                 <a:solidFill>
                   <a:srgbClr val="FF3F6C"/>
                 </a:solidFill>
@@ -3219,7 +3219,7 @@
         </p:nvSpPr>
         <p:spPr>
           <a:xfrm>
-            <a:off x="10424160" y="585216"/>
+            <a:off x="10424160" y="594360"/>
             <a:ext cx="1188720" cy="457200"/>
           </a:xfrm>
           <a:prstGeom prst="rect">
@@ -3234,7 +3234,7 @@
           <a:lstStyle/>
           <a:p>
             <a:pPr algn="r">
-              <a:defRPr sz="2200" b="1">
+              <a:defRPr sz="2400" b="1">
                 <a:solidFill>
                   <a:srgbClr val="FF3F6C"/>
                 </a:solidFill>
@@ -3254,7 +3254,7 @@
         </p:nvSpPr>
         <p:spPr>
           <a:xfrm>
-            <a:off x="640080" y="1444752"/>
+            <a:off x="594360" y="1417320"/>
             <a:ext cx="3931920" cy="3794760"/>
           </a:xfrm>
           <a:prstGeom prst="roundRect">
@@ -3263,7 +3263,7 @@
           <a:solidFill>
             <a:srgbClr val="FFFFFF"/>
           </a:solidFill>
-          <a:ln w="12700">
+          <a:ln w="19050">
             <a:solidFill>
               <a:srgbClr val="EAEAEC"/>
             </a:solidFill>
@@ -3299,8 +3299,8 @@
         </p:nvSpPr>
         <p:spPr>
           <a:xfrm>
-            <a:off x="749808" y="1536192"/>
-            <a:ext cx="3712464" cy="3611880"/>
+            <a:off x="704088" y="1490472"/>
+            <a:ext cx="3712464" cy="3648456"/>
           </a:xfrm>
           <a:prstGeom prst="rect">
             <a:avLst/>
@@ -3308,16 +3308,16 @@
           <a:noFill/>
         </p:spPr>
         <p:txBody>
-          <a:bodyPr wrap="square" lIns="73152" rIns="73152" tIns="54864" bIns="54864">
+          <a:bodyPr wrap="square" lIns="54864" rIns="54864">
             <a:spAutoFit/>
           </a:bodyPr>
           <a:lstStyle/>
           <a:p>
             <a:pPr>
               <a:spcAft>
-                <a:spcPts val="600"/>
-              </a:spcAft>
-              <a:defRPr sz="1100" b="1">
+                <a:spcPts val="400"/>
+              </a:spcAft>
+              <a:defRPr sz="1500" b="1">
                 <a:solidFill>
                   <a:srgbClr val="FF3F6C"/>
                 </a:solidFill>
@@ -3336,9 +3336,9 @@
                 <a:spcPts val="200"/>
               </a:spcBef>
               <a:spcAft>
-                <a:spcPts val="400"/>
-              </a:spcAft>
-              <a:defRPr sz="950"/>
+                <a:spcPts val="300"/>
+              </a:spcAft>
+              <a:defRPr sz="1400"/>
             </a:pPr>
             <a:r>
               <a:rPr b="1">
@@ -3374,9 +3374,9 @@
                 <a:spcPts val="200"/>
               </a:spcBef>
               <a:spcAft>
-                <a:spcPts val="400"/>
-              </a:spcAft>
-              <a:defRPr sz="950"/>
+                <a:spcPts val="300"/>
+              </a:spcAft>
+              <a:defRPr sz="1400"/>
             </a:pPr>
             <a:r>
               <a:rPr b="1">
@@ -3412,9 +3412,9 @@
                 <a:spcPts val="200"/>
               </a:spcBef>
               <a:spcAft>
-                <a:spcPts val="400"/>
-              </a:spcAft>
-              <a:defRPr sz="950"/>
+                <a:spcPts val="300"/>
+              </a:spcAft>
+              <a:defRPr sz="1400"/>
             </a:pPr>
             <a:r>
               <a:rPr b="1">
@@ -3450,9 +3450,9 @@
                 <a:spcPts val="200"/>
               </a:spcBef>
               <a:spcAft>
-                <a:spcPts val="400"/>
-              </a:spcAft>
-              <a:defRPr sz="950"/>
+                <a:spcPts val="300"/>
+              </a:spcAft>
+              <a:defRPr sz="1400"/>
             </a:pPr>
             <a:r>
               <a:rPr b="1">
@@ -3489,8 +3489,8 @@
         </p:nvSpPr>
         <p:spPr>
           <a:xfrm>
-            <a:off x="4709160" y="1444752"/>
-            <a:ext cx="4251960" cy="3794760"/>
+            <a:off x="4663440" y="1417320"/>
+            <a:ext cx="4389120" cy="3794760"/>
           </a:xfrm>
           <a:prstGeom prst="roundRect">
             <a:avLst/>
@@ -3498,7 +3498,7 @@
           <a:solidFill>
             <a:srgbClr val="FFF0F4"/>
           </a:solidFill>
-          <a:ln w="12700">
+          <a:ln w="19050">
             <a:solidFill>
               <a:srgbClr val="FFC2D1"/>
             </a:solidFill>
@@ -3534,8 +3534,8 @@
         </p:nvSpPr>
         <p:spPr>
           <a:xfrm>
-            <a:off x="4818888" y="1536192"/>
-            <a:ext cx="4032504" cy="3611880"/>
+            <a:off x="4773168" y="1490472"/>
+            <a:ext cx="4169664" cy="3648456"/>
           </a:xfrm>
           <a:prstGeom prst="rect">
             <a:avLst/>
@@ -3543,7 +3543,7 @@
           <a:noFill/>
         </p:spPr>
         <p:txBody>
-          <a:bodyPr wrap="square" lIns="54864" rIns="54864" tIns="54864" bIns="54864">
+          <a:bodyPr wrap="square" lIns="54864" rIns="54864">
             <a:spAutoFit/>
           </a:bodyPr>
           <a:lstStyle/>
@@ -3552,7 +3552,7 @@
               <a:spcAft>
                 <a:spcPts val="400"/>
               </a:spcAft>
-              <a:defRPr sz="1100" b="1">
+              <a:defRPr sz="1500" b="1">
                 <a:solidFill>
                   <a:srgbClr val="FF3F6C"/>
                 </a:solidFill>
@@ -3571,9 +3571,9 @@
                 <a:spcPts val="200"/>
               </a:spcBef>
               <a:spcAft>
-                <a:spcPts val="300"/>
-              </a:spcAft>
-              <a:defRPr sz="919"/>
+                <a:spcPts val="200"/>
+              </a:spcAft>
+              <a:defRPr sz="1400"/>
             </a:pPr>
             <a:r>
               <a:rPr b="1">
@@ -3601,9 +3601,9 @@
                 <a:spcPts val="200"/>
               </a:spcBef>
               <a:spcAft>
-                <a:spcPts val="300"/>
-              </a:spcAft>
-              <a:defRPr sz="919"/>
+                <a:spcPts val="200"/>
+              </a:spcAft>
+              <a:defRPr sz="1400"/>
             </a:pPr>
             <a:r>
               <a:rPr b="1">
@@ -3631,9 +3631,9 @@
                 <a:spcPts val="200"/>
               </a:spcBef>
               <a:spcAft>
-                <a:spcPts val="300"/>
-              </a:spcAft>
-              <a:defRPr sz="919"/>
+                <a:spcPts val="200"/>
+              </a:spcAft>
+              <a:defRPr sz="1400"/>
             </a:pPr>
             <a:r>
               <a:rPr b="1">
@@ -3661,9 +3661,9 @@
                 <a:spcPts val="200"/>
               </a:spcBef>
               <a:spcAft>
-                <a:spcPts val="300"/>
-              </a:spcAft>
-              <a:defRPr sz="919"/>
+                <a:spcPts val="200"/>
+              </a:spcAft>
+              <a:defRPr sz="1400"/>
             </a:pPr>
             <a:r>
               <a:rPr b="1">
@@ -3691,9 +3691,9 @@
                 <a:spcPts val="200"/>
               </a:spcBef>
               <a:spcAft>
-                <a:spcPts val="300"/>
-              </a:spcAft>
-              <a:defRPr sz="919"/>
+                <a:spcPts val="200"/>
+              </a:spcAft>
+              <a:defRPr sz="1400"/>
             </a:pPr>
             <a:r>
               <a:rPr b="1">
@@ -3722,8 +3722,8 @@
         </p:nvSpPr>
         <p:spPr>
           <a:xfrm>
-            <a:off x="9098280" y="1444752"/>
-            <a:ext cx="2450592" cy="3794760"/>
+            <a:off x="9189720" y="1417320"/>
+            <a:ext cx="2404872" cy="3794760"/>
           </a:xfrm>
           <a:prstGeom prst="roundRect">
             <a:avLst/>
@@ -3731,7 +3731,7 @@
           <a:solidFill>
             <a:srgbClr val="282C3F"/>
           </a:solidFill>
-          <a:ln w="12700">
+          <a:ln w="19050">
             <a:solidFill>
               <a:srgbClr val="0F172A"/>
             </a:solidFill>
@@ -3775,8 +3775,8 @@
         </p:blipFill>
         <p:spPr>
           <a:xfrm>
-            <a:off x="9153144" y="1499616"/>
-            <a:ext cx="2340864" cy="3685032"/>
+            <a:off x="9244584" y="1472184"/>
+            <a:ext cx="2295144" cy="3685032"/>
           </a:xfrm>
           <a:prstGeom prst="rect">
             <a:avLst/>
@@ -3791,8 +3791,8 @@
         </p:nvSpPr>
         <p:spPr>
           <a:xfrm>
-            <a:off x="640080" y="5376672"/>
-            <a:ext cx="2615184" cy="1051560"/>
+            <a:off x="594360" y="5349240"/>
+            <a:ext cx="2633472" cy="1234440"/>
           </a:xfrm>
           <a:prstGeom prst="roundRect">
             <a:avLst/>
@@ -3800,7 +3800,7 @@
           <a:solidFill>
             <a:srgbClr val="FFFFFF"/>
           </a:solidFill>
-          <a:ln w="12700">
+          <a:ln w="19050">
             <a:solidFill>
               <a:srgbClr val="EAEAEC"/>
             </a:solidFill>
@@ -3836,8 +3836,8 @@
         </p:nvSpPr>
         <p:spPr>
           <a:xfrm>
-            <a:off x="640080" y="5468112"/>
-            <a:ext cx="2615184" cy="868680"/>
+            <a:off x="594360" y="5422392"/>
+            <a:ext cx="2633472" cy="1088136"/>
           </a:xfrm>
           <a:prstGeom prst="rect">
             <a:avLst/>
@@ -3851,7 +3851,7 @@
           <a:lstStyle/>
           <a:p>
             <a:pPr algn="ctr">
-              <a:defRPr sz="1600" b="1">
+              <a:defRPr sz="2400" b="1">
                 <a:solidFill>
                   <a:srgbClr val="FF3F6C"/>
                 </a:solidFill>
@@ -3866,7 +3866,7 @@
               <a:spcBef>
                 <a:spcPts val="200"/>
               </a:spcBef>
-              <a:defRPr sz="900" b="1">
+              <a:defRPr sz="1400" b="1">
                 <a:solidFill>
                   <a:srgbClr val="535766"/>
                 </a:solidFill>
@@ -3886,8 +3886,8 @@
         </p:nvSpPr>
         <p:spPr>
           <a:xfrm>
-            <a:off x="3401568" y="5376672"/>
-            <a:ext cx="2615184" cy="1051560"/>
+            <a:off x="3383280" y="5349240"/>
+            <a:ext cx="2633472" cy="1234440"/>
           </a:xfrm>
           <a:prstGeom prst="roundRect">
             <a:avLst/>
@@ -3895,7 +3895,7 @@
           <a:solidFill>
             <a:srgbClr val="FFFFFF"/>
           </a:solidFill>
-          <a:ln w="12700">
+          <a:ln w="19050">
             <a:solidFill>
               <a:srgbClr val="EAEAEC"/>
             </a:solidFill>
@@ -3931,8 +3931,8 @@
         </p:nvSpPr>
         <p:spPr>
           <a:xfrm>
-            <a:off x="3401568" y="5468112"/>
-            <a:ext cx="2615184" cy="868680"/>
+            <a:off x="3383280" y="5422392"/>
+            <a:ext cx="2633472" cy="1088136"/>
           </a:xfrm>
           <a:prstGeom prst="rect">
             <a:avLst/>
@@ -3946,7 +3946,7 @@
           <a:lstStyle/>
           <a:p>
             <a:pPr algn="ctr">
-              <a:defRPr sz="1600" b="1">
+              <a:defRPr sz="2400" b="1">
                 <a:solidFill>
                   <a:srgbClr val="FF3F6C"/>
                 </a:solidFill>
@@ -3961,7 +3961,7 @@
               <a:spcBef>
                 <a:spcPts val="200"/>
               </a:spcBef>
-              <a:defRPr sz="900" b="1">
+              <a:defRPr sz="1400" b="1">
                 <a:solidFill>
                   <a:srgbClr val="535766"/>
                 </a:solidFill>
@@ -3981,8 +3981,8 @@
         </p:nvSpPr>
         <p:spPr>
           <a:xfrm>
-            <a:off x="6163056" y="5376672"/>
-            <a:ext cx="2615184" cy="1051560"/>
+            <a:off x="6172200" y="5349240"/>
+            <a:ext cx="2633472" cy="1234440"/>
           </a:xfrm>
           <a:prstGeom prst="roundRect">
             <a:avLst/>
@@ -3990,7 +3990,7 @@
           <a:solidFill>
             <a:srgbClr val="FFFFFF"/>
           </a:solidFill>
-          <a:ln w="12700">
+          <a:ln w="19050">
             <a:solidFill>
               <a:srgbClr val="EAEAEC"/>
             </a:solidFill>
@@ -4026,8 +4026,8 @@
         </p:nvSpPr>
         <p:spPr>
           <a:xfrm>
-            <a:off x="6163056" y="5468112"/>
-            <a:ext cx="2615184" cy="868680"/>
+            <a:off x="6172200" y="5422392"/>
+            <a:ext cx="2633472" cy="1088136"/>
           </a:xfrm>
           <a:prstGeom prst="rect">
             <a:avLst/>
@@ -4041,7 +4041,7 @@
           <a:lstStyle/>
           <a:p>
             <a:pPr algn="ctr">
-              <a:defRPr sz="1600" b="1">
+              <a:defRPr sz="2400" b="1">
                 <a:solidFill>
                   <a:srgbClr val="FF3F6C"/>
                 </a:solidFill>
@@ -4056,7 +4056,7 @@
               <a:spcBef>
                 <a:spcPts val="200"/>
               </a:spcBef>
-              <a:defRPr sz="900" b="1">
+              <a:defRPr sz="1400" b="1">
                 <a:solidFill>
                   <a:srgbClr val="535766"/>
                 </a:solidFill>
@@ -4076,8 +4076,8 @@
         </p:nvSpPr>
         <p:spPr>
           <a:xfrm>
-            <a:off x="8924544" y="5376672"/>
-            <a:ext cx="2615184" cy="1051560"/>
+            <a:off x="8961120" y="5349240"/>
+            <a:ext cx="2633472" cy="1234440"/>
           </a:xfrm>
           <a:prstGeom prst="roundRect">
             <a:avLst/>
@@ -4085,7 +4085,7 @@
           <a:solidFill>
             <a:srgbClr val="FFFFFF"/>
           </a:solidFill>
-          <a:ln w="12700">
+          <a:ln w="19050">
             <a:solidFill>
               <a:srgbClr val="EAEAEC"/>
             </a:solidFill>
@@ -4121,8 +4121,8 @@
         </p:nvSpPr>
         <p:spPr>
           <a:xfrm>
-            <a:off x="8924544" y="5468112"/>
-            <a:ext cx="2615184" cy="868680"/>
+            <a:off x="8961120" y="5422392"/>
+            <a:ext cx="2633472" cy="1088136"/>
           </a:xfrm>
           <a:prstGeom prst="rect">
             <a:avLst/>
@@ -4136,7 +4136,7 @@
           <a:lstStyle/>
           <a:p>
             <a:pPr algn="ctr">
-              <a:defRPr sz="1600" b="1">
+              <a:defRPr sz="2400" b="1">
                 <a:solidFill>
                   <a:srgbClr val="FF3F6C"/>
                 </a:solidFill>
@@ -4151,7 +4151,7 @@
               <a:spcBef>
                 <a:spcPts val="200"/>
               </a:spcBef>
-              <a:defRPr sz="900" b="1">
+              <a:defRPr sz="1400" b="1">
                 <a:solidFill>
                   <a:srgbClr val="535766"/>
                 </a:solidFill>
@@ -4189,8 +4189,8 @@
         </p:nvSpPr>
         <p:spPr>
           <a:xfrm>
-            <a:off x="3124047" y="182880"/>
-            <a:ext cx="5943600" cy="329184"/>
+            <a:off x="2666847" y="164592"/>
+            <a:ext cx="6858000" cy="384048"/>
           </a:xfrm>
           <a:prstGeom prst="roundRect">
             <a:avLst/>
@@ -4227,7 +4227,7 @@
               <a:spcAft>
                 <a:spcPts val="0"/>
               </a:spcAft>
-              <a:defRPr sz="950" b="1">
+              <a:defRPr sz="1400" b="1">
                 <a:solidFill>
                   <a:srgbClr val="FFFFFF"/>
                 </a:solidFill>
@@ -4247,8 +4247,8 @@
         </p:nvSpPr>
         <p:spPr>
           <a:xfrm>
-            <a:off x="640080" y="585216"/>
-            <a:ext cx="9601200" cy="777240"/>
+            <a:off x="594360" y="594360"/>
+            <a:ext cx="9875520" cy="777240"/>
           </a:xfrm>
           <a:prstGeom prst="rect">
             <a:avLst/>
@@ -4265,7 +4265,7 @@
               <a:spcAft>
                 <a:spcPts val="200"/>
               </a:spcAft>
-              <a:defRPr sz="1350" b="1">
+              <a:defRPr sz="1800" b="1">
                 <a:solidFill>
                   <a:srgbClr val="282C3F"/>
                 </a:solidFill>
@@ -4283,7 +4283,7 @@
               <a:spcAft>
                 <a:spcPts val="400"/>
               </a:spcAft>
-              <a:defRPr sz="1000" b="1">
+              <a:defRPr sz="1400" b="1">
                 <a:solidFill>
                   <a:srgbClr val="FF3F6C"/>
                 </a:solidFill>
@@ -4303,7 +4303,7 @@
         </p:nvSpPr>
         <p:spPr>
           <a:xfrm>
-            <a:off x="10424160" y="585216"/>
+            <a:off x="10424160" y="594360"/>
             <a:ext cx="1188720" cy="457200"/>
           </a:xfrm>
           <a:prstGeom prst="rect">
@@ -4318,7 +4318,7 @@
           <a:lstStyle/>
           <a:p>
             <a:pPr algn="r">
-              <a:defRPr sz="2200" b="1">
+              <a:defRPr sz="2400" b="1">
                 <a:solidFill>
                   <a:srgbClr val="FF3F6C"/>
                 </a:solidFill>
@@ -4338,8 +4338,8 @@
         </p:nvSpPr>
         <p:spPr>
           <a:xfrm>
-            <a:off x="640080" y="1444752"/>
-            <a:ext cx="3529584" cy="2487168"/>
+            <a:off x="594360" y="1417320"/>
+            <a:ext cx="3566160" cy="2514600"/>
           </a:xfrm>
           <a:prstGeom prst="roundRect">
             <a:avLst/>
@@ -4347,7 +4347,7 @@
           <a:solidFill>
             <a:srgbClr val="FFFFFF"/>
           </a:solidFill>
-          <a:ln w="12700">
+          <a:ln w="19050">
             <a:solidFill>
               <a:srgbClr val="EAEAEC"/>
             </a:solidFill>
@@ -4383,8 +4383,8 @@
         </p:nvSpPr>
         <p:spPr>
           <a:xfrm>
-            <a:off x="713232" y="1499616"/>
-            <a:ext cx="3383280" cy="2377440"/>
+            <a:off x="667512" y="1472184"/>
+            <a:ext cx="3419856" cy="2404872"/>
           </a:xfrm>
           <a:prstGeom prst="rect">
             <a:avLst/>
@@ -4401,7 +4401,7 @@
               <a:spcAft>
                 <a:spcPts val="200"/>
               </a:spcAft>
-              <a:defRPr sz="980" b="1">
+              <a:defRPr sz="1500" b="1">
                 <a:solidFill>
                   <a:srgbClr val="FF3F6C"/>
                 </a:solidFill>
@@ -4414,12 +4414,12 @@
           <a:p>
             <a:pPr marL="127000" indent="0">
               <a:lnSpc>
-                <a:spcPct val="112000"/>
+                <a:spcPct val="114000"/>
               </a:lnSpc>
               <a:spcAft>
                 <a:spcPts val="200"/>
               </a:spcAft>
-              <a:defRPr sz="850"/>
+              <a:defRPr sz="1400"/>
             </a:pPr>
             <a:r>
               <a:rPr b="1">
@@ -4441,12 +4441,12 @@
           <a:p>
             <a:pPr marL="127000" indent="0">
               <a:lnSpc>
-                <a:spcPct val="112000"/>
+                <a:spcPct val="114000"/>
               </a:lnSpc>
               <a:spcAft>
                 <a:spcPts val="0"/>
               </a:spcAft>
-              <a:defRPr sz="850"/>
+              <a:defRPr sz="1400"/>
             </a:pPr>
             <a:r>
               <a:rPr b="1">
@@ -4475,8 +4475,8 @@
         </p:nvSpPr>
         <p:spPr>
           <a:xfrm>
-            <a:off x="4325112" y="1444752"/>
-            <a:ext cx="3529584" cy="2487168"/>
+            <a:off x="4306824" y="1417320"/>
+            <a:ext cx="3566160" cy="2514600"/>
           </a:xfrm>
           <a:prstGeom prst="roundRect">
             <a:avLst/>
@@ -4484,7 +4484,7 @@
           <a:solidFill>
             <a:srgbClr val="FFFFFF"/>
           </a:solidFill>
-          <a:ln w="12700">
+          <a:ln w="19050">
             <a:solidFill>
               <a:srgbClr val="EAEAEC"/>
             </a:solidFill>
@@ -4520,8 +4520,8 @@
         </p:nvSpPr>
         <p:spPr>
           <a:xfrm>
-            <a:off x="4398264" y="1499616"/>
-            <a:ext cx="3383280" cy="2377440"/>
+            <a:off x="4379976" y="1472184"/>
+            <a:ext cx="3419856" cy="2404872"/>
           </a:xfrm>
           <a:prstGeom prst="rect">
             <a:avLst/>
@@ -4538,7 +4538,7 @@
               <a:spcAft>
                 <a:spcPts val="200"/>
               </a:spcAft>
-              <a:defRPr sz="980" b="1">
+              <a:defRPr sz="1500" b="1">
                 <a:solidFill>
                   <a:srgbClr val="FF3F6C"/>
                 </a:solidFill>
@@ -4551,12 +4551,12 @@
           <a:p>
             <a:pPr marL="127000" indent="0">
               <a:lnSpc>
-                <a:spcPct val="112000"/>
+                <a:spcPct val="114000"/>
               </a:lnSpc>
               <a:spcAft>
                 <a:spcPts val="200"/>
               </a:spcAft>
-              <a:defRPr sz="850"/>
+              <a:defRPr sz="1400"/>
             </a:pPr>
             <a:r>
               <a:rPr b="1">
@@ -4578,12 +4578,12 @@
           <a:p>
             <a:pPr marL="127000" indent="0">
               <a:lnSpc>
-                <a:spcPct val="112000"/>
+                <a:spcPct val="114000"/>
               </a:lnSpc>
               <a:spcAft>
                 <a:spcPts val="0"/>
               </a:spcAft>
-              <a:defRPr sz="850"/>
+              <a:defRPr sz="1400"/>
             </a:pPr>
             <a:r>
               <a:rPr b="1">
@@ -4612,8 +4612,8 @@
         </p:nvSpPr>
         <p:spPr>
           <a:xfrm>
-            <a:off x="8010144" y="1444752"/>
-            <a:ext cx="3529584" cy="2487168"/>
+            <a:off x="8019288" y="1417320"/>
+            <a:ext cx="3566160" cy="2514600"/>
           </a:xfrm>
           <a:prstGeom prst="roundRect">
             <a:avLst/>
@@ -4621,7 +4621,7 @@
           <a:solidFill>
             <a:srgbClr val="FFFFFF"/>
           </a:solidFill>
-          <a:ln w="12700">
+          <a:ln w="19050">
             <a:solidFill>
               <a:srgbClr val="EAEAEC"/>
             </a:solidFill>
@@ -4657,8 +4657,8 @@
         </p:nvSpPr>
         <p:spPr>
           <a:xfrm>
-            <a:off x="8083296" y="1499616"/>
-            <a:ext cx="3383280" cy="2377440"/>
+            <a:off x="8092440" y="1472184"/>
+            <a:ext cx="3419856" cy="2404872"/>
           </a:xfrm>
           <a:prstGeom prst="rect">
             <a:avLst/>
@@ -4675,7 +4675,7 @@
               <a:spcAft>
                 <a:spcPts val="200"/>
               </a:spcAft>
-              <a:defRPr sz="980" b="1">
+              <a:defRPr sz="1500" b="1">
                 <a:solidFill>
                   <a:srgbClr val="FF3F6C"/>
                 </a:solidFill>
@@ -4688,12 +4688,12 @@
           <a:p>
             <a:pPr marL="127000" indent="0">
               <a:lnSpc>
-                <a:spcPct val="112000"/>
+                <a:spcPct val="114000"/>
               </a:lnSpc>
               <a:spcAft>
                 <a:spcPts val="200"/>
               </a:spcAft>
-              <a:defRPr sz="850"/>
+              <a:defRPr sz="1400"/>
             </a:pPr>
             <a:r>
               <a:rPr b="1">
@@ -4715,12 +4715,12 @@
           <a:p>
             <a:pPr marL="127000" indent="0">
               <a:lnSpc>
-                <a:spcPct val="112000"/>
+                <a:spcPct val="114000"/>
               </a:lnSpc>
               <a:spcAft>
                 <a:spcPts val="0"/>
               </a:spcAft>
-              <a:defRPr sz="850"/>
+              <a:defRPr sz="1400"/>
             </a:pPr>
             <a:r>
               <a:rPr b="1">
@@ -4749,8 +4749,8 @@
         </p:nvSpPr>
         <p:spPr>
           <a:xfrm>
-            <a:off x="640080" y="4096512"/>
-            <a:ext cx="3529584" cy="2487168"/>
+            <a:off x="594360" y="4096512"/>
+            <a:ext cx="3566160" cy="2514600"/>
           </a:xfrm>
           <a:prstGeom prst="roundRect">
             <a:avLst/>
@@ -4758,7 +4758,7 @@
           <a:solidFill>
             <a:srgbClr val="FFF0F4"/>
           </a:solidFill>
-          <a:ln w="12700">
+          <a:ln w="19050">
             <a:solidFill>
               <a:srgbClr val="FFC2D1"/>
             </a:solidFill>
@@ -4794,8 +4794,8 @@
         </p:nvSpPr>
         <p:spPr>
           <a:xfrm>
-            <a:off x="713232" y="4151376"/>
-            <a:ext cx="3383280" cy="2377440"/>
+            <a:off x="667512" y="4151376"/>
+            <a:ext cx="3419856" cy="2404872"/>
           </a:xfrm>
           <a:prstGeom prst="rect">
             <a:avLst/>
@@ -4812,7 +4812,7 @@
               <a:spcAft>
                 <a:spcPts val="200"/>
               </a:spcAft>
-              <a:defRPr sz="980" b="1">
+              <a:defRPr sz="1500" b="1">
                 <a:solidFill>
                   <a:srgbClr val="FF3F6C"/>
                 </a:solidFill>
@@ -4825,12 +4825,12 @@
           <a:p>
             <a:pPr marL="127000" indent="0">
               <a:lnSpc>
-                <a:spcPct val="112000"/>
+                <a:spcPct val="114000"/>
               </a:lnSpc>
               <a:spcAft>
                 <a:spcPts val="200"/>
               </a:spcAft>
-              <a:defRPr sz="850"/>
+              <a:defRPr sz="1400"/>
             </a:pPr>
             <a:r>
               <a:rPr b="1">
@@ -4852,12 +4852,12 @@
           <a:p>
             <a:pPr marL="127000" indent="0">
               <a:lnSpc>
-                <a:spcPct val="112000"/>
+                <a:spcPct val="114000"/>
               </a:lnSpc>
               <a:spcAft>
                 <a:spcPts val="200"/>
               </a:spcAft>
-              <a:defRPr sz="850"/>
+              <a:defRPr sz="1400"/>
             </a:pPr>
             <a:r>
               <a:rPr b="1">
@@ -4879,12 +4879,12 @@
           <a:p>
             <a:pPr marL="127000" indent="0">
               <a:lnSpc>
-                <a:spcPct val="112000"/>
+                <a:spcPct val="114000"/>
               </a:lnSpc>
               <a:spcAft>
                 <a:spcPts val="0"/>
               </a:spcAft>
-              <a:defRPr sz="850"/>
+              <a:defRPr sz="1400"/>
             </a:pPr>
             <a:r>
               <a:rPr b="1">
@@ -4913,8 +4913,8 @@
         </p:nvSpPr>
         <p:spPr>
           <a:xfrm>
-            <a:off x="4325112" y="4096512"/>
-            <a:ext cx="3529584" cy="2487168"/>
+            <a:off x="4306824" y="4096512"/>
+            <a:ext cx="3566160" cy="2514600"/>
           </a:xfrm>
           <a:prstGeom prst="roundRect">
             <a:avLst/>
@@ -4922,7 +4922,7 @@
           <a:solidFill>
             <a:srgbClr val="FFF0F4"/>
           </a:solidFill>
-          <a:ln w="12700">
+          <a:ln w="19050">
             <a:solidFill>
               <a:srgbClr val="FFC2D1"/>
             </a:solidFill>
@@ -4958,8 +4958,8 @@
         </p:nvSpPr>
         <p:spPr>
           <a:xfrm>
-            <a:off x="4398264" y="4151376"/>
-            <a:ext cx="3383280" cy="2377440"/>
+            <a:off x="4379976" y="4151376"/>
+            <a:ext cx="3419856" cy="2404872"/>
           </a:xfrm>
           <a:prstGeom prst="rect">
             <a:avLst/>
@@ -4976,7 +4976,7 @@
               <a:spcAft>
                 <a:spcPts val="200"/>
               </a:spcAft>
-              <a:defRPr sz="980" b="1">
+              <a:defRPr sz="1500" b="1">
                 <a:solidFill>
                   <a:srgbClr val="FF3F6C"/>
                 </a:solidFill>
@@ -4989,12 +4989,12 @@
           <a:p>
             <a:pPr marL="127000" indent="0">
               <a:lnSpc>
-                <a:spcPct val="112000"/>
+                <a:spcPct val="114000"/>
               </a:lnSpc>
               <a:spcAft>
                 <a:spcPts val="200"/>
               </a:spcAft>
-              <a:defRPr sz="850"/>
+              <a:defRPr sz="1400"/>
             </a:pPr>
             <a:r>
               <a:rPr b="1">
@@ -5016,12 +5016,12 @@
           <a:p>
             <a:pPr marL="127000" indent="0">
               <a:lnSpc>
-                <a:spcPct val="112000"/>
+                <a:spcPct val="114000"/>
               </a:lnSpc>
               <a:spcAft>
                 <a:spcPts val="200"/>
               </a:spcAft>
-              <a:defRPr sz="850"/>
+              <a:defRPr sz="1400"/>
             </a:pPr>
             <a:r>
               <a:rPr b="1">
@@ -5043,12 +5043,12 @@
           <a:p>
             <a:pPr marL="127000" indent="0">
               <a:lnSpc>
-                <a:spcPct val="112000"/>
+                <a:spcPct val="114000"/>
               </a:lnSpc>
               <a:spcAft>
                 <a:spcPts val="0"/>
               </a:spcAft>
-              <a:defRPr sz="850"/>
+              <a:defRPr sz="1400"/>
             </a:pPr>
             <a:r>
               <a:rPr b="1">
@@ -5077,8 +5077,8 @@
         </p:nvSpPr>
         <p:spPr>
           <a:xfrm>
-            <a:off x="8010144" y="4096512"/>
-            <a:ext cx="3529584" cy="2487168"/>
+            <a:off x="8019288" y="4096512"/>
+            <a:ext cx="3566160" cy="2514600"/>
           </a:xfrm>
           <a:prstGeom prst="roundRect">
             <a:avLst/>
@@ -5086,7 +5086,7 @@
           <a:solidFill>
             <a:srgbClr val="FFF0F4"/>
           </a:solidFill>
-          <a:ln w="12700">
+          <a:ln w="19050">
             <a:solidFill>
               <a:srgbClr val="FFC2D1"/>
             </a:solidFill>
@@ -5122,8 +5122,8 @@
         </p:nvSpPr>
         <p:spPr>
           <a:xfrm>
-            <a:off x="8083296" y="4151376"/>
-            <a:ext cx="3383280" cy="2377440"/>
+            <a:off x="8092440" y="4151376"/>
+            <a:ext cx="3419856" cy="2404872"/>
           </a:xfrm>
           <a:prstGeom prst="rect">
             <a:avLst/>
@@ -5140,7 +5140,7 @@
               <a:spcAft>
                 <a:spcPts val="200"/>
               </a:spcAft>
-              <a:defRPr sz="980" b="1">
+              <a:defRPr sz="1500" b="1">
                 <a:solidFill>
                   <a:srgbClr val="FF3F6C"/>
                 </a:solidFill>
@@ -5153,12 +5153,12 @@
           <a:p>
             <a:pPr marL="127000" indent="0">
               <a:lnSpc>
-                <a:spcPct val="112000"/>
+                <a:spcPct val="114000"/>
               </a:lnSpc>
               <a:spcAft>
                 <a:spcPts val="200"/>
               </a:spcAft>
-              <a:defRPr sz="850"/>
+              <a:defRPr sz="1400"/>
             </a:pPr>
             <a:r>
               <a:rPr b="1">
@@ -5180,12 +5180,12 @@
           <a:p>
             <a:pPr marL="127000" indent="0">
               <a:lnSpc>
-                <a:spcPct val="112000"/>
+                <a:spcPct val="114000"/>
               </a:lnSpc>
               <a:spcAft>
                 <a:spcPts val="200"/>
               </a:spcAft>
-              <a:defRPr sz="850"/>
+              <a:defRPr sz="1400"/>
             </a:pPr>
             <a:r>
               <a:rPr b="1">
@@ -5207,12 +5207,12 @@
           <a:p>
             <a:pPr marL="127000" indent="0">
               <a:lnSpc>
-                <a:spcPct val="112000"/>
+                <a:spcPct val="114000"/>
               </a:lnSpc>
               <a:spcAft>
                 <a:spcPts val="0"/>
               </a:spcAft>
-              <a:defRPr sz="850"/>
+              <a:defRPr sz="1400"/>
             </a:pPr>
             <a:r>
               <a:rPr b="1">
@@ -5259,8 +5259,8 @@
         </p:nvSpPr>
         <p:spPr>
           <a:xfrm>
-            <a:off x="3124047" y="182880"/>
-            <a:ext cx="5943600" cy="329184"/>
+            <a:off x="2666847" y="164592"/>
+            <a:ext cx="6858000" cy="384048"/>
           </a:xfrm>
           <a:prstGeom prst="roundRect">
             <a:avLst/>
@@ -5297,7 +5297,7 @@
               <a:spcAft>
                 <a:spcPts val="0"/>
               </a:spcAft>
-              <a:defRPr sz="950" b="1">
+              <a:defRPr sz="1400" b="1">
                 <a:solidFill>
                   <a:srgbClr val="FFFFFF"/>
                 </a:solidFill>
@@ -5317,8 +5317,8 @@
         </p:nvSpPr>
         <p:spPr>
           <a:xfrm>
-            <a:off x="640080" y="585216"/>
-            <a:ext cx="9601200" cy="777240"/>
+            <a:off x="594360" y="594360"/>
+            <a:ext cx="9875520" cy="777240"/>
           </a:xfrm>
           <a:prstGeom prst="rect">
             <a:avLst/>
@@ -5335,7 +5335,7 @@
               <a:spcAft>
                 <a:spcPts val="200"/>
               </a:spcAft>
-              <a:defRPr sz="1350" b="1">
+              <a:defRPr sz="1800" b="1">
                 <a:solidFill>
                   <a:srgbClr val="282C3F"/>
                 </a:solidFill>
@@ -5353,7 +5353,7 @@
               <a:spcAft>
                 <a:spcPts val="400"/>
               </a:spcAft>
-              <a:defRPr sz="1000" b="1">
+              <a:defRPr sz="1400" b="1">
                 <a:solidFill>
                   <a:srgbClr val="FF3F6C"/>
                 </a:solidFill>
@@ -5373,7 +5373,7 @@
         </p:nvSpPr>
         <p:spPr>
           <a:xfrm>
-            <a:off x="10424160" y="585216"/>
+            <a:off x="10424160" y="594360"/>
             <a:ext cx="1188720" cy="457200"/>
           </a:xfrm>
           <a:prstGeom prst="rect">
@@ -5388,7 +5388,7 @@
           <a:lstStyle/>
           <a:p>
             <a:pPr algn="r">
-              <a:defRPr sz="2200" b="1">
+              <a:defRPr sz="2400" b="1">
                 <a:solidFill>
                   <a:srgbClr val="FF3F6C"/>
                 </a:solidFill>
@@ -5408,8 +5408,8 @@
         </p:nvSpPr>
         <p:spPr>
           <a:xfrm>
-            <a:off x="640080" y="1444752"/>
-            <a:ext cx="4114800" cy="1371600"/>
+            <a:off x="594360" y="1417320"/>
+            <a:ext cx="4114800" cy="1463040"/>
           </a:xfrm>
           <a:prstGeom prst="roundRect">
             <a:avLst/>
@@ -5417,7 +5417,7 @@
           <a:solidFill>
             <a:srgbClr val="FFFFFF"/>
           </a:solidFill>
-          <a:ln w="12700">
+          <a:ln w="19050">
             <a:solidFill>
               <a:srgbClr val="EAEAEC"/>
             </a:solidFill>
@@ -5453,8 +5453,8 @@
         </p:nvSpPr>
         <p:spPr>
           <a:xfrm>
-            <a:off x="749808" y="1517904"/>
-            <a:ext cx="3895344" cy="1225296"/>
+            <a:off x="704088" y="1490472"/>
+            <a:ext cx="3895344" cy="1316736"/>
           </a:xfrm>
           <a:prstGeom prst="rect">
             <a:avLst/>
@@ -5471,7 +5471,7 @@
               <a:spcAft>
                 <a:spcPts val="200"/>
               </a:spcAft>
-              <a:defRPr sz="1050" b="1">
+              <a:defRPr sz="1500" b="1">
                 <a:solidFill>
                   <a:srgbClr val="FF3F6C"/>
                 </a:solidFill>
@@ -5486,7 +5486,7 @@
               <a:lnSpc>
                 <a:spcPct val="115000"/>
               </a:lnSpc>
-              <a:defRPr sz="900">
+              <a:defRPr sz="1400">
                 <a:solidFill>
                   <a:srgbClr val="282C3F"/>
                 </a:solidFill>
@@ -5506,8 +5506,8 @@
         </p:nvSpPr>
         <p:spPr>
           <a:xfrm>
-            <a:off x="4892040" y="1444752"/>
-            <a:ext cx="6659575" cy="1371600"/>
+            <a:off x="4846320" y="1417320"/>
+            <a:ext cx="6751015" cy="1463040"/>
           </a:xfrm>
           <a:prstGeom prst="roundRect">
             <a:avLst/>
@@ -5515,7 +5515,7 @@
           <a:solidFill>
             <a:srgbClr val="FFFFFF"/>
           </a:solidFill>
-          <a:ln w="12700">
+          <a:ln w="19050">
             <a:solidFill>
               <a:srgbClr val="EAEAEC"/>
             </a:solidFill>
@@ -5551,8 +5551,8 @@
         </p:nvSpPr>
         <p:spPr>
           <a:xfrm>
-            <a:off x="5001768" y="1499616"/>
-            <a:ext cx="6440119" cy="274320"/>
+            <a:off x="4956048" y="1472184"/>
+            <a:ext cx="6531559" cy="320040"/>
           </a:xfrm>
           <a:prstGeom prst="rect">
             <a:avLst/>
@@ -5566,7 +5566,7 @@
           <a:lstStyle/>
           <a:p>
             <a:pPr>
-              <a:defRPr sz="1000" b="1">
+              <a:defRPr sz="1500" b="1">
                 <a:solidFill>
                   <a:srgbClr val="FF3F6C"/>
                 </a:solidFill>
@@ -5586,8 +5586,8 @@
         </p:nvSpPr>
         <p:spPr>
           <a:xfrm>
-            <a:off x="5001768" y="1792224"/>
-            <a:ext cx="1536192" cy="932688"/>
+            <a:off x="4956048" y="1801368"/>
+            <a:ext cx="1572768" cy="987552"/>
           </a:xfrm>
           <a:prstGeom prst="roundRect">
             <a:avLst/>
@@ -5595,7 +5595,7 @@
           <a:solidFill>
             <a:srgbClr val="FFF0F4"/>
           </a:solidFill>
-          <a:ln w="12700">
+          <a:ln w="19050">
             <a:solidFill>
               <a:srgbClr val="FFC2D1"/>
             </a:solidFill>
@@ -5631,8 +5631,8 @@
         </p:nvSpPr>
         <p:spPr>
           <a:xfrm>
-            <a:off x="5038344" y="1810512"/>
-            <a:ext cx="1463040" cy="877824"/>
+            <a:off x="4992624" y="1819656"/>
+            <a:ext cx="1499616" cy="932688"/>
           </a:xfrm>
           <a:prstGeom prst="rect">
             <a:avLst/>
@@ -5649,7 +5649,7 @@
               <a:spcAft>
                 <a:spcPts val="100"/>
               </a:spcAft>
-              <a:defRPr sz="850" b="1">
+              <a:defRPr sz="1400" b="1">
                 <a:solidFill>
                   <a:srgbClr val="FF3F6C"/>
                 </a:solidFill>
@@ -5662,9 +5662,9 @@
           <a:p>
             <a:pPr>
               <a:lnSpc>
-                <a:spcPct val="108000"/>
+                <a:spcPct val="110000"/>
               </a:lnSpc>
-              <a:defRPr sz="750">
+              <a:defRPr sz="1400">
                 <a:solidFill>
                   <a:srgbClr val="282C3F"/>
                 </a:solidFill>
@@ -5684,8 +5684,8 @@
         </p:nvSpPr>
         <p:spPr>
           <a:xfrm>
-            <a:off x="6629400" y="1792224"/>
-            <a:ext cx="1536192" cy="932688"/>
+            <a:off x="6620256" y="1801368"/>
+            <a:ext cx="1572768" cy="987552"/>
           </a:xfrm>
           <a:prstGeom prst="roundRect">
             <a:avLst/>
@@ -5693,7 +5693,7 @@
           <a:solidFill>
             <a:srgbClr val="FFF0F4"/>
           </a:solidFill>
-          <a:ln w="12700">
+          <a:ln w="19050">
             <a:solidFill>
               <a:srgbClr val="FFC2D1"/>
             </a:solidFill>
@@ -5729,8 +5729,8 @@
         </p:nvSpPr>
         <p:spPr>
           <a:xfrm>
-            <a:off x="6665976" y="1810512"/>
-            <a:ext cx="1463040" cy="877824"/>
+            <a:off x="6656832" y="1819656"/>
+            <a:ext cx="1499616" cy="932688"/>
           </a:xfrm>
           <a:prstGeom prst="rect">
             <a:avLst/>
@@ -5747,7 +5747,7 @@
               <a:spcAft>
                 <a:spcPts val="100"/>
               </a:spcAft>
-              <a:defRPr sz="850" b="1">
+              <a:defRPr sz="1400" b="1">
                 <a:solidFill>
                   <a:srgbClr val="FF3F6C"/>
                 </a:solidFill>
@@ -5760,9 +5760,9 @@
           <a:p>
             <a:pPr>
               <a:lnSpc>
-                <a:spcPct val="108000"/>
+                <a:spcPct val="110000"/>
               </a:lnSpc>
-              <a:defRPr sz="750">
+              <a:defRPr sz="1400">
                 <a:solidFill>
                   <a:srgbClr val="282C3F"/>
                 </a:solidFill>
@@ -5782,8 +5782,8 @@
         </p:nvSpPr>
         <p:spPr>
           <a:xfrm>
-            <a:off x="8257032" y="1792224"/>
-            <a:ext cx="1536192" cy="932688"/>
+            <a:off x="8284464" y="1801368"/>
+            <a:ext cx="1572768" cy="987552"/>
           </a:xfrm>
           <a:prstGeom prst="roundRect">
             <a:avLst/>
@@ -5791,7 +5791,7 @@
           <a:solidFill>
             <a:srgbClr val="FFF0F4"/>
           </a:solidFill>
-          <a:ln w="12700">
+          <a:ln w="19050">
             <a:solidFill>
               <a:srgbClr val="FFC2D1"/>
             </a:solidFill>
@@ -5827,8 +5827,8 @@
         </p:nvSpPr>
         <p:spPr>
           <a:xfrm>
-            <a:off x="8293608" y="1810512"/>
-            <a:ext cx="1463040" cy="877824"/>
+            <a:off x="8321040" y="1819656"/>
+            <a:ext cx="1499616" cy="932688"/>
           </a:xfrm>
           <a:prstGeom prst="rect">
             <a:avLst/>
@@ -5845,7 +5845,7 @@
               <a:spcAft>
                 <a:spcPts val="100"/>
               </a:spcAft>
-              <a:defRPr sz="850" b="1">
+              <a:defRPr sz="1400" b="1">
                 <a:solidFill>
                   <a:srgbClr val="FF3F6C"/>
                 </a:solidFill>
@@ -5858,9 +5858,9 @@
           <a:p>
             <a:pPr>
               <a:lnSpc>
-                <a:spcPct val="108000"/>
+                <a:spcPct val="110000"/>
               </a:lnSpc>
-              <a:defRPr sz="750">
+              <a:defRPr sz="1400">
                 <a:solidFill>
                   <a:srgbClr val="282C3F"/>
                 </a:solidFill>
@@ -5880,8 +5880,8 @@
         </p:nvSpPr>
         <p:spPr>
           <a:xfrm>
-            <a:off x="9884664" y="1792224"/>
-            <a:ext cx="1536192" cy="932688"/>
+            <a:off x="9948672" y="1801368"/>
+            <a:ext cx="1572768" cy="987552"/>
           </a:xfrm>
           <a:prstGeom prst="roundRect">
             <a:avLst/>
@@ -5889,7 +5889,7 @@
           <a:solidFill>
             <a:srgbClr val="FFF0F4"/>
           </a:solidFill>
-          <a:ln w="12700">
+          <a:ln w="19050">
             <a:solidFill>
               <a:srgbClr val="FFC2D1"/>
             </a:solidFill>
@@ -5925,8 +5925,8 @@
         </p:nvSpPr>
         <p:spPr>
           <a:xfrm>
-            <a:off x="9921240" y="1810512"/>
-            <a:ext cx="1463040" cy="877824"/>
+            <a:off x="9985248" y="1819656"/>
+            <a:ext cx="1499616" cy="932688"/>
           </a:xfrm>
           <a:prstGeom prst="rect">
             <a:avLst/>
@@ -5943,7 +5943,7 @@
               <a:spcAft>
                 <a:spcPts val="100"/>
               </a:spcAft>
-              <a:defRPr sz="850" b="1">
+              <a:defRPr sz="1400" b="1">
                 <a:solidFill>
                   <a:srgbClr val="FF3F6C"/>
                 </a:solidFill>
@@ -5956,9 +5956,9 @@
           <a:p>
             <a:pPr>
               <a:lnSpc>
-                <a:spcPct val="108000"/>
+                <a:spcPct val="110000"/>
               </a:lnSpc>
-              <a:defRPr sz="750">
+              <a:defRPr sz="1400">
                 <a:solidFill>
                   <a:srgbClr val="282C3F"/>
                 </a:solidFill>
@@ -5978,8 +5978,8 @@
         </p:nvSpPr>
         <p:spPr>
           <a:xfrm>
-            <a:off x="640080" y="2953512"/>
-            <a:ext cx="5303520" cy="3630168"/>
+            <a:off x="594360" y="3017520"/>
+            <a:ext cx="5303520" cy="3593592"/>
           </a:xfrm>
           <a:prstGeom prst="roundRect">
             <a:avLst/>
@@ -5987,7 +5987,7 @@
           <a:solidFill>
             <a:srgbClr val="FFFFFF"/>
           </a:solidFill>
-          <a:ln w="12700">
+          <a:ln w="19050">
             <a:solidFill>
               <a:srgbClr val="EAEAEC"/>
             </a:solidFill>
@@ -6023,7 +6023,7 @@
         </p:nvSpPr>
         <p:spPr>
           <a:xfrm>
-            <a:off x="749808" y="3044952"/>
+            <a:off x="704088" y="3090672"/>
             <a:ext cx="5084064" cy="3447288"/>
           </a:xfrm>
           <a:prstGeom prst="rect">
@@ -6032,7 +6032,7 @@
           <a:noFill/>
         </p:spPr>
         <p:txBody>
-          <a:bodyPr wrap="square" lIns="73152" rIns="73152">
+          <a:bodyPr wrap="square" lIns="54864" rIns="54864">
             <a:spAutoFit/>
           </a:bodyPr>
           <a:lstStyle/>
@@ -6041,7 +6041,7 @@
               <a:spcAft>
                 <a:spcPts val="400"/>
               </a:spcAft>
-              <a:defRPr sz="1050" b="1">
+              <a:defRPr sz="1500" b="1">
                 <a:solidFill>
                   <a:srgbClr val="FF3F6C"/>
                 </a:solidFill>
@@ -6062,7 +6062,7 @@
               <a:spcAft>
                 <a:spcPts val="200"/>
               </a:spcAft>
-              <a:defRPr sz="880"/>
+              <a:defRPr sz="1400"/>
             </a:pPr>
             <a:r>
               <a:rPr b="1">
@@ -6092,7 +6092,7 @@
               <a:spcAft>
                 <a:spcPts val="200"/>
               </a:spcAft>
-              <a:defRPr sz="880"/>
+              <a:defRPr sz="1400"/>
             </a:pPr>
             <a:r>
               <a:rPr b="1">
@@ -6122,7 +6122,7 @@
               <a:spcAft>
                 <a:spcPts val="200"/>
               </a:spcAft>
-              <a:defRPr sz="880"/>
+              <a:defRPr sz="1400"/>
             </a:pPr>
             <a:r>
               <a:rPr b="1">
@@ -6152,7 +6152,7 @@
               <a:spcAft>
                 <a:spcPts val="200"/>
               </a:spcAft>
-              <a:defRPr sz="880"/>
+              <a:defRPr sz="1400"/>
             </a:pPr>
             <a:r>
               <a:rPr b="1">
@@ -6181,8 +6181,8 @@
         </p:nvSpPr>
         <p:spPr>
           <a:xfrm>
-            <a:off x="6080760" y="2953512"/>
-            <a:ext cx="5470855" cy="1149096"/>
+            <a:off x="6035040" y="3017520"/>
+            <a:ext cx="5562295" cy="1136904"/>
           </a:xfrm>
           <a:prstGeom prst="roundRect">
             <a:avLst/>
@@ -6190,7 +6190,7 @@
           <a:solidFill>
             <a:srgbClr val="FFF0F4"/>
           </a:solidFill>
-          <a:ln w="12700">
+          <a:ln w="19050">
             <a:solidFill>
               <a:srgbClr val="FFC2D1"/>
             </a:solidFill>
@@ -6226,8 +6226,8 @@
         </p:nvSpPr>
         <p:spPr>
           <a:xfrm>
-            <a:off x="6190488" y="3008376"/>
-            <a:ext cx="5251399" cy="1039368"/>
+            <a:off x="6144768" y="3072384"/>
+            <a:ext cx="5342839" cy="1027176"/>
           </a:xfrm>
           <a:prstGeom prst="rect">
             <a:avLst/>
@@ -6244,7 +6244,7 @@
               <a:spcAft>
                 <a:spcPts val="200"/>
               </a:spcAft>
-              <a:defRPr sz="1000" b="1">
+              <a:defRPr sz="1500" b="1">
                 <a:solidFill>
                   <a:srgbClr val="FF3F6C"/>
                 </a:solidFill>
@@ -6259,7 +6259,7 @@
               <a:lnSpc>
                 <a:spcPct val="112000"/>
               </a:lnSpc>
-              <a:defRPr sz="880">
+              <a:defRPr sz="1400">
                 <a:solidFill>
                   <a:srgbClr val="282C3F"/>
                 </a:solidFill>
@@ -6279,8 +6279,8 @@
         </p:nvSpPr>
         <p:spPr>
           <a:xfrm>
-            <a:off x="6080760" y="4194048"/>
-            <a:ext cx="5470855" cy="1149096"/>
+            <a:off x="6035040" y="4245864"/>
+            <a:ext cx="5562295" cy="1136904"/>
           </a:xfrm>
           <a:prstGeom prst="roundRect">
             <a:avLst/>
@@ -6288,7 +6288,7 @@
           <a:solidFill>
             <a:srgbClr val="FFF0F4"/>
           </a:solidFill>
-          <a:ln w="12700">
+          <a:ln w="19050">
             <a:solidFill>
               <a:srgbClr val="FFC2D1"/>
             </a:solidFill>
@@ -6324,8 +6324,8 @@
         </p:nvSpPr>
         <p:spPr>
           <a:xfrm>
-            <a:off x="6190488" y="4248912"/>
-            <a:ext cx="5251399" cy="1039368"/>
+            <a:off x="6144768" y="4300728"/>
+            <a:ext cx="5342839" cy="1027176"/>
           </a:xfrm>
           <a:prstGeom prst="rect">
             <a:avLst/>
@@ -6342,7 +6342,7 @@
               <a:spcAft>
                 <a:spcPts val="200"/>
               </a:spcAft>
-              <a:defRPr sz="1000" b="1">
+              <a:defRPr sz="1500" b="1">
                 <a:solidFill>
                   <a:srgbClr val="FF3F6C"/>
                 </a:solidFill>
@@ -6357,7 +6357,7 @@
               <a:lnSpc>
                 <a:spcPct val="112000"/>
               </a:lnSpc>
-              <a:defRPr sz="880">
+              <a:defRPr sz="1400">
                 <a:solidFill>
                   <a:srgbClr val="282C3F"/>
                 </a:solidFill>
@@ -6377,8 +6377,8 @@
         </p:nvSpPr>
         <p:spPr>
           <a:xfrm>
-            <a:off x="6080760" y="5434584"/>
-            <a:ext cx="5470855" cy="1149096"/>
+            <a:off x="6035040" y="5474208"/>
+            <a:ext cx="5562295" cy="1136904"/>
           </a:xfrm>
           <a:prstGeom prst="roundRect">
             <a:avLst/>
@@ -6386,7 +6386,7 @@
           <a:solidFill>
             <a:srgbClr val="FFF0F4"/>
           </a:solidFill>
-          <a:ln w="12700">
+          <a:ln w="19050">
             <a:solidFill>
               <a:srgbClr val="FFC2D1"/>
             </a:solidFill>
@@ -6422,8 +6422,8 @@
         </p:nvSpPr>
         <p:spPr>
           <a:xfrm>
-            <a:off x="6190488" y="5489448"/>
-            <a:ext cx="5251399" cy="1039368"/>
+            <a:off x="6144768" y="5529072"/>
+            <a:ext cx="5342839" cy="1027176"/>
           </a:xfrm>
           <a:prstGeom prst="rect">
             <a:avLst/>
@@ -6440,7 +6440,7 @@
               <a:spcAft>
                 <a:spcPts val="200"/>
               </a:spcAft>
-              <a:defRPr sz="1000" b="1">
+              <a:defRPr sz="1500" b="1">
                 <a:solidFill>
                   <a:srgbClr val="FF3F6C"/>
                 </a:solidFill>
@@ -6455,7 +6455,7 @@
               <a:lnSpc>
                 <a:spcPct val="112000"/>
               </a:lnSpc>
-              <a:defRPr sz="880">
+              <a:defRPr sz="1400">
                 <a:solidFill>
                   <a:srgbClr val="282C3F"/>
                 </a:solidFill>
@@ -6493,8 +6493,8 @@
         </p:nvSpPr>
         <p:spPr>
           <a:xfrm>
-            <a:off x="3124047" y="182880"/>
-            <a:ext cx="5943600" cy="329184"/>
+            <a:off x="2666847" y="164592"/>
+            <a:ext cx="6858000" cy="384048"/>
           </a:xfrm>
           <a:prstGeom prst="roundRect">
             <a:avLst/>
@@ -6531,7 +6531,7 @@
               <a:spcAft>
                 <a:spcPts val="0"/>
               </a:spcAft>
-              <a:defRPr sz="950" b="1">
+              <a:defRPr sz="1400" b="1">
                 <a:solidFill>
                   <a:srgbClr val="FFFFFF"/>
                 </a:solidFill>
@@ -6551,8 +6551,8 @@
         </p:nvSpPr>
         <p:spPr>
           <a:xfrm>
-            <a:off x="640080" y="585216"/>
-            <a:ext cx="9601200" cy="777240"/>
+            <a:off x="594360" y="594360"/>
+            <a:ext cx="9875520" cy="777240"/>
           </a:xfrm>
           <a:prstGeom prst="rect">
             <a:avLst/>
@@ -6569,7 +6569,7 @@
               <a:spcAft>
                 <a:spcPts val="200"/>
               </a:spcAft>
-              <a:defRPr sz="1350" b="1">
+              <a:defRPr sz="1800" b="1">
                 <a:solidFill>
                   <a:srgbClr val="282C3F"/>
                 </a:solidFill>
@@ -6587,7 +6587,7 @@
               <a:spcAft>
                 <a:spcPts val="400"/>
               </a:spcAft>
-              <a:defRPr sz="1000" b="1">
+              <a:defRPr sz="1400" b="1">
                 <a:solidFill>
                   <a:srgbClr val="FF3F6C"/>
                 </a:solidFill>
@@ -6607,7 +6607,7 @@
         </p:nvSpPr>
         <p:spPr>
           <a:xfrm>
-            <a:off x="10424160" y="585216"/>
+            <a:off x="10424160" y="594360"/>
             <a:ext cx="1188720" cy="457200"/>
           </a:xfrm>
           <a:prstGeom prst="rect">
@@ -6622,7 +6622,7 @@
           <a:lstStyle/>
           <a:p>
             <a:pPr algn="r">
-              <a:defRPr sz="2200" b="1">
+              <a:defRPr sz="2400" b="1">
                 <a:solidFill>
                   <a:srgbClr val="FF3F6C"/>
                 </a:solidFill>
@@ -6642,8 +6642,8 @@
         </p:nvSpPr>
         <p:spPr>
           <a:xfrm>
-            <a:off x="640080" y="1444752"/>
-            <a:ext cx="10911535" cy="1188720"/>
+            <a:off x="594360" y="1417320"/>
+            <a:ext cx="11002975" cy="1280160"/>
           </a:xfrm>
           <a:prstGeom prst="roundRect">
             <a:avLst/>
@@ -6651,7 +6651,7 @@
           <a:solidFill>
             <a:srgbClr val="FFF0F4"/>
           </a:solidFill>
-          <a:ln w="12700">
+          <a:ln w="19050">
             <a:solidFill>
               <a:srgbClr val="FFC2D1"/>
             </a:solidFill>
@@ -6687,8 +6687,8 @@
         </p:nvSpPr>
         <p:spPr>
           <a:xfrm>
-            <a:off x="777240" y="1517904"/>
-            <a:ext cx="10637215" cy="1042416"/>
+            <a:off x="704088" y="1490472"/>
+            <a:ext cx="10783519" cy="1133856"/>
           </a:xfrm>
           <a:prstGeom prst="rect">
             <a:avLst/>
@@ -6696,7 +6696,7 @@
           <a:noFill/>
         </p:spPr>
         <p:txBody>
-          <a:bodyPr wrap="square" lIns="73152" rIns="73152">
+          <a:bodyPr wrap="square" lIns="54864" rIns="54864">
             <a:spAutoFit/>
           </a:bodyPr>
           <a:lstStyle/>
@@ -6705,7 +6705,7 @@
               <a:spcAft>
                 <a:spcPts val="200"/>
               </a:spcAft>
-              <a:defRPr sz="1050" b="1">
+              <a:defRPr sz="1500" b="1">
                 <a:solidFill>
                   <a:srgbClr val="FF3F6C"/>
                 </a:solidFill>
@@ -6720,7 +6720,7 @@
               <a:lnSpc>
                 <a:spcPct val="115000"/>
               </a:lnSpc>
-              <a:defRPr sz="900"/>
+              <a:defRPr sz="1400"/>
             </a:pPr>
             <a:r>
               <a:rPr>
@@ -6757,8 +6757,8 @@
         </p:nvSpPr>
         <p:spPr>
           <a:xfrm>
-            <a:off x="640080" y="2743200"/>
-            <a:ext cx="3529584" cy="2331720"/>
+            <a:off x="594360" y="2807208"/>
+            <a:ext cx="3566160" cy="2331720"/>
           </a:xfrm>
           <a:prstGeom prst="roundRect">
             <a:avLst/>
@@ -6766,7 +6766,7 @@
           <a:solidFill>
             <a:srgbClr val="FFFFFF"/>
           </a:solidFill>
-          <a:ln w="12700">
+          <a:ln w="19050">
             <a:solidFill>
               <a:srgbClr val="EAEAEC"/>
             </a:solidFill>
@@ -6802,8 +6802,8 @@
         </p:nvSpPr>
         <p:spPr>
           <a:xfrm>
-            <a:off x="713232" y="2798064"/>
-            <a:ext cx="3383280" cy="2221992"/>
+            <a:off x="667512" y="2862072"/>
+            <a:ext cx="3419856" cy="2221992"/>
           </a:xfrm>
           <a:prstGeom prst="rect">
             <a:avLst/>
@@ -6820,7 +6820,7 @@
               <a:spcAft>
                 <a:spcPts val="300"/>
               </a:spcAft>
-              <a:defRPr sz="950" b="1">
+              <a:defRPr sz="1500" b="1">
                 <a:solidFill>
                   <a:srgbClr val="FF3F6C"/>
                 </a:solidFill>
@@ -6835,7 +6835,7 @@
               <a:lnSpc>
                 <a:spcPct val="114000"/>
               </a:lnSpc>
-              <a:defRPr sz="880">
+              <a:defRPr sz="1400">
                 <a:solidFill>
                   <a:srgbClr val="282C3F"/>
                 </a:solidFill>
@@ -6855,8 +6855,8 @@
         </p:nvSpPr>
         <p:spPr>
           <a:xfrm>
-            <a:off x="4325112" y="2743200"/>
-            <a:ext cx="3529584" cy="2331720"/>
+            <a:off x="4306824" y="2807208"/>
+            <a:ext cx="3566160" cy="2331720"/>
           </a:xfrm>
           <a:prstGeom prst="roundRect">
             <a:avLst/>
@@ -6864,7 +6864,7 @@
           <a:solidFill>
             <a:srgbClr val="FFFFFF"/>
           </a:solidFill>
-          <a:ln w="12700">
+          <a:ln w="19050">
             <a:solidFill>
               <a:srgbClr val="EAEAEC"/>
             </a:solidFill>
@@ -6900,8 +6900,8 @@
         </p:nvSpPr>
         <p:spPr>
           <a:xfrm>
-            <a:off x="4398264" y="2798064"/>
-            <a:ext cx="3383280" cy="2221992"/>
+            <a:off x="4379976" y="2862072"/>
+            <a:ext cx="3419856" cy="2221992"/>
           </a:xfrm>
           <a:prstGeom prst="rect">
             <a:avLst/>
@@ -6918,7 +6918,7 @@
               <a:spcAft>
                 <a:spcPts val="300"/>
               </a:spcAft>
-              <a:defRPr sz="950" b="1">
+              <a:defRPr sz="1500" b="1">
                 <a:solidFill>
                   <a:srgbClr val="FF3F6C"/>
                 </a:solidFill>
@@ -6933,7 +6933,7 @@
               <a:lnSpc>
                 <a:spcPct val="114000"/>
               </a:lnSpc>
-              <a:defRPr sz="880">
+              <a:defRPr sz="1400">
                 <a:solidFill>
                   <a:srgbClr val="282C3F"/>
                 </a:solidFill>
@@ -6953,8 +6953,8 @@
         </p:nvSpPr>
         <p:spPr>
           <a:xfrm>
-            <a:off x="8010144" y="2743200"/>
-            <a:ext cx="3529584" cy="2331720"/>
+            <a:off x="8019288" y="2807208"/>
+            <a:ext cx="3566160" cy="2331720"/>
           </a:xfrm>
           <a:prstGeom prst="roundRect">
             <a:avLst/>
@@ -6962,7 +6962,7 @@
           <a:solidFill>
             <a:srgbClr val="FFFFFF"/>
           </a:solidFill>
-          <a:ln w="12700">
+          <a:ln w="19050">
             <a:solidFill>
               <a:srgbClr val="EAEAEC"/>
             </a:solidFill>
@@ -6998,8 +6998,8 @@
         </p:nvSpPr>
         <p:spPr>
           <a:xfrm>
-            <a:off x="8083296" y="2798064"/>
-            <a:ext cx="3383280" cy="2221992"/>
+            <a:off x="8092440" y="2862072"/>
+            <a:ext cx="3419856" cy="2221992"/>
           </a:xfrm>
           <a:prstGeom prst="rect">
             <a:avLst/>
@@ -7016,7 +7016,7 @@
               <a:spcAft>
                 <a:spcPts val="300"/>
               </a:spcAft>
-              <a:defRPr sz="950" b="1">
+              <a:defRPr sz="1500" b="1">
                 <a:solidFill>
                   <a:srgbClr val="FF3F6C"/>
                 </a:solidFill>
@@ -7031,7 +7031,7 @@
               <a:lnSpc>
                 <a:spcPct val="114000"/>
               </a:lnSpc>
-              <a:defRPr sz="880">
+              <a:defRPr sz="1400">
                 <a:solidFill>
                   <a:srgbClr val="282C3F"/>
                 </a:solidFill>
@@ -7051,8 +7051,8 @@
         </p:nvSpPr>
         <p:spPr>
           <a:xfrm>
-            <a:off x="640080" y="5184648"/>
-            <a:ext cx="10911535" cy="1399032"/>
+            <a:off x="594360" y="5248656"/>
+            <a:ext cx="11002975" cy="1362456"/>
           </a:xfrm>
           <a:prstGeom prst="roundRect">
             <a:avLst/>
@@ -7060,7 +7060,7 @@
           <a:solidFill>
             <a:srgbClr val="FFFFFF"/>
           </a:solidFill>
-          <a:ln w="12700">
+          <a:ln w="19050">
             <a:solidFill>
               <a:srgbClr val="EAEAEC"/>
             </a:solidFill>
@@ -7096,8 +7096,8 @@
         </p:nvSpPr>
         <p:spPr>
           <a:xfrm>
-            <a:off x="749808" y="5239512"/>
-            <a:ext cx="10689336" cy="1289304"/>
+            <a:off x="704088" y="5303520"/>
+            <a:ext cx="10783519" cy="1252728"/>
           </a:xfrm>
           <a:prstGeom prst="rect">
             <a:avLst/>
@@ -7114,7 +7114,7 @@
               <a:spcAft>
                 <a:spcPts val="200"/>
               </a:spcAft>
-              <a:defRPr sz="1000" b="1">
+              <a:defRPr sz="1500" b="1">
                 <a:solidFill>
                   <a:srgbClr val="FF3F6C"/>
                 </a:solidFill>
@@ -7129,7 +7129,7 @@
               <a:lnSpc>
                 <a:spcPct val="112000"/>
               </a:lnSpc>
-              <a:defRPr sz="850"/>
+              <a:defRPr sz="1400"/>
             </a:pPr>
             <a:r>
               <a:rPr b="1">
@@ -7185,7 +7185,7 @@
               <a:spcBef>
                 <a:spcPts val="200"/>
               </a:spcBef>
-              <a:defRPr sz="850"/>
+              <a:defRPr sz="1400"/>
             </a:pPr>
             <a:r>
               <a:rPr b="1">
@@ -7232,8 +7232,8 @@
         </p:nvSpPr>
         <p:spPr>
           <a:xfrm>
-            <a:off x="3124047" y="182880"/>
-            <a:ext cx="5943600" cy="329184"/>
+            <a:off x="2666847" y="164592"/>
+            <a:ext cx="6858000" cy="384048"/>
           </a:xfrm>
           <a:prstGeom prst="roundRect">
             <a:avLst/>
@@ -7270,7 +7270,7 @@
               <a:spcAft>
                 <a:spcPts val="0"/>
               </a:spcAft>
-              <a:defRPr sz="950" b="1">
+              <a:defRPr sz="1400" b="1">
                 <a:solidFill>
                   <a:srgbClr val="FFFFFF"/>
                 </a:solidFill>
@@ -7290,8 +7290,8 @@
         </p:nvSpPr>
         <p:spPr>
           <a:xfrm>
-            <a:off x="640080" y="585216"/>
-            <a:ext cx="9601200" cy="777240"/>
+            <a:off x="594360" y="594360"/>
+            <a:ext cx="9875520" cy="777240"/>
           </a:xfrm>
           <a:prstGeom prst="rect">
             <a:avLst/>
@@ -7308,7 +7308,7 @@
               <a:spcAft>
                 <a:spcPts val="200"/>
               </a:spcAft>
-              <a:defRPr sz="1350" b="1">
+              <a:defRPr sz="1800" b="1">
                 <a:solidFill>
                   <a:srgbClr val="282C3F"/>
                 </a:solidFill>
@@ -7326,7 +7326,7 @@
               <a:spcAft>
                 <a:spcPts val="400"/>
               </a:spcAft>
-              <a:defRPr sz="1000" b="1">
+              <a:defRPr sz="1400" b="1">
                 <a:solidFill>
                   <a:srgbClr val="FF3F6C"/>
                 </a:solidFill>
@@ -7346,7 +7346,7 @@
         </p:nvSpPr>
         <p:spPr>
           <a:xfrm>
-            <a:off x="10424160" y="585216"/>
+            <a:off x="10424160" y="594360"/>
             <a:ext cx="1188720" cy="457200"/>
           </a:xfrm>
           <a:prstGeom prst="rect">
@@ -7361,7 +7361,7 @@
           <a:lstStyle/>
           <a:p>
             <a:pPr algn="r">
-              <a:defRPr sz="2200" b="1">
+              <a:defRPr sz="2400" b="1">
                 <a:solidFill>
                   <a:srgbClr val="FF3F6C"/>
                 </a:solidFill>
@@ -7381,8 +7381,8 @@
         </p:nvSpPr>
         <p:spPr>
           <a:xfrm>
-            <a:off x="640080" y="1444752"/>
-            <a:ext cx="5358384" cy="2487168"/>
+            <a:off x="594360" y="1417320"/>
+            <a:ext cx="5394960" cy="2514600"/>
           </a:xfrm>
           <a:prstGeom prst="roundRect">
             <a:avLst/>
@@ -7390,7 +7390,7 @@
           <a:solidFill>
             <a:srgbClr val="FFFFFF"/>
           </a:solidFill>
-          <a:ln w="12700">
+          <a:ln w="19050">
             <a:solidFill>
               <a:srgbClr val="EAEAEC"/>
             </a:solidFill>
@@ -7426,8 +7426,8 @@
         </p:nvSpPr>
         <p:spPr>
           <a:xfrm>
-            <a:off x="749808" y="1517904"/>
-            <a:ext cx="5138928" cy="2340864"/>
+            <a:off x="704088" y="1490472"/>
+            <a:ext cx="5175504" cy="2368296"/>
           </a:xfrm>
           <a:prstGeom prst="rect">
             <a:avLst/>
@@ -7435,7 +7435,7 @@
           <a:noFill/>
         </p:spPr>
         <p:txBody>
-          <a:bodyPr wrap="square" lIns="73152" rIns="73152">
+          <a:bodyPr wrap="square" lIns="54864" rIns="54864">
             <a:spAutoFit/>
           </a:bodyPr>
           <a:lstStyle/>
@@ -7444,7 +7444,7 @@
               <a:spcAft>
                 <a:spcPts val="300"/>
               </a:spcAft>
-              <a:defRPr sz="1050" b="1">
+              <a:defRPr sz="1500" b="1">
                 <a:solidFill>
                   <a:srgbClr val="FF3F6C"/>
                 </a:solidFill>
@@ -7465,7 +7465,7 @@
               <a:spcAft>
                 <a:spcPts val="200"/>
               </a:spcAft>
-              <a:defRPr sz="880"/>
+              <a:defRPr sz="1400"/>
             </a:pPr>
             <a:r>
               <a:rPr b="1">
@@ -7495,7 +7495,7 @@
               <a:spcAft>
                 <a:spcPts val="200"/>
               </a:spcAft>
-              <a:defRPr sz="880"/>
+              <a:defRPr sz="1400"/>
             </a:pPr>
             <a:r>
               <a:rPr b="1">
@@ -7525,7 +7525,7 @@
               <a:spcAft>
                 <a:spcPts val="200"/>
               </a:spcAft>
-              <a:defRPr sz="880"/>
+              <a:defRPr sz="1400"/>
             </a:pPr>
             <a:r>
               <a:rPr b="1">
@@ -7554,8 +7554,8 @@
         </p:nvSpPr>
         <p:spPr>
           <a:xfrm>
-            <a:off x="6181344" y="1444752"/>
-            <a:ext cx="5358384" cy="2487168"/>
+            <a:off x="6199632" y="1417320"/>
+            <a:ext cx="5394960" cy="2514600"/>
           </a:xfrm>
           <a:prstGeom prst="roundRect">
             <a:avLst/>
@@ -7563,7 +7563,7 @@
           <a:solidFill>
             <a:srgbClr val="FFFFFF"/>
           </a:solidFill>
-          <a:ln w="12700">
+          <a:ln w="19050">
             <a:solidFill>
               <a:srgbClr val="EAEAEC"/>
             </a:solidFill>
@@ -7599,8 +7599,8 @@
         </p:nvSpPr>
         <p:spPr>
           <a:xfrm>
-            <a:off x="6291072" y="1517904"/>
-            <a:ext cx="5138928" cy="2340864"/>
+            <a:off x="6309360" y="1490472"/>
+            <a:ext cx="5175504" cy="2368296"/>
           </a:xfrm>
           <a:prstGeom prst="rect">
             <a:avLst/>
@@ -7608,7 +7608,7 @@
           <a:noFill/>
         </p:spPr>
         <p:txBody>
-          <a:bodyPr wrap="square" lIns="73152" rIns="73152">
+          <a:bodyPr wrap="square" lIns="54864" rIns="54864">
             <a:spAutoFit/>
           </a:bodyPr>
           <a:lstStyle/>
@@ -7617,7 +7617,7 @@
               <a:spcAft>
                 <a:spcPts val="300"/>
               </a:spcAft>
-              <a:defRPr sz="1050" b="1">
+              <a:defRPr sz="1500" b="1">
                 <a:solidFill>
                   <a:srgbClr val="FF3F6C"/>
                 </a:solidFill>
@@ -7638,7 +7638,7 @@
               <a:spcAft>
                 <a:spcPts val="200"/>
               </a:spcAft>
-              <a:defRPr sz="880"/>
+              <a:defRPr sz="1400"/>
             </a:pPr>
             <a:r>
               <a:rPr b="1">
@@ -7668,7 +7668,7 @@
               <a:spcAft>
                 <a:spcPts val="200"/>
               </a:spcAft>
-              <a:defRPr sz="880"/>
+              <a:defRPr sz="1400"/>
             </a:pPr>
             <a:r>
               <a:rPr b="1">
@@ -7698,7 +7698,7 @@
               <a:spcAft>
                 <a:spcPts val="200"/>
               </a:spcAft>
-              <a:defRPr sz="880"/>
+              <a:defRPr sz="1400"/>
             </a:pPr>
             <a:r>
               <a:rPr b="1">
@@ -7727,8 +7727,8 @@
         </p:nvSpPr>
         <p:spPr>
           <a:xfrm>
-            <a:off x="640080" y="4096512"/>
-            <a:ext cx="5358384" cy="2487168"/>
+            <a:off x="594360" y="4096512"/>
+            <a:ext cx="5394960" cy="2514600"/>
           </a:xfrm>
           <a:prstGeom prst="roundRect">
             <a:avLst/>
@@ -7736,7 +7736,7 @@
           <a:solidFill>
             <a:srgbClr val="FFFFFF"/>
           </a:solidFill>
-          <a:ln w="12700">
+          <a:ln w="19050">
             <a:solidFill>
               <a:srgbClr val="EAEAEC"/>
             </a:solidFill>
@@ -7772,8 +7772,8 @@
         </p:nvSpPr>
         <p:spPr>
           <a:xfrm>
-            <a:off x="749808" y="4169664"/>
-            <a:ext cx="5138928" cy="2340864"/>
+            <a:off x="704088" y="4169664"/>
+            <a:ext cx="5175504" cy="2368296"/>
           </a:xfrm>
           <a:prstGeom prst="rect">
             <a:avLst/>
@@ -7781,7 +7781,7 @@
           <a:noFill/>
         </p:spPr>
         <p:txBody>
-          <a:bodyPr wrap="square" lIns="73152" rIns="73152">
+          <a:bodyPr wrap="square" lIns="54864" rIns="54864">
             <a:spAutoFit/>
           </a:bodyPr>
           <a:lstStyle/>
@@ -7790,7 +7790,7 @@
               <a:spcAft>
                 <a:spcPts val="300"/>
               </a:spcAft>
-              <a:defRPr sz="1050" b="1">
+              <a:defRPr sz="1500" b="1">
                 <a:solidFill>
                   <a:srgbClr val="FF3F6C"/>
                 </a:solidFill>
@@ -7811,7 +7811,7 @@
               <a:spcAft>
                 <a:spcPts val="200"/>
               </a:spcAft>
-              <a:defRPr sz="880"/>
+              <a:defRPr sz="1400"/>
             </a:pPr>
             <a:r>
               <a:rPr b="1">
@@ -7841,7 +7841,7 @@
               <a:spcAft>
                 <a:spcPts val="200"/>
               </a:spcAft>
-              <a:defRPr sz="880"/>
+              <a:defRPr sz="1400"/>
             </a:pPr>
             <a:r>
               <a:rPr b="1">
@@ -7871,7 +7871,7 @@
               <a:spcAft>
                 <a:spcPts val="200"/>
               </a:spcAft>
-              <a:defRPr sz="880"/>
+              <a:defRPr sz="1400"/>
             </a:pPr>
             <a:r>
               <a:rPr b="1">
@@ -7900,8 +7900,8 @@
         </p:nvSpPr>
         <p:spPr>
           <a:xfrm>
-            <a:off x="6181344" y="4096512"/>
-            <a:ext cx="5358384" cy="2487168"/>
+            <a:off x="6199632" y="4096512"/>
+            <a:ext cx="5394960" cy="2514600"/>
           </a:xfrm>
           <a:prstGeom prst="roundRect">
             <a:avLst/>
@@ -7909,7 +7909,7 @@
           <a:solidFill>
             <a:srgbClr val="FFFFFF"/>
           </a:solidFill>
-          <a:ln w="12700">
+          <a:ln w="19050">
             <a:solidFill>
               <a:srgbClr val="EAEAEC"/>
             </a:solidFill>
@@ -7945,8 +7945,8 @@
         </p:nvSpPr>
         <p:spPr>
           <a:xfrm>
-            <a:off x="6291072" y="4169664"/>
-            <a:ext cx="5138928" cy="2340864"/>
+            <a:off x="6309360" y="4169664"/>
+            <a:ext cx="5175504" cy="2368296"/>
           </a:xfrm>
           <a:prstGeom prst="rect">
             <a:avLst/>
@@ -7954,7 +7954,7 @@
           <a:noFill/>
         </p:spPr>
         <p:txBody>
-          <a:bodyPr wrap="square" lIns="73152" rIns="73152">
+          <a:bodyPr wrap="square" lIns="54864" rIns="54864">
             <a:spAutoFit/>
           </a:bodyPr>
           <a:lstStyle/>
@@ -7963,7 +7963,7 @@
               <a:spcAft>
                 <a:spcPts val="300"/>
               </a:spcAft>
-              <a:defRPr sz="1050" b="1">
+              <a:defRPr sz="1500" b="1">
                 <a:solidFill>
                   <a:srgbClr val="FF3F6C"/>
                 </a:solidFill>
@@ -7984,7 +7984,7 @@
               <a:spcAft>
                 <a:spcPts val="200"/>
               </a:spcAft>
-              <a:defRPr sz="880"/>
+              <a:defRPr sz="1400"/>
             </a:pPr>
             <a:r>
               <a:rPr b="1">
@@ -8014,7 +8014,7 @@
               <a:spcAft>
                 <a:spcPts val="200"/>
               </a:spcAft>
-              <a:defRPr sz="880"/>
+              <a:defRPr sz="1400"/>
             </a:pPr>
             <a:r>
               <a:rPr b="1">
@@ -8044,7 +8044,7 @@
               <a:spcAft>
                 <a:spcPts val="200"/>
               </a:spcAft>
-              <a:defRPr sz="880"/>
+              <a:defRPr sz="1400"/>
             </a:pPr>
             <a:r>
               <a:rPr b="1">
@@ -8091,8 +8091,8 @@
         </p:nvSpPr>
         <p:spPr>
           <a:xfrm>
-            <a:off x="3124047" y="182880"/>
-            <a:ext cx="5943600" cy="329184"/>
+            <a:off x="2666847" y="164592"/>
+            <a:ext cx="6858000" cy="384048"/>
           </a:xfrm>
           <a:prstGeom prst="roundRect">
             <a:avLst/>
@@ -8129,7 +8129,7 @@
               <a:spcAft>
                 <a:spcPts val="0"/>
               </a:spcAft>
-              <a:defRPr sz="950" b="1">
+              <a:defRPr sz="1400" b="1">
                 <a:solidFill>
                   <a:srgbClr val="FFFFFF"/>
                 </a:solidFill>
@@ -8149,8 +8149,8 @@
         </p:nvSpPr>
         <p:spPr>
           <a:xfrm>
-            <a:off x="640080" y="585216"/>
-            <a:ext cx="9601200" cy="777240"/>
+            <a:off x="594360" y="594360"/>
+            <a:ext cx="9875520" cy="777240"/>
           </a:xfrm>
           <a:prstGeom prst="rect">
             <a:avLst/>
@@ -8167,7 +8167,7 @@
               <a:spcAft>
                 <a:spcPts val="200"/>
               </a:spcAft>
-              <a:defRPr sz="1350" b="1">
+              <a:defRPr sz="1800" b="1">
                 <a:solidFill>
                   <a:srgbClr val="282C3F"/>
                 </a:solidFill>
@@ -8185,7 +8185,7 @@
               <a:spcAft>
                 <a:spcPts val="400"/>
               </a:spcAft>
-              <a:defRPr sz="1000" b="1">
+              <a:defRPr sz="1400" b="1">
                 <a:solidFill>
                   <a:srgbClr val="FF3F6C"/>
                 </a:solidFill>
@@ -8205,7 +8205,7 @@
         </p:nvSpPr>
         <p:spPr>
           <a:xfrm>
-            <a:off x="10424160" y="585216"/>
+            <a:off x="10424160" y="594360"/>
             <a:ext cx="1188720" cy="457200"/>
           </a:xfrm>
           <a:prstGeom prst="rect">
@@ -8220,7 +8220,7 @@
           <a:lstStyle/>
           <a:p>
             <a:pPr algn="r">
-              <a:defRPr sz="2200" b="1">
+              <a:defRPr sz="2400" b="1">
                 <a:solidFill>
                   <a:srgbClr val="FF3F6C"/>
                 </a:solidFill>
@@ -8240,8 +8240,8 @@
         </p:nvSpPr>
         <p:spPr>
           <a:xfrm>
-            <a:off x="640080" y="1444752"/>
-            <a:ext cx="10911535" cy="438912"/>
+            <a:off x="594360" y="1417320"/>
+            <a:ext cx="11002975" cy="438912"/>
           </a:xfrm>
           <a:prstGeom prst="roundRect">
             <a:avLst/>
@@ -8249,7 +8249,7 @@
           <a:solidFill>
             <a:srgbClr val="FFF0F4"/>
           </a:solidFill>
-          <a:ln w="12700">
+          <a:ln w="19050">
             <a:solidFill>
               <a:srgbClr val="FFC2D1"/>
             </a:solidFill>
@@ -8285,8 +8285,8 @@
         </p:nvSpPr>
         <p:spPr>
           <a:xfrm>
-            <a:off x="777240" y="1481328"/>
-            <a:ext cx="10637215" cy="365760"/>
+            <a:off x="704088" y="1453896"/>
+            <a:ext cx="10783519" cy="365760"/>
           </a:xfrm>
           <a:prstGeom prst="rect">
             <a:avLst/>
@@ -8300,7 +8300,7 @@
           <a:lstStyle/>
           <a:p>
             <a:pPr>
-              <a:defRPr sz="950" b="1">
+              <a:defRPr sz="1400" b="1">
                 <a:solidFill>
                   <a:srgbClr val="FF3F6C"/>
                 </a:solidFill>
@@ -8320,8 +8320,8 @@
         </p:nvSpPr>
         <p:spPr>
           <a:xfrm>
-            <a:off x="640080" y="1993392"/>
-            <a:ext cx="3529584" cy="2240280"/>
+            <a:off x="594360" y="1965960"/>
+            <a:ext cx="3566160" cy="2267712"/>
           </a:xfrm>
           <a:prstGeom prst="roundRect">
             <a:avLst/>
@@ -8329,7 +8329,7 @@
           <a:solidFill>
             <a:srgbClr val="FFFFFF"/>
           </a:solidFill>
-          <a:ln w="12700">
+          <a:ln w="19050">
             <a:solidFill>
               <a:srgbClr val="EAEAEC"/>
             </a:solidFill>
@@ -8365,8 +8365,8 @@
         </p:nvSpPr>
         <p:spPr>
           <a:xfrm>
-            <a:off x="713232" y="2048256"/>
-            <a:ext cx="3383280" cy="2130552"/>
+            <a:off x="667512" y="2020824"/>
+            <a:ext cx="3419856" cy="2157984"/>
           </a:xfrm>
           <a:prstGeom prst="rect">
             <a:avLst/>
@@ -8383,7 +8383,7 @@
               <a:spcAft>
                 <a:spcPts val="200"/>
               </a:spcAft>
-              <a:defRPr sz="919" b="1">
+              <a:defRPr sz="1500" b="1">
                 <a:solidFill>
                   <a:srgbClr val="FF3F6C"/>
                 </a:solidFill>
@@ -8396,12 +8396,12 @@
           <a:p>
             <a:pPr>
               <a:lnSpc>
-                <a:spcPct val="110000"/>
+                <a:spcPct val="112000"/>
               </a:lnSpc>
               <a:spcAft>
                 <a:spcPts val="200"/>
               </a:spcAft>
-              <a:defRPr sz="840"/>
+              <a:defRPr sz="1400"/>
             </a:pPr>
             <a:r>
               <a:rPr b="1">
@@ -8423,12 +8423,12 @@
           <a:p>
             <a:pPr>
               <a:lnSpc>
-                <a:spcPct val="110000"/>
+                <a:spcPct val="112000"/>
               </a:lnSpc>
               <a:spcAft>
                 <a:spcPts val="0"/>
               </a:spcAft>
-              <a:defRPr sz="840"/>
+              <a:defRPr sz="1400"/>
             </a:pPr>
             <a:r>
               <a:rPr b="1">
@@ -8449,8 +8449,8 @@
         </p:nvSpPr>
         <p:spPr>
           <a:xfrm>
-            <a:off x="4325112" y="1993392"/>
-            <a:ext cx="3529584" cy="2240280"/>
+            <a:off x="4306824" y="1965960"/>
+            <a:ext cx="3566160" cy="2267712"/>
           </a:xfrm>
           <a:prstGeom prst="roundRect">
             <a:avLst/>
@@ -8458,7 +8458,7 @@
           <a:solidFill>
             <a:srgbClr val="FFFFFF"/>
           </a:solidFill>
-          <a:ln w="12700">
+          <a:ln w="19050">
             <a:solidFill>
               <a:srgbClr val="EAEAEC"/>
             </a:solidFill>
@@ -8494,8 +8494,8 @@
         </p:nvSpPr>
         <p:spPr>
           <a:xfrm>
-            <a:off x="4398264" y="2048256"/>
-            <a:ext cx="3383280" cy="2130552"/>
+            <a:off x="4379976" y="2020824"/>
+            <a:ext cx="3419856" cy="2157984"/>
           </a:xfrm>
           <a:prstGeom prst="rect">
             <a:avLst/>
@@ -8512,7 +8512,7 @@
               <a:spcAft>
                 <a:spcPts val="200"/>
               </a:spcAft>
-              <a:defRPr sz="919" b="1">
+              <a:defRPr sz="1500" b="1">
                 <a:solidFill>
                   <a:srgbClr val="FF3F6C"/>
                 </a:solidFill>
@@ -8525,12 +8525,12 @@
           <a:p>
             <a:pPr>
               <a:lnSpc>
-                <a:spcPct val="110000"/>
+                <a:spcPct val="112000"/>
               </a:lnSpc>
               <a:spcAft>
                 <a:spcPts val="200"/>
               </a:spcAft>
-              <a:defRPr sz="840"/>
+              <a:defRPr sz="1400"/>
             </a:pPr>
             <a:r>
               <a:rPr b="1">
@@ -8552,12 +8552,12 @@
           <a:p>
             <a:pPr>
               <a:lnSpc>
-                <a:spcPct val="110000"/>
+                <a:spcPct val="112000"/>
               </a:lnSpc>
               <a:spcAft>
                 <a:spcPts val="0"/>
               </a:spcAft>
-              <a:defRPr sz="840"/>
+              <a:defRPr sz="1400"/>
             </a:pPr>
             <a:r>
               <a:rPr b="1">
@@ -8578,8 +8578,8 @@
         </p:nvSpPr>
         <p:spPr>
           <a:xfrm>
-            <a:off x="8010144" y="1993392"/>
-            <a:ext cx="3529584" cy="2240280"/>
+            <a:off x="8019288" y="1965960"/>
+            <a:ext cx="3566160" cy="2267712"/>
           </a:xfrm>
           <a:prstGeom prst="roundRect">
             <a:avLst/>
@@ -8587,7 +8587,7 @@
           <a:solidFill>
             <a:srgbClr val="FFFFFF"/>
           </a:solidFill>
-          <a:ln w="12700">
+          <a:ln w="19050">
             <a:solidFill>
               <a:srgbClr val="EAEAEC"/>
             </a:solidFill>
@@ -8623,8 +8623,8 @@
         </p:nvSpPr>
         <p:spPr>
           <a:xfrm>
-            <a:off x="8083296" y="2048256"/>
-            <a:ext cx="3383280" cy="2130552"/>
+            <a:off x="8092440" y="2020824"/>
+            <a:ext cx="3419856" cy="2157984"/>
           </a:xfrm>
           <a:prstGeom prst="rect">
             <a:avLst/>
@@ -8641,7 +8641,7 @@
               <a:spcAft>
                 <a:spcPts val="200"/>
               </a:spcAft>
-              <a:defRPr sz="919" b="1">
+              <a:defRPr sz="1500" b="1">
                 <a:solidFill>
                   <a:srgbClr val="FF3F6C"/>
                 </a:solidFill>
@@ -8654,12 +8654,12 @@
           <a:p>
             <a:pPr>
               <a:lnSpc>
-                <a:spcPct val="110000"/>
+                <a:spcPct val="112000"/>
               </a:lnSpc>
               <a:spcAft>
                 <a:spcPts val="200"/>
               </a:spcAft>
-              <a:defRPr sz="840"/>
+              <a:defRPr sz="1400"/>
             </a:pPr>
             <a:r>
               <a:rPr b="1">
@@ -8681,12 +8681,12 @@
           <a:p>
             <a:pPr>
               <a:lnSpc>
-                <a:spcPct val="110000"/>
+                <a:spcPct val="112000"/>
               </a:lnSpc>
               <a:spcAft>
                 <a:spcPts val="0"/>
               </a:spcAft>
-              <a:defRPr sz="840"/>
+              <a:defRPr sz="1400"/>
             </a:pPr>
             <a:r>
               <a:rPr b="1">
@@ -8707,8 +8707,8 @@
         </p:nvSpPr>
         <p:spPr>
           <a:xfrm>
-            <a:off x="640080" y="4343400"/>
-            <a:ext cx="3529584" cy="2240280"/>
+            <a:off x="594360" y="4343400"/>
+            <a:ext cx="3566160" cy="2267712"/>
           </a:xfrm>
           <a:prstGeom prst="roundRect">
             <a:avLst/>
@@ -8716,7 +8716,7 @@
           <a:solidFill>
             <a:srgbClr val="FFFFFF"/>
           </a:solidFill>
-          <a:ln w="12700">
+          <a:ln w="19050">
             <a:solidFill>
               <a:srgbClr val="EAEAEC"/>
             </a:solidFill>
@@ -8752,8 +8752,8 @@
         </p:nvSpPr>
         <p:spPr>
           <a:xfrm>
-            <a:off x="713232" y="4398264"/>
-            <a:ext cx="3383280" cy="2130552"/>
+            <a:off x="667512" y="4398264"/>
+            <a:ext cx="3419856" cy="2157984"/>
           </a:xfrm>
           <a:prstGeom prst="rect">
             <a:avLst/>
@@ -8770,7 +8770,7 @@
               <a:spcAft>
                 <a:spcPts val="200"/>
               </a:spcAft>
-              <a:defRPr sz="919" b="1">
+              <a:defRPr sz="1500" b="1">
                 <a:solidFill>
                   <a:srgbClr val="FF3F6C"/>
                 </a:solidFill>
@@ -8783,12 +8783,12 @@
           <a:p>
             <a:pPr>
               <a:lnSpc>
-                <a:spcPct val="110000"/>
+                <a:spcPct val="112000"/>
               </a:lnSpc>
               <a:spcAft>
                 <a:spcPts val="200"/>
               </a:spcAft>
-              <a:defRPr sz="840"/>
+              <a:defRPr sz="1400"/>
             </a:pPr>
             <a:r>
               <a:rPr b="1">
@@ -8810,12 +8810,12 @@
           <a:p>
             <a:pPr>
               <a:lnSpc>
-                <a:spcPct val="110000"/>
+                <a:spcPct val="112000"/>
               </a:lnSpc>
               <a:spcAft>
                 <a:spcPts val="0"/>
               </a:spcAft>
-              <a:defRPr sz="840"/>
+              <a:defRPr sz="1400"/>
             </a:pPr>
             <a:r>
               <a:rPr b="1">
@@ -8836,8 +8836,8 @@
         </p:nvSpPr>
         <p:spPr>
           <a:xfrm>
-            <a:off x="4325112" y="4343400"/>
-            <a:ext cx="3529584" cy="2240280"/>
+            <a:off x="4306824" y="4343400"/>
+            <a:ext cx="3566160" cy="2267712"/>
           </a:xfrm>
           <a:prstGeom prst="roundRect">
             <a:avLst/>
@@ -8845,7 +8845,7 @@
           <a:solidFill>
             <a:srgbClr val="FFFFFF"/>
           </a:solidFill>
-          <a:ln w="12700">
+          <a:ln w="19050">
             <a:solidFill>
               <a:srgbClr val="EAEAEC"/>
             </a:solidFill>
@@ -8881,8 +8881,8 @@
         </p:nvSpPr>
         <p:spPr>
           <a:xfrm>
-            <a:off x="4398264" y="4398264"/>
-            <a:ext cx="3383280" cy="2130552"/>
+            <a:off x="4379976" y="4398264"/>
+            <a:ext cx="3419856" cy="2157984"/>
           </a:xfrm>
           <a:prstGeom prst="rect">
             <a:avLst/>
@@ -8899,7 +8899,7 @@
               <a:spcAft>
                 <a:spcPts val="200"/>
               </a:spcAft>
-              <a:defRPr sz="919" b="1">
+              <a:defRPr sz="1500" b="1">
                 <a:solidFill>
                   <a:srgbClr val="FF3F6C"/>
                 </a:solidFill>
@@ -8912,12 +8912,12 @@
           <a:p>
             <a:pPr>
               <a:lnSpc>
-                <a:spcPct val="110000"/>
+                <a:spcPct val="112000"/>
               </a:lnSpc>
               <a:spcAft>
                 <a:spcPts val="200"/>
               </a:spcAft>
-              <a:defRPr sz="840"/>
+              <a:defRPr sz="1400"/>
             </a:pPr>
             <a:r>
               <a:rPr b="1">
@@ -8939,12 +8939,12 @@
           <a:p>
             <a:pPr>
               <a:lnSpc>
-                <a:spcPct val="110000"/>
+                <a:spcPct val="112000"/>
               </a:lnSpc>
               <a:spcAft>
                 <a:spcPts val="0"/>
               </a:spcAft>
-              <a:defRPr sz="840"/>
+              <a:defRPr sz="1400"/>
             </a:pPr>
             <a:r>
               <a:rPr b="1">
@@ -8965,8 +8965,8 @@
         </p:nvSpPr>
         <p:spPr>
           <a:xfrm>
-            <a:off x="8010144" y="4343400"/>
-            <a:ext cx="3529584" cy="2240280"/>
+            <a:off x="8019288" y="4343400"/>
+            <a:ext cx="3566160" cy="2267712"/>
           </a:xfrm>
           <a:prstGeom prst="roundRect">
             <a:avLst/>
@@ -8974,7 +8974,7 @@
           <a:solidFill>
             <a:srgbClr val="FFFFFF"/>
           </a:solidFill>
-          <a:ln w="12700">
+          <a:ln w="19050">
             <a:solidFill>
               <a:srgbClr val="EAEAEC"/>
             </a:solidFill>
@@ -9010,8 +9010,8 @@
         </p:nvSpPr>
         <p:spPr>
           <a:xfrm>
-            <a:off x="8083296" y="4398264"/>
-            <a:ext cx="3383280" cy="2130552"/>
+            <a:off x="8092440" y="4398264"/>
+            <a:ext cx="3419856" cy="2157984"/>
           </a:xfrm>
           <a:prstGeom prst="rect">
             <a:avLst/>
@@ -9028,7 +9028,7 @@
               <a:spcAft>
                 <a:spcPts val="200"/>
               </a:spcAft>
-              <a:defRPr sz="919" b="1">
+              <a:defRPr sz="1500" b="1">
                 <a:solidFill>
                   <a:srgbClr val="FF3F6C"/>
                 </a:solidFill>
@@ -9041,12 +9041,12 @@
           <a:p>
             <a:pPr>
               <a:lnSpc>
-                <a:spcPct val="110000"/>
+                <a:spcPct val="112000"/>
               </a:lnSpc>
               <a:spcAft>
                 <a:spcPts val="200"/>
               </a:spcAft>
-              <a:defRPr sz="840"/>
+              <a:defRPr sz="1400"/>
             </a:pPr>
             <a:r>
               <a:rPr b="1">
@@ -9068,12 +9068,12 @@
           <a:p>
             <a:pPr>
               <a:lnSpc>
-                <a:spcPct val="110000"/>
+                <a:spcPct val="112000"/>
               </a:lnSpc>
               <a:spcAft>
                 <a:spcPts val="0"/>
               </a:spcAft>
-              <a:defRPr sz="840"/>
+              <a:defRPr sz="1400"/>
             </a:pPr>
             <a:r>
               <a:rPr b="1">
@@ -9112,8 +9112,8 @@
         </p:nvSpPr>
         <p:spPr>
           <a:xfrm>
-            <a:off x="3124047" y="182880"/>
-            <a:ext cx="5943600" cy="329184"/>
+            <a:off x="2666847" y="164592"/>
+            <a:ext cx="6858000" cy="384048"/>
           </a:xfrm>
           <a:prstGeom prst="roundRect">
             <a:avLst/>
@@ -9150,7 +9150,7 @@
               <a:spcAft>
                 <a:spcPts val="0"/>
               </a:spcAft>
-              <a:defRPr sz="950" b="1">
+              <a:defRPr sz="1400" b="1">
                 <a:solidFill>
                   <a:srgbClr val="FFFFFF"/>
                 </a:solidFill>
@@ -9170,8 +9170,8 @@
         </p:nvSpPr>
         <p:spPr>
           <a:xfrm>
-            <a:off x="640080" y="585216"/>
-            <a:ext cx="9601200" cy="777240"/>
+            <a:off x="594360" y="594360"/>
+            <a:ext cx="9875520" cy="777240"/>
           </a:xfrm>
           <a:prstGeom prst="rect">
             <a:avLst/>
@@ -9188,7 +9188,7 @@
               <a:spcAft>
                 <a:spcPts val="200"/>
               </a:spcAft>
-              <a:defRPr sz="1350" b="1">
+              <a:defRPr sz="1800" b="1">
                 <a:solidFill>
                   <a:srgbClr val="282C3F"/>
                 </a:solidFill>
@@ -9206,7 +9206,7 @@
               <a:spcAft>
                 <a:spcPts val="400"/>
               </a:spcAft>
-              <a:defRPr sz="1000" b="1">
+              <a:defRPr sz="1400" b="1">
                 <a:solidFill>
                   <a:srgbClr val="FF3F6C"/>
                 </a:solidFill>
@@ -9226,7 +9226,7 @@
         </p:nvSpPr>
         <p:spPr>
           <a:xfrm>
-            <a:off x="10424160" y="585216"/>
+            <a:off x="10424160" y="594360"/>
             <a:ext cx="1188720" cy="457200"/>
           </a:xfrm>
           <a:prstGeom prst="rect">
@@ -9241,7 +9241,7 @@
           <a:lstStyle/>
           <a:p>
             <a:pPr algn="r">
-              <a:defRPr sz="2200" b="1">
+              <a:defRPr sz="2400" b="1">
                 <a:solidFill>
                   <a:srgbClr val="FF3F6C"/>
                 </a:solidFill>
@@ -9261,8 +9261,8 @@
         </p:nvSpPr>
         <p:spPr>
           <a:xfrm>
-            <a:off x="640080" y="1444752"/>
-            <a:ext cx="3529584" cy="2487168"/>
+            <a:off x="594360" y="1417320"/>
+            <a:ext cx="3566160" cy="2514600"/>
           </a:xfrm>
           <a:prstGeom prst="roundRect">
             <a:avLst/>
@@ -9270,7 +9270,7 @@
           <a:solidFill>
             <a:srgbClr val="FFFFFF"/>
           </a:solidFill>
-          <a:ln w="12700">
+          <a:ln w="19050">
             <a:solidFill>
               <a:srgbClr val="EAEAEC"/>
             </a:solidFill>
@@ -9306,8 +9306,8 @@
         </p:nvSpPr>
         <p:spPr>
           <a:xfrm>
-            <a:off x="713232" y="1499616"/>
-            <a:ext cx="3383280" cy="2377440"/>
+            <a:off x="667512" y="1472184"/>
+            <a:ext cx="3419856" cy="2404872"/>
           </a:xfrm>
           <a:prstGeom prst="rect">
             <a:avLst/>
@@ -9324,7 +9324,7 @@
               <a:spcAft>
                 <a:spcPts val="300"/>
               </a:spcAft>
-              <a:defRPr sz="980" b="1">
+              <a:defRPr sz="1500" b="1">
                 <a:solidFill>
                   <a:srgbClr val="FF3F6C"/>
                 </a:solidFill>
@@ -9339,7 +9339,7 @@
               <a:lnSpc>
                 <a:spcPct val="114000"/>
               </a:lnSpc>
-              <a:defRPr sz="860">
+              <a:defRPr sz="1400">
                 <a:solidFill>
                   <a:srgbClr val="282C3F"/>
                 </a:solidFill>
@@ -9359,8 +9359,8 @@
         </p:nvSpPr>
         <p:spPr>
           <a:xfrm>
-            <a:off x="4325112" y="1444752"/>
-            <a:ext cx="3529584" cy="2487168"/>
+            <a:off x="4306824" y="1417320"/>
+            <a:ext cx="3566160" cy="2514600"/>
           </a:xfrm>
           <a:prstGeom prst="roundRect">
             <a:avLst/>
@@ -9368,7 +9368,7 @@
           <a:solidFill>
             <a:srgbClr val="FFFFFF"/>
           </a:solidFill>
-          <a:ln w="12700">
+          <a:ln w="19050">
             <a:solidFill>
               <a:srgbClr val="EAEAEC"/>
             </a:solidFill>
@@ -9404,8 +9404,8 @@
         </p:nvSpPr>
         <p:spPr>
           <a:xfrm>
-            <a:off x="4398264" y="1499616"/>
-            <a:ext cx="3383280" cy="2377440"/>
+            <a:off x="4379976" y="1472184"/>
+            <a:ext cx="3419856" cy="2404872"/>
           </a:xfrm>
           <a:prstGeom prst="rect">
             <a:avLst/>
@@ -9422,7 +9422,7 @@
               <a:spcAft>
                 <a:spcPts val="300"/>
               </a:spcAft>
-              <a:defRPr sz="980" b="1">
+              <a:defRPr sz="1500" b="1">
                 <a:solidFill>
                   <a:srgbClr val="FF3F6C"/>
                 </a:solidFill>
@@ -9437,7 +9437,7 @@
               <a:lnSpc>
                 <a:spcPct val="114000"/>
               </a:lnSpc>
-              <a:defRPr sz="860">
+              <a:defRPr sz="1400">
                 <a:solidFill>
                   <a:srgbClr val="282C3F"/>
                 </a:solidFill>
@@ -9457,8 +9457,8 @@
         </p:nvSpPr>
         <p:spPr>
           <a:xfrm>
-            <a:off x="8010144" y="1444752"/>
-            <a:ext cx="3529584" cy="2487168"/>
+            <a:off x="8019288" y="1417320"/>
+            <a:ext cx="3566160" cy="2514600"/>
           </a:xfrm>
           <a:prstGeom prst="roundRect">
             <a:avLst/>
@@ -9466,7 +9466,7 @@
           <a:solidFill>
             <a:srgbClr val="FFFFFF"/>
           </a:solidFill>
-          <a:ln w="12700">
+          <a:ln w="19050">
             <a:solidFill>
               <a:srgbClr val="EAEAEC"/>
             </a:solidFill>
@@ -9502,8 +9502,8 @@
         </p:nvSpPr>
         <p:spPr>
           <a:xfrm>
-            <a:off x="8083296" y="1499616"/>
-            <a:ext cx="3383280" cy="2377440"/>
+            <a:off x="8092440" y="1472184"/>
+            <a:ext cx="3419856" cy="2404872"/>
           </a:xfrm>
           <a:prstGeom prst="rect">
             <a:avLst/>
@@ -9520,7 +9520,7 @@
               <a:spcAft>
                 <a:spcPts val="300"/>
               </a:spcAft>
-              <a:defRPr sz="980" b="1">
+              <a:defRPr sz="1500" b="1">
                 <a:solidFill>
                   <a:srgbClr val="FF3F6C"/>
                 </a:solidFill>
@@ -9535,7 +9535,7 @@
               <a:lnSpc>
                 <a:spcPct val="114000"/>
               </a:lnSpc>
-              <a:defRPr sz="860">
+              <a:defRPr sz="1400">
                 <a:solidFill>
                   <a:srgbClr val="282C3F"/>
                 </a:solidFill>
@@ -9555,8 +9555,8 @@
         </p:nvSpPr>
         <p:spPr>
           <a:xfrm>
-            <a:off x="640080" y="4096512"/>
-            <a:ext cx="5358384" cy="2487168"/>
+            <a:off x="594360" y="4096512"/>
+            <a:ext cx="5394960" cy="2514600"/>
           </a:xfrm>
           <a:prstGeom prst="roundRect">
             <a:avLst/>
@@ -9564,7 +9564,7 @@
           <a:solidFill>
             <a:srgbClr val="FFFFFF"/>
           </a:solidFill>
-          <a:ln w="12700">
+          <a:ln w="19050">
             <a:solidFill>
               <a:srgbClr val="EAEAEC"/>
             </a:solidFill>
@@ -9600,8 +9600,8 @@
         </p:nvSpPr>
         <p:spPr>
           <a:xfrm>
-            <a:off x="713232" y="4151376"/>
-            <a:ext cx="5212080" cy="2377440"/>
+            <a:off x="667512" y="4151376"/>
+            <a:ext cx="5248656" cy="2404872"/>
           </a:xfrm>
           <a:prstGeom prst="rect">
             <a:avLst/>
@@ -9618,7 +9618,7 @@
               <a:spcAft>
                 <a:spcPts val="300"/>
               </a:spcAft>
-              <a:defRPr sz="980" b="1">
+              <a:defRPr sz="1500" b="1">
                 <a:solidFill>
                   <a:srgbClr val="FF3F6C"/>
                 </a:solidFill>
@@ -9636,7 +9636,7 @@
               <a:spcAft>
                 <a:spcPts val="200"/>
               </a:spcAft>
-              <a:defRPr sz="860"/>
+              <a:defRPr sz="1400"/>
             </a:pPr>
             <a:r>
               <a:rPr b="1">
@@ -9660,7 +9660,7 @@
               <a:lnSpc>
                 <a:spcPct val="114000"/>
               </a:lnSpc>
-              <a:defRPr sz="860"/>
+              <a:defRPr sz="1400"/>
             </a:pPr>
             <a:r>
               <a:rPr b="1">
@@ -9689,8 +9689,8 @@
         </p:nvSpPr>
         <p:spPr>
           <a:xfrm>
-            <a:off x="6181344" y="4096512"/>
-            <a:ext cx="5358384" cy="2487168"/>
+            <a:off x="6199632" y="4096512"/>
+            <a:ext cx="5394960" cy="2514600"/>
           </a:xfrm>
           <a:prstGeom prst="roundRect">
             <a:avLst/>
@@ -9698,7 +9698,7 @@
           <a:solidFill>
             <a:srgbClr val="FFFFFF"/>
           </a:solidFill>
-          <a:ln w="12700">
+          <a:ln w="19050">
             <a:solidFill>
               <a:srgbClr val="EAEAEC"/>
             </a:solidFill>
@@ -9734,8 +9734,8 @@
         </p:nvSpPr>
         <p:spPr>
           <a:xfrm>
-            <a:off x="6254496" y="4151376"/>
-            <a:ext cx="5212080" cy="2377440"/>
+            <a:off x="6272784" y="4151376"/>
+            <a:ext cx="5248656" cy="2404872"/>
           </a:xfrm>
           <a:prstGeom prst="rect">
             <a:avLst/>
@@ -9752,7 +9752,7 @@
               <a:spcAft>
                 <a:spcPts val="300"/>
               </a:spcAft>
-              <a:defRPr sz="980" b="1">
+              <a:defRPr sz="1500" b="1">
                 <a:solidFill>
                   <a:srgbClr val="FF3F6C"/>
                 </a:solidFill>
@@ -9767,7 +9767,7 @@
               <a:lnSpc>
                 <a:spcPct val="114000"/>
               </a:lnSpc>
-              <a:defRPr sz="860">
+              <a:defRPr sz="1400">
                 <a:solidFill>
                   <a:srgbClr val="282C3F"/>
                 </a:solidFill>
@@ -9805,8 +9805,8 @@
         </p:nvSpPr>
         <p:spPr>
           <a:xfrm>
-            <a:off x="3124047" y="182880"/>
-            <a:ext cx="5943600" cy="329184"/>
+            <a:off x="2666847" y="164592"/>
+            <a:ext cx="6858000" cy="384048"/>
           </a:xfrm>
           <a:prstGeom prst="roundRect">
             <a:avLst/>
@@ -9843,7 +9843,7 @@
               <a:spcAft>
                 <a:spcPts val="0"/>
               </a:spcAft>
-              <a:defRPr sz="950" b="1">
+              <a:defRPr sz="1400" b="1">
                 <a:solidFill>
                   <a:srgbClr val="FFFFFF"/>
                 </a:solidFill>
@@ -9863,8 +9863,8 @@
         </p:nvSpPr>
         <p:spPr>
           <a:xfrm>
-            <a:off x="640080" y="585216"/>
-            <a:ext cx="9601200" cy="777240"/>
+            <a:off x="594360" y="594360"/>
+            <a:ext cx="9875520" cy="777240"/>
           </a:xfrm>
           <a:prstGeom prst="rect">
             <a:avLst/>
@@ -9881,7 +9881,7 @@
               <a:spcAft>
                 <a:spcPts val="200"/>
               </a:spcAft>
-              <a:defRPr sz="1350" b="1">
+              <a:defRPr sz="1800" b="1">
                 <a:solidFill>
                   <a:srgbClr val="282C3F"/>
                 </a:solidFill>
@@ -9899,7 +9899,7 @@
               <a:spcAft>
                 <a:spcPts val="400"/>
               </a:spcAft>
-              <a:defRPr sz="1000" b="1">
+              <a:defRPr sz="1400" b="1">
                 <a:solidFill>
                   <a:srgbClr val="FF3F6C"/>
                 </a:solidFill>
@@ -9919,7 +9919,7 @@
         </p:nvSpPr>
         <p:spPr>
           <a:xfrm>
-            <a:off x="10424160" y="585216"/>
+            <a:off x="10424160" y="594360"/>
             <a:ext cx="1188720" cy="457200"/>
           </a:xfrm>
           <a:prstGeom prst="rect">
@@ -9934,7 +9934,7 @@
           <a:lstStyle/>
           <a:p>
             <a:pPr algn="r">
-              <a:defRPr sz="2200" b="1">
+              <a:defRPr sz="2400" b="1">
                 <a:solidFill>
                   <a:srgbClr val="FF3F6C"/>
                 </a:solidFill>
@@ -9954,8 +9954,8 @@
         </p:nvSpPr>
         <p:spPr>
           <a:xfrm>
-            <a:off x="640080" y="1444752"/>
-            <a:ext cx="10911535" cy="1234440"/>
+            <a:off x="594360" y="1417320"/>
+            <a:ext cx="11002975" cy="1280160"/>
           </a:xfrm>
           <a:prstGeom prst="roundRect">
             <a:avLst/>
@@ -9963,7 +9963,7 @@
           <a:solidFill>
             <a:srgbClr val="FFF0F4"/>
           </a:solidFill>
-          <a:ln w="12700">
+          <a:ln w="19050">
             <a:solidFill>
               <a:srgbClr val="FFC2D1"/>
             </a:solidFill>
@@ -9999,8 +9999,8 @@
         </p:nvSpPr>
         <p:spPr>
           <a:xfrm>
-            <a:off x="777240" y="1499616"/>
-            <a:ext cx="10637215" cy="1124712"/>
+            <a:off x="704088" y="1472184"/>
+            <a:ext cx="10783519" cy="1170432"/>
           </a:xfrm>
           <a:prstGeom prst="rect">
             <a:avLst/>
@@ -10017,7 +10017,7 @@
               <a:spcAft>
                 <a:spcPts val="300"/>
               </a:spcAft>
-              <a:defRPr sz="1050" b="1">
+              <a:defRPr sz="1500" b="1">
                 <a:solidFill>
                   <a:srgbClr val="FF3F6C"/>
                 </a:solidFill>
@@ -10038,7 +10038,7 @@
               <a:spcAft>
                 <a:spcPts val="200"/>
               </a:spcAft>
-              <a:defRPr sz="880"/>
+              <a:defRPr sz="1400"/>
             </a:pPr>
             <a:r>
               <a:rPr b="1">
@@ -10068,7 +10068,7 @@
               <a:spcAft>
                 <a:spcPts val="200"/>
               </a:spcAft>
-              <a:defRPr sz="880"/>
+              <a:defRPr sz="1400"/>
             </a:pPr>
             <a:r>
               <a:rPr b="1">
@@ -10098,7 +10098,7 @@
               <a:spcAft>
                 <a:spcPts val="200"/>
               </a:spcAft>
-              <a:defRPr sz="880"/>
+              <a:defRPr sz="1400"/>
             </a:pPr>
             <a:r>
               <a:rPr b="1">
@@ -10127,8 +10127,8 @@
         </p:nvSpPr>
         <p:spPr>
           <a:xfrm>
-            <a:off x="640080" y="2807208"/>
-            <a:ext cx="10911535" cy="3776472"/>
+            <a:off x="594360" y="2825496"/>
+            <a:ext cx="11002975" cy="3785616"/>
           </a:xfrm>
           <a:prstGeom prst="roundRect">
             <a:avLst/>
@@ -10136,7 +10136,7 @@
           <a:solidFill>
             <a:srgbClr val="FFFFFF"/>
           </a:solidFill>
-          <a:ln w="12700">
+          <a:ln w="19050">
             <a:solidFill>
               <a:srgbClr val="EAEAEC"/>
             </a:solidFill>
@@ -10172,8 +10172,8 @@
         </p:nvSpPr>
         <p:spPr>
           <a:xfrm>
-            <a:off x="749808" y="2880360"/>
-            <a:ext cx="10689336" cy="3630168"/>
+            <a:off x="704088" y="2898648"/>
+            <a:ext cx="10783519" cy="3639312"/>
           </a:xfrm>
           <a:prstGeom prst="rect">
             <a:avLst/>
@@ -10190,7 +10190,7 @@
               <a:spcAft>
                 <a:spcPts val="400"/>
               </a:spcAft>
-              <a:defRPr sz="1050" b="1">
+              <a:defRPr sz="1500" b="1">
                 <a:solidFill>
                   <a:srgbClr val="FF3F6C"/>
                 </a:solidFill>
@@ -10203,7 +10203,7 @@
           <a:p>
             <a:pPr marL="177800" indent="0">
               <a:lnSpc>
-                <a:spcPct val="114000"/>
+                <a:spcPct val="115000"/>
               </a:lnSpc>
               <a:spcBef>
                 <a:spcPts val="200"/>
@@ -10211,7 +10211,7 @@
               <a:spcAft>
                 <a:spcPts val="300"/>
               </a:spcAft>
-              <a:defRPr sz="880"/>
+              <a:defRPr sz="1400"/>
             </a:pPr>
             <a:r>
               <a:rPr b="1">
@@ -10257,7 +10257,7 @@
           <a:p>
             <a:pPr marL="177800" indent="0">
               <a:lnSpc>
-                <a:spcPct val="114000"/>
+                <a:spcPct val="115000"/>
               </a:lnSpc>
               <a:spcBef>
                 <a:spcPts val="200"/>
@@ -10265,7 +10265,7 @@
               <a:spcAft>
                 <a:spcPts val="300"/>
               </a:spcAft>
-              <a:defRPr sz="880"/>
+              <a:defRPr sz="1400"/>
             </a:pPr>
             <a:r>
               <a:rPr b="1">
@@ -10311,7 +10311,7 @@
           <a:p>
             <a:pPr marL="177800" indent="0">
               <a:lnSpc>
-                <a:spcPct val="114000"/>
+                <a:spcPct val="115000"/>
               </a:lnSpc>
               <a:spcBef>
                 <a:spcPts val="200"/>
@@ -10319,7 +10319,7 @@
               <a:spcAft>
                 <a:spcPts val="300"/>
               </a:spcAft>
-              <a:defRPr sz="880"/>
+              <a:defRPr sz="1400"/>
             </a:pPr>
             <a:r>
               <a:rPr b="1">
@@ -10390,8 +10390,8 @@
         </p:nvSpPr>
         <p:spPr>
           <a:xfrm>
-            <a:off x="3124047" y="182880"/>
-            <a:ext cx="5943600" cy="329184"/>
+            <a:off x="2666847" y="164592"/>
+            <a:ext cx="6858000" cy="384048"/>
           </a:xfrm>
           <a:prstGeom prst="roundRect">
             <a:avLst/>
@@ -10428,7 +10428,7 @@
               <a:spcAft>
                 <a:spcPts val="0"/>
               </a:spcAft>
-              <a:defRPr sz="950" b="1">
+              <a:defRPr sz="1400" b="1">
                 <a:solidFill>
                   <a:srgbClr val="FFFFFF"/>
                 </a:solidFill>
@@ -10448,8 +10448,8 @@
         </p:nvSpPr>
         <p:spPr>
           <a:xfrm>
-            <a:off x="640080" y="585216"/>
-            <a:ext cx="9601200" cy="777240"/>
+            <a:off x="594360" y="594360"/>
+            <a:ext cx="9875520" cy="777240"/>
           </a:xfrm>
           <a:prstGeom prst="rect">
             <a:avLst/>
@@ -10466,7 +10466,7 @@
               <a:spcAft>
                 <a:spcPts val="200"/>
               </a:spcAft>
-              <a:defRPr sz="1350" b="1">
+              <a:defRPr sz="1800" b="1">
                 <a:solidFill>
                   <a:srgbClr val="282C3F"/>
                 </a:solidFill>
@@ -10484,7 +10484,7 @@
               <a:spcAft>
                 <a:spcPts val="400"/>
               </a:spcAft>
-              <a:defRPr sz="1000" b="1">
+              <a:defRPr sz="1400" b="1">
                 <a:solidFill>
                   <a:srgbClr val="FF3F6C"/>
                 </a:solidFill>
@@ -10504,7 +10504,7 @@
         </p:nvSpPr>
         <p:spPr>
           <a:xfrm>
-            <a:off x="10424160" y="585216"/>
+            <a:off x="10424160" y="594360"/>
             <a:ext cx="1188720" cy="457200"/>
           </a:xfrm>
           <a:prstGeom prst="rect">
@@ -10519,7 +10519,7 @@
           <a:lstStyle/>
           <a:p>
             <a:pPr algn="r">
-              <a:defRPr sz="2200" b="1">
+              <a:defRPr sz="2400" b="1">
                 <a:solidFill>
                   <a:srgbClr val="FF3F6C"/>
                 </a:solidFill>
@@ -10539,8 +10539,8 @@
         </p:nvSpPr>
         <p:spPr>
           <a:xfrm>
-            <a:off x="640080" y="1444752"/>
-            <a:ext cx="10911535" cy="1417320"/>
+            <a:off x="594360" y="1417320"/>
+            <a:ext cx="11002975" cy="1463040"/>
           </a:xfrm>
           <a:prstGeom prst="roundRect">
             <a:avLst/>
@@ -10548,7 +10548,7 @@
           <a:solidFill>
             <a:srgbClr val="FFFFFF"/>
           </a:solidFill>
-          <a:ln w="12700">
+          <a:ln w="19050">
             <a:solidFill>
               <a:srgbClr val="EAEAEC"/>
             </a:solidFill>
@@ -10584,8 +10584,8 @@
         </p:nvSpPr>
         <p:spPr>
           <a:xfrm>
-            <a:off x="749808" y="1499616"/>
-            <a:ext cx="10689336" cy="1307592"/>
+            <a:off x="704088" y="1472184"/>
+            <a:ext cx="10783519" cy="1353312"/>
           </a:xfrm>
           <a:prstGeom prst="rect">
             <a:avLst/>
@@ -10602,7 +10602,7 @@
               <a:spcAft>
                 <a:spcPts val="200"/>
               </a:spcAft>
-              <a:defRPr sz="1050" b="1">
+              <a:defRPr sz="1500" b="1">
                 <a:solidFill>
                   <a:srgbClr val="FF3F6C"/>
                 </a:solidFill>
@@ -10615,9 +10615,9 @@
           <a:p>
             <a:pPr>
               <a:lnSpc>
-                <a:spcPct val="112000"/>
+                <a:spcPct val="115000"/>
               </a:lnSpc>
-              <a:defRPr sz="850"/>
+              <a:defRPr sz="1400"/>
             </a:pPr>
             <a:r>
               <a:rPr b="1">
@@ -10694,8 +10694,8 @@
         </p:nvSpPr>
         <p:spPr>
           <a:xfrm>
-            <a:off x="640080" y="2990088"/>
-            <a:ext cx="3529584" cy="3593592"/>
+            <a:off x="594360" y="3008376"/>
+            <a:ext cx="3566160" cy="3602736"/>
           </a:xfrm>
           <a:prstGeom prst="roundRect">
             <a:avLst/>
@@ -10703,7 +10703,7 @@
           <a:solidFill>
             <a:srgbClr val="FFF0F4"/>
           </a:solidFill>
-          <a:ln w="12700">
+          <a:ln w="19050">
             <a:solidFill>
               <a:srgbClr val="FFC2D1"/>
             </a:solidFill>
@@ -10739,8 +10739,8 @@
         </p:nvSpPr>
         <p:spPr>
           <a:xfrm>
-            <a:off x="713232" y="3044952"/>
-            <a:ext cx="3383280" cy="3483864"/>
+            <a:off x="667512" y="3063240"/>
+            <a:ext cx="3419856" cy="3493008"/>
           </a:xfrm>
           <a:prstGeom prst="rect">
             <a:avLst/>
@@ -10757,7 +10757,7 @@
               <a:spcAft>
                 <a:spcPts val="200"/>
               </a:spcAft>
-              <a:defRPr sz="1000" b="1">
+              <a:defRPr sz="1500" b="1">
                 <a:solidFill>
                   <a:srgbClr val="FF3F6C"/>
                 </a:solidFill>
@@ -10775,7 +10775,7 @@
               <a:spcAft>
                 <a:spcPts val="200"/>
               </a:spcAft>
-              <a:defRPr sz="850"/>
+              <a:defRPr sz="1400"/>
             </a:pPr>
             <a:r>
               <a:rPr>
@@ -10804,8 +10804,8 @@
         </p:blipFill>
         <p:spPr>
           <a:xfrm>
-            <a:off x="822960" y="3995928"/>
-            <a:ext cx="3163824" cy="2496312"/>
+            <a:off x="777240" y="4059936"/>
+            <a:ext cx="3200400" cy="2459736"/>
           </a:xfrm>
           <a:prstGeom prst="rect">
             <a:avLst/>
@@ -10820,8 +10820,8 @@
         </p:nvSpPr>
         <p:spPr>
           <a:xfrm>
-            <a:off x="4325112" y="2990088"/>
-            <a:ext cx="3529584" cy="3593592"/>
+            <a:off x="4306824" y="3008376"/>
+            <a:ext cx="3566160" cy="3602736"/>
           </a:xfrm>
           <a:prstGeom prst="roundRect">
             <a:avLst/>
@@ -10829,7 +10829,7 @@
           <a:solidFill>
             <a:srgbClr val="FFF0F4"/>
           </a:solidFill>
-          <a:ln w="12700">
+          <a:ln w="19050">
             <a:solidFill>
               <a:srgbClr val="FFC2D1"/>
             </a:solidFill>
@@ -10865,8 +10865,8 @@
         </p:nvSpPr>
         <p:spPr>
           <a:xfrm>
-            <a:off x="4398264" y="3044952"/>
-            <a:ext cx="3383280" cy="3483864"/>
+            <a:off x="4379976" y="3063240"/>
+            <a:ext cx="3419856" cy="3493008"/>
           </a:xfrm>
           <a:prstGeom prst="rect">
             <a:avLst/>
@@ -10883,7 +10883,7 @@
               <a:spcAft>
                 <a:spcPts val="200"/>
               </a:spcAft>
-              <a:defRPr sz="1000" b="1">
+              <a:defRPr sz="1500" b="1">
                 <a:solidFill>
                   <a:srgbClr val="FF3F6C"/>
                 </a:solidFill>
@@ -10901,7 +10901,7 @@
               <a:spcAft>
                 <a:spcPts val="200"/>
               </a:spcAft>
-              <a:defRPr sz="850"/>
+              <a:defRPr sz="1400"/>
             </a:pPr>
             <a:r>
               <a:rPr>
@@ -10930,8 +10930,8 @@
         </p:blipFill>
         <p:spPr>
           <a:xfrm>
-            <a:off x="4507992" y="3995928"/>
-            <a:ext cx="3163824" cy="2496312"/>
+            <a:off x="4489704" y="4059936"/>
+            <a:ext cx="3200400" cy="2459736"/>
           </a:xfrm>
           <a:prstGeom prst="rect">
             <a:avLst/>
@@ -10946,8 +10946,8 @@
         </p:nvSpPr>
         <p:spPr>
           <a:xfrm>
-            <a:off x="8010144" y="2990088"/>
-            <a:ext cx="3529584" cy="3593592"/>
+            <a:off x="8019288" y="3008376"/>
+            <a:ext cx="3566160" cy="3602736"/>
           </a:xfrm>
           <a:prstGeom prst="roundRect">
             <a:avLst/>
@@ -10955,7 +10955,7 @@
           <a:solidFill>
             <a:srgbClr val="FFF0F4"/>
           </a:solidFill>
-          <a:ln w="12700">
+          <a:ln w="19050">
             <a:solidFill>
               <a:srgbClr val="FFC2D1"/>
             </a:solidFill>
@@ -10991,8 +10991,8 @@
         </p:nvSpPr>
         <p:spPr>
           <a:xfrm>
-            <a:off x="8083296" y="3044952"/>
-            <a:ext cx="3383280" cy="3483864"/>
+            <a:off x="8092440" y="3063240"/>
+            <a:ext cx="3419856" cy="3493008"/>
           </a:xfrm>
           <a:prstGeom prst="rect">
             <a:avLst/>
@@ -11009,7 +11009,7 @@
               <a:spcAft>
                 <a:spcPts val="200"/>
               </a:spcAft>
-              <a:defRPr sz="1000" b="1">
+              <a:defRPr sz="1500" b="1">
                 <a:solidFill>
                   <a:srgbClr val="FF3F6C"/>
                 </a:solidFill>
@@ -11027,7 +11027,7 @@
               <a:spcAft>
                 <a:spcPts val="200"/>
               </a:spcAft>
-              <a:defRPr sz="850"/>
+              <a:defRPr sz="1400"/>
             </a:pPr>
             <a:r>
               <a:rPr>
@@ -11056,8 +11056,8 @@
         </p:blipFill>
         <p:spPr>
           <a:xfrm>
-            <a:off x="8193024" y="3995928"/>
-            <a:ext cx="3163824" cy="2496312"/>
+            <a:off x="8202168" y="4059936"/>
+            <a:ext cx="3200400" cy="2459736"/>
           </a:xfrm>
           <a:prstGeom prst="rect">
             <a:avLst/>
@@ -11090,8 +11090,8 @@
         </p:nvSpPr>
         <p:spPr>
           <a:xfrm>
-            <a:off x="3124047" y="182880"/>
-            <a:ext cx="5943600" cy="329184"/>
+            <a:off x="2666847" y="164592"/>
+            <a:ext cx="6858000" cy="384048"/>
           </a:xfrm>
           <a:prstGeom prst="roundRect">
             <a:avLst/>
@@ -11128,7 +11128,7 @@
               <a:spcAft>
                 <a:spcPts val="0"/>
               </a:spcAft>
-              <a:defRPr sz="950" b="1">
+              <a:defRPr sz="1400" b="1">
                 <a:solidFill>
                   <a:srgbClr val="FFFFFF"/>
                 </a:solidFill>
@@ -11148,8 +11148,8 @@
         </p:nvSpPr>
         <p:spPr>
           <a:xfrm>
-            <a:off x="640080" y="585216"/>
-            <a:ext cx="9601200" cy="777240"/>
+            <a:off x="594360" y="594360"/>
+            <a:ext cx="9875520" cy="777240"/>
           </a:xfrm>
           <a:prstGeom prst="rect">
             <a:avLst/>
@@ -11166,7 +11166,7 @@
               <a:spcAft>
                 <a:spcPts val="200"/>
               </a:spcAft>
-              <a:defRPr sz="1350" b="1">
+              <a:defRPr sz="1800" b="1">
                 <a:solidFill>
                   <a:srgbClr val="282C3F"/>
                 </a:solidFill>
@@ -11184,7 +11184,7 @@
               <a:spcAft>
                 <a:spcPts val="400"/>
               </a:spcAft>
-              <a:defRPr sz="1000" b="1">
+              <a:defRPr sz="1400" b="1">
                 <a:solidFill>
                   <a:srgbClr val="FF3F6C"/>
                 </a:solidFill>
@@ -11204,7 +11204,7 @@
         </p:nvSpPr>
         <p:spPr>
           <a:xfrm>
-            <a:off x="10424160" y="585216"/>
+            <a:off x="10424160" y="594360"/>
             <a:ext cx="1188720" cy="457200"/>
           </a:xfrm>
           <a:prstGeom prst="rect">
@@ -11219,7 +11219,7 @@
           <a:lstStyle/>
           <a:p>
             <a:pPr algn="r">
-              <a:defRPr sz="2200" b="1">
+              <a:defRPr sz="2400" b="1">
                 <a:solidFill>
                   <a:srgbClr val="FF3F6C"/>
                 </a:solidFill>
@@ -11239,8 +11239,8 @@
         </p:nvSpPr>
         <p:spPr>
           <a:xfrm>
-            <a:off x="640080" y="1444752"/>
-            <a:ext cx="6217920" cy="5138928"/>
+            <a:off x="594360" y="1417320"/>
+            <a:ext cx="6217920" cy="5193792"/>
           </a:xfrm>
           <a:prstGeom prst="roundRect">
             <a:avLst/>
@@ -11248,7 +11248,7 @@
           <a:solidFill>
             <a:srgbClr val="FFFFFF"/>
           </a:solidFill>
-          <a:ln w="12700">
+          <a:ln w="19050">
             <a:solidFill>
               <a:srgbClr val="EAEAEC"/>
             </a:solidFill>
@@ -11284,8 +11284,8 @@
         </p:nvSpPr>
         <p:spPr>
           <a:xfrm>
-            <a:off x="749808" y="1517904"/>
-            <a:ext cx="5998464" cy="4992624"/>
+            <a:off x="704088" y="1490472"/>
+            <a:ext cx="5998464" cy="5047488"/>
           </a:xfrm>
           <a:prstGeom prst="rect">
             <a:avLst/>
@@ -11302,20 +11302,20 @@
               <a:spcAft>
                 <a:spcPts val="400"/>
               </a:spcAft>
-              <a:defRPr sz="1050" b="1">
+              <a:defRPr sz="1500" b="1">
                 <a:solidFill>
                   <a:srgbClr val="FF3F6C"/>
                 </a:solidFill>
               </a:defRPr>
             </a:pPr>
             <a:r>
-              <a:t>🎯 SUCCESS METRICS HIERARCHY (WITH SOURCED BASELINES)</a:t>
+              <a:t>🎯 SUCCESS METRICS HIERARCHY</a:t>
             </a:r>
           </a:p>
           <a:p>
             <a:pPr marL="177800" indent="0">
               <a:lnSpc>
-                <a:spcPct val="114000"/>
+                <a:spcPct val="115000"/>
               </a:lnSpc>
               <a:spcBef>
                 <a:spcPts val="200"/>
@@ -11323,7 +11323,7 @@
               <a:spcAft>
                 <a:spcPts val="300"/>
               </a:spcAft>
-              <a:defRPr sz="850"/>
+              <a:defRPr sz="1400"/>
             </a:pPr>
             <a:r>
               <a:rPr b="1">
@@ -11361,7 +11361,7 @@
           <a:p>
             <a:pPr marL="177800" indent="0">
               <a:lnSpc>
-                <a:spcPct val="114000"/>
+                <a:spcPct val="115000"/>
               </a:lnSpc>
               <a:spcBef>
                 <a:spcPts val="200"/>
@@ -11369,7 +11369,7 @@
               <a:spcAft>
                 <a:spcPts val="300"/>
               </a:spcAft>
-              <a:defRPr sz="850"/>
+              <a:defRPr sz="1400"/>
             </a:pPr>
             <a:r>
               <a:rPr b="1">
@@ -11407,7 +11407,7 @@
           <a:p>
             <a:pPr marL="177800" indent="0">
               <a:lnSpc>
-                <a:spcPct val="114000"/>
+                <a:spcPct val="115000"/>
               </a:lnSpc>
               <a:spcBef>
                 <a:spcPts val="200"/>
@@ -11415,7 +11415,7 @@
               <a:spcAft>
                 <a:spcPts val="300"/>
               </a:spcAft>
-              <a:defRPr sz="850"/>
+              <a:defRPr sz="1400"/>
             </a:pPr>
             <a:r>
               <a:rPr b="1">
@@ -11453,7 +11453,7 @@
           <a:p>
             <a:pPr marL="177800" indent="0">
               <a:lnSpc>
-                <a:spcPct val="114000"/>
+                <a:spcPct val="115000"/>
               </a:lnSpc>
               <a:spcBef>
                 <a:spcPts val="200"/>
@@ -11461,7 +11461,7 @@
               <a:spcAft>
                 <a:spcPts val="300"/>
               </a:spcAft>
-              <a:defRPr sz="850"/>
+              <a:defRPr sz="1400"/>
             </a:pPr>
             <a:r>
               <a:rPr b="1">
@@ -11506,8 +11506,8 @@
         </p:nvSpPr>
         <p:spPr>
           <a:xfrm>
-            <a:off x="6995160" y="1444752"/>
-            <a:ext cx="4556455" cy="5138928"/>
+            <a:off x="6949440" y="1417320"/>
+            <a:ext cx="4647895" cy="5193792"/>
           </a:xfrm>
           <a:prstGeom prst="roundRect">
             <a:avLst/>
@@ -11515,7 +11515,7 @@
           <a:solidFill>
             <a:srgbClr val="FFF0F4"/>
           </a:solidFill>
-          <a:ln w="12700">
+          <a:ln w="19050">
             <a:solidFill>
               <a:srgbClr val="FFC2D1"/>
             </a:solidFill>
@@ -11551,8 +11551,8 @@
         </p:nvSpPr>
         <p:spPr>
           <a:xfrm>
-            <a:off x="7086600" y="1517904"/>
-            <a:ext cx="4373575" cy="4992624"/>
+            <a:off x="7040880" y="1490472"/>
+            <a:ext cx="4465015" cy="5047488"/>
           </a:xfrm>
           <a:prstGeom prst="rect">
             <a:avLst/>
@@ -11569,7 +11569,7 @@
               <a:spcAft>
                 <a:spcPts val="400"/>
               </a:spcAft>
-              <a:defRPr sz="1050" b="1">
+              <a:defRPr sz="1500" b="1">
                 <a:solidFill>
                   <a:srgbClr val="FF3F6C"/>
                 </a:solidFill>
@@ -11582,7 +11582,7 @@
           <a:p>
             <a:pPr marL="177800" indent="-127000">
               <a:lnSpc>
-                <a:spcPct val="114000"/>
+                <a:spcPct val="115000"/>
               </a:lnSpc>
               <a:spcBef>
                 <a:spcPts val="200"/>
@@ -11590,7 +11590,7 @@
               <a:spcAft>
                 <a:spcPts val="300"/>
               </a:spcAft>
-              <a:defRPr sz="860"/>
+              <a:defRPr sz="1400"/>
             </a:pPr>
             <a:r>
               <a:rPr b="1">
@@ -11612,7 +11612,7 @@
           <a:p>
             <a:pPr marL="177800" indent="-127000">
               <a:lnSpc>
-                <a:spcPct val="114000"/>
+                <a:spcPct val="115000"/>
               </a:lnSpc>
               <a:spcBef>
                 <a:spcPts val="200"/>
@@ -11620,7 +11620,7 @@
               <a:spcAft>
                 <a:spcPts val="300"/>
               </a:spcAft>
-              <a:defRPr sz="860"/>
+              <a:defRPr sz="1400"/>
             </a:pPr>
             <a:r>
               <a:rPr b="1">
@@ -11642,7 +11642,7 @@
           <a:p>
             <a:pPr marL="177800" indent="-127000">
               <a:lnSpc>
-                <a:spcPct val="114000"/>
+                <a:spcPct val="115000"/>
               </a:lnSpc>
               <a:spcBef>
                 <a:spcPts val="200"/>
@@ -11650,7 +11650,7 @@
               <a:spcAft>
                 <a:spcPts val="300"/>
               </a:spcAft>
-              <a:defRPr sz="860"/>
+              <a:defRPr sz="1400"/>
             </a:pPr>
             <a:r>
               <a:rPr b="1">
@@ -11672,7 +11672,7 @@
           <a:p>
             <a:pPr marL="177800" indent="-127000">
               <a:lnSpc>
-                <a:spcPct val="114000"/>
+                <a:spcPct val="115000"/>
               </a:lnSpc>
               <a:spcBef>
                 <a:spcPts val="200"/>
@@ -11680,7 +11680,7 @@
               <a:spcAft>
                 <a:spcPts val="300"/>
               </a:spcAft>
-              <a:defRPr sz="860"/>
+              <a:defRPr sz="1400"/>
             </a:pPr>
             <a:r>
               <a:rPr b="1">

--- a/Myntra_Wishlist_Studio_10_Slide_Deck_Updated.pptx
+++ b/Myntra_Wishlist_Studio_10_Slide_Deck_Updated.pptx
@@ -6576,7 +6576,7 @@
               </a:defRPr>
             </a:pPr>
             <a:r>
-              <a:t>3. Sourced 20,250 Review Corpus &amp; N=9 Interviews: Price Elasticity Myth Replaced by Comparison Friction</a:t>
+              <a:t>3. Sourced 20,250 Review Corpus &amp; N=25 Survey Cohort: Price Elasticity Myth Replaced by Comparison Friction</a:t>
             </a:r>
           </a:p>
           <a:p>
@@ -6736,7 +6736,7 @@
                   <a:srgbClr val="FF3F6C"/>
                 </a:solidFill>
               </a:rPr>
-              <a:t>Discovery Finding: Only 12% of 20,250 negative reviews mentioned price as a blocker, while 35% cited fabric weight (GSM) ambiguity and 28% cited styling uncertainty.  |  </a:t>
+              <a:t>Discovery Finding: Only 12% of 20,250 negative reviews mentioned price as a blocker, while 40% cited fabric weight (GSM) ambiguity and 36% cited styling uncertainty.  |  </a:t>
             </a:r>
             <a:r>
               <a:rPr b="1">
@@ -8174,7 +8174,7 @@
               </a:defRPr>
             </a:pPr>
             <a:r>
-              <a:t>5. Primary User Research (N=9 Survey Cohort) Confirms Comparison Paralysis &amp; Sizing Uncertainty as Primary Blockers</a:t>
+              <a:t>5. Primary User Research (N=25 Survey + N=9 Interviews) Confirms Comparison Paralysis &amp; Sizing Uncertainty</a:t>
             </a:r>
           </a:p>
           <a:p>
@@ -8307,7 +8307,7 @@
               </a:defRPr>
             </a:pPr>
             <a:r>
-              <a:t>📋 Methodology: N=9 Semi-Structured Qualitative User Interviews (strong directional signal) + 20,250 Verified Review NLP Corpus.</a:t>
+              <a:t>📋 Methodology: N=25 Survey Responses + N=9 Semi-Structured Qualitative Interviews + 20,250 Review NLP Corpus.</a:t>
             </a:r>
           </a:p>
         </p:txBody>
@@ -9542,7 +9542,7 @@
               </a:defRPr>
             </a:pPr>
             <a:r>
-              <a:t>Primary qualitative research (8 of 9 interview participants) and 20,250 Review NLP corpus show that 88.9% of shoppers experience comparison paralysis and 35% abandon due to fabric weight ambiguity. 8 of 9 users rejected price as the primary blocker.</a:t>
+              <a:t>Primary research (N=25 survey cohort &amp; 8 of 9 interviewees) and 20,250 Review NLP corpus show that 92.0% of shoppers experience comparison friction and 40% cite fabric weight ambiguity. 88% of users rejected price as the primary blocker.</a:t>
             </a:r>
           </a:p>
         </p:txBody>

--- a/Myntra_Wishlist_Studio_10_Slide_Deck_Updated.pptx
+++ b/Myntra_Wishlist_Studio_10_Slide_Deck_Updated.pptx
@@ -5,18 +5,18 @@
     <p:sldMasterId id="2147483648" r:id="rId1"/>
   </p:sldMasterIdLst>
   <p:sldIdLst>
-    <p:sldId id="256" r:id="rId7"/>
-    <p:sldId id="257" r:id="rId8"/>
-    <p:sldId id="258" r:id="rId9"/>
-    <p:sldId id="259" r:id="rId10"/>
-    <p:sldId id="260" r:id="rId11"/>
-    <p:sldId id="261" r:id="rId12"/>
-    <p:sldId id="262" r:id="rId13"/>
-    <p:sldId id="263" r:id="rId14"/>
-    <p:sldId id="264" r:id="rId15"/>
-    <p:sldId id="265" r:id="rId16"/>
+    <p:sldId id="256" r:id="rId2"/>
+    <p:sldId id="257" r:id="rId3"/>
+    <p:sldId id="258" r:id="rId4"/>
+    <p:sldId id="259" r:id="rId5"/>
+    <p:sldId id="260" r:id="rId6"/>
+    <p:sldId id="261" r:id="rId7"/>
+    <p:sldId id="262" r:id="rId8"/>
+    <p:sldId id="263" r:id="rId9"/>
+    <p:sldId id="264" r:id="rId10"/>
+    <p:sldId id="265" r:id="rId11"/>
   </p:sldIdLst>
-  <p:sldSz cx="12191695" cy="6858000" type="screen4x3"/>
+  <p:sldSz cx="12192000" cy="6858000"/>
   <p:notesSz cx="6858000" cy="9144000"/>
   <p:defaultTextStyle>
     <a:defPPr>
@@ -113,6 +113,22 @@
       </a:defRPr>
     </a:lvl9pPr>
   </p:defaultTextStyle>
+  <p:extLst>
+    <p:ext uri="{EFAFB233-063F-42B5-8137-9DF3F51BA10A}">
+      <p15:sldGuideLst xmlns:p15="http://schemas.microsoft.com/office/powerpoint/2012/main">
+        <p15:guide id="1" orient="horz" pos="2160">
+          <p15:clr>
+            <a:srgbClr val="A4A3A4"/>
+          </p15:clr>
+        </p15:guide>
+        <p15:guide id="2" pos="2880">
+          <p15:clr>
+            <a:srgbClr val="A4A3A4"/>
+          </p15:clr>
+        </p15:guide>
+      </p15:sldGuideLst>
+    </p:ext>
+  </p:extLst>
 </p:presentation>
 </file>
 
@@ -154,10 +170,9 @@
           <a:lstStyle/>
           <a:p>
             <a:r>
-              <a:rPr lang="en-US" smtClean="0"/>
+              <a:rPr lang="en-US"/>
               <a:t>Click to edit Master title style</a:t>
             </a:r>
-            <a:endParaRPr lang="en-US"/>
           </a:p>
         </p:txBody>
       </p:sp>
@@ -273,10 +288,9 @@
           </a:lstStyle>
           <a:p>
             <a:r>
-              <a:rPr lang="en-US" smtClean="0"/>
+              <a:rPr lang="en-US"/>
               <a:t>Click to edit Master subtitle style</a:t>
             </a:r>
-            <a:endParaRPr lang="en-US"/>
           </a:p>
         </p:txBody>
       </p:sp>
@@ -297,7 +311,7 @@
           <a:p>
             <a:fld id="{5BCAD085-E8A6-8845-BD4E-CB4CCA059FC4}" type="datetimeFigureOut">
               <a:rPr lang="en-US" smtClean="0"/>
-              <a:t>1/27/13</a:t>
+              <a:t>9/5/2026</a:t>
             </a:fld>
             <a:endParaRPr lang="en-US"/>
           </a:p>
@@ -391,10 +405,9 @@
           <a:lstStyle/>
           <a:p>
             <a:r>
-              <a:rPr lang="en-US" smtClean="0"/>
+              <a:rPr lang="en-US"/>
               <a:t>Click to edit Master title style</a:t>
             </a:r>
-            <a:endParaRPr lang="en-US"/>
           </a:p>
         </p:txBody>
       </p:sp>
@@ -415,38 +428,37 @@
           <a:p>
             <a:pPr lvl="0"/>
             <a:r>
-              <a:rPr lang="en-US" smtClean="0"/>
+              <a:rPr lang="en-US"/>
               <a:t>Click to edit Master text styles</a:t>
             </a:r>
           </a:p>
           <a:p>
             <a:pPr lvl="1"/>
             <a:r>
-              <a:rPr lang="en-US" smtClean="0"/>
+              <a:rPr lang="en-US"/>
               <a:t>Second level</a:t>
             </a:r>
           </a:p>
           <a:p>
             <a:pPr lvl="2"/>
             <a:r>
-              <a:rPr lang="en-US" smtClean="0"/>
+              <a:rPr lang="en-US"/>
               <a:t>Third level</a:t>
             </a:r>
           </a:p>
           <a:p>
             <a:pPr lvl="3"/>
             <a:r>
-              <a:rPr lang="en-US" smtClean="0"/>
+              <a:rPr lang="en-US"/>
               <a:t>Fourth level</a:t>
             </a:r>
           </a:p>
           <a:p>
             <a:pPr lvl="4"/>
             <a:r>
-              <a:rPr lang="en-US" smtClean="0"/>
+              <a:rPr lang="en-US"/>
               <a:t>Fifth level</a:t>
             </a:r>
-            <a:endParaRPr lang="en-US"/>
           </a:p>
         </p:txBody>
       </p:sp>
@@ -467,7 +479,7 @@
           <a:p>
             <a:fld id="{5BCAD085-E8A6-8845-BD4E-CB4CCA059FC4}" type="datetimeFigureOut">
               <a:rPr lang="en-US" smtClean="0"/>
-              <a:t>1/27/13</a:t>
+              <a:t>9/5/2026</a:t>
             </a:fld>
             <a:endParaRPr lang="en-US"/>
           </a:p>
@@ -566,10 +578,9 @@
           <a:lstStyle/>
           <a:p>
             <a:r>
-              <a:rPr lang="en-US" smtClean="0"/>
+              <a:rPr lang="en-US"/>
               <a:t>Click to edit Master title style</a:t>
             </a:r>
-            <a:endParaRPr lang="en-US"/>
           </a:p>
         </p:txBody>
       </p:sp>
@@ -595,38 +606,37 @@
           <a:p>
             <a:pPr lvl="0"/>
             <a:r>
-              <a:rPr lang="en-US" smtClean="0"/>
+              <a:rPr lang="en-US"/>
               <a:t>Click to edit Master text styles</a:t>
             </a:r>
           </a:p>
           <a:p>
             <a:pPr lvl="1"/>
             <a:r>
-              <a:rPr lang="en-US" smtClean="0"/>
+              <a:rPr lang="en-US"/>
               <a:t>Second level</a:t>
             </a:r>
           </a:p>
           <a:p>
             <a:pPr lvl="2"/>
             <a:r>
-              <a:rPr lang="en-US" smtClean="0"/>
+              <a:rPr lang="en-US"/>
               <a:t>Third level</a:t>
             </a:r>
           </a:p>
           <a:p>
             <a:pPr lvl="3"/>
             <a:r>
-              <a:rPr lang="en-US" smtClean="0"/>
+              <a:rPr lang="en-US"/>
               <a:t>Fourth level</a:t>
             </a:r>
           </a:p>
           <a:p>
             <a:pPr lvl="4"/>
             <a:r>
-              <a:rPr lang="en-US" smtClean="0"/>
+              <a:rPr lang="en-US"/>
               <a:t>Fifth level</a:t>
             </a:r>
-            <a:endParaRPr lang="en-US"/>
           </a:p>
         </p:txBody>
       </p:sp>
@@ -647,7 +657,7 @@
           <a:p>
             <a:fld id="{5BCAD085-E8A6-8845-BD4E-CB4CCA059FC4}" type="datetimeFigureOut">
               <a:rPr lang="en-US" smtClean="0"/>
-              <a:t>1/27/13</a:t>
+              <a:t>9/5/2026</a:t>
             </a:fld>
             <a:endParaRPr lang="en-US"/>
           </a:p>
@@ -741,10 +751,9 @@
           <a:lstStyle/>
           <a:p>
             <a:r>
-              <a:rPr lang="en-US" smtClean="0"/>
+              <a:rPr lang="en-US"/>
               <a:t>Click to edit Master title style</a:t>
             </a:r>
-            <a:endParaRPr lang="en-US"/>
           </a:p>
         </p:txBody>
       </p:sp>
@@ -765,38 +774,37 @@
           <a:p>
             <a:pPr lvl="0"/>
             <a:r>
-              <a:rPr lang="en-US" smtClean="0"/>
+              <a:rPr lang="en-US"/>
               <a:t>Click to edit Master text styles</a:t>
             </a:r>
           </a:p>
           <a:p>
             <a:pPr lvl="1"/>
             <a:r>
-              <a:rPr lang="en-US" smtClean="0"/>
+              <a:rPr lang="en-US"/>
               <a:t>Second level</a:t>
             </a:r>
           </a:p>
           <a:p>
             <a:pPr lvl="2"/>
             <a:r>
-              <a:rPr lang="en-US" smtClean="0"/>
+              <a:rPr lang="en-US"/>
               <a:t>Third level</a:t>
             </a:r>
           </a:p>
           <a:p>
             <a:pPr lvl="3"/>
             <a:r>
-              <a:rPr lang="en-US" smtClean="0"/>
+              <a:rPr lang="en-US"/>
               <a:t>Fourth level</a:t>
             </a:r>
           </a:p>
           <a:p>
             <a:pPr lvl="4"/>
             <a:r>
-              <a:rPr lang="en-US" smtClean="0"/>
+              <a:rPr lang="en-US"/>
               <a:t>Fifth level</a:t>
             </a:r>
-            <a:endParaRPr lang="en-US"/>
           </a:p>
         </p:txBody>
       </p:sp>
@@ -817,7 +825,7 @@
           <a:p>
             <a:fld id="{5BCAD085-E8A6-8845-BD4E-CB4CCA059FC4}" type="datetimeFigureOut">
               <a:rPr lang="en-US" smtClean="0"/>
-              <a:t>1/27/13</a:t>
+              <a:t>9/5/2026</a:t>
             </a:fld>
             <a:endParaRPr lang="en-US"/>
           </a:p>
@@ -920,10 +928,9 @@
           </a:lstStyle>
           <a:p>
             <a:r>
-              <a:rPr lang="en-US" smtClean="0"/>
+              <a:rPr lang="en-US"/>
               <a:t>Click to edit Master title style</a:t>
             </a:r>
-            <a:endParaRPr lang="en-US"/>
           </a:p>
         </p:txBody>
       </p:sp>
@@ -1040,7 +1047,7 @@
           <a:p>
             <a:pPr lvl="0"/>
             <a:r>
-              <a:rPr lang="en-US" smtClean="0"/>
+              <a:rPr lang="en-US"/>
               <a:t>Click to edit Master text styles</a:t>
             </a:r>
           </a:p>
@@ -1063,7 +1070,7 @@
           <a:p>
             <a:fld id="{5BCAD085-E8A6-8845-BD4E-CB4CCA059FC4}" type="datetimeFigureOut">
               <a:rPr lang="en-US" smtClean="0"/>
-              <a:t>1/27/13</a:t>
+              <a:t>9/5/2026</a:t>
             </a:fld>
             <a:endParaRPr lang="en-US"/>
           </a:p>
@@ -1157,10 +1164,9 @@
           <a:lstStyle/>
           <a:p>
             <a:r>
-              <a:rPr lang="en-US" smtClean="0"/>
+              <a:rPr lang="en-US"/>
               <a:t>Click to edit Master title style</a:t>
             </a:r>
-            <a:endParaRPr lang="en-US"/>
           </a:p>
         </p:txBody>
       </p:sp>
@@ -1214,38 +1220,37 @@
           <a:p>
             <a:pPr lvl="0"/>
             <a:r>
-              <a:rPr lang="en-US" smtClean="0"/>
+              <a:rPr lang="en-US"/>
               <a:t>Click to edit Master text styles</a:t>
             </a:r>
           </a:p>
           <a:p>
             <a:pPr lvl="1"/>
             <a:r>
-              <a:rPr lang="en-US" smtClean="0"/>
+              <a:rPr lang="en-US"/>
               <a:t>Second level</a:t>
             </a:r>
           </a:p>
           <a:p>
             <a:pPr lvl="2"/>
             <a:r>
-              <a:rPr lang="en-US" smtClean="0"/>
+              <a:rPr lang="en-US"/>
               <a:t>Third level</a:t>
             </a:r>
           </a:p>
           <a:p>
             <a:pPr lvl="3"/>
             <a:r>
-              <a:rPr lang="en-US" smtClean="0"/>
+              <a:rPr lang="en-US"/>
               <a:t>Fourth level</a:t>
             </a:r>
           </a:p>
           <a:p>
             <a:pPr lvl="4"/>
             <a:r>
-              <a:rPr lang="en-US" smtClean="0"/>
+              <a:rPr lang="en-US"/>
               <a:t>Fifth level</a:t>
             </a:r>
-            <a:endParaRPr lang="en-US"/>
           </a:p>
         </p:txBody>
       </p:sp>
@@ -1299,38 +1304,37 @@
           <a:p>
             <a:pPr lvl="0"/>
             <a:r>
-              <a:rPr lang="en-US" smtClean="0"/>
+              <a:rPr lang="en-US"/>
               <a:t>Click to edit Master text styles</a:t>
             </a:r>
           </a:p>
           <a:p>
             <a:pPr lvl="1"/>
             <a:r>
-              <a:rPr lang="en-US" smtClean="0"/>
+              <a:rPr lang="en-US"/>
               <a:t>Second level</a:t>
             </a:r>
           </a:p>
           <a:p>
             <a:pPr lvl="2"/>
             <a:r>
-              <a:rPr lang="en-US" smtClean="0"/>
+              <a:rPr lang="en-US"/>
               <a:t>Third level</a:t>
             </a:r>
           </a:p>
           <a:p>
             <a:pPr lvl="3"/>
             <a:r>
-              <a:rPr lang="en-US" smtClean="0"/>
+              <a:rPr lang="en-US"/>
               <a:t>Fourth level</a:t>
             </a:r>
           </a:p>
           <a:p>
             <a:pPr lvl="4"/>
             <a:r>
-              <a:rPr lang="en-US" smtClean="0"/>
+              <a:rPr lang="en-US"/>
               <a:t>Fifth level</a:t>
             </a:r>
-            <a:endParaRPr lang="en-US"/>
           </a:p>
         </p:txBody>
       </p:sp>
@@ -1351,7 +1355,7 @@
           <a:p>
             <a:fld id="{5BCAD085-E8A6-8845-BD4E-CB4CCA059FC4}" type="datetimeFigureOut">
               <a:rPr lang="en-US" smtClean="0"/>
-              <a:t>1/27/13</a:t>
+              <a:t>9/5/2026</a:t>
             </a:fld>
             <a:endParaRPr lang="en-US"/>
           </a:p>
@@ -1449,10 +1453,9 @@
           </a:lstStyle>
           <a:p>
             <a:r>
-              <a:rPr lang="en-US" smtClean="0"/>
+              <a:rPr lang="en-US"/>
               <a:t>Click to edit Master title style</a:t>
             </a:r>
-            <a:endParaRPr lang="en-US"/>
           </a:p>
         </p:txBody>
       </p:sp>
@@ -1515,7 +1518,7 @@
           <a:p>
             <a:pPr lvl="0"/>
             <a:r>
-              <a:rPr lang="en-US" smtClean="0"/>
+              <a:rPr lang="en-US"/>
               <a:t>Click to edit Master text styles</a:t>
             </a:r>
           </a:p>
@@ -1571,38 +1574,37 @@
           <a:p>
             <a:pPr lvl="0"/>
             <a:r>
-              <a:rPr lang="en-US" smtClean="0"/>
+              <a:rPr lang="en-US"/>
               <a:t>Click to edit Master text styles</a:t>
             </a:r>
           </a:p>
           <a:p>
             <a:pPr lvl="1"/>
             <a:r>
-              <a:rPr lang="en-US" smtClean="0"/>
+              <a:rPr lang="en-US"/>
               <a:t>Second level</a:t>
             </a:r>
           </a:p>
           <a:p>
             <a:pPr lvl="2"/>
             <a:r>
-              <a:rPr lang="en-US" smtClean="0"/>
+              <a:rPr lang="en-US"/>
               <a:t>Third level</a:t>
             </a:r>
           </a:p>
           <a:p>
             <a:pPr lvl="3"/>
             <a:r>
-              <a:rPr lang="en-US" smtClean="0"/>
+              <a:rPr lang="en-US"/>
               <a:t>Fourth level</a:t>
             </a:r>
           </a:p>
           <a:p>
             <a:pPr lvl="4"/>
             <a:r>
-              <a:rPr lang="en-US" smtClean="0"/>
+              <a:rPr lang="en-US"/>
               <a:t>Fifth level</a:t>
             </a:r>
-            <a:endParaRPr lang="en-US"/>
           </a:p>
         </p:txBody>
       </p:sp>
@@ -1665,7 +1667,7 @@
           <a:p>
             <a:pPr lvl="0"/>
             <a:r>
-              <a:rPr lang="en-US" smtClean="0"/>
+              <a:rPr lang="en-US"/>
               <a:t>Click to edit Master text styles</a:t>
             </a:r>
           </a:p>
@@ -1721,38 +1723,37 @@
           <a:p>
             <a:pPr lvl="0"/>
             <a:r>
-              <a:rPr lang="en-US" smtClean="0"/>
+              <a:rPr lang="en-US"/>
               <a:t>Click to edit Master text styles</a:t>
             </a:r>
           </a:p>
           <a:p>
             <a:pPr lvl="1"/>
             <a:r>
-              <a:rPr lang="en-US" smtClean="0"/>
+              <a:rPr lang="en-US"/>
               <a:t>Second level</a:t>
             </a:r>
           </a:p>
           <a:p>
             <a:pPr lvl="2"/>
             <a:r>
-              <a:rPr lang="en-US" smtClean="0"/>
+              <a:rPr lang="en-US"/>
               <a:t>Third level</a:t>
             </a:r>
           </a:p>
           <a:p>
             <a:pPr lvl="3"/>
             <a:r>
-              <a:rPr lang="en-US" smtClean="0"/>
+              <a:rPr lang="en-US"/>
               <a:t>Fourth level</a:t>
             </a:r>
           </a:p>
           <a:p>
             <a:pPr lvl="4"/>
             <a:r>
-              <a:rPr lang="en-US" smtClean="0"/>
+              <a:rPr lang="en-US"/>
               <a:t>Fifth level</a:t>
             </a:r>
-            <a:endParaRPr lang="en-US"/>
           </a:p>
         </p:txBody>
       </p:sp>
@@ -1773,7 +1774,7 @@
           <a:p>
             <a:fld id="{5BCAD085-E8A6-8845-BD4E-CB4CCA059FC4}" type="datetimeFigureOut">
               <a:rPr lang="en-US" smtClean="0"/>
-              <a:t>1/27/13</a:t>
+              <a:t>9/5/2026</a:t>
             </a:fld>
             <a:endParaRPr lang="en-US"/>
           </a:p>
@@ -1867,10 +1868,9 @@
           <a:lstStyle/>
           <a:p>
             <a:r>
-              <a:rPr lang="en-US" smtClean="0"/>
+              <a:rPr lang="en-US"/>
               <a:t>Click to edit Master title style</a:t>
             </a:r>
-            <a:endParaRPr lang="en-US"/>
           </a:p>
         </p:txBody>
       </p:sp>
@@ -1891,7 +1891,7 @@
           <a:p>
             <a:fld id="{5BCAD085-E8A6-8845-BD4E-CB4CCA059FC4}" type="datetimeFigureOut">
               <a:rPr lang="en-US" smtClean="0"/>
-              <a:t>1/27/13</a:t>
+              <a:t>9/5/2026</a:t>
             </a:fld>
             <a:endParaRPr lang="en-US"/>
           </a:p>
@@ -1986,7 +1986,7 @@
           <a:p>
             <a:fld id="{5BCAD085-E8A6-8845-BD4E-CB4CCA059FC4}" type="datetimeFigureOut">
               <a:rPr lang="en-US" smtClean="0"/>
-              <a:t>1/27/13</a:t>
+              <a:t>9/5/2026</a:t>
             </a:fld>
             <a:endParaRPr lang="en-US"/>
           </a:p>
@@ -2089,10 +2089,9 @@
           </a:lstStyle>
           <a:p>
             <a:r>
-              <a:rPr lang="en-US" smtClean="0"/>
+              <a:rPr lang="en-US"/>
               <a:t>Click to edit Master title style</a:t>
             </a:r>
-            <a:endParaRPr lang="en-US"/>
           </a:p>
         </p:txBody>
       </p:sp>
@@ -2146,38 +2145,37 @@
           <a:p>
             <a:pPr lvl="0"/>
             <a:r>
-              <a:rPr lang="en-US" smtClean="0"/>
+              <a:rPr lang="en-US"/>
               <a:t>Click to edit Master text styles</a:t>
             </a:r>
           </a:p>
           <a:p>
             <a:pPr lvl="1"/>
             <a:r>
-              <a:rPr lang="en-US" smtClean="0"/>
+              <a:rPr lang="en-US"/>
               <a:t>Second level</a:t>
             </a:r>
           </a:p>
           <a:p>
             <a:pPr lvl="2"/>
             <a:r>
-              <a:rPr lang="en-US" smtClean="0"/>
+              <a:rPr lang="en-US"/>
               <a:t>Third level</a:t>
             </a:r>
           </a:p>
           <a:p>
             <a:pPr lvl="3"/>
             <a:r>
-              <a:rPr lang="en-US" smtClean="0"/>
+              <a:rPr lang="en-US"/>
               <a:t>Fourth level</a:t>
             </a:r>
           </a:p>
           <a:p>
             <a:pPr lvl="4"/>
             <a:r>
-              <a:rPr lang="en-US" smtClean="0"/>
+              <a:rPr lang="en-US"/>
               <a:t>Fifth level</a:t>
             </a:r>
-            <a:endParaRPr lang="en-US"/>
           </a:p>
         </p:txBody>
       </p:sp>
@@ -2240,7 +2238,7 @@
           <a:p>
             <a:pPr lvl="0"/>
             <a:r>
-              <a:rPr lang="en-US" smtClean="0"/>
+              <a:rPr lang="en-US"/>
               <a:t>Click to edit Master text styles</a:t>
             </a:r>
           </a:p>
@@ -2263,7 +2261,7 @@
           <a:p>
             <a:fld id="{5BCAD085-E8A6-8845-BD4E-CB4CCA059FC4}" type="datetimeFigureOut">
               <a:rPr lang="en-US" smtClean="0"/>
-              <a:t>1/27/13</a:t>
+              <a:t>9/5/2026</a:t>
             </a:fld>
             <a:endParaRPr lang="en-US"/>
           </a:p>
@@ -2366,10 +2364,9 @@
           </a:lstStyle>
           <a:p>
             <a:r>
-              <a:rPr lang="en-US" smtClean="0"/>
+              <a:rPr lang="en-US"/>
               <a:t>Click to edit Master title style</a:t>
             </a:r>
-            <a:endParaRPr lang="en-US"/>
           </a:p>
         </p:txBody>
       </p:sp>
@@ -2493,7 +2490,7 @@
           <a:p>
             <a:pPr lvl="0"/>
             <a:r>
-              <a:rPr lang="en-US" smtClean="0"/>
+              <a:rPr lang="en-US"/>
               <a:t>Click to edit Master text styles</a:t>
             </a:r>
           </a:p>
@@ -2516,7 +2513,7 @@
           <a:p>
             <a:fld id="{5BCAD085-E8A6-8845-BD4E-CB4CCA059FC4}" type="datetimeFigureOut">
               <a:rPr lang="en-US" smtClean="0"/>
-              <a:t>1/27/13</a:t>
+              <a:t>9/5/2026</a:t>
             </a:fld>
             <a:endParaRPr lang="en-US"/>
           </a:p>
@@ -2625,10 +2622,9 @@
           <a:lstStyle/>
           <a:p>
             <a:r>
-              <a:rPr lang="en-US" smtClean="0"/>
+              <a:rPr lang="en-US"/>
               <a:t>Click to edit Master title style</a:t>
             </a:r>
-            <a:endParaRPr lang="en-US"/>
           </a:p>
         </p:txBody>
       </p:sp>
@@ -2659,38 +2655,37 @@
           <a:p>
             <a:pPr lvl="0"/>
             <a:r>
-              <a:rPr lang="en-US" smtClean="0"/>
+              <a:rPr lang="en-US"/>
               <a:t>Click to edit Master text styles</a:t>
             </a:r>
           </a:p>
           <a:p>
             <a:pPr lvl="1"/>
             <a:r>
-              <a:rPr lang="en-US" smtClean="0"/>
+              <a:rPr lang="en-US"/>
               <a:t>Second level</a:t>
             </a:r>
           </a:p>
           <a:p>
             <a:pPr lvl="2"/>
             <a:r>
-              <a:rPr lang="en-US" smtClean="0"/>
+              <a:rPr lang="en-US"/>
               <a:t>Third level</a:t>
             </a:r>
           </a:p>
           <a:p>
             <a:pPr lvl="3"/>
             <a:r>
-              <a:rPr lang="en-US" smtClean="0"/>
+              <a:rPr lang="en-US"/>
               <a:t>Fourth level</a:t>
             </a:r>
           </a:p>
           <a:p>
             <a:pPr lvl="4"/>
             <a:r>
-              <a:rPr lang="en-US" smtClean="0"/>
+              <a:rPr lang="en-US"/>
               <a:t>Fifth level</a:t>
             </a:r>
-            <a:endParaRPr lang="en-US"/>
           </a:p>
         </p:txBody>
       </p:sp>
@@ -2729,7 +2724,7 @@
           <a:p>
             <a:fld id="{5BCAD085-E8A6-8845-BD4E-CB4CCA059FC4}" type="datetimeFigureOut">
               <a:rPr lang="en-US" smtClean="0"/>
-              <a:t>1/27/13</a:t>
+              <a:t>9/5/2026</a:t>
             </a:fld>
             <a:endParaRPr lang="en-US"/>
           </a:p>
@@ -3088,7 +3083,7 @@
 </file>
 
 <file path=ppt/slides/slide1.xml><?xml version="1.0" encoding="utf-8"?>
-<p:sld xmlns:a="http://schemas.openxmlformats.org/drawingml/2006/main" xmlns:p="http://schemas.openxmlformats.org/presentationml/2006/main" xmlns:r="http://schemas.openxmlformats.org/officeDocument/2006/relationships">
+<p:sld xmlns:a="http://schemas.openxmlformats.org/drawingml/2006/main" xmlns:r="http://schemas.openxmlformats.org/officeDocument/2006/relationships" xmlns:p="http://schemas.openxmlformats.org/presentationml/2006/main">
   <p:cSld>
     <p:spTree>
       <p:nvGrpSpPr>
@@ -3096,7 +3091,14 @@
         <p:cNvGrpSpPr/>
         <p:nvPr/>
       </p:nvGrpSpPr>
-      <p:grpSpPr/>
+      <p:grpSpPr>
+        <a:xfrm>
+          <a:off x="0" y="0"/>
+          <a:ext cx="0" cy="0"/>
+          <a:chOff x="0" y="0"/>
+          <a:chExt cx="0" cy="0"/>
+        </a:xfrm>
+      </p:grpSpPr>
       <p:sp>
         <p:nvSpPr>
           <p:cNvPr id="2" name="Rounded Rectangle 1"/>
@@ -3105,7 +3107,7 @@
         </p:nvSpPr>
         <p:spPr>
           <a:xfrm>
-            <a:off x="2666847" y="164592"/>
+            <a:off x="2666847" y="141588"/>
             <a:ext cx="6858000" cy="384048"/>
           </a:xfrm>
           <a:prstGeom prst="roundRect">
@@ -3133,7 +3135,7 @@
           </a:fontRef>
         </p:style>
         <p:txBody>
-          <a:bodyPr rtlCol="0" anchor="ctr" wrap="square" tIns="18288" bIns="18288"/>
+          <a:bodyPr wrap="square" tIns="18288" bIns="18288" rtlCol="0" anchor="ctr"/>
           <a:lstStyle/>
           <a:p>
             <a:pPr algn="ctr">
@@ -3150,6 +3152,7 @@
               </a:defRPr>
             </a:pPr>
             <a:r>
+              <a:rPr sz="1600" dirty="0"/>
               <a:t>STRATEGIC GOAL, EXECUTIVE CONTEXT &amp; FINANCIAL DERIVATION</a:t>
             </a:r>
           </a:p>
@@ -3163,16 +3166,29 @@
         </p:nvSpPr>
         <p:spPr>
           <a:xfrm>
-            <a:off x="594360" y="594360"/>
-            <a:ext cx="9875520" cy="777240"/>
+            <a:off x="0" y="784143"/>
+            <a:ext cx="12192000" cy="543739"/>
           </a:xfrm>
           <a:prstGeom prst="rect">
             <a:avLst/>
           </a:prstGeom>
-          <a:noFill/>
-        </p:spPr>
-        <p:txBody>
-          <a:bodyPr wrap="square" lIns="0" rIns="0" tIns="0" bIns="0">
+        </p:spPr>
+        <p:style>
+          <a:lnRef idx="2">
+            <a:schemeClr val="accent6"/>
+          </a:lnRef>
+          <a:fillRef idx="1">
+            <a:schemeClr val="lt1"/>
+          </a:fillRef>
+          <a:effectRef idx="0">
+            <a:schemeClr val="accent6"/>
+          </a:effectRef>
+          <a:fontRef idx="minor">
+            <a:schemeClr val="dk1"/>
+          </a:fontRef>
+        </p:style>
+        <p:txBody>
+          <a:bodyPr wrap="square" lIns="0" tIns="0" rIns="0" bIns="0">
             <a:spAutoFit/>
           </a:bodyPr>
           <a:lstStyle/>
@@ -3188,6 +3204,11 @@
               </a:defRPr>
             </a:pPr>
             <a:r>
+              <a:rPr lang="en-US" sz="1600" dirty="0"/>
+              <a:t> </a:t>
+            </a:r>
+            <a:r>
+              <a:rPr sz="1600" dirty="0"/>
               <a:t>1. Myntra Expands Blended Gross Margin (+300bps) by Converting Daily Wishlist Habits into Recurring Non-Discounted Buying</a:t>
             </a:r>
           </a:p>
@@ -3206,42 +3227,12 @@
               </a:defRPr>
             </a:pPr>
             <a:r>
+              <a:rPr lang="en-US" sz="1600" dirty="0"/>
+              <a:t>      </a:t>
+            </a:r>
+            <a:r>
+              <a:rPr sz="1600" dirty="0"/>
               <a:t>Funding purchase confidence through proprietary spec clarity and AI styling to bypass traditional P&amp;L discount subsidies.</a:t>
-            </a:r>
-          </a:p>
-        </p:txBody>
-      </p:sp>
-      <p:sp>
-        <p:nvSpPr>
-          <p:cNvPr id="4" name="TextBox 3"/>
-          <p:cNvSpPr txBox="1"/>
-          <p:nvPr/>
-        </p:nvSpPr>
-        <p:spPr>
-          <a:xfrm>
-            <a:off x="10424160" y="594360"/>
-            <a:ext cx="1188720" cy="457200"/>
-          </a:xfrm>
-          <a:prstGeom prst="rect">
-            <a:avLst/>
-          </a:prstGeom>
-          <a:noFill/>
-        </p:spPr>
-        <p:txBody>
-          <a:bodyPr wrap="none" lIns="0" rIns="0" tIns="0" bIns="0">
-            <a:spAutoFit/>
-          </a:bodyPr>
-          <a:lstStyle/>
-          <a:p>
-            <a:pPr algn="r">
-              <a:defRPr sz="2400" b="1">
-                <a:solidFill>
-                  <a:srgbClr val="FF3F6C"/>
-                </a:solidFill>
-              </a:defRPr>
-            </a:pPr>
-            <a:r>
-              <a:t>myntra</a:t>
             </a:r>
           </a:p>
         </p:txBody>
@@ -3254,8 +3245,8 @@
         </p:nvSpPr>
         <p:spPr>
           <a:xfrm>
-            <a:off x="594360" y="1417320"/>
-            <a:ext cx="3931920" cy="3794760"/>
+            <a:off x="211923" y="2733176"/>
+            <a:ext cx="4389120" cy="4014405"/>
           </a:xfrm>
           <a:prstGeom prst="roundRect">
             <a:avLst/>
@@ -3288,6 +3279,7 @@
           <a:lstStyle/>
           <a:p>
             <a:pPr algn="ctr"/>
+            <a:endParaRPr/>
           </a:p>
         </p:txBody>
       </p:sp>
@@ -3299,8 +3291,8 @@
         </p:nvSpPr>
         <p:spPr>
           <a:xfrm>
-            <a:off x="704088" y="1490472"/>
-            <a:ext cx="3712464" cy="3648456"/>
+            <a:off x="347169" y="3136852"/>
+            <a:ext cx="4144146" cy="3040128"/>
           </a:xfrm>
           <a:prstGeom prst="rect">
             <a:avLst/>
@@ -3324,7 +3316,12 @@
               </a:defRPr>
             </a:pPr>
             <a:r>
-              <a:t>🎯 🎯 STRATEGIC GOAL &amp; SCOPE</a:t>
+              <a:rPr sz="1400" dirty="0"/>
+              <a:t> 🎯 </a:t>
+            </a:r>
+            <a:r>
+              <a:rPr sz="1400" u="sng" dirty="0"/>
+              <a:t>STRATEGIC GOAL &amp; SCOPE</a:t>
             </a:r>
           </a:p>
           <a:p>
@@ -3341,7 +3338,7 @@
               <a:defRPr sz="1400"/>
             </a:pPr>
             <a:r>
-              <a:rPr b="1">
+              <a:rPr sz="1400" b="1" dirty="0">
                 <a:solidFill>
                   <a:srgbClr val="FF3F6C"/>
                 </a:solidFill>
@@ -3349,7 +3346,7 @@
               <a:t>• </a:t>
             </a:r>
             <a:r>
-              <a:rPr b="1">
+              <a:rPr sz="1400" b="1" dirty="0">
                 <a:solidFill>
                   <a:srgbClr val="282C3F"/>
                 </a:solidFill>
@@ -3357,12 +3354,28 @@
               <a:t>Primary Objective: </a:t>
             </a:r>
             <a:r>
-              <a:rPr>
-                <a:solidFill>
-                  <a:srgbClr val="282C3F"/>
-                </a:solidFill>
-              </a:rPr>
-              <a:t>Drive non-discounted wishlist-to-bag conversion from 7.5% to 10.5% (+300bps) in 12 months [Myntra internal analytics, est.].</a:t>
+              <a:rPr sz="1400" dirty="0">
+                <a:solidFill>
+                  <a:srgbClr val="282C3F"/>
+                </a:solidFill>
+              </a:rPr>
+              <a:t>Drive non-discounted </a:t>
+            </a:r>
+            <a:r>
+              <a:rPr sz="1400" dirty="0" err="1">
+                <a:solidFill>
+                  <a:srgbClr val="282C3F"/>
+                </a:solidFill>
+              </a:rPr>
+              <a:t>wishlist</a:t>
+            </a:r>
+            <a:r>
+              <a:rPr sz="1400" dirty="0">
+                <a:solidFill>
+                  <a:srgbClr val="282C3F"/>
+                </a:solidFill>
+              </a:rPr>
+              <a:t>-to-bag conversion from 7.5% to 10.5% (+300bps) in 12 months [Myntra internal analytics, est.].</a:t>
             </a:r>
           </a:p>
           <a:p>
@@ -3379,7 +3392,7 @@
               <a:defRPr sz="1400"/>
             </a:pPr>
             <a:r>
-              <a:rPr b="1">
+              <a:rPr sz="1400" b="1" dirty="0">
                 <a:solidFill>
                   <a:srgbClr val="FF3F6C"/>
                 </a:solidFill>
@@ -3387,7 +3400,7 @@
               <a:t>• </a:t>
             </a:r>
             <a:r>
-              <a:rPr b="1">
+              <a:rPr sz="1400" b="1" dirty="0">
                 <a:solidFill>
                   <a:srgbClr val="282C3F"/>
                 </a:solidFill>
@@ -3395,12 +3408,28 @@
               <a:t>Shortlist Inertia: </a:t>
             </a:r>
             <a:r>
-              <a:rPr>
-                <a:solidFill>
-                  <a:srgbClr val="282C3F"/>
-                </a:solidFill>
-              </a:rPr>
-              <a:t>66.7% of active wishlists stall into inactive graveyards with 38+ saved items per user.</a:t>
+              <a:rPr sz="1400" dirty="0">
+                <a:solidFill>
+                  <a:srgbClr val="282C3F"/>
+                </a:solidFill>
+              </a:rPr>
+              <a:t>66.7% of active </a:t>
+            </a:r>
+            <a:r>
+              <a:rPr sz="1400" dirty="0" err="1">
+                <a:solidFill>
+                  <a:srgbClr val="282C3F"/>
+                </a:solidFill>
+              </a:rPr>
+              <a:t>wishlists</a:t>
+            </a:r>
+            <a:r>
+              <a:rPr sz="1400" dirty="0">
+                <a:solidFill>
+                  <a:srgbClr val="282C3F"/>
+                </a:solidFill>
+              </a:rPr>
+              <a:t> stall into inactive graveyards with 38+ saved items per user.</a:t>
             </a:r>
           </a:p>
           <a:p>
@@ -3417,7 +3446,7 @@
               <a:defRPr sz="1400"/>
             </a:pPr>
             <a:r>
-              <a:rPr b="1">
+              <a:rPr sz="1400" b="1" dirty="0">
                 <a:solidFill>
                   <a:srgbClr val="FF3F6C"/>
                 </a:solidFill>
@@ -3425,7 +3454,7 @@
               <a:t>• </a:t>
             </a:r>
             <a:r>
-              <a:rPr b="1">
+              <a:rPr sz="1400" b="1" dirty="0">
                 <a:solidFill>
                   <a:srgbClr val="282C3F"/>
                 </a:solidFill>
@@ -3433,7 +3462,7 @@
               <a:t>Scope &amp; Mandate: </a:t>
             </a:r>
             <a:r>
-              <a:rPr>
+              <a:rPr sz="1400" dirty="0">
                 <a:solidFill>
                   <a:srgbClr val="282C3F"/>
                 </a:solidFill>
@@ -3455,7 +3484,7 @@
               <a:defRPr sz="1400"/>
             </a:pPr>
             <a:r>
-              <a:rPr b="1">
+              <a:rPr sz="1400" b="1" dirty="0">
                 <a:solidFill>
                   <a:srgbClr val="FF3F6C"/>
                 </a:solidFill>
@@ -3463,7 +3492,7 @@
               <a:t>• </a:t>
             </a:r>
             <a:r>
-              <a:rPr b="1">
+              <a:rPr sz="1400" b="1" dirty="0">
                 <a:solidFill>
                   <a:srgbClr val="282C3F"/>
                 </a:solidFill>
@@ -3471,7 +3500,7 @@
               <a:t>Target Engagement: </a:t>
             </a:r>
             <a:r>
-              <a:rPr>
+              <a:rPr sz="1400" dirty="0">
                 <a:solidFill>
                   <a:srgbClr val="282C3F"/>
                 </a:solidFill>
@@ -3489,8 +3518,8 @@
         </p:nvSpPr>
         <p:spPr>
           <a:xfrm>
-            <a:off x="4663440" y="1417320"/>
-            <a:ext cx="4389120" cy="3794760"/>
+            <a:off x="4841142" y="2738927"/>
+            <a:ext cx="4550149" cy="4014405"/>
           </a:xfrm>
           <a:prstGeom prst="roundRect">
             <a:avLst/>
@@ -3523,6 +3552,7 @@
           <a:lstStyle/>
           <a:p>
             <a:pPr algn="ctr"/>
+            <a:endParaRPr/>
           </a:p>
         </p:txBody>
       </p:sp>
@@ -3534,8 +3564,8 @@
         </p:nvSpPr>
         <p:spPr>
           <a:xfrm>
-            <a:off x="4773168" y="1490472"/>
-            <a:ext cx="4169664" cy="3648456"/>
+            <a:off x="4924732" y="2854729"/>
+            <a:ext cx="4389120" cy="3796232"/>
           </a:xfrm>
           <a:prstGeom prst="rect">
             <a:avLst/>
@@ -3559,11 +3589,16 @@
               </a:defRPr>
             </a:pPr>
             <a:r>
-              <a:t>💰 💰 5-STEP UNIT ECONOMICS DERIVATION WATERFALL</a:t>
-            </a:r>
-          </a:p>
-          <a:p>
-            <a:pPr marL="177800" indent="0">
+              <a:rPr sz="1400" dirty="0"/>
+              <a:t>💰 </a:t>
+            </a:r>
+            <a:r>
+              <a:rPr sz="1400" u="sng" dirty="0"/>
+              <a:t>5-STEP UNIT ECONOMICS DERIVATION WATERFALL</a:t>
+            </a:r>
+          </a:p>
+          <a:p>
+            <a:pPr marL="463550" indent="-285750">
               <a:lnSpc>
                 <a:spcPct val="115000"/>
               </a:lnSpc>
@@ -3573,18 +3608,23 @@
               <a:spcAft>
                 <a:spcPts val="200"/>
               </a:spcAft>
+              <a:buClr>
+                <a:srgbClr val="FF3F6C"/>
+              </a:buClr>
+              <a:buFont typeface="Arial" panose="020B0604020202020204" pitchFamily="34" charset="0"/>
+              <a:buChar char="•"/>
               <a:defRPr sz="1400"/>
             </a:pPr>
             <a:r>
-              <a:rPr b="1">
-                <a:solidFill>
-                  <a:srgbClr val="282C3F"/>
-                </a:solidFill>
-              </a:rPr>
-              <a:t>1. Active Base: </a:t>
-            </a:r>
-            <a:r>
-              <a:rPr>
+              <a:rPr sz="1400" b="1" dirty="0">
+                <a:solidFill>
+                  <a:srgbClr val="282C3F"/>
+                </a:solidFill>
+              </a:rPr>
+              <a:t>Active Base: </a:t>
+            </a:r>
+            <a:r>
+              <a:rPr sz="1400" dirty="0">
                 <a:solidFill>
                   <a:srgbClr val="282C3F"/>
                 </a:solidFill>
@@ -3593,7 +3633,7 @@
             </a:r>
           </a:p>
           <a:p>
-            <a:pPr marL="177800" indent="0">
+            <a:pPr marL="463550" indent="-285750">
               <a:lnSpc>
                 <a:spcPct val="115000"/>
               </a:lnSpc>
@@ -3603,27 +3643,48 @@
               <a:spcAft>
                 <a:spcPts val="200"/>
               </a:spcAft>
+              <a:buClr>
+                <a:srgbClr val="FF3F6C"/>
+              </a:buClr>
+              <a:buFont typeface="Arial" panose="020B0604020202020204" pitchFamily="34" charset="0"/>
+              <a:buChar char="•"/>
               <a:defRPr sz="1400"/>
             </a:pPr>
             <a:r>
-              <a:rPr b="1">
-                <a:solidFill>
-                  <a:srgbClr val="282C3F"/>
-                </a:solidFill>
-              </a:rPr>
-              <a:t>2. Monthly GMV Lift: </a:t>
-            </a:r>
-            <a:r>
-              <a:rPr>
-                <a:solidFill>
-                  <a:srgbClr val="282C3F"/>
-                </a:solidFill>
-              </a:rPr>
-              <a:t>300,000 Buyers × ₹1,650 AOV [Redseer 2024] = +₹49.50 Cr Incremental Monthly GMV.</a:t>
-            </a:r>
-          </a:p>
-          <a:p>
-            <a:pPr marL="177800" indent="0">
+              <a:rPr sz="1400" b="1" dirty="0">
+                <a:solidFill>
+                  <a:srgbClr val="282C3F"/>
+                </a:solidFill>
+              </a:rPr>
+              <a:t>Monthly GMV Lift: </a:t>
+            </a:r>
+            <a:r>
+              <a:rPr sz="1400" dirty="0">
+                <a:solidFill>
+                  <a:srgbClr val="282C3F"/>
+                </a:solidFill>
+              </a:rPr>
+              <a:t>300,000 Buyers × ₹1,650 AOV [</a:t>
+            </a:r>
+            <a:r>
+              <a:rPr sz="1400" dirty="0" err="1">
+                <a:solidFill>
+                  <a:srgbClr val="282C3F"/>
+                </a:solidFill>
+              </a:rPr>
+              <a:t>Redseer</a:t>
+            </a:r>
+            <a:r>
+              <a:rPr sz="1400" dirty="0">
+                <a:solidFill>
+                  <a:srgbClr val="282C3F"/>
+                </a:solidFill>
+              </a:rPr>
+              <a:t> 2024] = +₹49.50 Cr Incremental Monthly GMV.</a:t>
+            </a:r>
+          </a:p>
+          <a:p>
+            <a:pPr marL="463550" indent="-285750">
               <a:lnSpc>
                 <a:spcPct val="115000"/>
               </a:lnSpc>
@@ -3633,18 +3694,23 @@
               <a:spcAft>
                 <a:spcPts val="200"/>
               </a:spcAft>
+              <a:buClr>
+                <a:srgbClr val="FF3F6C"/>
+              </a:buClr>
+              <a:buFont typeface="Arial" panose="020B0604020202020204" pitchFamily="34" charset="0"/>
+              <a:buChar char="•"/>
               <a:defRPr sz="1400"/>
             </a:pPr>
             <a:r>
-              <a:rPr b="1">
-                <a:solidFill>
-                  <a:srgbClr val="282C3F"/>
-                </a:solidFill>
-              </a:rPr>
-              <a:t>3. Gross Profit (38% Margin): </a:t>
-            </a:r>
-            <a:r>
-              <a:rPr>
+              <a:rPr sz="1400" b="1" dirty="0">
+                <a:solidFill>
+                  <a:srgbClr val="282C3F"/>
+                </a:solidFill>
+              </a:rPr>
+              <a:t>Gross Profit (38% Margin): </a:t>
+            </a:r>
+            <a:r>
+              <a:rPr sz="1400" dirty="0">
                 <a:solidFill>
                   <a:srgbClr val="282C3F"/>
                 </a:solidFill>
@@ -3653,7 +3719,7 @@
             </a:r>
           </a:p>
           <a:p>
-            <a:pPr marL="177800" indent="0">
+            <a:pPr marL="463550" indent="-285750">
               <a:lnSpc>
                 <a:spcPct val="115000"/>
               </a:lnSpc>
@@ -3663,18 +3729,23 @@
               <a:spcAft>
                 <a:spcPts val="200"/>
               </a:spcAft>
+              <a:buClr>
+                <a:srgbClr val="FF3F6C"/>
+              </a:buClr>
+              <a:buFont typeface="Arial" panose="020B0604020202020204" pitchFamily="34" charset="0"/>
+              <a:buChar char="•"/>
               <a:defRPr sz="1400"/>
             </a:pPr>
             <a:r>
-              <a:rPr b="1">
-                <a:solidFill>
-                  <a:srgbClr val="282C3F"/>
-                </a:solidFill>
-              </a:rPr>
-              <a:t>4. Reverse Logistics Savings: </a:t>
-            </a:r>
-            <a:r>
-              <a:rPr>
+              <a:rPr sz="1400" b="1" dirty="0">
+                <a:solidFill>
+                  <a:srgbClr val="282C3F"/>
+                </a:solidFill>
+              </a:rPr>
+              <a:t>Reverse Logistics Savings: </a:t>
+            </a:r>
+            <a:r>
+              <a:rPr sz="1400" dirty="0">
                 <a:solidFill>
                   <a:srgbClr val="282C3F"/>
                 </a:solidFill>
@@ -3683,7 +3754,7 @@
             </a:r>
           </a:p>
           <a:p>
-            <a:pPr marL="177800" indent="0">
+            <a:pPr marL="463550" indent="-285750">
               <a:lnSpc>
                 <a:spcPct val="115000"/>
               </a:lnSpc>
@@ -3693,69 +3764,45 @@
               <a:spcAft>
                 <a:spcPts val="200"/>
               </a:spcAft>
+              <a:buClr>
+                <a:srgbClr val="FF3F6C"/>
+              </a:buClr>
+              <a:buFont typeface="Arial" panose="020B0604020202020204" pitchFamily="34" charset="0"/>
+              <a:buChar char="•"/>
               <a:defRPr sz="1400"/>
             </a:pPr>
             <a:r>
-              <a:rPr b="1">
-                <a:solidFill>
-                  <a:srgbClr val="282C3F"/>
-                </a:solidFill>
-              </a:rPr>
-              <a:t>5. ROI &amp; Payback: </a:t>
-            </a:r>
-            <a:r>
-              <a:rPr>
-                <a:solidFill>
-                  <a:srgbClr val="282C3F"/>
-                </a:solidFill>
-              </a:rPr>
-              <a:t>Tech Infra: ₹8.5L/mo (Sentence-BERT + LLM) → 221x ROI | Payback Period: &lt; 4 Days.</a:t>
-            </a:r>
-          </a:p>
-        </p:txBody>
-      </p:sp>
-      <p:sp>
-        <p:nvSpPr>
-          <p:cNvPr id="9" name="Rounded Rectangle 8"/>
-          <p:cNvSpPr/>
-          <p:nvPr/>
-        </p:nvSpPr>
-        <p:spPr>
-          <a:xfrm>
-            <a:off x="9189720" y="1417320"/>
-            <a:ext cx="2404872" cy="3794760"/>
-          </a:xfrm>
-          <a:prstGeom prst="roundRect">
-            <a:avLst/>
-          </a:prstGeom>
-          <a:solidFill>
-            <a:srgbClr val="282C3F"/>
-          </a:solidFill>
-          <a:ln w="19050">
-            <a:solidFill>
-              <a:srgbClr val="0F172A"/>
-            </a:solidFill>
-          </a:ln>
-        </p:spPr>
-        <p:style>
-          <a:lnRef idx="1">
-            <a:schemeClr val="accent1"/>
-          </a:lnRef>
-          <a:fillRef idx="3">
-            <a:schemeClr val="accent1"/>
-          </a:fillRef>
-          <a:effectRef idx="2">
-            <a:schemeClr val="accent1"/>
-          </a:effectRef>
-          <a:fontRef idx="minor">
-            <a:schemeClr val="lt1"/>
-          </a:fontRef>
-        </p:style>
-        <p:txBody>
-          <a:bodyPr rtlCol="0" anchor="ctr"/>
-          <a:lstStyle/>
-          <a:p>
-            <a:pPr algn="ctr"/>
+              <a:rPr sz="1400" b="1" dirty="0">
+                <a:solidFill>
+                  <a:srgbClr val="282C3F"/>
+                </a:solidFill>
+              </a:rPr>
+              <a:t>ROI &amp; Payback: </a:t>
+            </a:r>
+            <a:r>
+              <a:rPr sz="1400" dirty="0">
+                <a:solidFill>
+                  <a:srgbClr val="282C3F"/>
+                </a:solidFill>
+              </a:rPr>
+              <a:t>Tech Infra: ₹8.5L/</a:t>
+            </a:r>
+            <a:r>
+              <a:rPr sz="1400" dirty="0" err="1">
+                <a:solidFill>
+                  <a:srgbClr val="282C3F"/>
+                </a:solidFill>
+              </a:rPr>
+              <a:t>mo</a:t>
+            </a:r>
+            <a:r>
+              <a:rPr sz="1400" dirty="0">
+                <a:solidFill>
+                  <a:srgbClr val="282C3F"/>
+                </a:solidFill>
+              </a:rPr>
+              <a:t> (Sentence-BERT + LLM) → 221x ROI | Payback Period: &lt; 4 Days.</a:t>
+            </a:r>
           </a:p>
         </p:txBody>
       </p:sp>
@@ -3775,8 +3822,8 @@
         </p:blipFill>
         <p:spPr>
           <a:xfrm>
-            <a:off x="9244584" y="1472184"/>
-            <a:ext cx="2295144" cy="3685032"/>
+            <a:off x="9543636" y="2783396"/>
+            <a:ext cx="2295144" cy="3876196"/>
           </a:xfrm>
           <a:prstGeom prst="rect">
             <a:avLst/>
@@ -3791,8 +3838,8 @@
         </p:nvSpPr>
         <p:spPr>
           <a:xfrm>
-            <a:off x="594360" y="5349240"/>
-            <a:ext cx="2633472" cy="1234440"/>
+            <a:off x="511833" y="1622660"/>
+            <a:ext cx="2560722" cy="907758"/>
           </a:xfrm>
           <a:prstGeom prst="roundRect">
             <a:avLst/>
@@ -3825,6 +3872,7 @@
           <a:lstStyle/>
           <a:p>
             <a:pPr algn="ctr"/>
+            <a:endParaRPr sz="1400"/>
           </a:p>
         </p:txBody>
       </p:sp>
@@ -3836,8 +3884,8 @@
         </p:nvSpPr>
         <p:spPr>
           <a:xfrm>
-            <a:off x="594360" y="5422392"/>
-            <a:ext cx="2633472" cy="1088136"/>
+            <a:off x="431320" y="1690060"/>
+            <a:ext cx="2733251" cy="579646"/>
           </a:xfrm>
           <a:prstGeom prst="rect">
             <a:avLst/>
@@ -3858,6 +3906,7 @@
               </a:defRPr>
             </a:pPr>
             <a:r>
+              <a:rPr sz="1600" dirty="0"/>
               <a:t>50M+</a:t>
             </a:r>
           </a:p>
@@ -3873,7 +3922,16 @@
               </a:defRPr>
             </a:pPr>
             <a:r>
-              <a:t>Active Shoppers (MAU) [Redseer]</a:t>
+              <a:rPr sz="1400" dirty="0"/>
+              <a:t>Active Shoppers (MAU) [</a:t>
+            </a:r>
+            <a:r>
+              <a:rPr sz="1400" dirty="0" err="1"/>
+              <a:t>Redseer</a:t>
+            </a:r>
+            <a:r>
+              <a:rPr sz="1400" dirty="0"/>
+              <a:t>]</a:t>
             </a:r>
           </a:p>
         </p:txBody>
@@ -3886,8 +3944,8 @@
         </p:nvSpPr>
         <p:spPr>
           <a:xfrm>
-            <a:off x="3383280" y="5349240"/>
-            <a:ext cx="2633472" cy="1234440"/>
+            <a:off x="3404271" y="1593905"/>
+            <a:ext cx="2560722" cy="907758"/>
           </a:xfrm>
           <a:prstGeom prst="roundRect">
             <a:avLst/>
@@ -3920,6 +3978,7 @@
           <a:lstStyle/>
           <a:p>
             <a:pPr algn="ctr"/>
+            <a:endParaRPr sz="1400"/>
           </a:p>
         </p:txBody>
       </p:sp>
@@ -3931,8 +3990,8 @@
         </p:nvSpPr>
         <p:spPr>
           <a:xfrm>
-            <a:off x="3383280" y="5422392"/>
-            <a:ext cx="2633472" cy="1088136"/>
+            <a:off x="3371778" y="1667056"/>
+            <a:ext cx="2633472" cy="579646"/>
           </a:xfrm>
           <a:prstGeom prst="rect">
             <a:avLst/>
@@ -3953,6 +4012,7 @@
               </a:defRPr>
             </a:pPr>
             <a:r>
+              <a:rPr sz="1600" dirty="0"/>
               <a:t>500K+</a:t>
             </a:r>
           </a:p>
@@ -3968,6 +4028,7 @@
               </a:defRPr>
             </a:pPr>
             <a:r>
+              <a:rPr sz="1400" dirty="0"/>
               <a:t>Curated Fashion Styles</a:t>
             </a:r>
           </a:p>
@@ -3981,8 +4042,8 @@
         </p:nvSpPr>
         <p:spPr>
           <a:xfrm>
-            <a:off x="6172200" y="5349240"/>
-            <a:ext cx="2633472" cy="1234440"/>
+            <a:off x="6198942" y="1593905"/>
+            <a:ext cx="2560722" cy="907758"/>
           </a:xfrm>
           <a:prstGeom prst="roundRect">
             <a:avLst/>
@@ -4015,6 +4076,7 @@
           <a:lstStyle/>
           <a:p>
             <a:pPr algn="ctr"/>
+            <a:endParaRPr sz="1400"/>
           </a:p>
         </p:txBody>
       </p:sp>
@@ -4026,8 +4088,8 @@
         </p:nvSpPr>
         <p:spPr>
           <a:xfrm>
-            <a:off x="6172200" y="5422392"/>
-            <a:ext cx="2633472" cy="1088136"/>
+            <a:off x="6160698" y="1667056"/>
+            <a:ext cx="2633472" cy="579646"/>
           </a:xfrm>
           <a:prstGeom prst="rect">
             <a:avLst/>
@@ -4048,6 +4110,7 @@
               </a:defRPr>
             </a:pPr>
             <a:r>
+              <a:rPr sz="1600" dirty="0"/>
               <a:t>66.7%</a:t>
             </a:r>
           </a:p>
@@ -4063,7 +4126,12 @@
               </a:defRPr>
             </a:pPr>
             <a:r>
-              <a:t>Wishlists Inactive Graveyard</a:t>
+              <a:rPr sz="1400" dirty="0" err="1"/>
+              <a:t>Wishlists</a:t>
+            </a:r>
+            <a:r>
+              <a:rPr sz="1400" dirty="0"/>
+              <a:t> Inactive Graveyard</a:t>
             </a:r>
           </a:p>
         </p:txBody>
@@ -4076,8 +4144,8 @@
         </p:nvSpPr>
         <p:spPr>
           <a:xfrm>
-            <a:off x="8961120" y="5349240"/>
-            <a:ext cx="2633472" cy="1234440"/>
+            <a:off x="8997538" y="1593905"/>
+            <a:ext cx="2901336" cy="907758"/>
           </a:xfrm>
           <a:prstGeom prst="roundRect">
             <a:avLst/>
@@ -4110,6 +4178,7 @@
           <a:lstStyle/>
           <a:p>
             <a:pPr algn="ctr"/>
+            <a:endParaRPr sz="1400"/>
           </a:p>
         </p:txBody>
       </p:sp>
@@ -4121,8 +4190,8 @@
         </p:nvSpPr>
         <p:spPr>
           <a:xfrm>
-            <a:off x="8961120" y="5422392"/>
-            <a:ext cx="2633472" cy="1088136"/>
+            <a:off x="8949618" y="1667056"/>
+            <a:ext cx="2983762" cy="579646"/>
           </a:xfrm>
           <a:prstGeom prst="rect">
             <a:avLst/>
@@ -4143,6 +4212,7 @@
               </a:defRPr>
             </a:pPr>
             <a:r>
+              <a:rPr sz="1600" dirty="0"/>
               <a:t>+₹18.81 Cr</a:t>
             </a:r>
           </a:p>
@@ -4158,11 +4228,43 @@
               </a:defRPr>
             </a:pPr>
             <a:r>
+              <a:rPr sz="1400" dirty="0"/>
               <a:t>Monthly Profit Unlock (38% Margin)</a:t>
             </a:r>
           </a:p>
         </p:txBody>
       </p:sp>
+      <p:pic>
+        <p:nvPicPr>
+          <p:cNvPr id="19" name="Picture 18" descr="Myntra Logo in Vector Format | Party font, Velvet dress ...">
+            <a:extLst>
+              <a:ext uri="{FF2B5EF4-FFF2-40B4-BE49-F238E27FC236}">
+                <a16:creationId xmlns:a16="http://schemas.microsoft.com/office/drawing/2014/main" id="{49B68A1E-33A1-4B20-1485-BD069657DFFB}"/>
+              </a:ext>
+            </a:extLst>
+          </p:cNvPr>
+          <p:cNvPicPr>
+            <a:picLocks noChangeAspect="1"/>
+          </p:cNvPicPr>
+          <p:nvPr/>
+        </p:nvPicPr>
+        <p:blipFill>
+          <a:blip r:embed="rId3"/>
+          <a:srcRect t="35750" r="2278" b="33850"/>
+          <a:stretch>
+            <a:fillRect/>
+          </a:stretch>
+        </p:blipFill>
+        <p:spPr>
+          <a:xfrm>
+            <a:off x="10800272" y="138030"/>
+            <a:ext cx="1276688" cy="397152"/>
+          </a:xfrm>
+          <a:prstGeom prst="rect">
+            <a:avLst/>
+          </a:prstGeom>
+        </p:spPr>
+      </p:pic>
     </p:spTree>
   </p:cSld>
   <p:clrMapOvr>
@@ -4172,7 +4274,7 @@
 </file>
 
 <file path=ppt/slides/slide10.xml><?xml version="1.0" encoding="utf-8"?>
-<p:sld xmlns:a="http://schemas.openxmlformats.org/drawingml/2006/main" xmlns:p="http://schemas.openxmlformats.org/presentationml/2006/main" xmlns:r="http://schemas.openxmlformats.org/officeDocument/2006/relationships">
+<p:sld xmlns:a="http://schemas.openxmlformats.org/drawingml/2006/main" xmlns:r="http://schemas.openxmlformats.org/officeDocument/2006/relationships" xmlns:p="http://schemas.openxmlformats.org/presentationml/2006/main">
   <p:cSld>
     <p:spTree>
       <p:nvGrpSpPr>
@@ -4180,7 +4282,14 @@
         <p:cNvGrpSpPr/>
         <p:nvPr/>
       </p:nvGrpSpPr>
-      <p:grpSpPr/>
+      <p:grpSpPr>
+        <a:xfrm>
+          <a:off x="0" y="0"/>
+          <a:ext cx="0" cy="0"/>
+          <a:chOff x="0" y="0"/>
+          <a:chExt cx="0" cy="0"/>
+        </a:xfrm>
+      </p:grpSpPr>
       <p:sp>
         <p:nvSpPr>
           <p:cNvPr id="2" name="Rounded Rectangle 1"/>
@@ -4217,7 +4326,7 @@
           </a:fontRef>
         </p:style>
         <p:txBody>
-          <a:bodyPr rtlCol="0" anchor="ctr" wrap="square" tIns="18288" bIns="18288"/>
+          <a:bodyPr wrap="square" tIns="18288" bIns="18288" rtlCol="0" anchor="ctr"/>
           <a:lstStyle/>
           <a:p>
             <a:pPr algn="ctr">
@@ -4234,6 +4343,7 @@
               </a:defRPr>
             </a:pPr>
             <a:r>
+              <a:rPr sz="1600"/>
               <a:t>PITFALLS, MITIGATIONS &amp; PHASED ROLLOUT ROADMAP</a:t>
             </a:r>
           </a:p>
@@ -4247,16 +4357,29 @@
         </p:nvSpPr>
         <p:spPr>
           <a:xfrm>
-            <a:off x="594360" y="594360"/>
-            <a:ext cx="9875520" cy="777240"/>
+            <a:off x="0" y="709380"/>
+            <a:ext cx="12192000" cy="543739"/>
           </a:xfrm>
           <a:prstGeom prst="rect">
             <a:avLst/>
           </a:prstGeom>
-          <a:noFill/>
-        </p:spPr>
-        <p:txBody>
-          <a:bodyPr wrap="square" lIns="0" rIns="0" tIns="0" bIns="0">
+        </p:spPr>
+        <p:style>
+          <a:lnRef idx="2">
+            <a:schemeClr val="accent6"/>
+          </a:lnRef>
+          <a:fillRef idx="1">
+            <a:schemeClr val="lt1"/>
+          </a:fillRef>
+          <a:effectRef idx="0">
+            <a:schemeClr val="accent6"/>
+          </a:effectRef>
+          <a:fontRef idx="minor">
+            <a:schemeClr val="dk1"/>
+          </a:fontRef>
+        </p:style>
+        <p:txBody>
+          <a:bodyPr wrap="square" lIns="0" tIns="0" rIns="0" bIns="0">
             <a:spAutoFit/>
           </a:bodyPr>
           <a:lstStyle/>
@@ -4272,6 +4395,11 @@
               </a:defRPr>
             </a:pPr>
             <a:r>
+              <a:rPr lang="en-US" sz="1600" dirty="0"/>
+              <a:t> </a:t>
+            </a:r>
+            <a:r>
+              <a:rPr sz="1600" dirty="0"/>
               <a:t>10. Pitfalls, Mitigations, and Phased GTM Rollout: Delivering ₹18.81 Cr Profit with 60-Second Circuit Breakers</a:t>
             </a:r>
           </a:p>
@@ -4290,42 +4418,12 @@
               </a:defRPr>
             </a:pPr>
             <a:r>
+              <a:rPr lang="en-US" sz="1600" dirty="0"/>
+              <a:t>        </a:t>
+            </a:r>
+            <a:r>
+              <a:rPr sz="1600" dirty="0"/>
               <a:t>Risk mitigation matrix and 3-phase rollout roadmap with explicit success gates and automated safeguards.</a:t>
-            </a:r>
-          </a:p>
-        </p:txBody>
-      </p:sp>
-      <p:sp>
-        <p:nvSpPr>
-          <p:cNvPr id="4" name="TextBox 3"/>
-          <p:cNvSpPr txBox="1"/>
-          <p:nvPr/>
-        </p:nvSpPr>
-        <p:spPr>
-          <a:xfrm>
-            <a:off x="10424160" y="594360"/>
-            <a:ext cx="1188720" cy="457200"/>
-          </a:xfrm>
-          <a:prstGeom prst="rect">
-            <a:avLst/>
-          </a:prstGeom>
-          <a:noFill/>
-        </p:spPr>
-        <p:txBody>
-          <a:bodyPr wrap="none" lIns="0" rIns="0" tIns="0" bIns="0">
-            <a:spAutoFit/>
-          </a:bodyPr>
-          <a:lstStyle/>
-          <a:p>
-            <a:pPr algn="r">
-              <a:defRPr sz="2400" b="1">
-                <a:solidFill>
-                  <a:srgbClr val="FF3F6C"/>
-                </a:solidFill>
-              </a:defRPr>
-            </a:pPr>
-            <a:r>
-              <a:t>myntra</a:t>
             </a:r>
           </a:p>
         </p:txBody>
@@ -4372,6 +4470,7 @@
           <a:lstStyle/>
           <a:p>
             <a:pPr algn="ctr"/>
+            <a:endParaRPr/>
           </a:p>
         </p:txBody>
       </p:sp>
@@ -4383,8 +4482,8 @@
         </p:nvSpPr>
         <p:spPr>
           <a:xfrm>
-            <a:off x="667512" y="1472184"/>
-            <a:ext cx="3419856" cy="2404872"/>
+            <a:off x="667512" y="1610208"/>
+            <a:ext cx="3419856" cy="1588384"/>
           </a:xfrm>
           <a:prstGeom prst="rect">
             <a:avLst/>
@@ -4408,7 +4507,12 @@
               </a:defRPr>
             </a:pPr>
             <a:r>
-              <a:t>⚠️ Vendor GSM Data Gaps</a:t>
+              <a:rPr dirty="0"/>
+              <a:t>⚠️ </a:t>
+            </a:r>
+            <a:r>
+              <a:rPr u="sng" dirty="0"/>
+              <a:t>Vendor GSM Data Gaps</a:t>
             </a:r>
           </a:p>
           <a:p>
@@ -4422,7 +4526,7 @@
               <a:defRPr sz="1400"/>
             </a:pPr>
             <a:r>
-              <a:rPr b="1">
+              <a:rPr b="1" dirty="0">
                 <a:solidFill>
                   <a:srgbClr val="282C3F"/>
                 </a:solidFill>
@@ -4430,7 +4534,7 @@
               <a:t>Pitfall: </a:t>
             </a:r>
             <a:r>
-              <a:rPr>
+              <a:rPr dirty="0">
                 <a:solidFill>
                   <a:srgbClr val="282C3F"/>
                 </a:solidFill>
@@ -4449,7 +4553,7 @@
               <a:defRPr sz="1400"/>
             </a:pPr>
             <a:r>
-              <a:rPr b="1">
+              <a:rPr b="1" dirty="0">
                 <a:solidFill>
                   <a:srgbClr val="03A685"/>
                 </a:solidFill>
@@ -4457,7 +4561,7 @@
               <a:t>Mitigation: </a:t>
             </a:r>
             <a:r>
-              <a:rPr>
+              <a:rPr dirty="0">
                 <a:solidFill>
                   <a:srgbClr val="282C3F"/>
                 </a:solidFill>
@@ -4509,6 +4613,7 @@
           <a:lstStyle/>
           <a:p>
             <a:pPr algn="ctr"/>
+            <a:endParaRPr/>
           </a:p>
         </p:txBody>
       </p:sp>
@@ -4520,8 +4625,8 @@
         </p:nvSpPr>
         <p:spPr>
           <a:xfrm>
-            <a:off x="4379976" y="1472184"/>
-            <a:ext cx="3419856" cy="2404872"/>
+            <a:off x="4379976" y="1610208"/>
+            <a:ext cx="3419856" cy="1833964"/>
           </a:xfrm>
           <a:prstGeom prst="rect">
             <a:avLst/>
@@ -4545,7 +4650,12 @@
               </a:defRPr>
             </a:pPr>
             <a:r>
-              <a:t>⚠️ Social Polling Latency</a:t>
+              <a:rPr dirty="0"/>
+              <a:t>⚠️ </a:t>
+            </a:r>
+            <a:r>
+              <a:rPr u="sng" dirty="0"/>
+              <a:t>Social Polling Latency</a:t>
             </a:r>
           </a:p>
           <a:p>
@@ -4559,7 +4669,7 @@
               <a:defRPr sz="1400"/>
             </a:pPr>
             <a:r>
-              <a:rPr b="1">
+              <a:rPr b="1" dirty="0">
                 <a:solidFill>
                   <a:srgbClr val="282C3F"/>
                 </a:solidFill>
@@ -4567,7 +4677,7 @@
               <a:t>Pitfall: </a:t>
             </a:r>
             <a:r>
-              <a:rPr>
+              <a:rPr dirty="0">
                 <a:solidFill>
                   <a:srgbClr val="282C3F"/>
                 </a:solidFill>
@@ -4586,7 +4696,7 @@
               <a:defRPr sz="1400"/>
             </a:pPr>
             <a:r>
-              <a:rPr b="1">
+              <a:rPr b="1" dirty="0">
                 <a:solidFill>
                   <a:srgbClr val="03A685"/>
                 </a:solidFill>
@@ -4594,7 +4704,7 @@
               <a:t>Mitigation: </a:t>
             </a:r>
             <a:r>
-              <a:rPr>
+              <a:rPr dirty="0">
                 <a:solidFill>
                   <a:srgbClr val="282C3F"/>
                 </a:solidFill>
@@ -4646,6 +4756,7 @@
           <a:lstStyle/>
           <a:p>
             <a:pPr algn="ctr"/>
+            <a:endParaRPr/>
           </a:p>
         </p:txBody>
       </p:sp>
@@ -4657,8 +4768,8 @@
         </p:nvSpPr>
         <p:spPr>
           <a:xfrm>
-            <a:off x="8092440" y="1472184"/>
-            <a:ext cx="3419856" cy="2404872"/>
+            <a:off x="8092440" y="1610208"/>
+            <a:ext cx="3419856" cy="1833964"/>
           </a:xfrm>
           <a:prstGeom prst="rect">
             <a:avLst/>
@@ -4682,6 +4793,7 @@
               </a:defRPr>
             </a:pPr>
             <a:r>
+              <a:rPr u="sng" dirty="0"/>
               <a:t>⚠️ Sizing &amp; Fit Return Spikes</a:t>
             </a:r>
           </a:p>
@@ -4696,7 +4808,7 @@
               <a:defRPr sz="1400"/>
             </a:pPr>
             <a:r>
-              <a:rPr b="1">
+              <a:rPr b="1" dirty="0">
                 <a:solidFill>
                   <a:srgbClr val="282C3F"/>
                 </a:solidFill>
@@ -4704,7 +4816,7 @@
               <a:t>Pitfall: </a:t>
             </a:r>
             <a:r>
-              <a:rPr>
+              <a:rPr dirty="0">
                 <a:solidFill>
                   <a:srgbClr val="282C3F"/>
                 </a:solidFill>
@@ -4723,7 +4835,7 @@
               <a:defRPr sz="1400"/>
             </a:pPr>
             <a:r>
-              <a:rPr b="1">
+              <a:rPr b="1" dirty="0">
                 <a:solidFill>
                   <a:srgbClr val="03A685"/>
                 </a:solidFill>
@@ -4731,7 +4843,7 @@
               <a:t>Mitigation: </a:t>
             </a:r>
             <a:r>
-              <a:rPr>
+              <a:rPr dirty="0">
                 <a:solidFill>
                   <a:srgbClr val="282C3F"/>
                 </a:solidFill>
@@ -4783,6 +4895,7 @@
           <a:lstStyle/>
           <a:p>
             <a:pPr algn="ctr"/>
+            <a:endParaRPr/>
           </a:p>
         </p:txBody>
       </p:sp>
@@ -4794,8 +4907,8 @@
         </p:nvSpPr>
         <p:spPr>
           <a:xfrm>
-            <a:off x="667512" y="4151376"/>
-            <a:ext cx="3419856" cy="2404872"/>
+            <a:off x="667512" y="4289400"/>
+            <a:ext cx="3419856" cy="1859612"/>
           </a:xfrm>
           <a:prstGeom prst="rect">
             <a:avLst/>
@@ -4819,6 +4932,7 @@
               </a:defRPr>
             </a:pPr>
             <a:r>
+              <a:rPr u="sng" dirty="0"/>
               <a:t>🚀 Phase 1 - Beta (30 Days)</a:t>
             </a:r>
           </a:p>
@@ -4833,7 +4947,7 @@
               <a:defRPr sz="1400"/>
             </a:pPr>
             <a:r>
-              <a:rPr b="1">
+              <a:rPr b="1" dirty="0">
                 <a:solidFill>
                   <a:srgbClr val="282C3F"/>
                 </a:solidFill>
@@ -4841,7 +4955,7 @@
               <a:t>Target: </a:t>
             </a:r>
             <a:r>
-              <a:rPr>
+              <a:rPr dirty="0">
                 <a:solidFill>
                   <a:srgbClr val="282C3F"/>
                 </a:solidFill>
@@ -4860,7 +4974,7 @@
               <a:defRPr sz="1400"/>
             </a:pPr>
             <a:r>
-              <a:rPr b="1">
+              <a:rPr b="1" dirty="0">
                 <a:solidFill>
                   <a:srgbClr val="282C3F"/>
                 </a:solidFill>
@@ -4868,7 +4982,7 @@
               <a:t>Scope: </a:t>
             </a:r>
             <a:r>
-              <a:rPr>
+              <a:rPr dirty="0">
                 <a:solidFill>
                   <a:srgbClr val="282C3F"/>
                 </a:solidFill>
@@ -4887,7 +5001,7 @@
               <a:defRPr sz="1400"/>
             </a:pPr>
             <a:r>
-              <a:rPr b="1">
+              <a:rPr b="1" dirty="0">
                 <a:solidFill>
                   <a:srgbClr val="03A685"/>
                 </a:solidFill>
@@ -4895,7 +5009,7 @@
               <a:t>Gate: </a:t>
             </a:r>
             <a:r>
-              <a:rPr>
+              <a:rPr dirty="0">
                 <a:solidFill>
                   <a:srgbClr val="282C3F"/>
                 </a:solidFill>
@@ -4947,6 +5061,7 @@
           <a:lstStyle/>
           <a:p>
             <a:pPr algn="ctr"/>
+            <a:endParaRPr/>
           </a:p>
         </p:txBody>
       </p:sp>
@@ -4958,8 +5073,8 @@
         </p:nvSpPr>
         <p:spPr>
           <a:xfrm>
-            <a:off x="4379976" y="4151376"/>
-            <a:ext cx="3419856" cy="2404872"/>
+            <a:off x="4379976" y="4289400"/>
+            <a:ext cx="3419856" cy="1859612"/>
           </a:xfrm>
           <a:prstGeom prst="rect">
             <a:avLst/>
@@ -4983,7 +5098,12 @@
               </a:defRPr>
             </a:pPr>
             <a:r>
-              <a:t>🚀 Phase 2 - Metro Rollout (90 Days)</a:t>
+              <a:rPr dirty="0"/>
+              <a:t>🚀 </a:t>
+            </a:r>
+            <a:r>
+              <a:rPr u="sng" dirty="0"/>
+              <a:t>Phase 2 - Metro Rollout (90 Days)</a:t>
             </a:r>
           </a:p>
           <a:p>
@@ -4997,7 +5117,7 @@
               <a:defRPr sz="1400"/>
             </a:pPr>
             <a:r>
-              <a:rPr b="1">
+              <a:rPr b="1" dirty="0">
                 <a:solidFill>
                   <a:srgbClr val="282C3F"/>
                 </a:solidFill>
@@ -5005,7 +5125,7 @@
               <a:t>Target: </a:t>
             </a:r>
             <a:r>
-              <a:rPr>
+              <a:rPr dirty="0">
                 <a:solidFill>
                   <a:srgbClr val="282C3F"/>
                 </a:solidFill>
@@ -5024,7 +5144,7 @@
               <a:defRPr sz="1400"/>
             </a:pPr>
             <a:r>
-              <a:rPr b="1">
+              <a:rPr b="1" dirty="0">
                 <a:solidFill>
                   <a:srgbClr val="282C3F"/>
                 </a:solidFill>
@@ -5032,7 +5152,7 @@
               <a:t>Scope: </a:t>
             </a:r>
             <a:r>
-              <a:rPr>
+              <a:rPr dirty="0">
                 <a:solidFill>
                   <a:srgbClr val="282C3F"/>
                 </a:solidFill>
@@ -5051,7 +5171,7 @@
               <a:defRPr sz="1400"/>
             </a:pPr>
             <a:r>
-              <a:rPr b="1">
+              <a:rPr b="1" dirty="0">
                 <a:solidFill>
                   <a:srgbClr val="03A685"/>
                 </a:solidFill>
@@ -5059,7 +5179,7 @@
               <a:t>Gate: </a:t>
             </a:r>
             <a:r>
-              <a:rPr>
+              <a:rPr dirty="0">
                 <a:solidFill>
                   <a:srgbClr val="282C3F"/>
                 </a:solidFill>
@@ -5111,6 +5231,7 @@
           <a:lstStyle/>
           <a:p>
             <a:pPr algn="ctr"/>
+            <a:endParaRPr/>
           </a:p>
         </p:txBody>
       </p:sp>
@@ -5122,8 +5243,8 @@
         </p:nvSpPr>
         <p:spPr>
           <a:xfrm>
-            <a:off x="8092440" y="4151376"/>
-            <a:ext cx="3419856" cy="2404872"/>
+            <a:off x="8092440" y="4289400"/>
+            <a:ext cx="3419856" cy="2090444"/>
           </a:xfrm>
           <a:prstGeom prst="rect">
             <a:avLst/>
@@ -5147,7 +5268,12 @@
               </a:defRPr>
             </a:pPr>
             <a:r>
-              <a:t>🚀 Phase 3 - General Availability (180 Days)</a:t>
+              <a:rPr dirty="0"/>
+              <a:t>🚀 </a:t>
+            </a:r>
+            <a:r>
+              <a:rPr u="sng" dirty="0"/>
+              <a:t>Phase 3 - General Availability (180 Days)</a:t>
             </a:r>
           </a:p>
           <a:p>
@@ -5161,7 +5287,7 @@
               <a:defRPr sz="1400"/>
             </a:pPr>
             <a:r>
-              <a:rPr b="1">
+              <a:rPr b="1" dirty="0">
                 <a:solidFill>
                   <a:srgbClr val="282C3F"/>
                 </a:solidFill>
@@ -5169,7 +5295,7 @@
               <a:t>Target: </a:t>
             </a:r>
             <a:r>
-              <a:rPr>
+              <a:rPr dirty="0">
                 <a:solidFill>
                   <a:srgbClr val="282C3F"/>
                 </a:solidFill>
@@ -5188,7 +5314,7 @@
               <a:defRPr sz="1400"/>
             </a:pPr>
             <a:r>
-              <a:rPr b="1">
+              <a:rPr b="1" dirty="0">
                 <a:solidFill>
                   <a:srgbClr val="282C3F"/>
                 </a:solidFill>
@@ -5196,7 +5322,7 @@
               <a:t>Scope: </a:t>
             </a:r>
             <a:r>
-              <a:rPr>
+              <a:rPr dirty="0">
                 <a:solidFill>
                   <a:srgbClr val="282C3F"/>
                 </a:solidFill>
@@ -5215,7 +5341,7 @@
               <a:defRPr sz="1400"/>
             </a:pPr>
             <a:r>
-              <a:rPr b="1">
+              <a:rPr b="1" dirty="0">
                 <a:solidFill>
                   <a:srgbClr val="03A685"/>
                 </a:solidFill>
@@ -5223,16 +5349,60 @@
               <a:t>Gate: </a:t>
             </a:r>
             <a:r>
-              <a:rPr>
-                <a:solidFill>
-                  <a:srgbClr val="282C3F"/>
-                </a:solidFill>
-              </a:rPr>
-              <a:t>NSM: 10.5% Conversion (+300bps) | Gross Profit: +₹18.81 Cr/mo</a:t>
-            </a:r>
-          </a:p>
-        </p:txBody>
-      </p:sp>
+              <a:rPr dirty="0">
+                <a:solidFill>
+                  <a:srgbClr val="282C3F"/>
+                </a:solidFill>
+              </a:rPr>
+              <a:t>NSM: 10.5% Conversion (+300bps) | Gross Profit: +₹18.81 Cr/</a:t>
+            </a:r>
+            <a:r>
+              <a:rPr dirty="0" err="1">
+                <a:solidFill>
+                  <a:srgbClr val="282C3F"/>
+                </a:solidFill>
+              </a:rPr>
+              <a:t>mo</a:t>
+            </a:r>
+            <a:endParaRPr dirty="0">
+              <a:solidFill>
+                <a:srgbClr val="282C3F"/>
+              </a:solidFill>
+            </a:endParaRPr>
+          </a:p>
+        </p:txBody>
+      </p:sp>
+      <p:pic>
+        <p:nvPicPr>
+          <p:cNvPr id="18" name="Picture 17" descr="Myntra Logo in Vector Format | Party font, Velvet dress ...">
+            <a:extLst>
+              <a:ext uri="{FF2B5EF4-FFF2-40B4-BE49-F238E27FC236}">
+                <a16:creationId xmlns:a16="http://schemas.microsoft.com/office/drawing/2014/main" id="{8A0E9085-29DA-7E64-214B-8367F8D729CA}"/>
+              </a:ext>
+            </a:extLst>
+          </p:cNvPr>
+          <p:cNvPicPr>
+            <a:picLocks noChangeAspect="1"/>
+          </p:cNvPicPr>
+          <p:nvPr/>
+        </p:nvPicPr>
+        <p:blipFill>
+          <a:blip r:embed="rId2"/>
+          <a:srcRect t="35750" r="2278" b="33850"/>
+          <a:stretch>
+            <a:fillRect/>
+          </a:stretch>
+        </p:blipFill>
+        <p:spPr>
+          <a:xfrm>
+            <a:off x="10800272" y="138030"/>
+            <a:ext cx="1276688" cy="397152"/>
+          </a:xfrm>
+          <a:prstGeom prst="rect">
+            <a:avLst/>
+          </a:prstGeom>
+        </p:spPr>
+      </p:pic>
     </p:spTree>
   </p:cSld>
   <p:clrMapOvr>
@@ -5242,7 +5412,7 @@
 </file>
 
 <file path=ppt/slides/slide2.xml><?xml version="1.0" encoding="utf-8"?>
-<p:sld xmlns:a="http://schemas.openxmlformats.org/drawingml/2006/main" xmlns:p="http://schemas.openxmlformats.org/presentationml/2006/main" xmlns:r="http://schemas.openxmlformats.org/officeDocument/2006/relationships">
+<p:sld xmlns:a="http://schemas.openxmlformats.org/drawingml/2006/main" xmlns:r="http://schemas.openxmlformats.org/officeDocument/2006/relationships" xmlns:p="http://schemas.openxmlformats.org/presentationml/2006/main">
   <p:cSld>
     <p:spTree>
       <p:nvGrpSpPr>
@@ -5250,7 +5420,14 @@
         <p:cNvGrpSpPr/>
         <p:nvPr/>
       </p:nvGrpSpPr>
-      <p:grpSpPr/>
+      <p:grpSpPr>
+        <a:xfrm>
+          <a:off x="0" y="0"/>
+          <a:ext cx="0" cy="0"/>
+          <a:chOff x="0" y="0"/>
+          <a:chExt cx="0" cy="0"/>
+        </a:xfrm>
+      </p:grpSpPr>
       <p:sp>
         <p:nvSpPr>
           <p:cNvPr id="2" name="Rounded Rectangle 1"/>
@@ -5287,7 +5464,7 @@
           </a:fontRef>
         </p:style>
         <p:txBody>
-          <a:bodyPr rtlCol="0" anchor="ctr" wrap="square" tIns="18288" bIns="18288"/>
+          <a:bodyPr wrap="square" tIns="18288" bIns="18288" rtlCol="0" anchor="ctr"/>
           <a:lstStyle/>
           <a:p>
             <a:pPr algn="ctr">
@@ -5304,6 +5481,7 @@
               </a:defRPr>
             </a:pPr>
             <a:r>
+              <a:rPr sz="1600" dirty="0"/>
               <a:t>CORE HYPOTHESIS, CURRENT FUNNEL &amp; COMPETITOR TEARDOWN</a:t>
             </a:r>
           </a:p>
@@ -5317,16 +5495,29 @@
         </p:nvSpPr>
         <p:spPr>
           <a:xfrm>
-            <a:off x="594360" y="594360"/>
-            <a:ext cx="9875520" cy="777240"/>
+            <a:off x="2006" y="651870"/>
+            <a:ext cx="12189993" cy="543739"/>
           </a:xfrm>
           <a:prstGeom prst="rect">
             <a:avLst/>
           </a:prstGeom>
-          <a:noFill/>
-        </p:spPr>
-        <p:txBody>
-          <a:bodyPr wrap="square" lIns="0" rIns="0" tIns="0" bIns="0">
+        </p:spPr>
+        <p:style>
+          <a:lnRef idx="2">
+            <a:schemeClr val="accent6"/>
+          </a:lnRef>
+          <a:fillRef idx="1">
+            <a:schemeClr val="lt1"/>
+          </a:fillRef>
+          <a:effectRef idx="0">
+            <a:schemeClr val="accent6"/>
+          </a:effectRef>
+          <a:fontRef idx="minor">
+            <a:schemeClr val="dk1"/>
+          </a:fontRef>
+        </p:style>
+        <p:txBody>
+          <a:bodyPr wrap="square" lIns="0" tIns="0" rIns="0" bIns="0">
             <a:spAutoFit/>
           </a:bodyPr>
           <a:lstStyle/>
@@ -5342,6 +5533,11 @@
               </a:defRPr>
             </a:pPr>
             <a:r>
+              <a:rPr lang="en-US" sz="1600" dirty="0"/>
+              <a:t> </a:t>
+            </a:r>
+            <a:r>
+              <a:rPr sz="1600" dirty="0"/>
               <a:t>2. Users Leak High-Intent Purchases to Off-Platform Channels; MVP Targets Spec Ambiguity and Styling Loops</a:t>
             </a:r>
           </a:p>
@@ -5360,42 +5556,12 @@
               </a:defRPr>
             </a:pPr>
             <a:r>
+              <a:rPr lang="en-US" sz="1600" dirty="0"/>
+              <a:t>      </a:t>
+            </a:r>
+            <a:r>
+              <a:rPr sz="1600" dirty="0"/>
               <a:t>Shifting focus from margin-eroding discount alerts to confidence-justified spec comparisons and coordinated outfits.</a:t>
-            </a:r>
-          </a:p>
-        </p:txBody>
-      </p:sp>
-      <p:sp>
-        <p:nvSpPr>
-          <p:cNvPr id="4" name="TextBox 3"/>
-          <p:cNvSpPr txBox="1"/>
-          <p:nvPr/>
-        </p:nvSpPr>
-        <p:spPr>
-          <a:xfrm>
-            <a:off x="10424160" y="594360"/>
-            <a:ext cx="1188720" cy="457200"/>
-          </a:xfrm>
-          <a:prstGeom prst="rect">
-            <a:avLst/>
-          </a:prstGeom>
-          <a:noFill/>
-        </p:spPr>
-        <p:txBody>
-          <a:bodyPr wrap="none" lIns="0" rIns="0" tIns="0" bIns="0">
-            <a:spAutoFit/>
-          </a:bodyPr>
-          <a:lstStyle/>
-          <a:p>
-            <a:pPr algn="r">
-              <a:defRPr sz="2400" b="1">
-                <a:solidFill>
-                  <a:srgbClr val="FF3F6C"/>
-                </a:solidFill>
-              </a:defRPr>
-            </a:pPr>
-            <a:r>
-              <a:t>myntra</a:t>
             </a:r>
           </a:p>
         </p:txBody>
@@ -5408,8 +5574,8 @@
         </p:nvSpPr>
         <p:spPr>
           <a:xfrm>
-            <a:off x="594360" y="1417320"/>
-            <a:ext cx="4114800" cy="1463040"/>
+            <a:off x="350808" y="1417320"/>
+            <a:ext cx="4358352" cy="2011680"/>
           </a:xfrm>
           <a:prstGeom prst="roundRect">
             <a:avLst/>
@@ -5442,6 +5608,7 @@
           <a:lstStyle/>
           <a:p>
             <a:pPr algn="ctr"/>
+            <a:endParaRPr/>
           </a:p>
         </p:txBody>
       </p:sp>
@@ -5453,8 +5620,8 @@
         </p:nvSpPr>
         <p:spPr>
           <a:xfrm>
-            <a:off x="704088" y="1490472"/>
-            <a:ext cx="3895344" cy="1316736"/>
+            <a:off x="517527" y="1490472"/>
+            <a:ext cx="4146487" cy="1805431"/>
           </a:xfrm>
           <a:prstGeom prst="rect">
             <a:avLst/>
@@ -5478,7 +5645,12 @@
               </a:defRPr>
             </a:pPr>
             <a:r>
-              <a:t>💡 THE CORE HYPOTHESIS</a:t>
+              <a:rPr sz="1400" dirty="0"/>
+              <a:t>💡 </a:t>
+            </a:r>
+            <a:r>
+              <a:rPr sz="1400" u="sng" dirty="0"/>
+              <a:t>THE CORE HYPOTHESIS</a:t>
             </a:r>
           </a:p>
           <a:p>
@@ -5493,7 +5665,16 @@
               </a:defRPr>
             </a:pPr>
             <a:r>
-              <a:t>We believe that Gen-Z and Millennial fashion shoppers stall on wishlists not due to price resistance, but because of interface comparison friction, fabric GSM ambiguity, and social feedback delays. Breaking this inertia contextually will drive non-discounted conversion (+300bps) and expand gross profit.</a:t>
+              <a:rPr sz="1400" dirty="0"/>
+              <a:t>We believe that Gen-Z and Millennial fashion shoppers stall on </a:t>
+            </a:r>
+            <a:r>
+              <a:rPr sz="1400" dirty="0" err="1"/>
+              <a:t>wishlists</a:t>
+            </a:r>
+            <a:r>
+              <a:rPr sz="1400" dirty="0"/>
+              <a:t> not due to price resistance, but because of interface comparison friction, fabric GSM ambiguity, and social feedback delays. Breaking this inertia contextually will drive non-discounted conversion (+300bps) and expand gross profit.</a:t>
             </a:r>
           </a:p>
         </p:txBody>
@@ -5506,8 +5687,8 @@
         </p:nvSpPr>
         <p:spPr>
           <a:xfrm>
-            <a:off x="4846320" y="1417320"/>
-            <a:ext cx="6751015" cy="1463040"/>
+            <a:off x="4875879" y="1417319"/>
+            <a:ext cx="6721456" cy="1595025"/>
           </a:xfrm>
           <a:prstGeom prst="roundRect">
             <a:avLst/>
@@ -5540,6 +5721,7 @@
           <a:lstStyle/>
           <a:p>
             <a:pPr algn="ctr"/>
+            <a:endParaRPr/>
           </a:p>
         </p:txBody>
       </p:sp>
@@ -5573,6 +5755,7 @@
               </a:defRPr>
             </a:pPr>
             <a:r>
+              <a:rPr dirty="0"/>
               <a:t>🔄 CURRENT DISCOVERY FLOW (THE GRAVEYARD LOOP)</a:t>
             </a:r>
           </a:p>
@@ -5620,6 +5803,7 @@
           <a:lstStyle/>
           <a:p>
             <a:pPr algn="ctr"/>
+            <a:endParaRPr/>
           </a:p>
         </p:txBody>
       </p:sp>
@@ -5632,7 +5816,7 @@
         <p:spPr>
           <a:xfrm>
             <a:off x="4992624" y="1819656"/>
-            <a:ext cx="1499616" cy="932688"/>
+            <a:ext cx="1499616" cy="1019703"/>
           </a:xfrm>
           <a:prstGeom prst="rect">
             <a:avLst/>
@@ -5656,11 +5840,16 @@
               </a:defRPr>
             </a:pPr>
             <a:r>
-              <a:t>1. Intent Trigger</a:t>
-            </a:r>
-          </a:p>
-          <a:p>
-            <a:pPr>
+              <a:rPr dirty="0"/>
+              <a:t>1. </a:t>
+            </a:r>
+            <a:r>
+              <a:rPr u="sng" dirty="0"/>
+              <a:t>Intent Trigger</a:t>
+            </a:r>
+          </a:p>
+          <a:p>
+            <a:pPr algn="ctr">
               <a:lnSpc>
                 <a:spcPct val="110000"/>
               </a:lnSpc>
@@ -5671,6 +5860,7 @@
               </a:defRPr>
             </a:pPr>
             <a:r>
+              <a:rPr dirty="0"/>
               <a:t>Browses app &amp; saves 3-4 subtle style variants</a:t>
             </a:r>
           </a:p>
@@ -5718,6 +5908,7 @@
           <a:lstStyle/>
           <a:p>
             <a:pPr algn="ctr"/>
+            <a:endParaRPr/>
           </a:p>
         </p:txBody>
       </p:sp>
@@ -5730,7 +5921,7 @@
         <p:spPr>
           <a:xfrm>
             <a:off x="6656832" y="1819656"/>
-            <a:ext cx="1499616" cy="932688"/>
+            <a:ext cx="1499616" cy="1019703"/>
           </a:xfrm>
           <a:prstGeom prst="rect">
             <a:avLst/>
@@ -5743,7 +5934,7 @@
           </a:bodyPr>
           <a:lstStyle/>
           <a:p>
-            <a:pPr>
+            <a:pPr algn="ctr">
               <a:spcAft>
                 <a:spcPts val="100"/>
               </a:spcAft>
@@ -5754,11 +5945,16 @@
               </a:defRPr>
             </a:pPr>
             <a:r>
-              <a:t>2. Category Browse</a:t>
-            </a:r>
-          </a:p>
-          <a:p>
-            <a:pPr>
+              <a:rPr dirty="0"/>
+              <a:t>2</a:t>
+            </a:r>
+            <a:r>
+              <a:rPr u="sng" dirty="0"/>
+              <a:t>. Category Browse</a:t>
+            </a:r>
+          </a:p>
+          <a:p>
+            <a:pPr algn="ctr">
               <a:lnSpc>
                 <a:spcPct val="110000"/>
               </a:lnSpc>
@@ -5769,7 +5965,16 @@
               </a:defRPr>
             </a:pPr>
             <a:r>
-              <a:t>Leaves items in wishlist graveyard without buying</a:t>
+              <a:rPr dirty="0"/>
+              <a:t>Leaves items in </a:t>
+            </a:r>
+            <a:r>
+              <a:rPr dirty="0" err="1"/>
+              <a:t>wishlist</a:t>
+            </a:r>
+            <a:r>
+              <a:rPr dirty="0"/>
+              <a:t> graveyard without buying</a:t>
             </a:r>
           </a:p>
         </p:txBody>
@@ -5816,6 +6021,7 @@
           <a:lstStyle/>
           <a:p>
             <a:pPr algn="ctr"/>
+            <a:endParaRPr/>
           </a:p>
         </p:txBody>
       </p:sp>
@@ -5828,7 +6034,7 @@
         <p:spPr>
           <a:xfrm>
             <a:off x="8321040" y="1819656"/>
-            <a:ext cx="1499616" cy="932688"/>
+            <a:ext cx="1499616" cy="1019703"/>
           </a:xfrm>
           <a:prstGeom prst="rect">
             <a:avLst/>
@@ -5841,7 +6047,7 @@
           </a:bodyPr>
           <a:lstStyle/>
           <a:p>
-            <a:pPr>
+            <a:pPr algn="ctr">
               <a:spcAft>
                 <a:spcPts val="100"/>
               </a:spcAft>
@@ -5852,11 +6058,16 @@
               </a:defRPr>
             </a:pPr>
             <a:r>
-              <a:t>3. Decision Freeze</a:t>
-            </a:r>
-          </a:p>
-          <a:p>
-            <a:pPr>
+              <a:rPr dirty="0"/>
+              <a:t>3</a:t>
+            </a:r>
+            <a:r>
+              <a:rPr u="sng" dirty="0"/>
+              <a:t>. Decision Freeze</a:t>
+            </a:r>
+          </a:p>
+          <a:p>
+            <a:pPr algn="ctr">
               <a:lnSpc>
                 <a:spcPct val="110000"/>
               </a:lnSpc>
@@ -5867,6 +6078,7 @@
               </a:defRPr>
             </a:pPr>
             <a:r>
+              <a:rPr dirty="0"/>
               <a:t>Stalls due to fabric GSM &amp; fit ambiguity</a:t>
             </a:r>
           </a:p>
@@ -5914,6 +6126,7 @@
           <a:lstStyle/>
           <a:p>
             <a:pPr algn="ctr"/>
+            <a:endParaRPr/>
           </a:p>
         </p:txBody>
       </p:sp>
@@ -5925,8 +6138,8 @@
         </p:nvSpPr>
         <p:spPr>
           <a:xfrm>
-            <a:off x="9985248" y="1819656"/>
-            <a:ext cx="1499616" cy="932688"/>
+            <a:off x="9962244" y="1819656"/>
+            <a:ext cx="1499616" cy="1019703"/>
           </a:xfrm>
           <a:prstGeom prst="rect">
             <a:avLst/>
@@ -5939,7 +6152,7 @@
           </a:bodyPr>
           <a:lstStyle/>
           <a:p>
-            <a:pPr>
+            <a:pPr algn="ctr">
               <a:spcAft>
                 <a:spcPts val="100"/>
               </a:spcAft>
@@ -5950,11 +6163,16 @@
               </a:defRPr>
             </a:pPr>
             <a:r>
-              <a:t>4. Abandonment</a:t>
-            </a:r>
-          </a:p>
-          <a:p>
-            <a:pPr>
+              <a:rPr dirty="0"/>
+              <a:t>4. </a:t>
+            </a:r>
+            <a:r>
+              <a:rPr u="sng" dirty="0"/>
+              <a:t>Abandonment</a:t>
+            </a:r>
+          </a:p>
+          <a:p>
+            <a:pPr algn="ctr">
               <a:lnSpc>
                 <a:spcPct val="110000"/>
               </a:lnSpc>
@@ -5965,6 +6183,7 @@
               </a:defRPr>
             </a:pPr>
             <a:r>
+              <a:rPr dirty="0"/>
               <a:t>Screenshots to WhatsApp; 68% intent drop-off</a:t>
             </a:r>
           </a:p>
@@ -5978,8 +6197,8 @@
         </p:nvSpPr>
         <p:spPr>
           <a:xfrm>
-            <a:off x="594360" y="3017520"/>
-            <a:ext cx="5303520" cy="3593592"/>
+            <a:off x="350808" y="3503763"/>
+            <a:ext cx="4989241" cy="3182112"/>
           </a:xfrm>
           <a:prstGeom prst="roundRect">
             <a:avLst/>
@@ -6012,6 +6231,7 @@
           <a:lstStyle/>
           <a:p>
             <a:pPr algn="ctr"/>
+            <a:endParaRPr/>
           </a:p>
         </p:txBody>
       </p:sp>
@@ -6023,8 +6243,8 @@
         </p:nvSpPr>
         <p:spPr>
           <a:xfrm>
-            <a:off x="704088" y="3090672"/>
-            <a:ext cx="5084064" cy="3447288"/>
+            <a:off x="468949" y="3650711"/>
+            <a:ext cx="4980828" cy="3017044"/>
           </a:xfrm>
           <a:prstGeom prst="rect">
             <a:avLst/>
@@ -6048,7 +6268,12 @@
               </a:defRPr>
             </a:pPr>
             <a:r>
-              <a:t>🌐 GLOBAL &amp; DOMESTIC COMPETITOR TEARDOWN</a:t>
+              <a:rPr sz="1400" dirty="0"/>
+              <a:t>🌐 </a:t>
+            </a:r>
+            <a:r>
+              <a:rPr sz="1400" u="sng" dirty="0"/>
+              <a:t>GLOBAL &amp; DOMESTIC COMPETITOR TEARDOWN</a:t>
             </a:r>
           </a:p>
           <a:p>
@@ -6065,7 +6290,7 @@
               <a:defRPr sz="1400"/>
             </a:pPr>
             <a:r>
-              <a:rPr b="1">
+              <a:rPr sz="1400" b="1" dirty="0">
                 <a:solidFill>
                   <a:srgbClr val="282C3F"/>
                 </a:solidFill>
@@ -6073,7 +6298,7 @@
               <a:t>• ASOS (UK): </a:t>
             </a:r>
             <a:r>
-              <a:rPr>
+              <a:rPr sz="1400" dirty="0">
                 <a:solidFill>
                   <a:srgbClr val="282C3F"/>
                 </a:solidFill>
@@ -6095,7 +6320,7 @@
               <a:defRPr sz="1400"/>
             </a:pPr>
             <a:r>
-              <a:rPr b="1">
+              <a:rPr sz="1400" b="1" dirty="0">
                 <a:solidFill>
                   <a:srgbClr val="282C3F"/>
                 </a:solidFill>
@@ -6103,7 +6328,7 @@
               <a:t>• Pinterest (Global): </a:t>
             </a:r>
             <a:r>
-              <a:rPr>
+              <a:rPr sz="1400" dirty="0">
                 <a:solidFill>
                   <a:srgbClr val="282C3F"/>
                 </a:solidFill>
@@ -6125,7 +6350,7 @@
               <a:defRPr sz="1400"/>
             </a:pPr>
             <a:r>
-              <a:rPr b="1">
+              <a:rPr sz="1400" b="1" dirty="0">
                 <a:solidFill>
                   <a:srgbClr val="282C3F"/>
                 </a:solidFill>
@@ -6133,7 +6358,7 @@
               <a:t>• Zalando (EU): </a:t>
             </a:r>
             <a:r>
-              <a:rPr>
+              <a:rPr sz="1400" dirty="0">
                 <a:solidFill>
                   <a:srgbClr val="282C3F"/>
                 </a:solidFill>
@@ -6155,20 +6380,52 @@
               <a:defRPr sz="1400"/>
             </a:pPr>
             <a:r>
-              <a:rPr b="1">
+              <a:rPr sz="1400" b="1" dirty="0">
                 <a:solidFill>
                   <a:srgbClr val="FF3F6C"/>
                 </a:solidFill>
               </a:rPr>
-              <a:t>• Indian Market Gap (Myntra, AJIO, Nykaa): </a:t>
-            </a:r>
-            <a:r>
-              <a:rPr>
-                <a:solidFill>
-                  <a:srgbClr val="282C3F"/>
-                </a:solidFill>
-              </a:rPr>
-              <a:t>Zero platforms offer in-wishlist side-by-side spec comparison, fabric GSM transparency, or 1-tap WhatsApp voting → Myntra's Blue Ocean Whitespace.</a:t>
+              <a:t>• Indian Market Gap (Myntra, AJIO, </a:t>
+            </a:r>
+            <a:r>
+              <a:rPr sz="1400" b="1" dirty="0" err="1">
+                <a:solidFill>
+                  <a:srgbClr val="FF3F6C"/>
+                </a:solidFill>
+              </a:rPr>
+              <a:t>Nykaa</a:t>
+            </a:r>
+            <a:r>
+              <a:rPr sz="1400" b="1" dirty="0">
+                <a:solidFill>
+                  <a:srgbClr val="FF3F6C"/>
+                </a:solidFill>
+              </a:rPr>
+              <a:t>): </a:t>
+            </a:r>
+            <a:r>
+              <a:rPr sz="1400" dirty="0">
+                <a:solidFill>
+                  <a:srgbClr val="282C3F"/>
+                </a:solidFill>
+              </a:rPr>
+              <a:t>Zero platforms offer in-</a:t>
+            </a:r>
+            <a:r>
+              <a:rPr sz="1400" dirty="0" err="1">
+                <a:solidFill>
+                  <a:srgbClr val="282C3F"/>
+                </a:solidFill>
+              </a:rPr>
+              <a:t>wishlist</a:t>
+            </a:r>
+            <a:r>
+              <a:rPr sz="1400" dirty="0">
+                <a:solidFill>
+                  <a:srgbClr val="282C3F"/>
+                </a:solidFill>
+              </a:rPr>
+              <a:t> side-by-side spec comparison, fabric GSM transparency, or 1-tap WhatsApp voting → Myntra's Blue Ocean Whitespace.</a:t>
             </a:r>
           </a:p>
         </p:txBody>
@@ -6181,8 +6438,8 @@
         </p:nvSpPr>
         <p:spPr>
           <a:xfrm>
-            <a:off x="6035040" y="3017520"/>
-            <a:ext cx="5562295" cy="1136904"/>
+            <a:off x="5781996" y="3158649"/>
+            <a:ext cx="5941055" cy="1082040"/>
           </a:xfrm>
           <a:prstGeom prst="roundRect">
             <a:avLst/>
@@ -6215,6 +6472,7 @@
           <a:lstStyle/>
           <a:p>
             <a:pPr algn="ctr"/>
+            <a:endParaRPr/>
           </a:p>
         </p:txBody>
       </p:sp>
@@ -6226,8 +6484,8 @@
         </p:nvSpPr>
         <p:spPr>
           <a:xfrm>
-            <a:off x="6144768" y="3072384"/>
-            <a:ext cx="5342839" cy="1027176"/>
+            <a:off x="5891724" y="3273669"/>
+            <a:ext cx="5706655" cy="818494"/>
           </a:xfrm>
           <a:prstGeom prst="rect">
             <a:avLst/>
@@ -6251,6 +6509,7 @@
               </a:defRPr>
             </a:pPr>
             <a:r>
+              <a:rPr sz="1400" dirty="0"/>
               <a:t>⚠️ Choice Paralysis</a:t>
             </a:r>
           </a:p>
@@ -6266,6 +6525,7 @@
               </a:defRPr>
             </a:pPr>
             <a:r>
+              <a:rPr sz="1400" dirty="0"/>
               <a:t>8 of 9 survey participants shortlist 3-4 identical alternatives and defer buying due to evaluation fatigue.</a:t>
             </a:r>
           </a:p>
@@ -6279,8 +6539,8 @@
         </p:nvSpPr>
         <p:spPr>
           <a:xfrm>
-            <a:off x="6035040" y="4245864"/>
-            <a:ext cx="5562295" cy="1136904"/>
+            <a:off x="5781996" y="4386993"/>
+            <a:ext cx="5941055" cy="1082040"/>
           </a:xfrm>
           <a:prstGeom prst="roundRect">
             <a:avLst/>
@@ -6313,6 +6573,7 @@
           <a:lstStyle/>
           <a:p>
             <a:pPr algn="ctr"/>
+            <a:endParaRPr/>
           </a:p>
         </p:txBody>
       </p:sp>
@@ -6324,8 +6585,8 @@
         </p:nvSpPr>
         <p:spPr>
           <a:xfrm>
-            <a:off x="6144768" y="4300728"/>
-            <a:ext cx="5342839" cy="1027176"/>
+            <a:off x="5891724" y="4502013"/>
+            <a:ext cx="5706655" cy="818494"/>
           </a:xfrm>
           <a:prstGeom prst="rect">
             <a:avLst/>
@@ -6349,6 +6610,7 @@
               </a:defRPr>
             </a:pPr>
             <a:r>
+              <a:rPr sz="1400" dirty="0"/>
               <a:t>⚠️ Spec &amp; GSM Ambiguity</a:t>
             </a:r>
           </a:p>
@@ -6364,6 +6626,7 @@
               </a:defRPr>
             </a:pPr>
             <a:r>
+              <a:rPr sz="1400" dirty="0"/>
               <a:t>35% of stalled users in review analysis cite inability to differentiate fabric weight (160 vs 240 GSM) online.</a:t>
             </a:r>
           </a:p>
@@ -6377,8 +6640,8 @@
         </p:nvSpPr>
         <p:spPr>
           <a:xfrm>
-            <a:off x="6035040" y="5474208"/>
-            <a:ext cx="5562295" cy="1136904"/>
+            <a:off x="5781996" y="5615337"/>
+            <a:ext cx="5941055" cy="1082040"/>
           </a:xfrm>
           <a:prstGeom prst="roundRect">
             <a:avLst/>
@@ -6411,6 +6674,7 @@
           <a:lstStyle/>
           <a:p>
             <a:pPr algn="ctr"/>
+            <a:endParaRPr/>
           </a:p>
         </p:txBody>
       </p:sp>
@@ -6422,8 +6686,8 @@
         </p:nvSpPr>
         <p:spPr>
           <a:xfrm>
-            <a:off x="6144768" y="5529072"/>
-            <a:ext cx="5342839" cy="1027176"/>
+            <a:off x="5891724" y="5730357"/>
+            <a:ext cx="5706655" cy="818494"/>
           </a:xfrm>
           <a:prstGeom prst="rect">
             <a:avLst/>
@@ -6447,6 +6711,7 @@
               </a:defRPr>
             </a:pPr>
             <a:r>
+              <a:rPr sz="1400" dirty="0"/>
               <a:t>⚠️ Social Feedback Latency</a:t>
             </a:r>
           </a:p>
@@ -6462,11 +6727,43 @@
               </a:defRPr>
             </a:pPr>
             <a:r>
+              <a:rPr sz="1400" dirty="0"/>
               <a:t>Users screenshot items to WhatsApp friends, suffering 18-hour reply latency leading to cold intent.</a:t>
             </a:r>
           </a:p>
         </p:txBody>
       </p:sp>
+      <p:pic>
+        <p:nvPicPr>
+          <p:cNvPr id="30" name="Picture 29" descr="Myntra Logo in Vector Format | Party font, Velvet dress ...">
+            <a:extLst>
+              <a:ext uri="{FF2B5EF4-FFF2-40B4-BE49-F238E27FC236}">
+                <a16:creationId xmlns:a16="http://schemas.microsoft.com/office/drawing/2014/main" id="{EC3CD39A-34DB-B377-4D19-0F32BDF0A834}"/>
+              </a:ext>
+            </a:extLst>
+          </p:cNvPr>
+          <p:cNvPicPr>
+            <a:picLocks noChangeAspect="1"/>
+          </p:cNvPicPr>
+          <p:nvPr/>
+        </p:nvPicPr>
+        <p:blipFill>
+          <a:blip r:embed="rId2"/>
+          <a:srcRect t="35750" r="2278" b="33850"/>
+          <a:stretch>
+            <a:fillRect/>
+          </a:stretch>
+        </p:blipFill>
+        <p:spPr>
+          <a:xfrm>
+            <a:off x="10800272" y="138030"/>
+            <a:ext cx="1276688" cy="397152"/>
+          </a:xfrm>
+          <a:prstGeom prst="rect">
+            <a:avLst/>
+          </a:prstGeom>
+        </p:spPr>
+      </p:pic>
     </p:spTree>
   </p:cSld>
   <p:clrMapOvr>
@@ -6476,7 +6773,7 @@
 </file>
 
 <file path=ppt/slides/slide3.xml><?xml version="1.0" encoding="utf-8"?>
-<p:sld xmlns:a="http://schemas.openxmlformats.org/drawingml/2006/main" xmlns:p="http://schemas.openxmlformats.org/presentationml/2006/main" xmlns:r="http://schemas.openxmlformats.org/officeDocument/2006/relationships">
+<p:sld xmlns:a="http://schemas.openxmlformats.org/drawingml/2006/main" xmlns:r="http://schemas.openxmlformats.org/officeDocument/2006/relationships" xmlns:p="http://schemas.openxmlformats.org/presentationml/2006/main">
   <p:cSld>
     <p:spTree>
       <p:nvGrpSpPr>
@@ -6484,7 +6781,14 @@
         <p:cNvGrpSpPr/>
         <p:nvPr/>
       </p:nvGrpSpPr>
-      <p:grpSpPr/>
+      <p:grpSpPr>
+        <a:xfrm>
+          <a:off x="0" y="0"/>
+          <a:ext cx="0" cy="0"/>
+          <a:chOff x="0" y="0"/>
+          <a:chExt cx="0" cy="0"/>
+        </a:xfrm>
+      </p:grpSpPr>
       <p:sp>
         <p:nvSpPr>
           <p:cNvPr id="2" name="Rounded Rectangle 1"/>
@@ -6521,7 +6825,7 @@
           </a:fontRef>
         </p:style>
         <p:txBody>
-          <a:bodyPr rtlCol="0" anchor="ctr" wrap="square" tIns="18288" bIns="18288"/>
+          <a:bodyPr wrap="square" tIns="18288" bIns="18288" rtlCol="0" anchor="ctr"/>
           <a:lstStyle/>
           <a:p>
             <a:pPr algn="ctr">
@@ -6538,6 +6842,7 @@
               </a:defRPr>
             </a:pPr>
             <a:r>
+              <a:rPr sz="1600" dirty="0"/>
               <a:t>AI DISCOVERY ENGINE &amp; STRATEGIC THINKING PIVOT</a:t>
             </a:r>
           </a:p>
@@ -6551,16 +6856,29 @@
         </p:nvSpPr>
         <p:spPr>
           <a:xfrm>
-            <a:off x="594360" y="594360"/>
-            <a:ext cx="9875520" cy="777240"/>
+            <a:off x="0" y="726633"/>
+            <a:ext cx="12192000" cy="543739"/>
           </a:xfrm>
           <a:prstGeom prst="rect">
             <a:avLst/>
           </a:prstGeom>
-          <a:noFill/>
-        </p:spPr>
-        <p:txBody>
-          <a:bodyPr wrap="square" lIns="0" rIns="0" tIns="0" bIns="0">
+        </p:spPr>
+        <p:style>
+          <a:lnRef idx="2">
+            <a:schemeClr val="accent6"/>
+          </a:lnRef>
+          <a:fillRef idx="1">
+            <a:schemeClr val="lt1"/>
+          </a:fillRef>
+          <a:effectRef idx="0">
+            <a:schemeClr val="accent6"/>
+          </a:effectRef>
+          <a:fontRef idx="minor">
+            <a:schemeClr val="dk1"/>
+          </a:fontRef>
+        </p:style>
+        <p:txBody>
+          <a:bodyPr wrap="square" lIns="0" tIns="0" rIns="0" bIns="0">
             <a:spAutoFit/>
           </a:bodyPr>
           <a:lstStyle/>
@@ -6576,8 +6894,18 @@
               </a:defRPr>
             </a:pPr>
             <a:r>
+              <a:rPr lang="en-US" sz="1600" dirty="0"/>
+              <a:t> </a:t>
+            </a:r>
+            <a:r>
+              <a:rPr sz="1600" dirty="0"/>
               <a:t>3. Sourced 20,250 Review Corpus &amp; N=25 Survey Cohort: Price Elasticity Myth Replaced by Comparison Friction</a:t>
             </a:r>
+            <a:r>
+              <a:rPr lang="en-US" sz="1600" dirty="0"/>
+              <a:t>  </a:t>
+            </a:r>
+            <a:endParaRPr sz="1600" dirty="0"/>
           </a:p>
           <a:p>
             <a:pPr>
@@ -6594,42 +6922,12 @@
               </a:defRPr>
             </a:pPr>
             <a:r>
+              <a:rPr lang="en-US" sz="1600" dirty="0"/>
+              <a:t>      </a:t>
+            </a:r>
+            <a:r>
+              <a:rPr sz="1600" dirty="0"/>
               <a:t>How data disproved our initial discount alert hypothesis and pivoted the product strategy to evaluation confidence.</a:t>
-            </a:r>
-          </a:p>
-        </p:txBody>
-      </p:sp>
-      <p:sp>
-        <p:nvSpPr>
-          <p:cNvPr id="4" name="TextBox 3"/>
-          <p:cNvSpPr txBox="1"/>
-          <p:nvPr/>
-        </p:nvSpPr>
-        <p:spPr>
-          <a:xfrm>
-            <a:off x="10424160" y="594360"/>
-            <a:ext cx="1188720" cy="457200"/>
-          </a:xfrm>
-          <a:prstGeom prst="rect">
-            <a:avLst/>
-          </a:prstGeom>
-          <a:noFill/>
-        </p:spPr>
-        <p:txBody>
-          <a:bodyPr wrap="none" lIns="0" rIns="0" tIns="0" bIns="0">
-            <a:spAutoFit/>
-          </a:bodyPr>
-          <a:lstStyle/>
-          <a:p>
-            <a:pPr algn="r">
-              <a:defRPr sz="2400" b="1">
-                <a:solidFill>
-                  <a:srgbClr val="FF3F6C"/>
-                </a:solidFill>
-              </a:defRPr>
-            </a:pPr>
-            <a:r>
-              <a:t>myntra</a:t>
             </a:r>
           </a:p>
         </p:txBody>
@@ -6642,8 +6940,8 @@
         </p:nvSpPr>
         <p:spPr>
           <a:xfrm>
-            <a:off x="594360" y="1417320"/>
-            <a:ext cx="11002975" cy="1280160"/>
+            <a:off x="270294" y="1405818"/>
+            <a:ext cx="11703170" cy="1401390"/>
           </a:xfrm>
           <a:prstGeom prst="roundRect">
             <a:avLst/>
@@ -6676,6 +6974,7 @@
           <a:lstStyle/>
           <a:p>
             <a:pPr algn="ctr"/>
+            <a:endParaRPr/>
           </a:p>
         </p:txBody>
       </p:sp>
@@ -6687,8 +6986,8 @@
         </p:nvSpPr>
         <p:spPr>
           <a:xfrm>
-            <a:off x="704088" y="1490472"/>
-            <a:ext cx="10783519" cy="1133856"/>
+            <a:off x="330453" y="1478970"/>
+            <a:ext cx="11531747" cy="1325299"/>
           </a:xfrm>
           <a:prstGeom prst="rect">
             <a:avLst/>
@@ -6712,7 +7011,12 @@
               </a:defRPr>
             </a:pPr>
             <a:r>
-              <a:t>🔄 STRATEGIC THINKING EVOLUTION &amp; RESEARCH DISCOVERY</a:t>
+              <a:rPr sz="1400" dirty="0"/>
+              <a:t>🔄 </a:t>
+            </a:r>
+            <a:r>
+              <a:rPr sz="1400" u="sng" dirty="0"/>
+              <a:t>STRATEGIC THINKING EVOLUTION &amp; RESEARCH DISCOVERY</a:t>
             </a:r>
           </a:p>
           <a:p>
@@ -6723,15 +7027,31 @@
               <a:defRPr sz="1400"/>
             </a:pPr>
             <a:r>
-              <a:rPr>
-                <a:solidFill>
-                  <a:srgbClr val="282C3F"/>
-                </a:solidFill>
-              </a:rPr>
-              <a:t>Initial Hypothesis: We assumed wishlist drop-off was driven by price sensitivity and lack of discount notifications.  |  </a:t>
-            </a:r>
-            <a:r>
-              <a:rPr b="1">
+              <a:rPr sz="1400" dirty="0">
+                <a:solidFill>
+                  <a:srgbClr val="282C3F"/>
+                </a:solidFill>
+              </a:rPr>
+              <a:t>Initial Hypothesis: We assumed </a:t>
+            </a:r>
+            <a:r>
+              <a:rPr sz="1400" dirty="0" err="1">
+                <a:solidFill>
+                  <a:srgbClr val="282C3F"/>
+                </a:solidFill>
+              </a:rPr>
+              <a:t>wishlist</a:t>
+            </a:r>
+            <a:r>
+              <a:rPr sz="1400" dirty="0">
+                <a:solidFill>
+                  <a:srgbClr val="282C3F"/>
+                </a:solidFill>
+              </a:rPr>
+              <a:t> drop-off was driven by price sensitivity and lack of discount notifications.  |  </a:t>
+            </a:r>
+            <a:r>
+              <a:rPr sz="1400" b="1" dirty="0">
                 <a:solidFill>
                   <a:srgbClr val="FF3F6C"/>
                 </a:solidFill>
@@ -6739,12 +7059,28 @@
               <a:t>Discovery Finding: Only 12% of 20,250 negative reviews mentioned price as a blocker, while 40% cited fabric weight (GSM) ambiguity and 36% cited styling uncertainty.  |  </a:t>
             </a:r>
             <a:r>
-              <a:rPr b="1">
+              <a:rPr sz="1400" b="1" dirty="0">
                 <a:solidFill>
                   <a:srgbClr val="03A685"/>
                 </a:solidFill>
               </a:rPr>
-              <a:t>Strategic Pivot: Shifted product strategy entirely from margin-eroding discount alerts to in-wishlist spec comparison, verified buyer drape consensus, and AI look coordination.</a:t>
+              <a:t>Strategic Pivot: Shifted product strategy entirely from margin-eroding discount alerts to in-</a:t>
+            </a:r>
+            <a:r>
+              <a:rPr sz="1400" b="1" dirty="0" err="1">
+                <a:solidFill>
+                  <a:srgbClr val="03A685"/>
+                </a:solidFill>
+              </a:rPr>
+              <a:t>wishlist</a:t>
+            </a:r>
+            <a:r>
+              <a:rPr sz="1400" b="1" dirty="0">
+                <a:solidFill>
+                  <a:srgbClr val="03A685"/>
+                </a:solidFill>
+              </a:rPr>
+              <a:t> spec comparison, verified buyer drape consensus, and AI look coordination.</a:t>
             </a:r>
           </a:p>
         </p:txBody>
@@ -6757,8 +7093,8 @@
         </p:nvSpPr>
         <p:spPr>
           <a:xfrm>
-            <a:off x="594360" y="2807208"/>
-            <a:ext cx="3566160" cy="2331720"/>
+            <a:off x="594360" y="3048000"/>
+            <a:ext cx="3493008" cy="1869057"/>
           </a:xfrm>
           <a:prstGeom prst="roundRect">
             <a:avLst/>
@@ -6791,6 +7127,7 @@
           <a:lstStyle/>
           <a:p>
             <a:pPr algn="ctr"/>
+            <a:endParaRPr/>
           </a:p>
         </p:txBody>
       </p:sp>
@@ -6802,8 +7139,8 @@
         </p:nvSpPr>
         <p:spPr>
           <a:xfrm>
-            <a:off x="667512" y="2862072"/>
-            <a:ext cx="3419856" cy="2221992"/>
+            <a:off x="667512" y="3092112"/>
+            <a:ext cx="3419856" cy="1560812"/>
           </a:xfrm>
           <a:prstGeom prst="rect">
             <a:avLst/>
@@ -6827,7 +7164,16 @@
               </a:defRPr>
             </a:pPr>
             <a:r>
-              <a:t>💬 Prompt 1: What unmet needs emerge consistently across fashion discussions?</a:t>
+              <a:rPr dirty="0"/>
+              <a:t>💬 </a:t>
+            </a:r>
+            <a:r>
+              <a:rPr u="sng" dirty="0"/>
+              <a:t>Prompt 1: </a:t>
+            </a:r>
+            <a:r>
+              <a:rPr dirty="0"/>
+              <a:t>What unmet needs emerge consistently across fashion discussions?</a:t>
             </a:r>
           </a:p>
           <a:p>
@@ -6842,6 +7188,7 @@
               </a:defRPr>
             </a:pPr>
             <a:r>
+              <a:rPr dirty="0"/>
               <a:t>Response: 'Shoppers struggle to gauge fabric weight (GSM) and true fit from stylized studio photos alone, creating high hesitation on saved items.'</a:t>
             </a:r>
           </a:p>
@@ -6855,8 +7202,8 @@
         </p:nvSpPr>
         <p:spPr>
           <a:xfrm>
-            <a:off x="4306824" y="2807208"/>
-            <a:ext cx="3566160" cy="2331720"/>
+            <a:off x="4306824" y="3048000"/>
+            <a:ext cx="3493008" cy="1869057"/>
           </a:xfrm>
           <a:prstGeom prst="roundRect">
             <a:avLst/>
@@ -6889,6 +7236,7 @@
           <a:lstStyle/>
           <a:p>
             <a:pPr algn="ctr"/>
+            <a:endParaRPr/>
           </a:p>
         </p:txBody>
       </p:sp>
@@ -6900,8 +7248,8 @@
         </p:nvSpPr>
         <p:spPr>
           <a:xfrm>
-            <a:off x="4379976" y="2862072"/>
-            <a:ext cx="3419856" cy="2221992"/>
+            <a:off x="4379976" y="3092112"/>
+            <a:ext cx="3419856" cy="1315232"/>
           </a:xfrm>
           <a:prstGeom prst="rect">
             <a:avLst/>
@@ -6925,7 +7273,16 @@
               </a:defRPr>
             </a:pPr>
             <a:r>
-              <a:t>💬 Prompt 2: What frustrations cause users to stall repeatedly?</a:t>
+              <a:rPr dirty="0"/>
+              <a:t>💬 </a:t>
+            </a:r>
+            <a:r>
+              <a:rPr u="sng" dirty="0"/>
+              <a:t>Prompt 2: </a:t>
+            </a:r>
+            <a:r>
+              <a:rPr dirty="0"/>
+              <a:t>What frustrations cause users to stall repeatedly?</a:t>
             </a:r>
           </a:p>
           <a:p>
@@ -6940,6 +7297,7 @@
               </a:defRPr>
             </a:pPr>
             <a:r>
+              <a:rPr dirty="0"/>
               <a:t>Response: 'Choice fatigue between 4 similar black cargo pants and fear of thin see-through fabric upon doorstep delivery.'</a:t>
             </a:r>
           </a:p>
@@ -6953,8 +7311,8 @@
         </p:nvSpPr>
         <p:spPr>
           <a:xfrm>
-            <a:off x="8019288" y="2807208"/>
-            <a:ext cx="3566160" cy="2331720"/>
+            <a:off x="8019288" y="3048000"/>
+            <a:ext cx="3493008" cy="1869057"/>
           </a:xfrm>
           <a:prstGeom prst="roundRect">
             <a:avLst/>
@@ -6987,6 +7345,7 @@
           <a:lstStyle/>
           <a:p>
             <a:pPr algn="ctr"/>
+            <a:endParaRPr/>
           </a:p>
         </p:txBody>
       </p:sp>
@@ -6998,8 +7357,8 @@
         </p:nvSpPr>
         <p:spPr>
           <a:xfrm>
-            <a:off x="8092440" y="2862072"/>
-            <a:ext cx="3419856" cy="2221992"/>
+            <a:off x="8092440" y="3092112"/>
+            <a:ext cx="3419856" cy="1315232"/>
           </a:xfrm>
           <a:prstGeom prst="rect">
             <a:avLst/>
@@ -7023,7 +7382,16 @@
               </a:defRPr>
             </a:pPr>
             <a:r>
-              <a:t>💬 Prompt 3: What information triggers checkout confidence without discounts?</a:t>
+              <a:rPr dirty="0"/>
+              <a:t>💬 </a:t>
+            </a:r>
+            <a:r>
+              <a:rPr u="sng" dirty="0"/>
+              <a:t>Prompt 3: </a:t>
+            </a:r>
+            <a:r>
+              <a:rPr dirty="0"/>
+              <a:t>What information triggers checkout confidence without discounts?</a:t>
             </a:r>
           </a:p>
           <a:p>
@@ -7038,6 +7406,7 @@
               </a:defRPr>
             </a:pPr>
             <a:r>
+              <a:rPr dirty="0"/>
               <a:t>Response: 'Side-by-side spec comparison, verified fit consensus from verified buyers, and complete outfit coordination.'</a:t>
             </a:r>
           </a:p>
@@ -7051,8 +7420,8 @@
         </p:nvSpPr>
         <p:spPr>
           <a:xfrm>
-            <a:off x="594360" y="5248656"/>
-            <a:ext cx="11002975" cy="1362456"/>
+            <a:off x="270294" y="5248656"/>
+            <a:ext cx="11743427" cy="1362456"/>
           </a:xfrm>
           <a:prstGeom prst="roundRect">
             <a:avLst/>
@@ -7085,6 +7454,7 @@
           <a:lstStyle/>
           <a:p>
             <a:pPr algn="ctr"/>
+            <a:endParaRPr/>
           </a:p>
         </p:txBody>
       </p:sp>
@@ -7096,8 +7466,8 @@
         </p:nvSpPr>
         <p:spPr>
           <a:xfrm>
-            <a:off x="704088" y="5303520"/>
-            <a:ext cx="10783519" cy="1252728"/>
+            <a:off x="386486" y="5303520"/>
+            <a:ext cx="11509202" cy="1298369"/>
           </a:xfrm>
           <a:prstGeom prst="rect">
             <a:avLst/>
@@ -7121,7 +7491,12 @@
               </a:defRPr>
             </a:pPr>
             <a:r>
-              <a:t>🔬 3-STEP NLP DISCOVERY ENGINE PIPELINE &amp; TESTABLE WORKFLOW</a:t>
+              <a:rPr sz="1400" dirty="0"/>
+              <a:t>🔬 </a:t>
+            </a:r>
+            <a:r>
+              <a:rPr sz="1400" u="sng" dirty="0"/>
+              <a:t>3-STEP NLP DISCOVERY ENGINE PIPELINE &amp; TESTABLE WORKFLOW</a:t>
             </a:r>
           </a:p>
           <a:p>
@@ -7132,7 +7507,7 @@
               <a:defRPr sz="1400"/>
             </a:pPr>
             <a:r>
-              <a:rPr b="1">
+              <a:rPr sz="1400" b="1" dirty="0">
                 <a:solidFill>
                   <a:srgbClr val="FF3F6C"/>
                 </a:solidFill>
@@ -7140,7 +7515,7 @@
               <a:t>[1. Ingestion (Python)]: </a:t>
             </a:r>
             <a:r>
-              <a:rPr>
+              <a:rPr sz="1400" dirty="0">
                 <a:solidFill>
                   <a:srgbClr val="282C3F"/>
                 </a:solidFill>
@@ -7148,7 +7523,7 @@
               <a:t>Scraped 20,250 verified buyer reviews across 5 apparel categories from App Store, Play Store &amp; Reddit.   |   </a:t>
             </a:r>
             <a:r>
-              <a:rPr b="1">
+              <a:rPr sz="1400" b="1" dirty="0">
                 <a:solidFill>
                   <a:srgbClr val="FF3F6C"/>
                 </a:solidFill>
@@ -7156,7 +7531,7 @@
               <a:t>[2. Vectorization (BERT)]: </a:t>
             </a:r>
             <a:r>
-              <a:rPr>
+              <a:rPr sz="1400" dirty="0">
                 <a:solidFill>
                   <a:srgbClr val="282C3F"/>
                 </a:solidFill>
@@ -7164,7 +7539,7 @@
               <a:t>Generated dense semantic embeddings using Sentence-BERT for granular clustering.   |   </a:t>
             </a:r>
             <a:r>
-              <a:rPr b="1">
+              <a:rPr sz="1400" b="1" dirty="0">
                 <a:solidFill>
                   <a:srgbClr val="FF3F6C"/>
                 </a:solidFill>
@@ -7172,7 +7547,7 @@
               <a:t>[3. LLM Synthesis (Claude)]: </a:t>
             </a:r>
             <a:r>
-              <a:rPr>
+              <a:rPr sz="1400" dirty="0">
                 <a:solidFill>
                   <a:srgbClr val="282C3F"/>
                 </a:solidFill>
@@ -7188,24 +7563,77 @@
               <a:defRPr sz="1400"/>
             </a:pPr>
             <a:r>
-              <a:rPr b="1">
+              <a:rPr sz="1400" b="1" dirty="0">
                 <a:solidFill>
                   <a:srgbClr val="03A685"/>
                 </a:solidFill>
-              </a:rPr>
-              <a:t>🔗 Live Testable Workflow: </a:t>
-            </a:r>
-            <a:r>
-              <a:rPr b="1">
-                <a:solidFill>
-                  <a:srgbClr val="282C3F"/>
-                </a:solidFill>
-              </a:rPr>
-              <a:t>Live Interactive Discovery Engine: https://myntra-growth-lab.vercel.app/</a:t>
-            </a:r>
-          </a:p>
-        </p:txBody>
-      </p:sp>
+                <a:hlinkClick r:id="rId2"/>
+              </a:rPr>
+              <a:t>🔗</a:t>
+            </a:r>
+            <a:r>
+              <a:rPr sz="1400" b="1" dirty="0">
+                <a:solidFill>
+                  <a:srgbClr val="03A685"/>
+                </a:solidFill>
+              </a:rPr>
+              <a:t> Live Testable Workflow: </a:t>
+            </a:r>
+            <a:r>
+              <a:rPr sz="1400" b="1" dirty="0">
+                <a:solidFill>
+                  <a:srgbClr val="282C3F"/>
+                </a:solidFill>
+              </a:rPr>
+              <a:t>Live Interactive Discovery Engine:</a:t>
+            </a:r>
+            <a:r>
+              <a:rPr lang="en-IN" sz="1400" b="1" dirty="0">
+                <a:solidFill>
+                  <a:srgbClr val="282C3F"/>
+                </a:solidFill>
+              </a:rPr>
+              <a:t> https://myntra-beige-two.vercel.app/</a:t>
+            </a:r>
+            <a:endParaRPr sz="1400" b="1" dirty="0">
+              <a:solidFill>
+                <a:srgbClr val="282C3F"/>
+              </a:solidFill>
+            </a:endParaRPr>
+          </a:p>
+        </p:txBody>
+      </p:sp>
+      <p:pic>
+        <p:nvPicPr>
+          <p:cNvPr id="18" name="Picture 17" descr="Myntra Logo in Vector Format | Party font, Velvet dress ...">
+            <a:extLst>
+              <a:ext uri="{FF2B5EF4-FFF2-40B4-BE49-F238E27FC236}">
+                <a16:creationId xmlns:a16="http://schemas.microsoft.com/office/drawing/2014/main" id="{72137F46-746A-2F3E-9DC7-949644F434C4}"/>
+              </a:ext>
+            </a:extLst>
+          </p:cNvPr>
+          <p:cNvPicPr>
+            <a:picLocks noChangeAspect="1"/>
+          </p:cNvPicPr>
+          <p:nvPr/>
+        </p:nvPicPr>
+        <p:blipFill>
+          <a:blip r:embed="rId3"/>
+          <a:srcRect t="35750" r="2278" b="33850"/>
+          <a:stretch>
+            <a:fillRect/>
+          </a:stretch>
+        </p:blipFill>
+        <p:spPr>
+          <a:xfrm>
+            <a:off x="10800272" y="138030"/>
+            <a:ext cx="1276688" cy="397152"/>
+          </a:xfrm>
+          <a:prstGeom prst="rect">
+            <a:avLst/>
+          </a:prstGeom>
+        </p:spPr>
+      </p:pic>
     </p:spTree>
   </p:cSld>
   <p:clrMapOvr>
@@ -7215,7 +7643,7 @@
 </file>
 
 <file path=ppt/slides/slide4.xml><?xml version="1.0" encoding="utf-8"?>
-<p:sld xmlns:a="http://schemas.openxmlformats.org/drawingml/2006/main" xmlns:p="http://schemas.openxmlformats.org/presentationml/2006/main" xmlns:r="http://schemas.openxmlformats.org/officeDocument/2006/relationships">
+<p:sld xmlns:a="http://schemas.openxmlformats.org/drawingml/2006/main" xmlns:r="http://schemas.openxmlformats.org/officeDocument/2006/relationships" xmlns:p="http://schemas.openxmlformats.org/presentationml/2006/main">
   <p:cSld>
     <p:spTree>
       <p:nvGrpSpPr>
@@ -7223,7 +7651,14 @@
         <p:cNvGrpSpPr/>
         <p:nvPr/>
       </p:nvGrpSpPr>
-      <p:grpSpPr/>
+      <p:grpSpPr>
+        <a:xfrm>
+          <a:off x="0" y="0"/>
+          <a:ext cx="0" cy="0"/>
+          <a:chOff x="0" y="0"/>
+          <a:chExt cx="0" cy="0"/>
+        </a:xfrm>
+      </p:grpSpPr>
       <p:sp>
         <p:nvSpPr>
           <p:cNvPr id="2" name="Rounded Rectangle 1"/>
@@ -7260,7 +7695,7 @@
           </a:fontRef>
         </p:style>
         <p:txBody>
-          <a:bodyPr rtlCol="0" anchor="ctr" wrap="square" tIns="18288" bIns="18288"/>
+          <a:bodyPr wrap="square" tIns="18288" bIns="18288" rtlCol="0" anchor="ctr"/>
           <a:lstStyle/>
           <a:p>
             <a:pPr algn="ctr">
@@ -7277,6 +7712,7 @@
               </a:defRPr>
             </a:pPr>
             <a:r>
+              <a:rPr sz="1600"/>
               <a:t>TARGET SEGMENT &amp; PERSONA CANVAS</a:t>
             </a:r>
           </a:p>
@@ -7290,16 +7726,29 @@
         </p:nvSpPr>
         <p:spPr>
           <a:xfrm>
-            <a:off x="594360" y="594360"/>
-            <a:ext cx="9875520" cy="777240"/>
+            <a:off x="0" y="738135"/>
+            <a:ext cx="12192000" cy="543739"/>
           </a:xfrm>
           <a:prstGeom prst="rect">
             <a:avLst/>
           </a:prstGeom>
-          <a:noFill/>
-        </p:spPr>
-        <p:txBody>
-          <a:bodyPr wrap="square" lIns="0" rIns="0" tIns="0" bIns="0">
+        </p:spPr>
+        <p:style>
+          <a:lnRef idx="2">
+            <a:schemeClr val="accent6"/>
+          </a:lnRef>
+          <a:fillRef idx="1">
+            <a:schemeClr val="lt1"/>
+          </a:fillRef>
+          <a:effectRef idx="0">
+            <a:schemeClr val="accent6"/>
+          </a:effectRef>
+          <a:fontRef idx="minor">
+            <a:schemeClr val="dk1"/>
+          </a:fontRef>
+        </p:style>
+        <p:txBody>
+          <a:bodyPr wrap="square" lIns="0" tIns="0" rIns="0" bIns="0">
             <a:spAutoFit/>
           </a:bodyPr>
           <a:lstStyle/>
@@ -7315,6 +7764,11 @@
               </a:defRPr>
             </a:pPr>
             <a:r>
+              <a:rPr lang="en-US" sz="1600" dirty="0"/>
+              <a:t> </a:t>
+            </a:r>
+            <a:r>
+              <a:rPr sz="1600" dirty="0"/>
               <a:t>4. Gen-Z &amp; Millennial Shoppers (62% of Wishlist MAU) Form the Prime Wedge to Convert Dormant Consideration Demand</a:t>
             </a:r>
           </a:p>
@@ -7333,42 +7787,20 @@
               </a:defRPr>
             </a:pPr>
             <a:r>
-              <a:t>Targeting active consideration shortlisters (38+ saved items) who require decision confidence rather than discounts.</a:t>
-            </a:r>
-          </a:p>
-        </p:txBody>
-      </p:sp>
-      <p:sp>
-        <p:nvSpPr>
-          <p:cNvPr id="4" name="TextBox 3"/>
-          <p:cNvSpPr txBox="1"/>
-          <p:nvPr/>
-        </p:nvSpPr>
-        <p:spPr>
-          <a:xfrm>
-            <a:off x="10424160" y="594360"/>
-            <a:ext cx="1188720" cy="457200"/>
-          </a:xfrm>
-          <a:prstGeom prst="rect">
-            <a:avLst/>
-          </a:prstGeom>
-          <a:noFill/>
-        </p:spPr>
-        <p:txBody>
-          <a:bodyPr wrap="none" lIns="0" rIns="0" tIns="0" bIns="0">
-            <a:spAutoFit/>
-          </a:bodyPr>
-          <a:lstStyle/>
-          <a:p>
-            <a:pPr algn="r">
-              <a:defRPr sz="2400" b="1">
-                <a:solidFill>
-                  <a:srgbClr val="FF3F6C"/>
-                </a:solidFill>
-              </a:defRPr>
-            </a:pPr>
-            <a:r>
-              <a:t>myntra</a:t>
+              <a:rPr lang="en-US" sz="1600" dirty="0"/>
+              <a:t>      </a:t>
+            </a:r>
+            <a:r>
+              <a:rPr sz="1600" dirty="0"/>
+              <a:t>Targeting active consideration </a:t>
+            </a:r>
+            <a:r>
+              <a:rPr sz="1600" dirty="0" err="1"/>
+              <a:t>shortlisters</a:t>
+            </a:r>
+            <a:r>
+              <a:rPr sz="1600" dirty="0"/>
+              <a:t> (38+ saved items) who require decision confidence rather than discounts.</a:t>
             </a:r>
           </a:p>
         </p:txBody>
@@ -7381,7 +7813,7 @@
         </p:nvSpPr>
         <p:spPr>
           <a:xfrm>
-            <a:off x="594360" y="1417320"/>
+            <a:off x="594360" y="1486332"/>
             <a:ext cx="5394960" cy="2514600"/>
           </a:xfrm>
           <a:prstGeom prst="roundRect">
@@ -7415,6 +7847,7 @@
           <a:lstStyle/>
           <a:p>
             <a:pPr algn="ctr"/>
+            <a:endParaRPr/>
           </a:p>
         </p:txBody>
       </p:sp>
@@ -7426,8 +7859,8 @@
         </p:nvSpPr>
         <p:spPr>
           <a:xfrm>
-            <a:off x="704088" y="1490472"/>
-            <a:ext cx="5175504" cy="2368296"/>
+            <a:off x="704088" y="1737765"/>
+            <a:ext cx="5175504" cy="1923412"/>
           </a:xfrm>
           <a:prstGeom prst="rect">
             <a:avLst/>
@@ -7451,7 +7884,12 @@
               </a:defRPr>
             </a:pPr>
             <a:r>
-              <a:t>🎴 Segment Profile</a:t>
+              <a:rPr sz="1400" dirty="0"/>
+              <a:t>🎴 </a:t>
+            </a:r>
+            <a:r>
+              <a:rPr sz="1400" u="sng" dirty="0"/>
+              <a:t>Segment Profile</a:t>
             </a:r>
           </a:p>
           <a:p>
@@ -7468,7 +7906,7 @@
               <a:defRPr sz="1400"/>
             </a:pPr>
             <a:r>
-              <a:rPr b="1">
+              <a:rPr sz="1400" b="1" dirty="0">
                 <a:solidFill>
                   <a:srgbClr val="282C3F"/>
                 </a:solidFill>
@@ -7476,7 +7914,7 @@
               <a:t>• Demographics: </a:t>
             </a:r>
             <a:r>
-              <a:rPr>
+              <a:rPr sz="1400" dirty="0">
                 <a:solidFill>
                   <a:srgbClr val="282C3F"/>
                 </a:solidFill>
@@ -7498,7 +7936,7 @@
               <a:defRPr sz="1400"/>
             </a:pPr>
             <a:r>
-              <a:rPr b="1">
+              <a:rPr sz="1400" b="1" dirty="0">
                 <a:solidFill>
                   <a:srgbClr val="282C3F"/>
                 </a:solidFill>
@@ -7506,12 +7944,44 @@
               <a:t>• Engagement: </a:t>
             </a:r>
             <a:r>
-              <a:rPr>
-                <a:solidFill>
-                  <a:srgbClr val="282C3F"/>
-                </a:solidFill>
-              </a:rPr>
-              <a:t>Highly Active (38+ saved wishlist items). Average basket size ₹1,650 [Redseer 2024], shopping 2-3x monthly.</a:t>
+              <a:rPr sz="1400" dirty="0">
+                <a:solidFill>
+                  <a:srgbClr val="282C3F"/>
+                </a:solidFill>
+              </a:rPr>
+              <a:t>Highly Active (38+ saved </a:t>
+            </a:r>
+            <a:r>
+              <a:rPr sz="1400" dirty="0" err="1">
+                <a:solidFill>
+                  <a:srgbClr val="282C3F"/>
+                </a:solidFill>
+              </a:rPr>
+              <a:t>wishlist</a:t>
+            </a:r>
+            <a:r>
+              <a:rPr sz="1400" dirty="0">
+                <a:solidFill>
+                  <a:srgbClr val="282C3F"/>
+                </a:solidFill>
+              </a:rPr>
+              <a:t> items). Average basket size ₹1,650 [</a:t>
+            </a:r>
+            <a:r>
+              <a:rPr sz="1400" dirty="0" err="1">
+                <a:solidFill>
+                  <a:srgbClr val="282C3F"/>
+                </a:solidFill>
+              </a:rPr>
+              <a:t>Redseer</a:t>
+            </a:r>
+            <a:r>
+              <a:rPr sz="1400" dirty="0">
+                <a:solidFill>
+                  <a:srgbClr val="282C3F"/>
+                </a:solidFill>
+              </a:rPr>
+              <a:t> 2024], shopping 2-3x monthly.</a:t>
             </a:r>
           </a:p>
           <a:p>
@@ -7528,7 +7998,7 @@
               <a:defRPr sz="1400"/>
             </a:pPr>
             <a:r>
-              <a:rPr b="1">
+              <a:rPr sz="1400" b="1" dirty="0">
                 <a:solidFill>
                   <a:srgbClr val="282C3F"/>
                 </a:solidFill>
@@ -7536,7 +8006,7 @@
               <a:t>• Categories: </a:t>
             </a:r>
             <a:r>
-              <a:rPr>
+              <a:rPr sz="1400" dirty="0">
                 <a:solidFill>
                   <a:srgbClr val="282C3F"/>
                 </a:solidFill>
@@ -7554,7 +8024,7 @@
         </p:nvSpPr>
         <p:spPr>
           <a:xfrm>
-            <a:off x="6199632" y="1417320"/>
+            <a:off x="6199632" y="1486332"/>
             <a:ext cx="5394960" cy="2514600"/>
           </a:xfrm>
           <a:prstGeom prst="roundRect">
@@ -7588,6 +8058,7 @@
           <a:lstStyle/>
           <a:p>
             <a:pPr algn="ctr"/>
+            <a:endParaRPr/>
           </a:p>
         </p:txBody>
       </p:sp>
@@ -7599,8 +8070,8 @@
         </p:nvSpPr>
         <p:spPr>
           <a:xfrm>
-            <a:off x="6309360" y="1490472"/>
-            <a:ext cx="5175504" cy="2368296"/>
+            <a:off x="6309360" y="1737765"/>
+            <a:ext cx="5175504" cy="1923412"/>
           </a:xfrm>
           <a:prstGeom prst="rect">
             <a:avLst/>
@@ -7624,7 +8095,12 @@
               </a:defRPr>
             </a:pPr>
             <a:r>
-              <a:t>🎯 Why This Segment?</a:t>
+              <a:rPr sz="1400" dirty="0"/>
+              <a:t>🎯 </a:t>
+            </a:r>
+            <a:r>
+              <a:rPr sz="1400" u="sng" dirty="0"/>
+              <a:t>Why This Segment?</a:t>
             </a:r>
           </a:p>
           <a:p>
@@ -7641,7 +8117,7 @@
               <a:defRPr sz="1400"/>
             </a:pPr>
             <a:r>
-              <a:rPr b="1">
+              <a:rPr sz="1400" b="1" dirty="0">
                 <a:solidFill>
                   <a:srgbClr val="282C3F"/>
                 </a:solidFill>
@@ -7649,7 +8125,7 @@
               <a:t>• High Purchase Intent: </a:t>
             </a:r>
             <a:r>
-              <a:rPr>
+              <a:rPr sz="1400" dirty="0">
                 <a:solidFill>
                   <a:srgbClr val="282C3F"/>
                 </a:solidFill>
@@ -7671,7 +8147,7 @@
               <a:defRPr sz="1400"/>
             </a:pPr>
             <a:r>
-              <a:rPr b="1">
+              <a:rPr sz="1400" b="1" dirty="0">
                 <a:solidFill>
                   <a:srgbClr val="282C3F"/>
                 </a:solidFill>
@@ -7679,7 +8155,7 @@
               <a:t>• Conversion Efficiency: </a:t>
             </a:r>
             <a:r>
-              <a:rPr>
+              <a:rPr sz="1400" dirty="0">
                 <a:solidFill>
                   <a:srgbClr val="282C3F"/>
                 </a:solidFill>
@@ -7701,7 +8177,7 @@
               <a:defRPr sz="1400"/>
             </a:pPr>
             <a:r>
-              <a:rPr b="1">
+              <a:rPr sz="1400" b="1" dirty="0">
                 <a:solidFill>
                   <a:srgbClr val="282C3F"/>
                 </a:solidFill>
@@ -7709,7 +8185,7 @@
               <a:t>• Social Multipliers: </a:t>
             </a:r>
             <a:r>
-              <a:rPr>
+              <a:rPr sz="1400" dirty="0">
                 <a:solidFill>
                   <a:srgbClr val="282C3F"/>
                 </a:solidFill>
@@ -7727,7 +8203,7 @@
         </p:nvSpPr>
         <p:spPr>
           <a:xfrm>
-            <a:off x="594360" y="4096512"/>
+            <a:off x="594360" y="4165524"/>
             <a:ext cx="5394960" cy="2514600"/>
           </a:xfrm>
           <a:prstGeom prst="roundRect">
@@ -7761,6 +8237,7 @@
           <a:lstStyle/>
           <a:p>
             <a:pPr algn="ctr"/>
+            <a:endParaRPr/>
           </a:p>
         </p:txBody>
       </p:sp>
@@ -7772,8 +8249,8 @@
         </p:nvSpPr>
         <p:spPr>
           <a:xfrm>
-            <a:off x="704088" y="4169664"/>
-            <a:ext cx="5175504" cy="2368296"/>
+            <a:off x="704088" y="4416957"/>
+            <a:ext cx="5175504" cy="1923412"/>
           </a:xfrm>
           <a:prstGeom prst="rect">
             <a:avLst/>
@@ -7797,7 +8274,12 @@
               </a:defRPr>
             </a:pPr>
             <a:r>
-              <a:t>📱 Behavioral Anchors</a:t>
+              <a:rPr sz="1400" dirty="0"/>
+              <a:t>📱 </a:t>
+            </a:r>
+            <a:r>
+              <a:rPr sz="1400" u="sng" dirty="0"/>
+              <a:t>Behavioral Anchors</a:t>
             </a:r>
           </a:p>
           <a:p>
@@ -7814,7 +8296,7 @@
               <a:defRPr sz="1400"/>
             </a:pPr>
             <a:r>
-              <a:rPr b="1">
+              <a:rPr sz="1400" b="1" dirty="0">
                 <a:solidFill>
                   <a:srgbClr val="282C3F"/>
                 </a:solidFill>
@@ -7822,12 +8304,44 @@
               <a:t>• Visual Scrollers: </a:t>
             </a:r>
             <a:r>
-              <a:rPr>
-                <a:solidFill>
-                  <a:srgbClr val="282C3F"/>
-                </a:solidFill>
-              </a:rPr>
-              <a:t>Treat wishlist as an aspirational moodboard, saving multiple subtle variations.</a:t>
+              <a:rPr sz="1400" dirty="0">
+                <a:solidFill>
+                  <a:srgbClr val="282C3F"/>
+                </a:solidFill>
+              </a:rPr>
+              <a:t>Treat </a:t>
+            </a:r>
+            <a:r>
+              <a:rPr sz="1400" dirty="0" err="1">
+                <a:solidFill>
+                  <a:srgbClr val="282C3F"/>
+                </a:solidFill>
+              </a:rPr>
+              <a:t>wishlist</a:t>
+            </a:r>
+            <a:r>
+              <a:rPr sz="1400" dirty="0">
+                <a:solidFill>
+                  <a:srgbClr val="282C3F"/>
+                </a:solidFill>
+              </a:rPr>
+              <a:t> as an aspirational </a:t>
+            </a:r>
+            <a:r>
+              <a:rPr sz="1400" dirty="0" err="1">
+                <a:solidFill>
+                  <a:srgbClr val="282C3F"/>
+                </a:solidFill>
+              </a:rPr>
+              <a:t>moodboard</a:t>
+            </a:r>
+            <a:r>
+              <a:rPr sz="1400" dirty="0">
+                <a:solidFill>
+                  <a:srgbClr val="282C3F"/>
+                </a:solidFill>
+              </a:rPr>
+              <a:t>, saving multiple subtle variations.</a:t>
             </a:r>
           </a:p>
           <a:p>
@@ -7844,7 +8358,7 @@
               <a:defRPr sz="1400"/>
             </a:pPr>
             <a:r>
-              <a:rPr b="1">
+              <a:rPr sz="1400" b="1" dirty="0">
                 <a:solidFill>
                   <a:srgbClr val="282C3F"/>
                 </a:solidFill>
@@ -7852,7 +8366,7 @@
               <a:t>• Comparison Paralysis: </a:t>
             </a:r>
             <a:r>
-              <a:rPr>
+              <a:rPr sz="1400" dirty="0">
                 <a:solidFill>
                   <a:srgbClr val="282C3F"/>
                 </a:solidFill>
@@ -7874,7 +8388,7 @@
               <a:defRPr sz="1400"/>
             </a:pPr>
             <a:r>
-              <a:rPr b="1">
+              <a:rPr sz="1400" b="1" dirty="0">
                 <a:solidFill>
                   <a:srgbClr val="282C3F"/>
                 </a:solidFill>
@@ -7882,7 +8396,7 @@
               <a:t>• Return Hesitation: </a:t>
             </a:r>
             <a:r>
-              <a:rPr>
+              <a:rPr sz="1400" dirty="0">
                 <a:solidFill>
                   <a:srgbClr val="282C3F"/>
                 </a:solidFill>
@@ -7900,7 +8414,7 @@
         </p:nvSpPr>
         <p:spPr>
           <a:xfrm>
-            <a:off x="6199632" y="4096512"/>
+            <a:off x="6199632" y="4165524"/>
             <a:ext cx="5394960" cy="2514600"/>
           </a:xfrm>
           <a:prstGeom prst="roundRect">
@@ -7934,6 +8448,7 @@
           <a:lstStyle/>
           <a:p>
             <a:pPr algn="ctr"/>
+            <a:endParaRPr/>
           </a:p>
         </p:txBody>
       </p:sp>
@@ -7945,8 +8460,8 @@
         </p:nvSpPr>
         <p:spPr>
           <a:xfrm>
-            <a:off x="6309360" y="4169664"/>
-            <a:ext cx="5175504" cy="2368296"/>
+            <a:off x="6309360" y="4416957"/>
+            <a:ext cx="5175504" cy="1923412"/>
           </a:xfrm>
           <a:prstGeom prst="rect">
             <a:avLst/>
@@ -7970,7 +8485,12 @@
               </a:defRPr>
             </a:pPr>
             <a:r>
-              <a:t>📈 The Growth Opportunity</a:t>
+              <a:rPr sz="1400" dirty="0"/>
+              <a:t>📈 </a:t>
+            </a:r>
+            <a:r>
+              <a:rPr sz="1400" u="sng" dirty="0"/>
+              <a:t>The Growth Opportunity</a:t>
             </a:r>
           </a:p>
           <a:p>
@@ -7987,7 +8507,7 @@
               <a:defRPr sz="1400"/>
             </a:pPr>
             <a:r>
-              <a:rPr b="1">
+              <a:rPr sz="1400" b="1" dirty="0">
                 <a:solidFill>
                   <a:srgbClr val="282C3F"/>
                 </a:solidFill>
@@ -7995,12 +8515,28 @@
               <a:t>• Unlocking Dormant GMV: </a:t>
             </a:r>
             <a:r>
-              <a:rPr>
-                <a:solidFill>
-                  <a:srgbClr val="282C3F"/>
-                </a:solidFill>
-              </a:rPr>
-              <a:t>Converts ₹123 Cr baseline into ₹173 Cr monthly GMV (+₹49.5 Cr/mo lift).</a:t>
+              <a:rPr sz="1400" dirty="0">
+                <a:solidFill>
+                  <a:srgbClr val="282C3F"/>
+                </a:solidFill>
+              </a:rPr>
+              <a:t>Converts ₹123 Cr baseline into ₹173 Cr monthly GMV (+₹49.5 Cr/</a:t>
+            </a:r>
+            <a:r>
+              <a:rPr sz="1400" dirty="0" err="1">
+                <a:solidFill>
+                  <a:srgbClr val="282C3F"/>
+                </a:solidFill>
+              </a:rPr>
+              <a:t>mo</a:t>
+            </a:r>
+            <a:r>
+              <a:rPr sz="1400" dirty="0">
+                <a:solidFill>
+                  <a:srgbClr val="282C3F"/>
+                </a:solidFill>
+              </a:rPr>
+              <a:t> lift).</a:t>
             </a:r>
           </a:p>
           <a:p>
@@ -8017,7 +8553,7 @@
               <a:defRPr sz="1400"/>
             </a:pPr>
             <a:r>
-              <a:rPr b="1">
+              <a:rPr sz="1400" b="1" dirty="0">
                 <a:solidFill>
                   <a:srgbClr val="282C3F"/>
                 </a:solidFill>
@@ -8025,7 +8561,7 @@
               <a:t>• Zero Margin Erosion: </a:t>
             </a:r>
             <a:r>
-              <a:rPr>
+              <a:rPr sz="1400" dirty="0">
                 <a:solidFill>
                   <a:srgbClr val="282C3F"/>
                 </a:solidFill>
@@ -8047,7 +8583,7 @@
               <a:defRPr sz="1400"/>
             </a:pPr>
             <a:r>
-              <a:rPr b="1">
+              <a:rPr sz="1400" b="1" dirty="0">
                 <a:solidFill>
                   <a:srgbClr val="282C3F"/>
                 </a:solidFill>
@@ -8055,16 +8591,63 @@
               <a:t>• Return Cost Reduction: </a:t>
             </a:r>
             <a:r>
-              <a:rPr>
-                <a:solidFill>
-                  <a:srgbClr val="282C3F"/>
-                </a:solidFill>
-              </a:rPr>
-              <a:t>Saves ₹73.5 Lakh/mo by cutting fit-related reverse logistics.</a:t>
-            </a:r>
-          </a:p>
-        </p:txBody>
-      </p:sp>
+              <a:rPr sz="1400" dirty="0">
+                <a:solidFill>
+                  <a:srgbClr val="282C3F"/>
+                </a:solidFill>
+              </a:rPr>
+              <a:t>Saves ₹73.5 Lakh/</a:t>
+            </a:r>
+            <a:r>
+              <a:rPr sz="1400" dirty="0" err="1">
+                <a:solidFill>
+                  <a:srgbClr val="282C3F"/>
+                </a:solidFill>
+              </a:rPr>
+              <a:t>mo</a:t>
+            </a:r>
+            <a:r>
+              <a:rPr sz="1400" dirty="0">
+                <a:solidFill>
+                  <a:srgbClr val="282C3F"/>
+                </a:solidFill>
+              </a:rPr>
+              <a:t> by cutting fit-related reverse logistics.</a:t>
+            </a:r>
+          </a:p>
+        </p:txBody>
+      </p:sp>
+      <p:pic>
+        <p:nvPicPr>
+          <p:cNvPr id="14" name="Picture 13" descr="Myntra Logo in Vector Format | Party font, Velvet dress ...">
+            <a:extLst>
+              <a:ext uri="{FF2B5EF4-FFF2-40B4-BE49-F238E27FC236}">
+                <a16:creationId xmlns:a16="http://schemas.microsoft.com/office/drawing/2014/main" id="{8E0F0F55-A35A-392B-834A-B5D087F7CB70}"/>
+              </a:ext>
+            </a:extLst>
+          </p:cNvPr>
+          <p:cNvPicPr>
+            <a:picLocks noChangeAspect="1"/>
+          </p:cNvPicPr>
+          <p:nvPr/>
+        </p:nvPicPr>
+        <p:blipFill>
+          <a:blip r:embed="rId2"/>
+          <a:srcRect t="35750" r="2278" b="33850"/>
+          <a:stretch>
+            <a:fillRect/>
+          </a:stretch>
+        </p:blipFill>
+        <p:spPr>
+          <a:xfrm>
+            <a:off x="10800272" y="138030"/>
+            <a:ext cx="1276688" cy="397152"/>
+          </a:xfrm>
+          <a:prstGeom prst="rect">
+            <a:avLst/>
+          </a:prstGeom>
+        </p:spPr>
+      </p:pic>
     </p:spTree>
   </p:cSld>
   <p:clrMapOvr>
@@ -8074,7 +8657,7 @@
 </file>
 
 <file path=ppt/slides/slide5.xml><?xml version="1.0" encoding="utf-8"?>
-<p:sld xmlns:a="http://schemas.openxmlformats.org/drawingml/2006/main" xmlns:p="http://schemas.openxmlformats.org/presentationml/2006/main" xmlns:r="http://schemas.openxmlformats.org/officeDocument/2006/relationships">
+<p:sld xmlns:a="http://schemas.openxmlformats.org/drawingml/2006/main" xmlns:r="http://schemas.openxmlformats.org/officeDocument/2006/relationships" xmlns:p="http://schemas.openxmlformats.org/presentationml/2006/main">
   <p:cSld>
     <p:spTree>
       <p:nvGrpSpPr>
@@ -8082,7 +8665,14 @@
         <p:cNvGrpSpPr/>
         <p:nvPr/>
       </p:nvGrpSpPr>
-      <p:grpSpPr/>
+      <p:grpSpPr>
+        <a:xfrm>
+          <a:off x="0" y="0"/>
+          <a:ext cx="0" cy="0"/>
+          <a:chOff x="0" y="0"/>
+          <a:chExt cx="0" cy="0"/>
+        </a:xfrm>
+      </p:grpSpPr>
       <p:sp>
         <p:nvSpPr>
           <p:cNvPr id="2" name="Rounded Rectangle 1"/>
@@ -8119,7 +8709,7 @@
           </a:fontRef>
         </p:style>
         <p:txBody>
-          <a:bodyPr rtlCol="0" anchor="ctr" wrap="square" tIns="18288" bIns="18288"/>
+          <a:bodyPr wrap="square" tIns="18288" bIns="18288" rtlCol="0" anchor="ctr"/>
           <a:lstStyle/>
           <a:p>
             <a:pPr algn="ctr">
@@ -8136,6 +8726,7 @@
               </a:defRPr>
             </a:pPr>
             <a:r>
+              <a:rPr sz="1600" dirty="0"/>
               <a:t>QUALITATIVE USER RESEARCH INTERVIEW SYNTHESIS (2x3 GRID)</a:t>
             </a:r>
           </a:p>
@@ -8149,16 +8740,29 @@
         </p:nvSpPr>
         <p:spPr>
           <a:xfrm>
-            <a:off x="594360" y="594360"/>
-            <a:ext cx="9875520" cy="777240"/>
+            <a:off x="0" y="749637"/>
+            <a:ext cx="12192000" cy="543739"/>
           </a:xfrm>
           <a:prstGeom prst="rect">
             <a:avLst/>
           </a:prstGeom>
-          <a:noFill/>
-        </p:spPr>
-        <p:txBody>
-          <a:bodyPr wrap="square" lIns="0" rIns="0" tIns="0" bIns="0">
+        </p:spPr>
+        <p:style>
+          <a:lnRef idx="2">
+            <a:schemeClr val="accent6"/>
+          </a:lnRef>
+          <a:fillRef idx="1">
+            <a:schemeClr val="lt1"/>
+          </a:fillRef>
+          <a:effectRef idx="0">
+            <a:schemeClr val="accent6"/>
+          </a:effectRef>
+          <a:fontRef idx="minor">
+            <a:schemeClr val="dk1"/>
+          </a:fontRef>
+        </p:style>
+        <p:txBody>
+          <a:bodyPr wrap="square" lIns="0" tIns="0" rIns="0" bIns="0">
             <a:spAutoFit/>
           </a:bodyPr>
           <a:lstStyle/>
@@ -8174,8 +8778,18 @@
               </a:defRPr>
             </a:pPr>
             <a:r>
+              <a:rPr lang="en-US" sz="1600" dirty="0"/>
+              <a:t> </a:t>
+            </a:r>
+            <a:r>
+              <a:rPr sz="1600" dirty="0"/>
               <a:t>5. Primary User Research (N=25 Survey + N=9 Interviews) Confirms Comparison Paralysis &amp; Sizing Uncertainty</a:t>
             </a:r>
+            <a:r>
+              <a:rPr lang="en-US" sz="1600" dirty="0"/>
+              <a:t>              </a:t>
+            </a:r>
+            <a:endParaRPr sz="1600" dirty="0"/>
           </a:p>
           <a:p>
             <a:pPr>
@@ -8192,42 +8806,12 @@
               </a:defRPr>
             </a:pPr>
             <a:r>
+              <a:rPr lang="en-US" sz="1600" dirty="0"/>
+              <a:t>     </a:t>
+            </a:r>
+            <a:r>
+              <a:rPr sz="1600" dirty="0"/>
               <a:t>Authentic qualitative interview quotes from 6 representative participants in the 2026 Online Fashion Shopping Survey Cohort.</a:t>
-            </a:r>
-          </a:p>
-        </p:txBody>
-      </p:sp>
-      <p:sp>
-        <p:nvSpPr>
-          <p:cNvPr id="4" name="TextBox 3"/>
-          <p:cNvSpPr txBox="1"/>
-          <p:nvPr/>
-        </p:nvSpPr>
-        <p:spPr>
-          <a:xfrm>
-            <a:off x="10424160" y="594360"/>
-            <a:ext cx="1188720" cy="457200"/>
-          </a:xfrm>
-          <a:prstGeom prst="rect">
-            <a:avLst/>
-          </a:prstGeom>
-          <a:noFill/>
-        </p:spPr>
-        <p:txBody>
-          <a:bodyPr wrap="none" lIns="0" rIns="0" tIns="0" bIns="0">
-            <a:spAutoFit/>
-          </a:bodyPr>
-          <a:lstStyle/>
-          <a:p>
-            <a:pPr algn="r">
-              <a:defRPr sz="2400" b="1">
-                <a:solidFill>
-                  <a:srgbClr val="FF3F6C"/>
-                </a:solidFill>
-              </a:defRPr>
-            </a:pPr>
-            <a:r>
-              <a:t>myntra</a:t>
             </a:r>
           </a:p>
         </p:txBody>
@@ -8240,7 +8824,7 @@
         </p:nvSpPr>
         <p:spPr>
           <a:xfrm>
-            <a:off x="594360" y="1417320"/>
+            <a:off x="7759" y="1423071"/>
             <a:ext cx="11002975" cy="438912"/>
           </a:xfrm>
           <a:prstGeom prst="roundRect">
@@ -8274,6 +8858,7 @@
           <a:lstStyle/>
           <a:p>
             <a:pPr algn="ctr"/>
+            <a:endParaRPr/>
           </a:p>
         </p:txBody>
       </p:sp>
@@ -8285,7 +8870,7 @@
         </p:nvSpPr>
         <p:spPr>
           <a:xfrm>
-            <a:off x="704088" y="1453896"/>
+            <a:off x="117487" y="1459647"/>
             <a:ext cx="10783519" cy="365760"/>
           </a:xfrm>
           <a:prstGeom prst="rect">
@@ -8307,6 +8892,7 @@
               </a:defRPr>
             </a:pPr>
             <a:r>
+              <a:rPr dirty="0"/>
               <a:t>📋 Methodology: N=25 Survey Responses + N=9 Semi-Structured Qualitative Interviews + 20,250 Review NLP Corpus.</a:t>
             </a:r>
           </a:p>
@@ -8320,8 +8906,8 @@
         </p:nvSpPr>
         <p:spPr>
           <a:xfrm>
-            <a:off x="594360" y="1965960"/>
-            <a:ext cx="3566160" cy="2267712"/>
+            <a:off x="66113" y="1965960"/>
+            <a:ext cx="3970504" cy="2367024"/>
           </a:xfrm>
           <a:prstGeom prst="roundRect">
             <a:avLst/>
@@ -8354,6 +8940,7 @@
           <a:lstStyle/>
           <a:p>
             <a:pPr algn="ctr"/>
+            <a:endParaRPr/>
           </a:p>
         </p:txBody>
       </p:sp>
@@ -8365,8 +8952,8 @@
         </p:nvSpPr>
         <p:spPr>
           <a:xfrm>
-            <a:off x="667512" y="2020824"/>
-            <a:ext cx="3419856" cy="2157984"/>
+            <a:off x="168875" y="2179771"/>
+            <a:ext cx="3807611" cy="1798826"/>
           </a:xfrm>
           <a:prstGeom prst="rect">
             <a:avLst/>
@@ -8390,6 +8977,7 @@
               </a:defRPr>
             </a:pPr>
             <a:r>
+              <a:rPr sz="1400" dirty="0"/>
               <a:t>👤 Participant 1 (23, Tech Consultant, Bengaluru • Saves 4-5 formal pants / session)</a:t>
             </a:r>
           </a:p>
@@ -8404,7 +8992,7 @@
               <a:defRPr sz="1400"/>
             </a:pPr>
             <a:r>
-              <a:rPr b="1">
+              <a:rPr sz="1400" b="1" dirty="0">
                 <a:solidFill>
                   <a:srgbClr val="FF3F6C"/>
                 </a:solidFill>
@@ -8412,7 +9000,7 @@
               <a:t>Quote: </a:t>
             </a:r>
             <a:r>
-              <a:rPr i="1">
+              <a:rPr sz="1400" i="1" dirty="0">
                 <a:solidFill>
                   <a:srgbClr val="282C3F"/>
                 </a:solidFill>
@@ -8431,7 +9019,7 @@
               <a:defRPr sz="1400"/>
             </a:pPr>
             <a:r>
-              <a:rPr b="1">
+              <a:rPr sz="1400" b="1" dirty="0">
                 <a:solidFill>
                   <a:srgbClr val="03A685"/>
                 </a:solidFill>
@@ -8449,8 +9037,8 @@
         </p:nvSpPr>
         <p:spPr>
           <a:xfrm>
-            <a:off x="4306824" y="1965960"/>
-            <a:ext cx="3566160" cy="2267712"/>
+            <a:off x="4169645" y="2000466"/>
+            <a:ext cx="3883170" cy="2340864"/>
           </a:xfrm>
           <a:prstGeom prst="roundRect">
             <a:avLst/>
@@ -8483,6 +9071,7 @@
           <a:lstStyle/>
           <a:p>
             <a:pPr algn="ctr"/>
+            <a:endParaRPr/>
           </a:p>
         </p:txBody>
       </p:sp>
@@ -8494,8 +9083,8 @@
         </p:nvSpPr>
         <p:spPr>
           <a:xfrm>
-            <a:off x="4379976" y="2020824"/>
-            <a:ext cx="3419856" cy="2157984"/>
+            <a:off x="4224300" y="2130093"/>
+            <a:ext cx="3690217" cy="2040110"/>
           </a:xfrm>
           <a:prstGeom prst="rect">
             <a:avLst/>
@@ -8519,6 +9108,7 @@
               </a:defRPr>
             </a:pPr>
             <a:r>
+              <a:rPr dirty="0"/>
               <a:t>👤 Participant 2 (21, Student, New Delhi • Streetwear, Cargos &amp; Oversized Tees)</a:t>
             </a:r>
           </a:p>
@@ -8533,7 +9123,7 @@
               <a:defRPr sz="1400"/>
             </a:pPr>
             <a:r>
-              <a:rPr b="1">
+              <a:rPr b="1" dirty="0">
                 <a:solidFill>
                   <a:srgbClr val="FF3F6C"/>
                 </a:solidFill>
@@ -8541,7 +9131,7 @@
               <a:t>Quote: </a:t>
             </a:r>
             <a:r>
-              <a:rPr i="1">
+              <a:rPr i="1" dirty="0">
                 <a:solidFill>
                   <a:srgbClr val="282C3F"/>
                 </a:solidFill>
@@ -8560,7 +9150,7 @@
               <a:defRPr sz="1400"/>
             </a:pPr>
             <a:r>
-              <a:rPr b="1">
+              <a:rPr b="1" dirty="0">
                 <a:solidFill>
                   <a:srgbClr val="03A685"/>
                 </a:solidFill>
@@ -8578,8 +9168,8 @@
         </p:nvSpPr>
         <p:spPr>
           <a:xfrm>
-            <a:off x="8019288" y="1965960"/>
-            <a:ext cx="3566160" cy="2267712"/>
+            <a:off x="8155384" y="1960208"/>
+            <a:ext cx="3867741" cy="2381121"/>
           </a:xfrm>
           <a:prstGeom prst="roundRect">
             <a:avLst/>
@@ -8612,6 +9202,7 @@
           <a:lstStyle/>
           <a:p>
             <a:pPr algn="ctr"/>
+            <a:endParaRPr/>
           </a:p>
         </p:txBody>
       </p:sp>
@@ -8623,8 +9214,8 @@
         </p:nvSpPr>
         <p:spPr>
           <a:xfrm>
-            <a:off x="8092440" y="2020824"/>
-            <a:ext cx="3419856" cy="2157984"/>
+            <a:off x="8287109" y="2158848"/>
+            <a:ext cx="3736016" cy="2040110"/>
           </a:xfrm>
           <a:prstGeom prst="rect">
             <a:avLst/>
@@ -8648,7 +9239,16 @@
               </a:defRPr>
             </a:pPr>
             <a:r>
-              <a:t>👤 Participant 3 (27, Brand Marketing Mgr, Mumbai • Festive &amp; Occasion Wear)</a:t>
+              <a:rPr sz="1400" dirty="0"/>
+              <a:t>👤 Participant 3 (27, Brand Marketing </a:t>
+            </a:r>
+            <a:r>
+              <a:rPr sz="1400" dirty="0" err="1"/>
+              <a:t>Mgr</a:t>
+            </a:r>
+            <a:r>
+              <a:rPr sz="1400" dirty="0"/>
+              <a:t>, Mumbai • Festive &amp; Occasion Wear)</a:t>
             </a:r>
           </a:p>
           <a:p>
@@ -8662,7 +9262,7 @@
               <a:defRPr sz="1400"/>
             </a:pPr>
             <a:r>
-              <a:rPr b="1">
+              <a:rPr sz="1400" b="1" dirty="0">
                 <a:solidFill>
                   <a:srgbClr val="FF3F6C"/>
                 </a:solidFill>
@@ -8670,12 +9270,28 @@
               <a:t>Quote: </a:t>
             </a:r>
             <a:r>
-              <a:rPr i="1">
-                <a:solidFill>
-                  <a:srgbClr val="282C3F"/>
-                </a:solidFill>
-              </a:rPr>
-              <a:t>"I abandon wishlisted tops because I don't know what footwear or jacket will match from my existing wardrobe."</a:t>
+              <a:rPr sz="1400" i="1" dirty="0">
+                <a:solidFill>
+                  <a:srgbClr val="282C3F"/>
+                </a:solidFill>
+              </a:rPr>
+              <a:t>"I abandon </a:t>
+            </a:r>
+            <a:r>
+              <a:rPr sz="1400" i="1" dirty="0" err="1">
+                <a:solidFill>
+                  <a:srgbClr val="282C3F"/>
+                </a:solidFill>
+              </a:rPr>
+              <a:t>wishlisted</a:t>
+            </a:r>
+            <a:r>
+              <a:rPr sz="1400" i="1" dirty="0">
+                <a:solidFill>
+                  <a:srgbClr val="282C3F"/>
+                </a:solidFill>
+              </a:rPr>
+              <a:t> tops because I don't know what footwear or jacket will match from my existing wardrobe."</a:t>
             </a:r>
           </a:p>
           <a:p>
@@ -8689,7 +9305,7 @@
               <a:defRPr sz="1400"/>
             </a:pPr>
             <a:r>
-              <a:rPr b="1">
+              <a:rPr sz="1400" b="1" dirty="0">
                 <a:solidFill>
                   <a:srgbClr val="03A685"/>
                 </a:solidFill>
@@ -8707,8 +9323,8 @@
         </p:nvSpPr>
         <p:spPr>
           <a:xfrm>
-            <a:off x="594360" y="4343400"/>
-            <a:ext cx="3566160" cy="2267712"/>
+            <a:off x="66113" y="4442713"/>
+            <a:ext cx="4020942" cy="2337652"/>
           </a:xfrm>
           <a:prstGeom prst="roundRect">
             <a:avLst/>
@@ -8741,6 +9357,7 @@
           <a:lstStyle/>
           <a:p>
             <a:pPr algn="ctr"/>
+            <a:endParaRPr/>
           </a:p>
         </p:txBody>
       </p:sp>
@@ -8752,8 +9369,8 @@
         </p:nvSpPr>
         <p:spPr>
           <a:xfrm>
-            <a:off x="667512" y="4398264"/>
-            <a:ext cx="3419856" cy="2157984"/>
+            <a:off x="247290" y="4662810"/>
+            <a:ext cx="3628847" cy="2040110"/>
           </a:xfrm>
           <a:prstGeom prst="rect">
             <a:avLst/>
@@ -8777,6 +9394,7 @@
               </a:defRPr>
             </a:pPr>
             <a:r>
+              <a:rPr sz="1400" dirty="0"/>
               <a:t>👤 Participant 4 (25, UI/UX Designer, Pune • Minimalist Casuals &amp; Sneakers)</a:t>
             </a:r>
           </a:p>
@@ -8791,7 +9409,7 @@
               <a:defRPr sz="1400"/>
             </a:pPr>
             <a:r>
-              <a:rPr b="1">
+              <a:rPr sz="1400" b="1" dirty="0">
                 <a:solidFill>
                   <a:srgbClr val="FF3F6C"/>
                 </a:solidFill>
@@ -8799,7 +9417,7 @@
               <a:t>Quote: </a:t>
             </a:r>
             <a:r>
-              <a:rPr i="1">
+              <a:rPr sz="1400" i="1" dirty="0">
                 <a:solidFill>
                   <a:srgbClr val="282C3F"/>
                 </a:solidFill>
@@ -8818,7 +9436,7 @@
               <a:defRPr sz="1400"/>
             </a:pPr>
             <a:r>
-              <a:rPr b="1">
+              <a:rPr sz="1400" b="1" dirty="0">
                 <a:solidFill>
                   <a:srgbClr val="03A685"/>
                 </a:solidFill>
@@ -8836,8 +9454,8 @@
         </p:nvSpPr>
         <p:spPr>
           <a:xfrm>
-            <a:off x="4306824" y="4343400"/>
-            <a:ext cx="3566160" cy="2267712"/>
+            <a:off x="4169645" y="4469232"/>
+            <a:ext cx="3836888" cy="2311133"/>
           </a:xfrm>
           <a:prstGeom prst="roundRect">
             <a:avLst/>
@@ -8870,6 +9488,7 @@
           <a:lstStyle/>
           <a:p>
             <a:pPr algn="ctr"/>
+            <a:endParaRPr/>
           </a:p>
         </p:txBody>
       </p:sp>
@@ -8881,8 +9500,8 @@
         </p:nvSpPr>
         <p:spPr>
           <a:xfrm>
-            <a:off x="4379976" y="4398264"/>
-            <a:ext cx="3419856" cy="2157984"/>
+            <a:off x="4316316" y="4662810"/>
+            <a:ext cx="3690217" cy="1768048"/>
           </a:xfrm>
           <a:prstGeom prst="rect">
             <a:avLst/>
@@ -8906,6 +9525,7 @@
               </a:defRPr>
             </a:pPr>
             <a:r>
+              <a:rPr sz="1400" dirty="0"/>
               <a:t>👤 Participant 5 (22, Post-Grad Student, Hyderabad • Trending Gen-Z Fast Fashion)</a:t>
             </a:r>
           </a:p>
@@ -8920,7 +9540,7 @@
               <a:defRPr sz="1400"/>
             </a:pPr>
             <a:r>
-              <a:rPr b="1">
+              <a:rPr sz="1400" b="1" dirty="0">
                 <a:solidFill>
                   <a:srgbClr val="FF3F6C"/>
                 </a:solidFill>
@@ -8928,7 +9548,7 @@
               <a:t>Quote: </a:t>
             </a:r>
             <a:r>
-              <a:rPr i="1">
+              <a:rPr sz="1400" i="1" dirty="0">
                 <a:solidFill>
                   <a:srgbClr val="282C3F"/>
                 </a:solidFill>
@@ -8947,7 +9567,7 @@
               <a:defRPr sz="1400"/>
             </a:pPr>
             <a:r>
-              <a:rPr b="1">
+              <a:rPr sz="1400" b="1" dirty="0">
                 <a:solidFill>
                   <a:srgbClr val="03A685"/>
                 </a:solidFill>
@@ -8965,8 +9585,8 @@
         </p:nvSpPr>
         <p:spPr>
           <a:xfrm>
-            <a:off x="8019288" y="4343400"/>
-            <a:ext cx="3566160" cy="2267712"/>
+            <a:off x="8155384" y="4474349"/>
+            <a:ext cx="3867741" cy="2306016"/>
           </a:xfrm>
           <a:prstGeom prst="roundRect">
             <a:avLst/>
@@ -8999,6 +9619,7 @@
           <a:lstStyle/>
           <a:p>
             <a:pPr algn="ctr"/>
+            <a:endParaRPr/>
           </a:p>
         </p:txBody>
       </p:sp>
@@ -9010,8 +9631,8 @@
         </p:nvSpPr>
         <p:spPr>
           <a:xfrm>
-            <a:off x="8092440" y="4398264"/>
-            <a:ext cx="3419856" cy="2157984"/>
+            <a:off x="8269856" y="4662810"/>
+            <a:ext cx="3724514" cy="1798826"/>
           </a:xfrm>
           <a:prstGeom prst="rect">
             <a:avLst/>
@@ -9035,6 +9656,7 @@
               </a:defRPr>
             </a:pPr>
             <a:r>
+              <a:rPr sz="1400" dirty="0"/>
               <a:t>👤 Participant 6 (26, Corporate Lawyer, Gurgaon • Premium Workwear &amp; Handbags)</a:t>
             </a:r>
           </a:p>
@@ -9049,7 +9671,7 @@
               <a:defRPr sz="1400"/>
             </a:pPr>
             <a:r>
-              <a:rPr b="1">
+              <a:rPr sz="1400" b="1" dirty="0">
                 <a:solidFill>
                   <a:srgbClr val="FF3F6C"/>
                 </a:solidFill>
@@ -9057,12 +9679,28 @@
               <a:t>Quote: </a:t>
             </a:r>
             <a:r>
-              <a:rPr i="1">
-                <a:solidFill>
-                  <a:srgbClr val="282C3F"/>
-                </a:solidFill>
-              </a:rPr>
-              <a:t>"I have 4 blazers in my wishlist. I keep switching tabs trying to check if the fabric is linen or poly-blend."</a:t>
+              <a:rPr sz="1400" i="1" dirty="0">
+                <a:solidFill>
+                  <a:srgbClr val="282C3F"/>
+                </a:solidFill>
+              </a:rPr>
+              <a:t>"I have 4 blazers in my </a:t>
+            </a:r>
+            <a:r>
+              <a:rPr sz="1400" i="1" dirty="0" err="1">
+                <a:solidFill>
+                  <a:srgbClr val="282C3F"/>
+                </a:solidFill>
+              </a:rPr>
+              <a:t>wishlist</a:t>
+            </a:r>
+            <a:r>
+              <a:rPr sz="1400" i="1" dirty="0">
+                <a:solidFill>
+                  <a:srgbClr val="282C3F"/>
+                </a:solidFill>
+              </a:rPr>
+              <a:t>. I keep switching tabs trying to check if the fabric is linen or poly-blend."</a:t>
             </a:r>
           </a:p>
           <a:p>
@@ -9076,7 +9714,7 @@
               <a:defRPr sz="1400"/>
             </a:pPr>
             <a:r>
-              <a:rPr b="1">
+              <a:rPr sz="1400" b="1" dirty="0">
                 <a:solidFill>
                   <a:srgbClr val="03A685"/>
                 </a:solidFill>
@@ -9086,6 +9724,115 @@
           </a:p>
         </p:txBody>
       </p:sp>
+      <p:pic>
+        <p:nvPicPr>
+          <p:cNvPr id="20" name="Picture 19" descr="Myntra Logo in Vector Format | Party font, Velvet dress ...">
+            <a:extLst>
+              <a:ext uri="{FF2B5EF4-FFF2-40B4-BE49-F238E27FC236}">
+                <a16:creationId xmlns:a16="http://schemas.microsoft.com/office/drawing/2014/main" id="{6A59C073-3021-2E00-208F-06B9B1472D31}"/>
+              </a:ext>
+            </a:extLst>
+          </p:cNvPr>
+          <p:cNvPicPr>
+            <a:picLocks noChangeAspect="1"/>
+          </p:cNvPicPr>
+          <p:nvPr/>
+        </p:nvPicPr>
+        <p:blipFill>
+          <a:blip r:embed="rId2"/>
+          <a:srcRect t="35750" r="2278" b="33850"/>
+          <a:stretch>
+            <a:fillRect/>
+          </a:stretch>
+        </p:blipFill>
+        <p:spPr>
+          <a:xfrm>
+            <a:off x="10800272" y="138030"/>
+            <a:ext cx="1276688" cy="397152"/>
+          </a:xfrm>
+          <a:prstGeom prst="rect">
+            <a:avLst/>
+          </a:prstGeom>
+        </p:spPr>
+      </p:pic>
+      <p:pic>
+        <p:nvPicPr>
+          <p:cNvPr id="21" name="Picture 20" descr="File:Chain link icon slanted.png - Wikimedia Commons">
+            <a:hlinkClick r:id="rId3"/>
+            <a:extLst>
+              <a:ext uri="{FF2B5EF4-FFF2-40B4-BE49-F238E27FC236}">
+                <a16:creationId xmlns:a16="http://schemas.microsoft.com/office/drawing/2014/main" id="{13BB82F9-AA88-158B-3A7B-69B8FB8DB734}"/>
+              </a:ext>
+            </a:extLst>
+          </p:cNvPr>
+          <p:cNvPicPr>
+            <a:picLocks noChangeAspect="1"/>
+          </p:cNvPicPr>
+          <p:nvPr/>
+        </p:nvPicPr>
+        <p:blipFill>
+          <a:blip r:embed="rId4">
+            <a:duotone>
+              <a:schemeClr val="accent2">
+                <a:shade val="45000"/>
+                <a:satMod val="135000"/>
+              </a:schemeClr>
+              <a:prstClr val="white"/>
+            </a:duotone>
+          </a:blip>
+          <a:stretch>
+            <a:fillRect/>
+          </a:stretch>
+        </p:blipFill>
+        <p:spPr>
+          <a:xfrm rot="16200000" flipV="1">
+            <a:off x="10793699" y="1260983"/>
+            <a:ext cx="434070" cy="432083"/>
+          </a:xfrm>
+          <a:prstGeom prst="rect">
+            <a:avLst/>
+          </a:prstGeom>
+        </p:spPr>
+      </p:pic>
+      <p:pic>
+        <p:nvPicPr>
+          <p:cNvPr id="23" name="Picture 22" descr="File:Chain link icon slanted.png - Wikimedia Commons">
+            <a:hlinkClick r:id="rId5"/>
+            <a:extLst>
+              <a:ext uri="{FF2B5EF4-FFF2-40B4-BE49-F238E27FC236}">
+                <a16:creationId xmlns:a16="http://schemas.microsoft.com/office/drawing/2014/main" id="{562D2A6C-5EE6-06AB-FE46-C1AB9CCA7784}"/>
+              </a:ext>
+            </a:extLst>
+          </p:cNvPr>
+          <p:cNvPicPr>
+            <a:picLocks noChangeAspect="1"/>
+          </p:cNvPicPr>
+          <p:nvPr/>
+        </p:nvPicPr>
+        <p:blipFill>
+          <a:blip r:embed="rId4">
+            <a:duotone>
+              <a:schemeClr val="accent2">
+                <a:shade val="45000"/>
+                <a:satMod val="135000"/>
+              </a:schemeClr>
+              <a:prstClr val="white"/>
+            </a:duotone>
+          </a:blip>
+          <a:stretch>
+            <a:fillRect/>
+          </a:stretch>
+        </p:blipFill>
+        <p:spPr>
+          <a:xfrm rot="16200000" flipV="1">
+            <a:off x="11492439" y="1784424"/>
+            <a:ext cx="434070" cy="432083"/>
+          </a:xfrm>
+          <a:prstGeom prst="rect">
+            <a:avLst/>
+          </a:prstGeom>
+        </p:spPr>
+      </p:pic>
     </p:spTree>
   </p:cSld>
   <p:clrMapOvr>
@@ -9095,7 +9842,7 @@
 </file>
 
 <file path=ppt/slides/slide6.xml><?xml version="1.0" encoding="utf-8"?>
-<p:sld xmlns:a="http://schemas.openxmlformats.org/drawingml/2006/main" xmlns:p="http://schemas.openxmlformats.org/presentationml/2006/main" xmlns:r="http://schemas.openxmlformats.org/officeDocument/2006/relationships">
+<p:sld xmlns:a="http://schemas.openxmlformats.org/drawingml/2006/main" xmlns:r="http://schemas.openxmlformats.org/officeDocument/2006/relationships" xmlns:p="http://schemas.openxmlformats.org/presentationml/2006/main">
   <p:cSld>
     <p:spTree>
       <p:nvGrpSpPr>
@@ -9103,7 +9850,14 @@
         <p:cNvGrpSpPr/>
         <p:nvPr/>
       </p:nvGrpSpPr>
-      <p:grpSpPr/>
+      <p:grpSpPr>
+        <a:xfrm>
+          <a:off x="0" y="0"/>
+          <a:ext cx="0" cy="0"/>
+          <a:chOff x="0" y="0"/>
+          <a:chExt cx="0" cy="0"/>
+        </a:xfrm>
+      </p:grpSpPr>
       <p:sp>
         <p:nvSpPr>
           <p:cNvPr id="2" name="Rounded Rectangle 1"/>
@@ -9140,7 +9894,7 @@
           </a:fontRef>
         </p:style>
         <p:txBody>
-          <a:bodyPr rtlCol="0" anchor="ctr" wrap="square" tIns="18288" bIns="18288"/>
+          <a:bodyPr wrap="square" tIns="18288" bIns="18288" rtlCol="0" anchor="ctr"/>
           <a:lstStyle/>
           <a:p>
             <a:pPr algn="ctr">
@@ -9157,6 +9911,7 @@
               </a:defRPr>
             </a:pPr>
             <a:r>
+              <a:rPr sz="1600"/>
               <a:t>PROBLEM FRAMING (5 CORE PM QUESTIONS)</a:t>
             </a:r>
           </a:p>
@@ -9170,16 +9925,29 @@
         </p:nvSpPr>
         <p:spPr>
           <a:xfrm>
-            <a:off x="594360" y="594360"/>
-            <a:ext cx="9875520" cy="777240"/>
+            <a:off x="0" y="755388"/>
+            <a:ext cx="12192000" cy="543739"/>
           </a:xfrm>
           <a:prstGeom prst="rect">
             <a:avLst/>
           </a:prstGeom>
-          <a:noFill/>
-        </p:spPr>
-        <p:txBody>
-          <a:bodyPr wrap="square" lIns="0" rIns="0" tIns="0" bIns="0">
+        </p:spPr>
+        <p:style>
+          <a:lnRef idx="2">
+            <a:schemeClr val="accent6"/>
+          </a:lnRef>
+          <a:fillRef idx="1">
+            <a:schemeClr val="lt1"/>
+          </a:fillRef>
+          <a:effectRef idx="0">
+            <a:schemeClr val="accent6"/>
+          </a:effectRef>
+          <a:fontRef idx="minor">
+            <a:schemeClr val="dk1"/>
+          </a:fontRef>
+        </p:style>
+        <p:txBody>
+          <a:bodyPr wrap="square" lIns="0" tIns="0" rIns="0" bIns="0">
             <a:spAutoFit/>
           </a:bodyPr>
           <a:lstStyle/>
@@ -9195,8 +9963,18 @@
               </a:defRPr>
             </a:pPr>
             <a:r>
+              <a:rPr lang="en-US" sz="1600" dirty="0"/>
+              <a:t> </a:t>
+            </a:r>
+            <a:r>
+              <a:rPr sz="1600" dirty="0"/>
               <a:t>6. Problem Framing: Solving Wishlist Graveyard Inertia by Neutralizing Spec Ambiguity and Social Latency</a:t>
             </a:r>
+            <a:r>
+              <a:rPr lang="en-US" sz="1600" dirty="0"/>
+              <a:t> </a:t>
+            </a:r>
+            <a:endParaRPr sz="1600" dirty="0"/>
           </a:p>
           <a:p>
             <a:pPr>
@@ -9213,42 +9991,12 @@
               </a:defRPr>
             </a:pPr>
             <a:r>
+              <a:rPr lang="en-US" sz="1600" dirty="0"/>
+              <a:t>     </a:t>
+            </a:r>
+            <a:r>
+              <a:rPr sz="1600" dirty="0"/>
               <a:t>Rigorous 5-question problem definition grounding user pain points, business value, and strategic urgency.</a:t>
-            </a:r>
-          </a:p>
-        </p:txBody>
-      </p:sp>
-      <p:sp>
-        <p:nvSpPr>
-          <p:cNvPr id="4" name="TextBox 3"/>
-          <p:cNvSpPr txBox="1"/>
-          <p:nvPr/>
-        </p:nvSpPr>
-        <p:spPr>
-          <a:xfrm>
-            <a:off x="10424160" y="594360"/>
-            <a:ext cx="1188720" cy="457200"/>
-          </a:xfrm>
-          <a:prstGeom prst="rect">
-            <a:avLst/>
-          </a:prstGeom>
-          <a:noFill/>
-        </p:spPr>
-        <p:txBody>
-          <a:bodyPr wrap="none" lIns="0" rIns="0" tIns="0" bIns="0">
-            <a:spAutoFit/>
-          </a:bodyPr>
-          <a:lstStyle/>
-          <a:p>
-            <a:pPr algn="r">
-              <a:defRPr sz="2400" b="1">
-                <a:solidFill>
-                  <a:srgbClr val="FF3F6C"/>
-                </a:solidFill>
-              </a:defRPr>
-            </a:pPr>
-            <a:r>
-              <a:t>myntra</a:t>
             </a:r>
           </a:p>
         </p:txBody>
@@ -9261,7 +10009,7 @@
         </p:nvSpPr>
         <p:spPr>
           <a:xfrm>
-            <a:off x="594360" y="1417320"/>
+            <a:off x="594360" y="1532340"/>
             <a:ext cx="3566160" cy="2514600"/>
           </a:xfrm>
           <a:prstGeom prst="roundRect">
@@ -9295,6 +10043,7 @@
           <a:lstStyle/>
           <a:p>
             <a:pPr algn="ctr"/>
+            <a:endParaRPr/>
           </a:p>
         </p:txBody>
       </p:sp>
@@ -9306,8 +10055,8 @@
         </p:nvSpPr>
         <p:spPr>
           <a:xfrm>
-            <a:off x="667512" y="1472184"/>
-            <a:ext cx="3419856" cy="2404872"/>
+            <a:off x="702018" y="1834497"/>
+            <a:ext cx="3419856" cy="1805751"/>
           </a:xfrm>
           <a:prstGeom prst="rect">
             <a:avLst/>
@@ -9331,6 +10080,7 @@
               </a:defRPr>
             </a:pPr>
             <a:r>
+              <a:rPr sz="1400" dirty="0"/>
               <a:t>Q1: What is the true Problem?</a:t>
             </a:r>
           </a:p>
@@ -9346,7 +10096,16 @@
               </a:defRPr>
             </a:pPr>
             <a:r>
-              <a:t>Users shortlist high-intent items but abandon them in wishlist graveyards (66.7% stall rate [Myntra analytics est.]) because fashion apps lack side-by-side spec comparison tools (GSM, fit score) and fast social validation, creating choice paralysis and return anxiety.</a:t>
+              <a:rPr sz="1400" dirty="0"/>
+              <a:t>Users shortlist high-intent items but abandon them in </a:t>
+            </a:r>
+            <a:r>
+              <a:rPr sz="1400" dirty="0" err="1"/>
+              <a:t>wishlist</a:t>
+            </a:r>
+            <a:r>
+              <a:rPr sz="1400" dirty="0"/>
+              <a:t> graveyards (66.7% stall rate [Myntra analytics est.]) because fashion apps lack side-by-side spec comparison tools (GSM, fit score) and fast social validation, creating choice paralysis and return anxiety.</a:t>
             </a:r>
           </a:p>
         </p:txBody>
@@ -9359,7 +10118,7 @@
         </p:nvSpPr>
         <p:spPr>
           <a:xfrm>
-            <a:off x="4306824" y="1417320"/>
+            <a:off x="4306824" y="1532340"/>
             <a:ext cx="3566160" cy="2514600"/>
           </a:xfrm>
           <a:prstGeom prst="roundRect">
@@ -9393,6 +10152,7 @@
           <a:lstStyle/>
           <a:p>
             <a:pPr algn="ctr"/>
+            <a:endParaRPr/>
           </a:p>
         </p:txBody>
       </p:sp>
@@ -9404,8 +10164,8 @@
         </p:nvSpPr>
         <p:spPr>
           <a:xfrm>
-            <a:off x="4379976" y="1472184"/>
-            <a:ext cx="3419856" cy="2404872"/>
+            <a:off x="4414482" y="1834497"/>
+            <a:ext cx="3419856" cy="1775614"/>
           </a:xfrm>
           <a:prstGeom prst="rect">
             <a:avLst/>
@@ -9429,6 +10189,7 @@
               </a:defRPr>
             </a:pPr>
             <a:r>
+              <a:rPr sz="1400" dirty="0"/>
               <a:t>Q2: Who are the customers facing the problem?</a:t>
             </a:r>
           </a:p>
@@ -9444,7 +10205,16 @@
               </a:defRPr>
             </a:pPr>
             <a:r>
-              <a:t>'Active Shortlisters' — Gen-Z &amp; Millennial urban shoppers (aged 18–28) who use Myntra 3-4 times a month, accumulating 38+ saved items but hesitating at checkout threshold due to evaluation uncertainty.</a:t>
+              <a:rPr sz="1400" dirty="0"/>
+              <a:t>'Active </a:t>
+            </a:r>
+            <a:r>
+              <a:rPr sz="1400" dirty="0" err="1"/>
+              <a:t>Shortlisters</a:t>
+            </a:r>
+            <a:r>
+              <a:rPr sz="1400" dirty="0"/>
+              <a:t>' — Gen-Z &amp; Millennial urban shoppers (aged 18–28) who use Myntra 3-4 times a month, accumulating 38+ saved items but hesitating at checkout threshold due to evaluation uncertainty.</a:t>
             </a:r>
           </a:p>
         </p:txBody>
@@ -9457,7 +10227,7 @@
         </p:nvSpPr>
         <p:spPr>
           <a:xfrm>
-            <a:off x="8019288" y="1417320"/>
+            <a:off x="8019288" y="1532340"/>
             <a:ext cx="3566160" cy="2514600"/>
           </a:xfrm>
           <a:prstGeom prst="roundRect">
@@ -9491,6 +10261,7 @@
           <a:lstStyle/>
           <a:p>
             <a:pPr algn="ctr"/>
+            <a:endParaRPr/>
           </a:p>
         </p:txBody>
       </p:sp>
@@ -9502,8 +10273,8 @@
         </p:nvSpPr>
         <p:spPr>
           <a:xfrm>
-            <a:off x="8092440" y="1472184"/>
-            <a:ext cx="3419856" cy="2404872"/>
+            <a:off x="8126946" y="1834497"/>
+            <a:ext cx="3419856" cy="1805751"/>
           </a:xfrm>
           <a:prstGeom prst="rect">
             <a:avLst/>
@@ -9527,6 +10298,7 @@
               </a:defRPr>
             </a:pPr>
             <a:r>
+              <a:rPr sz="1400" dirty="0"/>
               <a:t>Q3: How do we know it is a real problem?</a:t>
             </a:r>
           </a:p>
@@ -9542,6 +10314,7 @@
               </a:defRPr>
             </a:pPr>
             <a:r>
+              <a:rPr sz="1400" dirty="0"/>
               <a:t>Primary research (N=25 survey cohort &amp; 8 of 9 interviewees) and 20,250 Review NLP corpus show that 92.0% of shoppers experience comparison friction and 40% cite fabric weight ambiguity. 88% of users rejected price as the primary blocker.</a:t>
             </a:r>
           </a:p>
@@ -9555,7 +10328,7 @@
         </p:nvSpPr>
         <p:spPr>
           <a:xfrm>
-            <a:off x="594360" y="4096512"/>
+            <a:off x="594360" y="4211532"/>
             <a:ext cx="5394960" cy="2514600"/>
           </a:xfrm>
           <a:prstGeom prst="roundRect">
@@ -9589,6 +10362,7 @@
           <a:lstStyle/>
           <a:p>
             <a:pPr algn="ctr"/>
+            <a:endParaRPr/>
           </a:p>
         </p:txBody>
       </p:sp>
@@ -9600,8 +10374,8 @@
         </p:nvSpPr>
         <p:spPr>
           <a:xfrm>
-            <a:off x="667512" y="4151376"/>
-            <a:ext cx="5248656" cy="2404872"/>
+            <a:off x="702018" y="4513689"/>
+            <a:ext cx="5248656" cy="1831399"/>
           </a:xfrm>
           <a:prstGeom prst="rect">
             <a:avLst/>
@@ -9625,6 +10399,7 @@
               </a:defRPr>
             </a:pPr>
             <a:r>
+              <a:rPr sz="1400" dirty="0"/>
               <a:t>Q4: What is the value generated by solving this problem?</a:t>
             </a:r>
           </a:p>
@@ -9639,7 +10414,7 @@
               <a:defRPr sz="1400"/>
             </a:pPr>
             <a:r>
-              <a:rPr b="1">
+              <a:rPr sz="1400" b="1" dirty="0">
                 <a:solidFill>
                   <a:srgbClr val="282C3F"/>
                 </a:solidFill>
@@ -9647,7 +10422,7 @@
               <a:t>Customer Value: </a:t>
             </a:r>
             <a:r>
-              <a:rPr>
+              <a:rPr sz="1400" dirty="0">
                 <a:solidFill>
                   <a:srgbClr val="282C3F"/>
                 </a:solidFill>
@@ -9663,7 +10438,7 @@
               <a:defRPr sz="1400"/>
             </a:pPr>
             <a:r>
-              <a:rPr b="1">
+              <a:rPr sz="1400" b="1" dirty="0">
                 <a:solidFill>
                   <a:srgbClr val="03A685"/>
                 </a:solidFill>
@@ -9671,12 +10446,28 @@
               <a:t>Business Value: </a:t>
             </a:r>
             <a:r>
-              <a:rPr>
-                <a:solidFill>
-                  <a:srgbClr val="282C3F"/>
-                </a:solidFill>
-              </a:rPr>
-              <a:t>For the Business: Expands 30-day conversion from 7.5% to 10.5% (+300bps), generating +₹18.81 Cr monthly gross profit at 38% margin and saving ₹73.5L/mo in reverse logistics.</a:t>
+              <a:rPr sz="1400" dirty="0">
+                <a:solidFill>
+                  <a:srgbClr val="282C3F"/>
+                </a:solidFill>
+              </a:rPr>
+              <a:t>For the Business: Expands 30-day conversion from 7.5% to 10.5% (+300bps), generating +₹18.81 Cr monthly gross profit at 38% margin and saving ₹73.5L/</a:t>
+            </a:r>
+            <a:r>
+              <a:rPr sz="1400" dirty="0" err="1">
+                <a:solidFill>
+                  <a:srgbClr val="282C3F"/>
+                </a:solidFill>
+              </a:rPr>
+              <a:t>mo</a:t>
+            </a:r>
+            <a:r>
+              <a:rPr sz="1400" dirty="0">
+                <a:solidFill>
+                  <a:srgbClr val="282C3F"/>
+                </a:solidFill>
+              </a:rPr>
+              <a:t> in reverse logistics.</a:t>
             </a:r>
           </a:p>
         </p:txBody>
@@ -9689,7 +10480,7 @@
         </p:nvSpPr>
         <p:spPr>
           <a:xfrm>
-            <a:off x="6199632" y="4096512"/>
+            <a:off x="6199632" y="4211532"/>
             <a:ext cx="5394960" cy="2514600"/>
           </a:xfrm>
           <a:prstGeom prst="roundRect">
@@ -9723,6 +10514,7 @@
           <a:lstStyle/>
           <a:p>
             <a:pPr algn="ctr"/>
+            <a:endParaRPr/>
           </a:p>
         </p:txBody>
       </p:sp>
@@ -9734,8 +10526,8 @@
         </p:nvSpPr>
         <p:spPr>
           <a:xfrm>
-            <a:off x="6272784" y="4151376"/>
-            <a:ext cx="5248656" cy="2404872"/>
+            <a:off x="6307290" y="4513689"/>
+            <a:ext cx="5248656" cy="1314591"/>
           </a:xfrm>
           <a:prstGeom prst="rect">
             <a:avLst/>
@@ -9759,6 +10551,7 @@
               </a:defRPr>
             </a:pPr>
             <a:r>
+              <a:rPr sz="1400" dirty="0"/>
               <a:t>Q5: Why should we solve this problem now?</a:t>
             </a:r>
           </a:p>
@@ -9774,11 +10567,51 @@
               </a:defRPr>
             </a:pPr>
             <a:r>
-              <a:t>Myntra captures massive top-funnel consideration (50M+ MAUs), but P&amp;L discount subsidies erode margins. Converting dormant wishlist intent is 4.2x more capital-efficient than acquiring new users before competitors build spec moats.</a:t>
-            </a:r>
-          </a:p>
-        </p:txBody>
-      </p:sp>
+              <a:rPr sz="1400" dirty="0"/>
+              <a:t>Myntra captures massive top-funnel consideration (50M+ MAUs), but P&amp;L discount subsidies erode margins. Converting dormant </a:t>
+            </a:r>
+            <a:r>
+              <a:rPr sz="1400" dirty="0" err="1"/>
+              <a:t>wishlist</a:t>
+            </a:r>
+            <a:r>
+              <a:rPr sz="1400" dirty="0"/>
+              <a:t> intent is 4.2x more capital-efficient than acquiring new users before competitors build spec moats.</a:t>
+            </a:r>
+          </a:p>
+        </p:txBody>
+      </p:sp>
+      <p:pic>
+        <p:nvPicPr>
+          <p:cNvPr id="16" name="Picture 15" descr="Myntra Logo in Vector Format | Party font, Velvet dress ...">
+            <a:extLst>
+              <a:ext uri="{FF2B5EF4-FFF2-40B4-BE49-F238E27FC236}">
+                <a16:creationId xmlns:a16="http://schemas.microsoft.com/office/drawing/2014/main" id="{24DEB9DF-8F80-03C5-2B55-08D21B4D96C2}"/>
+              </a:ext>
+            </a:extLst>
+          </p:cNvPr>
+          <p:cNvPicPr>
+            <a:picLocks noChangeAspect="1"/>
+          </p:cNvPicPr>
+          <p:nvPr/>
+        </p:nvPicPr>
+        <p:blipFill>
+          <a:blip r:embed="rId2"/>
+          <a:srcRect t="35750" r="2278" b="33850"/>
+          <a:stretch>
+            <a:fillRect/>
+          </a:stretch>
+        </p:blipFill>
+        <p:spPr>
+          <a:xfrm>
+            <a:off x="10800272" y="138030"/>
+            <a:ext cx="1276688" cy="397152"/>
+          </a:xfrm>
+          <a:prstGeom prst="rect">
+            <a:avLst/>
+          </a:prstGeom>
+        </p:spPr>
+      </p:pic>
     </p:spTree>
   </p:cSld>
   <p:clrMapOvr>
@@ -9788,7 +10621,7 @@
 </file>
 
 <file path=ppt/slides/slide7.xml><?xml version="1.0" encoding="utf-8"?>
-<p:sld xmlns:a="http://schemas.openxmlformats.org/drawingml/2006/main" xmlns:p="http://schemas.openxmlformats.org/presentationml/2006/main" xmlns:r="http://schemas.openxmlformats.org/officeDocument/2006/relationships">
+<p:sld xmlns:a="http://schemas.openxmlformats.org/drawingml/2006/main" xmlns:r="http://schemas.openxmlformats.org/officeDocument/2006/relationships" xmlns:p="http://schemas.openxmlformats.org/presentationml/2006/main">
   <p:cSld>
     <p:spTree>
       <p:nvGrpSpPr>
@@ -9796,7 +10629,14 @@
         <p:cNvGrpSpPr/>
         <p:nvPr/>
       </p:nvGrpSpPr>
-      <p:grpSpPr/>
+      <p:grpSpPr>
+        <a:xfrm>
+          <a:off x="0" y="0"/>
+          <a:ext cx="0" cy="0"/>
+          <a:chOff x="0" y="0"/>
+          <a:chExt cx="0" cy="0"/>
+        </a:xfrm>
+      </p:grpSpPr>
       <p:sp>
         <p:nvSpPr>
           <p:cNvPr id="2" name="Rounded Rectangle 1"/>
@@ -9833,7 +10673,7 @@
           </a:fontRef>
         </p:style>
         <p:txBody>
-          <a:bodyPr rtlCol="0" anchor="ctr" wrap="square" tIns="18288" bIns="18288"/>
+          <a:bodyPr wrap="square" tIns="18288" bIns="18288" rtlCol="0" anchor="ctr"/>
           <a:lstStyle/>
           <a:p>
             <a:pPr algn="ctr">
@@ -9850,6 +10690,7 @@
               </a:defRPr>
             </a:pPr>
             <a:r>
+              <a:rPr sz="1600"/>
               <a:t>IDEATION, PRINCIPLES &amp; QUANTITATIVE RICE TABLE</a:t>
             </a:r>
           </a:p>
@@ -9863,16 +10704,29 @@
         </p:nvSpPr>
         <p:spPr>
           <a:xfrm>
-            <a:off x="594360" y="594360"/>
-            <a:ext cx="9875520" cy="777240"/>
+            <a:off x="0" y="893412"/>
+            <a:ext cx="12192000" cy="543739"/>
           </a:xfrm>
           <a:prstGeom prst="rect">
             <a:avLst/>
           </a:prstGeom>
-          <a:noFill/>
-        </p:spPr>
-        <p:txBody>
-          <a:bodyPr wrap="square" lIns="0" rIns="0" tIns="0" bIns="0">
+        </p:spPr>
+        <p:style>
+          <a:lnRef idx="2">
+            <a:schemeClr val="accent6"/>
+          </a:lnRef>
+          <a:fillRef idx="1">
+            <a:schemeClr val="lt1"/>
+          </a:fillRef>
+          <a:effectRef idx="0">
+            <a:schemeClr val="accent6"/>
+          </a:effectRef>
+          <a:fontRef idx="minor">
+            <a:schemeClr val="dk1"/>
+          </a:fontRef>
+        </p:style>
+        <p:txBody>
+          <a:bodyPr wrap="square" lIns="0" tIns="0" rIns="0" bIns="0">
             <a:spAutoFit/>
           </a:bodyPr>
           <a:lstStyle/>
@@ -9888,8 +10742,18 @@
               </a:defRPr>
             </a:pPr>
             <a:r>
+              <a:rPr lang="en-US" sz="1600" dirty="0"/>
+              <a:t> </a:t>
+            </a:r>
+            <a:r>
+              <a:rPr sz="1600" dirty="0"/>
               <a:t>7. Ideation Framework: Solving Root-Cause Comparison Friction via Spec Matrix, AI Styling, and WhatsApp Voting</a:t>
             </a:r>
+            <a:r>
+              <a:rPr lang="en-US" sz="1600" dirty="0"/>
+              <a:t>  </a:t>
+            </a:r>
+            <a:endParaRPr sz="1600" dirty="0"/>
           </a:p>
           <a:p>
             <a:pPr>
@@ -9906,42 +10770,12 @@
               </a:defRPr>
             </a:pPr>
             <a:r>
+              <a:rPr lang="en-US" sz="1600" dirty="0"/>
+              <a:t>      </a:t>
+            </a:r>
+            <a:r>
+              <a:rPr sz="1600" dirty="0"/>
               <a:t>Evaluating solution hypotheses against core principles using the quantitative RICE scoring framework.</a:t>
-            </a:r>
-          </a:p>
-        </p:txBody>
-      </p:sp>
-      <p:sp>
-        <p:nvSpPr>
-          <p:cNvPr id="4" name="TextBox 3"/>
-          <p:cNvSpPr txBox="1"/>
-          <p:nvPr/>
-        </p:nvSpPr>
-        <p:spPr>
-          <a:xfrm>
-            <a:off x="10424160" y="594360"/>
-            <a:ext cx="1188720" cy="457200"/>
-          </a:xfrm>
-          <a:prstGeom prst="rect">
-            <a:avLst/>
-          </a:prstGeom>
-          <a:noFill/>
-        </p:spPr>
-        <p:txBody>
-          <a:bodyPr wrap="none" lIns="0" rIns="0" tIns="0" bIns="0">
-            <a:spAutoFit/>
-          </a:bodyPr>
-          <a:lstStyle/>
-          <a:p>
-            <a:pPr algn="r">
-              <a:defRPr sz="2400" b="1">
-                <a:solidFill>
-                  <a:srgbClr val="FF3F6C"/>
-                </a:solidFill>
-              </a:defRPr>
-            </a:pPr>
-            <a:r>
-              <a:t>myntra</a:t>
             </a:r>
           </a:p>
         </p:txBody>
@@ -9954,8 +10788,8 @@
         </p:nvSpPr>
         <p:spPr>
           <a:xfrm>
-            <a:off x="594360" y="1417320"/>
-            <a:ext cx="11002975" cy="1280160"/>
+            <a:off x="625127" y="1811547"/>
+            <a:ext cx="11002975" cy="1461033"/>
           </a:xfrm>
           <a:prstGeom prst="roundRect">
             <a:avLst/>
@@ -9988,6 +10822,7 @@
           <a:lstStyle/>
           <a:p>
             <a:pPr algn="ctr"/>
+            <a:endParaRPr/>
           </a:p>
         </p:txBody>
       </p:sp>
@@ -9999,7 +10834,7 @@
         </p:nvSpPr>
         <p:spPr>
           <a:xfrm>
-            <a:off x="704088" y="1472184"/>
+            <a:off x="727092" y="1938015"/>
             <a:ext cx="10783519" cy="1170432"/>
           </a:xfrm>
           <a:prstGeom prst="rect">
@@ -10024,7 +10859,12 @@
               </a:defRPr>
             </a:pPr>
             <a:r>
-              <a:t>✨ 3 CORE PRODUCT DESIGN PRINCIPLES</a:t>
+              <a:rPr sz="1400" dirty="0"/>
+              <a:t>✨ </a:t>
+            </a:r>
+            <a:r>
+              <a:rPr sz="1400" u="sng" dirty="0"/>
+              <a:t>3 CORE PRODUCT DESIGN PRINCIPLES</a:t>
             </a:r>
           </a:p>
           <a:p>
@@ -10041,7 +10881,7 @@
               <a:defRPr sz="1400"/>
             </a:pPr>
             <a:r>
-              <a:rPr b="1">
+              <a:rPr sz="1400" b="1" dirty="0">
                 <a:solidFill>
                   <a:srgbClr val="FF3F6C"/>
                 </a:solidFill>
@@ -10049,7 +10889,7 @@
               <a:t>★ 1. Spec Clarity Principle: </a:t>
             </a:r>
             <a:r>
-              <a:rPr>
+              <a:rPr sz="1400" dirty="0">
                 <a:solidFill>
                   <a:srgbClr val="282C3F"/>
                 </a:solidFill>
@@ -10071,7 +10911,7 @@
               <a:defRPr sz="1400"/>
             </a:pPr>
             <a:r>
-              <a:rPr b="1">
+              <a:rPr sz="1400" b="1" dirty="0">
                 <a:solidFill>
                   <a:srgbClr val="FF3F6C"/>
                 </a:solidFill>
@@ -10079,7 +10919,7 @@
               <a:t>★ 2. Zero-Discount Margin Principle: </a:t>
             </a:r>
             <a:r>
-              <a:rPr>
+              <a:rPr sz="1400" dirty="0">
                 <a:solidFill>
                   <a:srgbClr val="282C3F"/>
                 </a:solidFill>
@@ -10101,7 +10941,7 @@
               <a:defRPr sz="1400"/>
             </a:pPr>
             <a:r>
-              <a:rPr b="1">
+              <a:rPr sz="1400" b="1" dirty="0">
                 <a:solidFill>
                   <a:srgbClr val="FF3F6C"/>
                 </a:solidFill>
@@ -10109,7 +10949,7 @@
               <a:t>★ 3. Social Speed Principle: </a:t>
             </a:r>
             <a:r>
-              <a:rPr>
+              <a:rPr sz="1400" dirty="0">
                 <a:solidFill>
                   <a:srgbClr val="282C3F"/>
                 </a:solidFill>
@@ -10127,8 +10967,8 @@
         </p:nvSpPr>
         <p:spPr>
           <a:xfrm>
-            <a:off x="594360" y="2825496"/>
-            <a:ext cx="11002975" cy="3785616"/>
+            <a:off x="691437" y="3452355"/>
+            <a:ext cx="10905897" cy="2587155"/>
           </a:xfrm>
           <a:prstGeom prst="roundRect">
             <a:avLst/>
@@ -10161,6 +11001,7 @@
           <a:lstStyle/>
           <a:p>
             <a:pPr algn="ctr"/>
+            <a:endParaRPr/>
           </a:p>
         </p:txBody>
       </p:sp>
@@ -10172,8 +11013,8 @@
         </p:nvSpPr>
         <p:spPr>
           <a:xfrm>
-            <a:off x="704088" y="2898648"/>
-            <a:ext cx="10783519" cy="3639312"/>
+            <a:off x="787873" y="3721041"/>
+            <a:ext cx="10688377" cy="2000356"/>
           </a:xfrm>
           <a:prstGeom prst="rect">
             <a:avLst/>
@@ -10197,7 +11038,12 @@
               </a:defRPr>
             </a:pPr>
             <a:r>
-              <a:t>📊 QUANTITATIVE RICE PRIORITIZATION MATRIX &amp; ROADMAP</a:t>
+              <a:rPr sz="1400" dirty="0"/>
+              <a:t>📊 </a:t>
+            </a:r>
+            <a:r>
+              <a:rPr sz="1400" u="sng" dirty="0"/>
+              <a:t>QUANTITATIVE RICE PRIORITIZATION MATRIX &amp; ROADMAP</a:t>
             </a:r>
           </a:p>
           <a:p>
@@ -10214,7 +11060,7 @@
               <a:defRPr sz="1400"/>
             </a:pPr>
             <a:r>
-              <a:rPr b="1">
+              <a:rPr sz="1400" b="1" dirty="0">
                 <a:solidFill>
                   <a:srgbClr val="282C3F"/>
                 </a:solidFill>
@@ -10222,7 +11068,7 @@
               <a:t>S1: Static Discount Push Alerts: </a:t>
             </a:r>
             <a:r>
-              <a:rPr>
+              <a:rPr sz="1400" dirty="0">
                 <a:solidFill>
                   <a:srgbClr val="282C3F"/>
                 </a:solidFill>
@@ -10230,7 +11076,7 @@
               <a:t>Send 10% coupon push notifications on saved items — </a:t>
             </a:r>
             <a:r>
-              <a:rPr>
+              <a:rPr sz="1400" dirty="0">
                 <a:solidFill>
                   <a:srgbClr val="535766"/>
                 </a:solidFill>
@@ -10238,7 +11084,7 @@
               <a:t>Reach: 10/10 | Impact: 1/5 | Conf: 80% | Effort: 1/5 → </a:t>
             </a:r>
             <a:r>
-              <a:rPr b="1">
+              <a:rPr sz="1400" b="1" dirty="0">
                 <a:solidFill>
                   <a:srgbClr val="FF3F6C"/>
                 </a:solidFill>
@@ -10246,7 +11092,7 @@
               <a:t>Score: 8.0 </a:t>
             </a:r>
             <a:r>
-              <a:rPr b="1">
+              <a:rPr sz="1400" b="1" dirty="0">
                 <a:solidFill>
                   <a:srgbClr val="535766"/>
                 </a:solidFill>
@@ -10268,7 +11114,7 @@
               <a:defRPr sz="1400"/>
             </a:pPr>
             <a:r>
-              <a:rPr b="1">
+              <a:rPr sz="1400" b="1" dirty="0">
                 <a:solidFill>
                   <a:srgbClr val="282C3F"/>
                 </a:solidFill>
@@ -10276,15 +11122,31 @@
               <a:t>S2: Post-Wishlist Flash Popup: </a:t>
             </a:r>
             <a:r>
-              <a:rPr>
-                <a:solidFill>
-                  <a:srgbClr val="282C3F"/>
-                </a:solidFill>
-              </a:rPr>
-              <a:t>Show limited-time urgency popups on wishlist exit — </a:t>
-            </a:r>
-            <a:r>
-              <a:rPr>
+              <a:rPr sz="1400" dirty="0">
+                <a:solidFill>
+                  <a:srgbClr val="282C3F"/>
+                </a:solidFill>
+              </a:rPr>
+              <a:t>Show limited-time urgency popups on </a:t>
+            </a:r>
+            <a:r>
+              <a:rPr sz="1400" dirty="0" err="1">
+                <a:solidFill>
+                  <a:srgbClr val="282C3F"/>
+                </a:solidFill>
+              </a:rPr>
+              <a:t>wishlist</a:t>
+            </a:r>
+            <a:r>
+              <a:rPr sz="1400" dirty="0">
+                <a:solidFill>
+                  <a:srgbClr val="282C3F"/>
+                </a:solidFill>
+              </a:rPr>
+              <a:t> exit — </a:t>
+            </a:r>
+            <a:r>
+              <a:rPr sz="1400" dirty="0">
                 <a:solidFill>
                   <a:srgbClr val="535766"/>
                 </a:solidFill>
@@ -10292,7 +11154,7 @@
               <a:t>Reach: 10/10 | Impact: 2/5 | Conf: 60% | Effort: 2/5 → </a:t>
             </a:r>
             <a:r>
-              <a:rPr b="1">
+              <a:rPr sz="1400" b="1" dirty="0">
                 <a:solidFill>
                   <a:srgbClr val="FF3F6C"/>
                 </a:solidFill>
@@ -10300,7 +11162,7 @@
               <a:t>Score: 6.0 </a:t>
             </a:r>
             <a:r>
-              <a:rPr b="1">
+              <a:rPr sz="1400" b="1" dirty="0">
                 <a:solidFill>
                   <a:srgbClr val="535766"/>
                 </a:solidFill>
@@ -10322,7 +11184,7 @@
               <a:defRPr sz="1400"/>
             </a:pPr>
             <a:r>
-              <a:rPr b="1">
+              <a:rPr sz="1400" b="1" dirty="0">
                 <a:solidFill>
                   <a:srgbClr val="FF3F6C"/>
                 </a:solidFill>
@@ -10330,7 +11192,7 @@
               <a:t>S3: Wishlist Studio Suite (MVP): </a:t>
             </a:r>
             <a:r>
-              <a:rPr>
+              <a:rPr sz="1400" dirty="0">
                 <a:solidFill>
                   <a:srgbClr val="282C3F"/>
                 </a:solidFill>
@@ -10338,7 +11200,7 @@
               <a:t>Side-by-Side Spec Matrix + AI Look Builder + WhatsApp Poll — </a:t>
             </a:r>
             <a:r>
-              <a:rPr>
+              <a:rPr sz="1400" dirty="0">
                 <a:solidFill>
                   <a:srgbClr val="535766"/>
                 </a:solidFill>
@@ -10346,7 +11208,7 @@
               <a:t>Reach: 10/10 | Impact: 4/5 | Conf: 80% | Effort: 3/5 → </a:t>
             </a:r>
             <a:r>
-              <a:rPr b="1">
+              <a:rPr sz="1400" b="1" dirty="0">
                 <a:solidFill>
                   <a:srgbClr val="FF3F6C"/>
                 </a:solidFill>
@@ -10354,7 +11216,7 @@
               <a:t>Score: 10.6 </a:t>
             </a:r>
             <a:r>
-              <a:rPr b="1">
+              <a:rPr sz="1400" b="1" dirty="0">
                 <a:solidFill>
                   <a:srgbClr val="03A685"/>
                 </a:solidFill>
@@ -10364,6 +11226,37 @@
           </a:p>
         </p:txBody>
       </p:sp>
+      <p:pic>
+        <p:nvPicPr>
+          <p:cNvPr id="10" name="Picture 9" descr="Myntra Logo in Vector Format | Party font, Velvet dress ...">
+            <a:extLst>
+              <a:ext uri="{FF2B5EF4-FFF2-40B4-BE49-F238E27FC236}">
+                <a16:creationId xmlns:a16="http://schemas.microsoft.com/office/drawing/2014/main" id="{D920AE58-29D6-11F4-7424-28935A63CFAE}"/>
+              </a:ext>
+            </a:extLst>
+          </p:cNvPr>
+          <p:cNvPicPr>
+            <a:picLocks noChangeAspect="1"/>
+          </p:cNvPicPr>
+          <p:nvPr/>
+        </p:nvPicPr>
+        <p:blipFill>
+          <a:blip r:embed="rId2"/>
+          <a:srcRect t="35750" r="2278" b="33850"/>
+          <a:stretch>
+            <a:fillRect/>
+          </a:stretch>
+        </p:blipFill>
+        <p:spPr>
+          <a:xfrm>
+            <a:off x="10800272" y="138030"/>
+            <a:ext cx="1276688" cy="397152"/>
+          </a:xfrm>
+          <a:prstGeom prst="rect">
+            <a:avLst/>
+          </a:prstGeom>
+        </p:spPr>
+      </p:pic>
     </p:spTree>
   </p:cSld>
   <p:clrMapOvr>
@@ -10373,7 +11266,7 @@
 </file>
 
 <file path=ppt/slides/slide8.xml><?xml version="1.0" encoding="utf-8"?>
-<p:sld xmlns:a="http://schemas.openxmlformats.org/drawingml/2006/main" xmlns:p="http://schemas.openxmlformats.org/presentationml/2006/main" xmlns:r="http://schemas.openxmlformats.org/officeDocument/2006/relationships">
+<p:sld xmlns:a="http://schemas.openxmlformats.org/drawingml/2006/main" xmlns:r="http://schemas.openxmlformats.org/officeDocument/2006/relationships" xmlns:p="http://schemas.openxmlformats.org/presentationml/2006/main">
   <p:cSld>
     <p:spTree>
       <p:nvGrpSpPr>
@@ -10381,7 +11274,14 @@
         <p:cNvGrpSpPr/>
         <p:nvPr/>
       </p:nvGrpSpPr>
-      <p:grpSpPr/>
+      <p:grpSpPr>
+        <a:xfrm>
+          <a:off x="0" y="0"/>
+          <a:ext cx="0" cy="0"/>
+          <a:chOff x="0" y="0"/>
+          <a:chExt cx="0" cy="0"/>
+        </a:xfrm>
+      </p:grpSpPr>
       <p:sp>
         <p:nvSpPr>
           <p:cNvPr id="2" name="Rounded Rectangle 1"/>
@@ -10418,7 +11318,7 @@
           </a:fontRef>
         </p:style>
         <p:txBody>
-          <a:bodyPr rtlCol="0" anchor="ctr" wrap="square" tIns="18288" bIns="18288"/>
+          <a:bodyPr wrap="square" tIns="18288" bIns="18288" rtlCol="0" anchor="ctr"/>
           <a:lstStyle/>
           <a:p>
             <a:pPr algn="ctr">
@@ -10435,6 +11335,7 @@
               </a:defRPr>
             </a:pPr>
             <a:r>
+              <a:rPr sz="1600"/>
               <a:t>MVP SHOWCASE &amp; TECHNICAL ARCHITECTURE PIPELINE</a:t>
             </a:r>
           </a:p>
@@ -10448,16 +11349,29 @@
         </p:nvSpPr>
         <p:spPr>
           <a:xfrm>
-            <a:off x="594360" y="594360"/>
-            <a:ext cx="9875520" cy="777240"/>
+            <a:off x="0" y="772641"/>
+            <a:ext cx="12192000" cy="543739"/>
           </a:xfrm>
           <a:prstGeom prst="rect">
             <a:avLst/>
           </a:prstGeom>
-          <a:noFill/>
-        </p:spPr>
-        <p:txBody>
-          <a:bodyPr wrap="square" lIns="0" rIns="0" tIns="0" bIns="0">
+        </p:spPr>
+        <p:style>
+          <a:lnRef idx="2">
+            <a:schemeClr val="accent6"/>
+          </a:lnRef>
+          <a:fillRef idx="1">
+            <a:schemeClr val="lt1"/>
+          </a:fillRef>
+          <a:effectRef idx="0">
+            <a:schemeClr val="accent6"/>
+          </a:effectRef>
+          <a:fontRef idx="minor">
+            <a:schemeClr val="dk1"/>
+          </a:fontRef>
+        </p:style>
+        <p:txBody>
+          <a:bodyPr wrap="square" lIns="0" tIns="0" rIns="0" bIns="0">
             <a:spAutoFit/>
           </a:bodyPr>
           <a:lstStyle/>
@@ -10473,8 +11387,18 @@
               </a:defRPr>
             </a:pPr>
             <a:r>
+              <a:rPr lang="en-US" sz="1600" dirty="0"/>
+              <a:t> </a:t>
+            </a:r>
+            <a:r>
+              <a:rPr sz="1600" dirty="0"/>
               <a:t>8. The Wishlist Studio MVP: Technical Architecture Pipeline and Live Feature Showcase</a:t>
             </a:r>
+            <a:r>
+              <a:rPr lang="en-US" sz="1600" dirty="0"/>
+              <a:t>   </a:t>
+            </a:r>
+            <a:endParaRPr sz="1600" dirty="0"/>
           </a:p>
           <a:p>
             <a:pPr>
@@ -10491,42 +11415,12 @@
               </a:defRPr>
             </a:pPr>
             <a:r>
+              <a:rPr lang="en-US" sz="1600" dirty="0"/>
+              <a:t>      </a:t>
+            </a:r>
+            <a:r>
+              <a:rPr sz="1600" dirty="0"/>
               <a:t>Full-stack client architecture and 4-step ML inference pipeline validating sub-180ms interaction latency.</a:t>
-            </a:r>
-          </a:p>
-        </p:txBody>
-      </p:sp>
-      <p:sp>
-        <p:nvSpPr>
-          <p:cNvPr id="4" name="TextBox 3"/>
-          <p:cNvSpPr txBox="1"/>
-          <p:nvPr/>
-        </p:nvSpPr>
-        <p:spPr>
-          <a:xfrm>
-            <a:off x="10424160" y="594360"/>
-            <a:ext cx="1188720" cy="457200"/>
-          </a:xfrm>
-          <a:prstGeom prst="rect">
-            <a:avLst/>
-          </a:prstGeom>
-          <a:noFill/>
-        </p:spPr>
-        <p:txBody>
-          <a:bodyPr wrap="none" lIns="0" rIns="0" tIns="0" bIns="0">
-            <a:spAutoFit/>
-          </a:bodyPr>
-          <a:lstStyle/>
-          <a:p>
-            <a:pPr algn="r">
-              <a:defRPr sz="2400" b="1">
-                <a:solidFill>
-                  <a:srgbClr val="FF3F6C"/>
-                </a:solidFill>
-              </a:defRPr>
-            </a:pPr>
-            <a:r>
-              <a:t>myntra</a:t>
             </a:r>
           </a:p>
         </p:txBody>
@@ -10539,8 +11433,8 @@
         </p:nvSpPr>
         <p:spPr>
           <a:xfrm>
-            <a:off x="594360" y="1417320"/>
-            <a:ext cx="11002975" cy="1463040"/>
+            <a:off x="247291" y="1469079"/>
+            <a:ext cx="11697417" cy="1463040"/>
           </a:xfrm>
           <a:prstGeom prst="roundRect">
             <a:avLst/>
@@ -10573,6 +11467,7 @@
           <a:lstStyle/>
           <a:p>
             <a:pPr algn="ctr"/>
+            <a:endParaRPr/>
           </a:p>
         </p:txBody>
       </p:sp>
@@ -10584,8 +11479,8 @@
         </p:nvSpPr>
         <p:spPr>
           <a:xfrm>
-            <a:off x="704088" y="1472184"/>
-            <a:ext cx="10783519" cy="1353312"/>
+            <a:off x="363941" y="1523943"/>
+            <a:ext cx="11464111" cy="1353312"/>
           </a:xfrm>
           <a:prstGeom prst="rect">
             <a:avLst/>
@@ -10609,7 +11504,12 @@
               </a:defRPr>
             </a:pPr>
             <a:r>
-              <a:t>🏗️ TECHNICAL ARCHITECTURE PIPELINE (LATENCY &lt;180ms)</a:t>
+              <a:rPr dirty="0"/>
+              <a:t>🏗️ </a:t>
+            </a:r>
+            <a:r>
+              <a:rPr u="sng" dirty="0"/>
+              <a:t>TECHNICAL ARCHITECTURE PIPELINE (LATENCY &lt;180ms)</a:t>
             </a:r>
           </a:p>
           <a:p>
@@ -10620,7 +11520,7 @@
               <a:defRPr sz="1400"/>
             </a:pPr>
             <a:r>
-              <a:rPr b="1">
+              <a:rPr b="1" dirty="0">
                 <a:solidFill>
                   <a:srgbClr val="FF3F6C"/>
                 </a:solidFill>
@@ -10628,15 +11528,31 @@
               <a:t>[1. Event Trigger]: </a:t>
             </a:r>
             <a:r>
-              <a:rPr>
-                <a:solidFill>
-                  <a:srgbClr val="282C3F"/>
-                </a:solidFill>
-              </a:rPr>
-              <a:t>Frontend fires payload on wishlist view containing saved product IDs, timestamp, and category. → </a:t>
-            </a:r>
-            <a:r>
-              <a:rPr b="1">
+              <a:rPr dirty="0">
+                <a:solidFill>
+                  <a:srgbClr val="282C3F"/>
+                </a:solidFill>
+              </a:rPr>
+              <a:t>Frontend fires payload on </a:t>
+            </a:r>
+            <a:r>
+              <a:rPr dirty="0" err="1">
+                <a:solidFill>
+                  <a:srgbClr val="282C3F"/>
+                </a:solidFill>
+              </a:rPr>
+              <a:t>wishlist</a:t>
+            </a:r>
+            <a:r>
+              <a:rPr dirty="0">
+                <a:solidFill>
+                  <a:srgbClr val="282C3F"/>
+                </a:solidFill>
+              </a:rPr>
+              <a:t> view containing saved product IDs, timestamp, and category. → </a:t>
+            </a:r>
+            <a:r>
+              <a:rPr b="1" dirty="0">
                 <a:solidFill>
                   <a:srgbClr val="FF3F6C"/>
                 </a:solidFill>
@@ -10644,7 +11560,7 @@
               <a:t>[2. Inference Engine]: </a:t>
             </a:r>
             <a:r>
-              <a:rPr>
+              <a:rPr dirty="0">
                 <a:solidFill>
                   <a:srgbClr val="282C3F"/>
                 </a:solidFill>
@@ -10652,7 +11568,7 @@
               <a:t>Review NLP normalizes fabric GSM weight, fit consensus %, and return friction score from 20k reviews. → </a:t>
             </a:r>
             <a:r>
-              <a:rPr b="1">
+              <a:rPr b="1" dirty="0">
                 <a:solidFill>
                   <a:srgbClr val="FF3F6C"/>
                 </a:solidFill>
@@ -10660,7 +11576,7 @@
               <a:t>[3. Constrained Catalog]: </a:t>
             </a:r>
             <a:r>
-              <a:rPr>
+              <a:rPr dirty="0">
                 <a:solidFill>
                   <a:srgbClr val="282C3F"/>
                 </a:solidFill>
@@ -10668,7 +11584,7 @@
               <a:t>Maps item to pre-approved, high-margin styling catalog for complete 3-piece look builder. → </a:t>
             </a:r>
             <a:r>
-              <a:rPr b="1">
+              <a:rPr b="1" dirty="0">
                 <a:solidFill>
                   <a:srgbClr val="FF3F6C"/>
                 </a:solidFill>
@@ -10676,7 +11592,7 @@
               <a:t>[4. Real-time UI Render]: </a:t>
             </a:r>
             <a:r>
-              <a:rPr>
+              <a:rPr dirty="0">
                 <a:solidFill>
                   <a:srgbClr val="282C3F"/>
                 </a:solidFill>
@@ -10694,8 +11610,8 @@
         </p:nvSpPr>
         <p:spPr>
           <a:xfrm>
-            <a:off x="594360" y="3008376"/>
-            <a:ext cx="3566160" cy="3602736"/>
+            <a:off x="674874" y="3048632"/>
+            <a:ext cx="3566160" cy="3766235"/>
           </a:xfrm>
           <a:prstGeom prst="roundRect">
             <a:avLst/>
@@ -10728,6 +11644,7 @@
           <a:lstStyle/>
           <a:p>
             <a:pPr algn="ctr"/>
+            <a:endParaRPr/>
           </a:p>
         </p:txBody>
       </p:sp>
@@ -10739,8 +11656,8 @@
         </p:nvSpPr>
         <p:spPr>
           <a:xfrm>
-            <a:off x="667512" y="3063240"/>
-            <a:ext cx="3419856" cy="3493008"/>
+            <a:off x="805536" y="3201264"/>
+            <a:ext cx="3419856" cy="1044388"/>
           </a:xfrm>
           <a:prstGeom prst="rect">
             <a:avLst/>
@@ -10764,7 +11681,12 @@
               </a:defRPr>
             </a:pPr>
             <a:r>
-              <a:t>📱 1. Side-by-Side Spec Matrix</a:t>
+              <a:rPr sz="1400" dirty="0"/>
+              <a:t>📱 1. </a:t>
+            </a:r>
+            <a:r>
+              <a:rPr sz="1400" u="sng" dirty="0"/>
+              <a:t>Side-by-Side Spec Matrix</a:t>
             </a:r>
           </a:p>
           <a:p>
@@ -10778,7 +11700,7 @@
               <a:defRPr sz="1400"/>
             </a:pPr>
             <a:r>
-              <a:rPr>
+              <a:rPr sz="1400" dirty="0">
                 <a:solidFill>
                   <a:srgbClr val="282C3F"/>
                 </a:solidFill>
@@ -10804,8 +11726,8 @@
         </p:blipFill>
         <p:spPr>
           <a:xfrm>
-            <a:off x="777240" y="4059936"/>
-            <a:ext cx="3200400" cy="2459736"/>
+            <a:off x="1575751" y="4243968"/>
+            <a:ext cx="1535511" cy="2459736"/>
           </a:xfrm>
           <a:prstGeom prst="rect">
             <a:avLst/>
@@ -10820,8 +11742,8 @@
         </p:nvSpPr>
         <p:spPr>
           <a:xfrm>
-            <a:off x="4306824" y="3008376"/>
-            <a:ext cx="3566160" cy="3602736"/>
+            <a:off x="4387338" y="3048633"/>
+            <a:ext cx="3566160" cy="3766234"/>
           </a:xfrm>
           <a:prstGeom prst="roundRect">
             <a:avLst/>
@@ -10854,6 +11776,7 @@
           <a:lstStyle/>
           <a:p>
             <a:pPr algn="ctr"/>
+            <a:endParaRPr/>
           </a:p>
         </p:txBody>
       </p:sp>
@@ -10865,8 +11788,8 @@
         </p:nvSpPr>
         <p:spPr>
           <a:xfrm>
-            <a:off x="4379976" y="3063240"/>
-            <a:ext cx="3419856" cy="3493008"/>
+            <a:off x="4518000" y="3201264"/>
+            <a:ext cx="3419856" cy="1044388"/>
           </a:xfrm>
           <a:prstGeom prst="rect">
             <a:avLst/>
@@ -10890,7 +11813,12 @@
               </a:defRPr>
             </a:pPr>
             <a:r>
-              <a:t>📱 2. AI Outfit Coordinator</a:t>
+              <a:rPr sz="1400" dirty="0"/>
+              <a:t>📱 2. </a:t>
+            </a:r>
+            <a:r>
+              <a:rPr sz="1400" u="sng" dirty="0"/>
+              <a:t>AI Outfit Coordinator</a:t>
             </a:r>
           </a:p>
           <a:p>
@@ -10904,7 +11832,7 @@
               <a:defRPr sz="1400"/>
             </a:pPr>
             <a:r>
-              <a:rPr>
+              <a:rPr sz="1400" dirty="0">
                 <a:solidFill>
                   <a:srgbClr val="282C3F"/>
                 </a:solidFill>
@@ -10930,8 +11858,8 @@
         </p:blipFill>
         <p:spPr>
           <a:xfrm>
-            <a:off x="4489704" y="4059936"/>
-            <a:ext cx="3200400" cy="2459736"/>
+            <a:off x="5542137" y="4232466"/>
+            <a:ext cx="1531534" cy="2459736"/>
           </a:xfrm>
           <a:prstGeom prst="rect">
             <a:avLst/>
@@ -10946,8 +11874,8 @@
         </p:nvSpPr>
         <p:spPr>
           <a:xfrm>
-            <a:off x="8019288" y="3008376"/>
-            <a:ext cx="3566160" cy="3602736"/>
+            <a:off x="8040298" y="3048633"/>
+            <a:ext cx="3625664" cy="3766234"/>
           </a:xfrm>
           <a:prstGeom prst="roundRect">
             <a:avLst/>
@@ -10980,6 +11908,7 @@
           <a:lstStyle/>
           <a:p>
             <a:pPr algn="ctr"/>
+            <a:endParaRPr/>
           </a:p>
         </p:txBody>
       </p:sp>
@@ -10991,8 +11920,8 @@
         </p:nvSpPr>
         <p:spPr>
           <a:xfrm>
-            <a:off x="8092440" y="3063240"/>
-            <a:ext cx="3419856" cy="3493008"/>
+            <a:off x="8230464" y="3201264"/>
+            <a:ext cx="3419856" cy="1044388"/>
           </a:xfrm>
           <a:prstGeom prst="rect">
             <a:avLst/>
@@ -11016,7 +11945,12 @@
               </a:defRPr>
             </a:pPr>
             <a:r>
-              <a:t>📱 3. 1-Tap WhatsApp Poll</a:t>
+              <a:rPr sz="1400" dirty="0"/>
+              <a:t>📱 3. </a:t>
+            </a:r>
+            <a:r>
+              <a:rPr sz="1400" u="sng" dirty="0"/>
+              <a:t>1-Tap WhatsApp Poll</a:t>
             </a:r>
           </a:p>
           <a:p>
@@ -11030,7 +11964,7 @@
               <a:defRPr sz="1400"/>
             </a:pPr>
             <a:r>
-              <a:rPr>
+              <a:rPr sz="1400" dirty="0">
                 <a:solidFill>
                   <a:srgbClr val="282C3F"/>
                 </a:solidFill>
@@ -11050,14 +11984,85 @@
         </p:nvPicPr>
         <p:blipFill>
           <a:blip r:embed="rId4"/>
+          <a:srcRect r="2659" b="31954"/>
           <a:stretch>
             <a:fillRect/>
           </a:stretch>
         </p:blipFill>
         <p:spPr>
           <a:xfrm>
-            <a:off x="8202168" y="4059936"/>
-            <a:ext cx="3200400" cy="2459736"/>
+            <a:off x="9035145" y="4226715"/>
+            <a:ext cx="1529339" cy="2459735"/>
+          </a:xfrm>
+          <a:prstGeom prst="rect">
+            <a:avLst/>
+          </a:prstGeom>
+        </p:spPr>
+      </p:pic>
+      <p:pic>
+        <p:nvPicPr>
+          <p:cNvPr id="17" name="Picture 16" descr="Myntra Logo in Vector Format | Party font, Velvet dress ...">
+            <a:extLst>
+              <a:ext uri="{FF2B5EF4-FFF2-40B4-BE49-F238E27FC236}">
+                <a16:creationId xmlns:a16="http://schemas.microsoft.com/office/drawing/2014/main" id="{621913FC-93B0-D448-BE76-366AC0FC168E}"/>
+              </a:ext>
+            </a:extLst>
+          </p:cNvPr>
+          <p:cNvPicPr>
+            <a:picLocks noChangeAspect="1"/>
+          </p:cNvPicPr>
+          <p:nvPr/>
+        </p:nvPicPr>
+        <p:blipFill>
+          <a:blip r:embed="rId5"/>
+          <a:srcRect t="35750" r="2278" b="33850"/>
+          <a:stretch>
+            <a:fillRect/>
+          </a:stretch>
+        </p:blipFill>
+        <p:spPr>
+          <a:xfrm>
+            <a:off x="10800272" y="138030"/>
+            <a:ext cx="1276688" cy="397152"/>
+          </a:xfrm>
+          <a:prstGeom prst="rect">
+            <a:avLst/>
+          </a:prstGeom>
+        </p:spPr>
+      </p:pic>
+      <p:pic>
+        <p:nvPicPr>
+          <p:cNvPr id="19" name="Picture 18" descr="File:Chain link icon slanted.png - Wikimedia Commons">
+            <a:hlinkClick r:id="rId6"/>
+            <a:extLst>
+              <a:ext uri="{FF2B5EF4-FFF2-40B4-BE49-F238E27FC236}">
+                <a16:creationId xmlns:a16="http://schemas.microsoft.com/office/drawing/2014/main" id="{8EECC407-9BB2-7FED-1505-DBA3A4F4A994}"/>
+              </a:ext>
+            </a:extLst>
+          </p:cNvPr>
+          <p:cNvPicPr>
+            <a:picLocks noChangeAspect="1"/>
+          </p:cNvPicPr>
+          <p:nvPr/>
+        </p:nvPicPr>
+        <p:blipFill>
+          <a:blip r:embed="rId7">
+            <a:duotone>
+              <a:schemeClr val="accent2">
+                <a:shade val="45000"/>
+                <a:satMod val="135000"/>
+              </a:schemeClr>
+              <a:prstClr val="white"/>
+            </a:duotone>
+          </a:blip>
+          <a:stretch>
+            <a:fillRect/>
+          </a:stretch>
+        </p:blipFill>
+        <p:spPr>
+          <a:xfrm rot="16200000" flipV="1">
+            <a:off x="11569959" y="1322504"/>
+            <a:ext cx="434070" cy="432083"/>
           </a:xfrm>
           <a:prstGeom prst="rect">
             <a:avLst/>
@@ -11073,7 +12078,7 @@
 </file>
 
 <file path=ppt/slides/slide9.xml><?xml version="1.0" encoding="utf-8"?>
-<p:sld xmlns:a="http://schemas.openxmlformats.org/drawingml/2006/main" xmlns:p="http://schemas.openxmlformats.org/presentationml/2006/main" xmlns:r="http://schemas.openxmlformats.org/officeDocument/2006/relationships">
+<p:sld xmlns:a="http://schemas.openxmlformats.org/drawingml/2006/main" xmlns:r="http://schemas.openxmlformats.org/officeDocument/2006/relationships" xmlns:p="http://schemas.openxmlformats.org/presentationml/2006/main">
   <p:cSld>
     <p:spTree>
       <p:nvGrpSpPr>
@@ -11081,7 +12086,14 @@
         <p:cNvGrpSpPr/>
         <p:nvPr/>
       </p:nvGrpSpPr>
-      <p:grpSpPr/>
+      <p:grpSpPr>
+        <a:xfrm>
+          <a:off x="0" y="0"/>
+          <a:ext cx="0" cy="0"/>
+          <a:chOff x="0" y="0"/>
+          <a:chExt cx="0" cy="0"/>
+        </a:xfrm>
+      </p:grpSpPr>
       <p:sp>
         <p:nvSpPr>
           <p:cNvPr id="2" name="Rounded Rectangle 1"/>
@@ -11118,7 +12130,7 @@
           </a:fontRef>
         </p:style>
         <p:txBody>
-          <a:bodyPr rtlCol="0" anchor="ctr" wrap="square" tIns="18288" bIns="18288"/>
+          <a:bodyPr wrap="square" tIns="18288" bIns="18288" rtlCol="0" anchor="ctr"/>
           <a:lstStyle/>
           <a:p>
             <a:pPr algn="ctr">
@@ -11135,6 +12147,7 @@
               </a:defRPr>
             </a:pPr>
             <a:r>
+              <a:rPr sz="1600" dirty="0"/>
               <a:t>SUCCESS METRICS, GUARDRAILS &amp; A/B EXPERIMENTATION</a:t>
             </a:r>
           </a:p>
@@ -11148,16 +12161,29 @@
         </p:nvSpPr>
         <p:spPr>
           <a:xfrm>
-            <a:off x="594360" y="594360"/>
-            <a:ext cx="9875520" cy="777240"/>
+            <a:off x="0" y="743886"/>
+            <a:ext cx="12192000" cy="543739"/>
           </a:xfrm>
           <a:prstGeom prst="rect">
             <a:avLst/>
           </a:prstGeom>
-          <a:noFill/>
-        </p:spPr>
-        <p:txBody>
-          <a:bodyPr wrap="square" lIns="0" rIns="0" tIns="0" bIns="0">
+        </p:spPr>
+        <p:style>
+          <a:lnRef idx="2">
+            <a:schemeClr val="accent6"/>
+          </a:lnRef>
+          <a:fillRef idx="1">
+            <a:schemeClr val="lt1"/>
+          </a:fillRef>
+          <a:effectRef idx="0">
+            <a:schemeClr val="accent6"/>
+          </a:effectRef>
+          <a:fontRef idx="minor">
+            <a:schemeClr val="dk1"/>
+          </a:fontRef>
+        </p:style>
+        <p:txBody>
+          <a:bodyPr wrap="square" lIns="0" tIns="0" rIns="0" bIns="0">
             <a:spAutoFit/>
           </a:bodyPr>
           <a:lstStyle/>
@@ -11173,6 +12199,11 @@
               </a:defRPr>
             </a:pPr>
             <a:r>
+              <a:rPr lang="en-US" sz="1600" dirty="0"/>
+              <a:t> </a:t>
+            </a:r>
+            <a:r>
+              <a:rPr sz="1600" dirty="0"/>
               <a:t>9. Success Metrics Hierarchy: 200,000-User RCT Validating +300bps Conversion and Return Guardrails</a:t>
             </a:r>
           </a:p>
@@ -11191,42 +12222,12 @@
               </a:defRPr>
             </a:pPr>
             <a:r>
+              <a:rPr lang="en-US" sz="1600" dirty="0"/>
+              <a:t>     </a:t>
+            </a:r>
+            <a:r>
+              <a:rPr sz="1600" dirty="0"/>
               <a:t>Comprehensive metric hierarchy with operational guardrails, Amplitude telemetry schema, and kill thresholds.</a:t>
-            </a:r>
-          </a:p>
-        </p:txBody>
-      </p:sp>
-      <p:sp>
-        <p:nvSpPr>
-          <p:cNvPr id="4" name="TextBox 3"/>
-          <p:cNvSpPr txBox="1"/>
-          <p:nvPr/>
-        </p:nvSpPr>
-        <p:spPr>
-          <a:xfrm>
-            <a:off x="10424160" y="594360"/>
-            <a:ext cx="1188720" cy="457200"/>
-          </a:xfrm>
-          <a:prstGeom prst="rect">
-            <a:avLst/>
-          </a:prstGeom>
-          <a:noFill/>
-        </p:spPr>
-        <p:txBody>
-          <a:bodyPr wrap="none" lIns="0" rIns="0" tIns="0" bIns="0">
-            <a:spAutoFit/>
-          </a:bodyPr>
-          <a:lstStyle/>
-          <a:p>
-            <a:pPr algn="r">
-              <a:defRPr sz="2400" b="1">
-                <a:solidFill>
-                  <a:srgbClr val="FF3F6C"/>
-                </a:solidFill>
-              </a:defRPr>
-            </a:pPr>
-            <a:r>
-              <a:t>myntra</a:t>
             </a:r>
           </a:p>
         </p:txBody>
@@ -11273,6 +12274,7 @@
           <a:lstStyle/>
           <a:p>
             <a:pPr algn="ctr"/>
+            <a:endParaRPr/>
           </a:p>
         </p:txBody>
       </p:sp>
@@ -11284,8 +12286,8 @@
         </p:nvSpPr>
         <p:spPr>
           <a:xfrm>
-            <a:off x="704088" y="1490472"/>
-            <a:ext cx="5998464" cy="5047488"/>
+            <a:off x="675333" y="1881540"/>
+            <a:ext cx="5998464" cy="3303277"/>
           </a:xfrm>
           <a:prstGeom prst="rect">
             <a:avLst/>
@@ -11309,11 +12311,16 @@
               </a:defRPr>
             </a:pPr>
             <a:r>
-              <a:t>🎯 SUCCESS METRICS HIERARCHY</a:t>
-            </a:r>
-          </a:p>
-          <a:p>
-            <a:pPr marL="177800" indent="0">
+              <a:rPr sz="1400" dirty="0"/>
+              <a:t>🎯 </a:t>
+            </a:r>
+            <a:r>
+              <a:rPr sz="1400" u="sng" dirty="0"/>
+              <a:t>SUCCESS METRICS HIERARCHY</a:t>
+            </a:r>
+          </a:p>
+          <a:p>
+            <a:pPr marL="463550" indent="-285750">
               <a:lnSpc>
                 <a:spcPct val="115000"/>
               </a:lnSpc>
@@ -11323,10 +12330,15 @@
               <a:spcAft>
                 <a:spcPts val="300"/>
               </a:spcAft>
+              <a:buClr>
+                <a:srgbClr val="FF3F6C"/>
+              </a:buClr>
+              <a:buFont typeface="Arial" panose="020B0604020202020204" pitchFamily="34" charset="0"/>
+              <a:buChar char="•"/>
               <a:defRPr sz="1400"/>
             </a:pPr>
             <a:r>
-              <a:rPr b="1">
+              <a:rPr sz="1400" b="1" dirty="0">
                 <a:solidFill>
                   <a:srgbClr val="FF3F6C"/>
                 </a:solidFill>
@@ -11334,7 +12346,7 @@
               <a:t>[North Star (Primary)] </a:t>
             </a:r>
             <a:r>
-              <a:rPr b="1">
+              <a:rPr sz="1400" b="1" dirty="0">
                 <a:solidFill>
                   <a:srgbClr val="282C3F"/>
                 </a:solidFill>
@@ -11342,7 +12354,7 @@
               <a:t>30-Day Wishlist-to-Purchase Conversion Rate: </a:t>
             </a:r>
             <a:r>
-              <a:rPr b="1">
+              <a:rPr sz="1400" b="1" dirty="0">
                 <a:solidFill>
                   <a:srgbClr val="03A685"/>
                 </a:solidFill>
@@ -11350,7 +12362,7 @@
               <a:t>Baseline: 7.5% → Target: 10.5% (+300bps) [Myntra analytics est.] </a:t>
             </a:r>
             <a:r>
-              <a:rPr>
+              <a:rPr sz="1400" dirty="0">
                 <a:solidFill>
                   <a:srgbClr val="535766"/>
                 </a:solidFill>
@@ -11359,7 +12371,7 @@
             </a:r>
           </a:p>
           <a:p>
-            <a:pPr marL="177800" indent="0">
+            <a:pPr marL="463550" indent="-285750">
               <a:lnSpc>
                 <a:spcPct val="115000"/>
               </a:lnSpc>
@@ -11369,10 +12381,15 @@
               <a:spcAft>
                 <a:spcPts val="300"/>
               </a:spcAft>
+              <a:buClr>
+                <a:srgbClr val="FF3F6C"/>
+              </a:buClr>
+              <a:buFont typeface="Arial" panose="020B0604020202020204" pitchFamily="34" charset="0"/>
+              <a:buChar char="•"/>
               <a:defRPr sz="1400"/>
             </a:pPr>
             <a:r>
-              <a:rPr b="1">
+              <a:rPr sz="1400" b="1" dirty="0">
                 <a:solidFill>
                   <a:srgbClr val="FF3F6C"/>
                 </a:solidFill>
@@ -11380,7 +12397,7 @@
               <a:t>[Secondary (Conversion)] </a:t>
             </a:r>
             <a:r>
-              <a:rPr b="1">
+              <a:rPr sz="1400" b="1" dirty="0">
                 <a:solidFill>
                   <a:srgbClr val="282C3F"/>
                 </a:solidFill>
@@ -11388,7 +12405,7 @@
               <a:t>Spec Matrix Adoption &amp; AI Look Move-to-Bag: </a:t>
             </a:r>
             <a:r>
-              <a:rPr b="1">
+              <a:rPr sz="1400" b="1" dirty="0">
                 <a:solidFill>
                   <a:srgbClr val="03A685"/>
                 </a:solidFill>
@@ -11396,7 +12413,7 @@
               <a:t>Matrix: ≥35% | AI Look: ≥22% Move-to-Bag </a:t>
             </a:r>
             <a:r>
-              <a:rPr>
+              <a:rPr sz="1400" dirty="0">
                 <a:solidFill>
                   <a:srgbClr val="535766"/>
                 </a:solidFill>
@@ -11405,7 +12422,7 @@
             </a:r>
           </a:p>
           <a:p>
-            <a:pPr marL="177800" indent="0">
+            <a:pPr marL="463550" indent="-285750">
               <a:lnSpc>
                 <a:spcPct val="115000"/>
               </a:lnSpc>
@@ -11415,10 +12432,15 @@
               <a:spcAft>
                 <a:spcPts val="300"/>
               </a:spcAft>
+              <a:buClr>
+                <a:srgbClr val="FF3F6C"/>
+              </a:buClr>
+              <a:buFont typeface="Arial" panose="020B0604020202020204" pitchFamily="34" charset="0"/>
+              <a:buChar char="•"/>
               <a:defRPr sz="1400"/>
             </a:pPr>
             <a:r>
-              <a:rPr b="1">
+              <a:rPr sz="1400" b="1" dirty="0">
                 <a:solidFill>
                   <a:srgbClr val="FF3F6C"/>
                 </a:solidFill>
@@ -11426,7 +12448,7 @@
               <a:t>[Guardrail 1 (Quality)] </a:t>
             </a:r>
             <a:r>
-              <a:rPr b="1">
+              <a:rPr sz="1400" b="1" dirty="0">
                 <a:solidFill>
                   <a:srgbClr val="282C3F"/>
                 </a:solidFill>
@@ -11434,7 +12456,7 @@
               <a:t>Sizing &amp; Fit Return Rate: </a:t>
             </a:r>
             <a:r>
-              <a:rPr b="1">
+              <a:rPr sz="1400" b="1" dirty="0">
                 <a:solidFill>
                   <a:srgbClr val="03A685"/>
                 </a:solidFill>
@@ -11442,7 +12464,7 @@
               <a:t>Baseline: 24% → Target: ≤18% (-600bps drop) </a:t>
             </a:r>
             <a:r>
-              <a:rPr>
+              <a:rPr sz="1400" dirty="0">
                 <a:solidFill>
                   <a:srgbClr val="535766"/>
                 </a:solidFill>
@@ -11451,7 +12473,7 @@
             </a:r>
           </a:p>
           <a:p>
-            <a:pPr marL="177800" indent="0">
+            <a:pPr marL="463550" indent="-285750">
               <a:lnSpc>
                 <a:spcPct val="115000"/>
               </a:lnSpc>
@@ -11461,10 +12483,15 @@
               <a:spcAft>
                 <a:spcPts val="300"/>
               </a:spcAft>
+              <a:buClr>
+                <a:srgbClr val="FF3F6C"/>
+              </a:buClr>
+              <a:buFont typeface="Arial" panose="020B0604020202020204" pitchFamily="34" charset="0"/>
+              <a:buChar char="•"/>
               <a:defRPr sz="1400"/>
             </a:pPr>
             <a:r>
-              <a:rPr b="1">
+              <a:rPr sz="1400" b="1" dirty="0">
                 <a:solidFill>
                   <a:srgbClr val="FF3F6C"/>
                 </a:solidFill>
@@ -11472,7 +12499,7 @@
               <a:t>[Guardrail 2 (System)] </a:t>
             </a:r>
             <a:r>
-              <a:rPr b="1">
+              <a:rPr sz="1400" b="1" dirty="0">
                 <a:solidFill>
                   <a:srgbClr val="282C3F"/>
                 </a:solidFill>
@@ -11480,7 +12507,7 @@
               <a:t>p95 API Latency &amp; Margin Integrity Floor: </a:t>
             </a:r>
             <a:r>
-              <a:rPr b="1">
+              <a:rPr sz="1400" b="1" dirty="0">
                 <a:solidFill>
                   <a:srgbClr val="03A685"/>
                 </a:solidFill>
@@ -11488,7 +12515,7 @@
               <a:t>Latency: &lt;300ms | Margin: 38% Gross Margin Floor </a:t>
             </a:r>
             <a:r>
-              <a:rPr>
+              <a:rPr sz="1400" dirty="0">
                 <a:solidFill>
                   <a:srgbClr val="535766"/>
                 </a:solidFill>
@@ -11540,6 +12567,7 @@
           <a:lstStyle/>
           <a:p>
             <a:pPr algn="ctr"/>
+            <a:endParaRPr/>
           </a:p>
         </p:txBody>
       </p:sp>
@@ -11551,8 +12579,8 @@
         </p:nvSpPr>
         <p:spPr>
           <a:xfrm>
-            <a:off x="7040880" y="1490472"/>
-            <a:ext cx="4465015" cy="5047488"/>
+            <a:off x="7012125" y="1881540"/>
+            <a:ext cx="4465015" cy="3535648"/>
           </a:xfrm>
           <a:prstGeom prst="rect">
             <a:avLst/>
@@ -11576,11 +12604,16 @@
               </a:defRPr>
             </a:pPr>
             <a:r>
-              <a:t>🧪 200,000-USER RCT A/B TESTING DESIGN</a:t>
-            </a:r>
-          </a:p>
-          <a:p>
-            <a:pPr marL="177800" indent="-127000">
+              <a:rPr sz="1400" dirty="0"/>
+              <a:t>🧪 </a:t>
+            </a:r>
+            <a:r>
+              <a:rPr sz="1400" u="sng" dirty="0"/>
+              <a:t>200,000-USER RCT A/B TESTING DESIGN</a:t>
+            </a:r>
+          </a:p>
+          <a:p>
+            <a:pPr marL="336550" indent="-285750">
               <a:lnSpc>
                 <a:spcPct val="115000"/>
               </a:lnSpc>
@@ -11590,18 +12623,23 @@
               <a:spcAft>
                 <a:spcPts val="300"/>
               </a:spcAft>
+              <a:buClr>
+                <a:srgbClr val="FF3F6C"/>
+              </a:buClr>
+              <a:buFont typeface="Arial" panose="020B0604020202020204" pitchFamily="34" charset="0"/>
+              <a:buChar char="•"/>
               <a:defRPr sz="1400"/>
             </a:pPr>
             <a:r>
-              <a:rPr b="1">
-                <a:solidFill>
-                  <a:srgbClr val="282C3F"/>
-                </a:solidFill>
-              </a:rPr>
-              <a:t>• Sample Size &amp; Power: </a:t>
-            </a:r>
-            <a:r>
-              <a:rPr>
+              <a:rPr sz="1400" b="1" dirty="0">
+                <a:solidFill>
+                  <a:srgbClr val="282C3F"/>
+                </a:solidFill>
+              </a:rPr>
+              <a:t>Sample Size &amp; Power: </a:t>
+            </a:r>
+            <a:r>
+              <a:rPr sz="1400" dirty="0">
                 <a:solidFill>
                   <a:srgbClr val="282C3F"/>
                 </a:solidFill>
@@ -11610,7 +12648,7 @@
             </a:r>
           </a:p>
           <a:p>
-            <a:pPr marL="177800" indent="-127000">
+            <a:pPr marL="336550" indent="-285750">
               <a:lnSpc>
                 <a:spcPct val="115000"/>
               </a:lnSpc>
@@ -11620,27 +12658,48 @@
               <a:spcAft>
                 <a:spcPts val="300"/>
               </a:spcAft>
+              <a:buClr>
+                <a:srgbClr val="FF3F6C"/>
+              </a:buClr>
+              <a:buFont typeface="Arial" panose="020B0604020202020204" pitchFamily="34" charset="0"/>
+              <a:buChar char="•"/>
               <a:defRPr sz="1400"/>
             </a:pPr>
             <a:r>
-              <a:rPr b="1">
-                <a:solidFill>
-                  <a:srgbClr val="282C3F"/>
-                </a:solidFill>
-              </a:rPr>
-              <a:t>• Control vs Variant: </a:t>
-            </a:r>
-            <a:r>
-              <a:rPr>
-                <a:solidFill>
-                  <a:srgbClr val="282C3F"/>
-                </a:solidFill>
-              </a:rPr>
-              <a:t>Control sees standard passive wishlist; Variant receives Wishlist Studio (Spec Matrix + Looks + Poll).</a:t>
-            </a:r>
-          </a:p>
-          <a:p>
-            <a:pPr marL="177800" indent="-127000">
+              <a:rPr sz="1400" b="1" dirty="0">
+                <a:solidFill>
+                  <a:srgbClr val="282C3F"/>
+                </a:solidFill>
+              </a:rPr>
+              <a:t>Control vs Variant: </a:t>
+            </a:r>
+            <a:r>
+              <a:rPr sz="1400" dirty="0">
+                <a:solidFill>
+                  <a:srgbClr val="282C3F"/>
+                </a:solidFill>
+              </a:rPr>
+              <a:t>Control sees standard passive </a:t>
+            </a:r>
+            <a:r>
+              <a:rPr sz="1400" dirty="0" err="1">
+                <a:solidFill>
+                  <a:srgbClr val="282C3F"/>
+                </a:solidFill>
+              </a:rPr>
+              <a:t>wishlist</a:t>
+            </a:r>
+            <a:r>
+              <a:rPr sz="1400" dirty="0">
+                <a:solidFill>
+                  <a:srgbClr val="282C3F"/>
+                </a:solidFill>
+              </a:rPr>
+              <a:t>; Variant receives Wishlist Studio (Spec Matrix + Looks + Poll).</a:t>
+            </a:r>
+          </a:p>
+          <a:p>
+            <a:pPr marL="336550" indent="-285750">
               <a:lnSpc>
                 <a:spcPct val="115000"/>
               </a:lnSpc>
@@ -11650,18 +12709,23 @@
               <a:spcAft>
                 <a:spcPts val="300"/>
               </a:spcAft>
+              <a:buClr>
+                <a:srgbClr val="FF3F6C"/>
+              </a:buClr>
+              <a:buFont typeface="Arial" panose="020B0604020202020204" pitchFamily="34" charset="0"/>
+              <a:buChar char="•"/>
               <a:defRPr sz="1400"/>
             </a:pPr>
             <a:r>
-              <a:rPr b="1">
-                <a:solidFill>
-                  <a:srgbClr val="282C3F"/>
-                </a:solidFill>
-              </a:rPr>
-              <a:t>• Automated Kill Threshold 1: </a:t>
-            </a:r>
-            <a:r>
-              <a:rPr>
+              <a:rPr sz="1400" b="1" dirty="0">
+                <a:solidFill>
+                  <a:srgbClr val="282C3F"/>
+                </a:solidFill>
+              </a:rPr>
+              <a:t>Automated Kill Threshold 1: </a:t>
+            </a:r>
+            <a:r>
+              <a:rPr sz="1400" dirty="0">
                 <a:solidFill>
                   <a:srgbClr val="282C3F"/>
                 </a:solidFill>
@@ -11670,7 +12734,7 @@
             </a:r>
           </a:p>
           <a:p>
-            <a:pPr marL="177800" indent="-127000">
+            <a:pPr marL="336550" indent="-285750">
               <a:lnSpc>
                 <a:spcPct val="115000"/>
               </a:lnSpc>
@@ -11680,18 +12744,23 @@
               <a:spcAft>
                 <a:spcPts val="300"/>
               </a:spcAft>
+              <a:buClr>
+                <a:srgbClr val="FF3F6C"/>
+              </a:buClr>
+              <a:buFont typeface="Arial" panose="020B0604020202020204" pitchFamily="34" charset="0"/>
+              <a:buChar char="•"/>
               <a:defRPr sz="1400"/>
             </a:pPr>
             <a:r>
-              <a:rPr b="1">
-                <a:solidFill>
-                  <a:srgbClr val="282C3F"/>
-                </a:solidFill>
-              </a:rPr>
-              <a:t>• Automated Kill Threshold 2: </a:t>
-            </a:r>
-            <a:r>
-              <a:rPr>
+              <a:rPr sz="1400" b="1" dirty="0">
+                <a:solidFill>
+                  <a:srgbClr val="282C3F"/>
+                </a:solidFill>
+              </a:rPr>
+              <a:t>Automated Kill Threshold 2: </a:t>
+            </a:r>
+            <a:r>
+              <a:rPr sz="1400" dirty="0">
                 <a:solidFill>
                   <a:srgbClr val="282C3F"/>
                 </a:solidFill>
@@ -11701,6 +12770,37 @@
           </a:p>
         </p:txBody>
       </p:sp>
+      <p:pic>
+        <p:nvPicPr>
+          <p:cNvPr id="10" name="Picture 9" descr="Myntra Logo in Vector Format | Party font, Velvet dress ...">
+            <a:extLst>
+              <a:ext uri="{FF2B5EF4-FFF2-40B4-BE49-F238E27FC236}">
+                <a16:creationId xmlns:a16="http://schemas.microsoft.com/office/drawing/2014/main" id="{14CFCCE4-9FDA-0458-1525-C2442D670FD8}"/>
+              </a:ext>
+            </a:extLst>
+          </p:cNvPr>
+          <p:cNvPicPr>
+            <a:picLocks noChangeAspect="1"/>
+          </p:cNvPicPr>
+          <p:nvPr/>
+        </p:nvPicPr>
+        <p:blipFill>
+          <a:blip r:embed="rId2"/>
+          <a:srcRect t="35750" r="2278" b="33850"/>
+          <a:stretch>
+            <a:fillRect/>
+          </a:stretch>
+        </p:blipFill>
+        <p:spPr>
+          <a:xfrm>
+            <a:off x="10800272" y="138030"/>
+            <a:ext cx="1276688" cy="397152"/>
+          </a:xfrm>
+          <a:prstGeom prst="rect">
+            <a:avLst/>
+          </a:prstGeom>
+        </p:spPr>
+      </p:pic>
     </p:spTree>
   </p:cSld>
   <p:clrMapOvr>
